--- a/Curso Gas B/05 - ITC-ICG 08 - Aparatos de gas/05 - ITC-ICG 08 - Aparatos de gas - Vídeo 3.pptx
+++ b/Curso Gas B/05 - ITC-ICG 08 - Aparatos de gas/05 - ITC-ICG 08 - Aparatos de gas - Vídeo 3.pptx
@@ -514,12 +514,12 @@
           <a:lstStyle/>
           <a:p>
             <a:r>
-              <a:t>N1: ¿Cómo se demuestra que un aparato es de fiar?</a:t>
-            </a:r>
-          </a:p>
-          <a:p>
-            <a:r>
-              <a:t>N2: Con los procedimientos del anexo uno. Un organismo de control certifica que el aparato cumple lo que debe, por tres vías: el examen de tipo, que certifica el modelo; la verificación de conformidad de la producción, que vigila que la serie salga igual; y la verificación por unidad, que certifica un aparato concreto. Y cierra con la documentación de diseño que hay que presentar. Es la letra pequeña de la certificación que vimos en el apartado tres; aquí la desmenuzamos entera.</a:t>
+              <a:t>N1: ¿Cómo se demuestra, de verdad, que un aparato es de fiar?</a:t>
+            </a:r>
+          </a:p>
+          <a:p>
+            <a:r>
+              <a:t>N2: Esa es la pregunta de este vídeo, y la responde el anexo uno. En el primer vídeo vimos la fórmula de la conformidad, a más b, o bien c; ahora abrimos esa letra pequeña. El anexo uno detalla los tres procedimientos con los que un organismo de control certifica que un aparato cumple lo que debe: el examen de tipo, que certifica el modelo; la verificación de conformidad de la producción, que vigila que la serie salga igual; y la verificación por unidad, que certifica un aparato concreto. Y cierra con la documentación de diseño que hay que presentar. Es denso, pero se entiende bien si seguimos la lógica de quién hace qué.</a:t>
             </a:r>
           </a:p>
         </p:txBody>
@@ -589,12 +589,12 @@
           <a:lstStyle/>
           <a:p>
             <a:r>
-              <a:t>N1: ¿Qué papeles pide el examen de tipo?</a:t>
-            </a:r>
-          </a:p>
-          <a:p>
-            <a:r>
-              <a:t>N2: La documentación de diseño describe el modelo de serie: cámara de combustión, salida de humos, categoría del aparato, quemadores e inyectores con sus consumos, elementos de seguridad y de regulación con sus valores de tarado, planos de fabricación acotados y a escala, lista de normas aplicadas y los manuales. Como habla de un modelo en general, incluye los tipos de gases y presiones de utilización, el esquema de la instalación eléctrica interior y las piezas susceptibles de ser sustituidas.</a:t>
+              <a:t>N1: ¿Qué papeles hay que presentar para certificar?</a:t>
+            </a:r>
+          </a:p>
+          <a:p>
+            <a:r>
+              <a:t>N2: Se llama documentación de diseño, y la del examen de tipo describe el modelo en general. Incluye marca, modelo, fabricante e importador; una descripción general del aparato con su cámara de combustión, la salida de humos, la categoría del aparato y los tipos de gases y presiones; los quemadores, inyectores y consumos; los elementos de seguridad y de regulación con sus valores de tarado y rangos; los datos para la instalación; los materiales; las piezas susceptibles de ser sustituidas; los esquemas de regulación y de seguridad, y el esquema de la instalación eléctrica interior. Más los planos acotados y a escala, la lista de normas aplicadas, la placa de características y los manuales. Es la carpeta completa del modelo.</a:t>
             </a:r>
           </a:p>
         </p:txBody>
@@ -664,12 +664,12 @@
           <a:lstStyle/>
           <a:p>
             <a:r>
-              <a:t>N1: ¿En qué se diferencia esta lista de la del examen de tipo?</a:t>
-            </a:r>
-          </a:p>
-          <a:p>
-            <a:r>
-              <a:t>N2: La de la unidad describe un aparato concreto en su sitio, así que añade datos de ese ejemplar y su emplazamiento: número de fabricación, domicilio de la instalación, plano de situación, esquema de la línea de gas instalada y el gas y la presión para el que ha sido regulado el aparato. La del tipo, en cambio, habla de gases y presiones en general y añade el esquema eléctrico interior y las piezas sustituibles. Regla: tipo es el modelo en general; unidad es este aparato en su sitio.</a:t>
+              <a:t>N1: Las dos listas se parecen mucho. ¿Cuál es la diferencia?</a:t>
+            </a:r>
+          </a:p>
+          <a:p>
+            <a:r>
+              <a:t>N2: Ahí está el truco de examen. La documentación del examen de tipo, la cuatro punto uno, describe un modelo de serie en general. La de la verificación por unidad, la cuatro punto dos, describe un aparato concreto y añade datos de esa unidad y de su emplazamiento: el número de fabricación, el domicilio de la instalación, el plano de situación, el esquema de la línea de gas instalada, y el gas y la presión para el que ha sido regulado ese aparato. La cuatro punto uno, en cambio, habla de tipos de gases y presiones en general, y suma el esquema eléctrico interior y las piezas sustituibles. Regla para recordar: tipo, el modelo en general; unidad, este aparato en su sitio.</a:t>
             </a:r>
           </a:p>
         </p:txBody>
@@ -739,12 +739,12 @@
           <a:lstStyle/>
           <a:p>
             <a:r>
-              <a:t>N1: En estas listas aparece la categoría del aparato. ¿Qué significa?</a:t>
-            </a:r>
-          </a:p>
-          <a:p>
-            <a:r>
-              <a:t>N2: Se refiere a la categoría de gases que admite el aparato, qué gases y presiones acepta, según la UNE-EN cuatrocientos treinta y siete. No es el tipo A, B o C, que va por la combustión, ni la categoría del carné del instalador. Son tres clasificaciones distintas que conviven y no debes mezclar. Elegir mal la categoría de gases para el suministro de esa vivienda es montar un aparato que no quemará bien ese gas.</a:t>
+              <a:t>N1: En estas listas aparece categoría del aparato. ¿Es lo mismo que el tipo o el carné?</a:t>
+            </a:r>
+          </a:p>
+          <a:p>
+            <a:r>
+              <a:t>N2: No, y esta es una confusión que hay que cortar de raíz porque conviven tres clasificaciones distintas. Una, la categoría del aparato: se refiere a la categoría de gases que admite el aparato, es decir, qué gases y presiones acepta, según la norma UNE-EN cuatrocientos treinta y siete. Dos, el tipo A, B o C: cómo quema y evacúa el aparato, su circuito de combustión, que vimos en el vídeo dos. Y tres, la categoría A, B o C del instalador: el nivel del carné. Son tres cosas que no tienen nada que ver. Y en obra importa: elegir mal la categoría de gases para el suministro de esa vivienda es montar un aparato que no quemará bien ese gas.</a:t>
             </a:r>
           </a:p>
         </p:txBody>
@@ -814,12 +814,22 @@
           <a:lstStyle/>
           <a:p>
             <a:r>
-              <a:t>N1: Lo esencial del anexo uno, ¿en tres trazos?</a:t>
-            </a:r>
-          </a:p>
-          <a:p>
-            <a:r>
-              <a:t>N2: Primero, siempre hay un organismo de control independiente que examina, prueba y certifica; el fabricante solo solicita y aporta, y ese respaldo es lo que hay detrás de la placa y el certificado. Segundo, la serie se certifica con examen de tipo más verificación de la producción, ya sea por inspección sorpresa a intervalos máximos de un año o por sistema de calidad ISO nueve mil uno con seguimiento anual; y la pieza única, con verificación por unidad, que pide el destino y puede ensayarse ya instalada. Y tercero, no mezcles las tres clasificaciones: tipo por la combustión, categoría del aparato por los gases y categoría del instalador por el carné.</a:t>
+              <a:t>N1: Es un vídeo técnico. ¿Cómo me quedo con lo importante?</a:t>
+            </a:r>
+          </a:p>
+          <a:p>
+            <a:r>
+              <a:t>N2: Vamos a reconstruir el porqué, que es lo que de verdad se entiende. Todo el anexo se sostiene sobre una idea: siempre hay un organismo de control, un tercero independiente, que examina, prueba y certifica; el fabricante solo solicita y aporta. Sobre eso montamos los tres procedimientos. El examen de tipo certifica el molde de la serie, y si se toca el molde de forma que afecte a la seguridad, hace falta aprobación adicional. La verificación de la producción demuestra que cada unidad sale igual que el molde, por dos caminos a elección del fabricante: el examen de producto, con inspecciones sin aviso a intervalos máximos de un año, donde si un aparato falla se bloquea su venta; o el aseguramiento de la calidad, con sistema ISO nueve mil uno y seguimiento anual. Y la verificación por unidad certifica una pieza única, pidiendo su destino y pudiendo probarla ya instalada.</a:t>
+            </a:r>
+          </a:p>
+          <a:p>
+            <a:r>
+              <a:t>N1: ¿Y cómo se pregunta esto y para qué me sirve en obra?</a:t>
+            </a:r>
+          </a:p>
+          <a:p>
+            <a:r>
+              <a:t>N2: En el examen te preguntan quién certifica, cada cuánto es la inspección sorpresa, o qué distingue la documentación cuatro punto uno de la cuatro punto dos, esa del número de fabricación y el domicilio de la instalación. En la obra, este anexo es el porqué de que puedas fiarte: cuando montas un aparato certificado, detrás de su placa hay este respaldo de un tercero; y ojo con no confundir la categoría del aparato, que es qué gases admite, con el tipo de combustión o con tu carné. Hoy ya eres más gasista que ayer: sabes qué hay detrás del certificado que sostiene una instalación. Solo nos queda un paso para cerrar la ITC: leer la placa del aparato y las pruebas de seguridad del anexo tres. Vamos al último vídeo.</a:t>
             </a:r>
           </a:p>
         </p:txBody>
@@ -889,12 +899,12 @@
           <a:lstStyle/>
           <a:p>
             <a:r>
-              <a:t>N1: ¿Qué números resumen el anexo uno?</a:t>
-            </a:r>
-          </a:p>
-          <a:p>
-            <a:r>
-              <a:t>N2: Tres procedimientos de certificación: examen de tipo, verificación de la producción y verificación por unidad. Un año, que es el intervalo máximo entre controles sin aviso del examen de producto. Y dos listas de documentación de diseño, la del examen de tipo y la de la unidad, parecidas pero con truco. Ten estos tres números a mano.</a:t>
+              <a:t>N1: ¿Qué tres números resumen el anexo uno?</a:t>
+            </a:r>
+          </a:p>
+          <a:p>
+            <a:r>
+              <a:t>N2: Tres. Primero, tres procedimientos de certificación: examen de tipo, verificación de la producción y verificación por unidad. Segundo, un año, que es el intervalo máximo entre los controles sin aviso del organismo en el camino del examen de producto. Y tercero, dos listas de documentación de diseño: una para el examen de tipo y otra para la verificación por unidad, parecidas pero con truco. Con estos tres números tienes el esqueleto del vídeo.</a:t>
             </a:r>
           </a:p>
         </p:txBody>
@@ -964,12 +974,12 @@
           <a:lstStyle/>
           <a:p>
             <a:r>
-              <a:t>N1: ¿Quién certifica realmente un aparato?</a:t>
-            </a:r>
-          </a:p>
-          <a:p>
-            <a:r>
-              <a:t>N2: Siempre hay un tercero independiente, el organismo de control, que examina la documentación de diseño, hace o manda hacer las pruebas y expide el certificado. El fabricante o su representante legal solo presenta la solicitud y pone a disposición el aparato representativo. Nunca se certifica a sí mismo. Cuando montas un aparato, ese respaldo es lo que hay detrás de su placa y su certificado: sin él, ni deberías instalarlo ni podrías responder ante un siniestro.</a:t>
+              <a:t>N1: Antes de entrar en los procedimientos, ¿quién hace cada cosa?</a:t>
+            </a:r>
+          </a:p>
+          <a:p>
+            <a:r>
+              <a:t>N2: Esto es la clave que ordena todo el anexo, así que fíjalo primero. Hay dos actores. El organismo de control es un tercero independiente que examina la documentación, hace las pruebas y expide el certificado. El fabricante, o su representante legal, solo presenta la solicitud y pone el aparato a disposición. Es decir, el fabricante nunca se certifica a sí mismo: siempre hay alguien de fuera que da fe. ¿Por qué importa esto en obra? Porque cuando montas un aparato certificado, ese respaldo de un tercero independiente es lo que hay detrás de su placa y de su certificado. Sin él, ni deberías instalarlo ni podrías responder ante un siniestro.</a:t>
             </a:r>
           </a:p>
         </p:txBody>
@@ -1039,12 +1049,12 @@
           <a:lstStyle/>
           <a:p>
             <a:r>
-              <a:t>N1: ¿Se certifica cada aparato que sale de la fábrica?</a:t>
-            </a:r>
-          </a:p>
-          <a:p>
-            <a:r>
-              <a:t>N2: No. El examen de tipo certifica un modelo representativo, el tipo, que es el molde de la serie. Se elige un aparato que representa a toda la producción y sobre él el organismo hace las pruebas necesarias para comprobar que cumple las normas o procedimientos aplicables. El tipo puede incluir distintas variantes siempre que no presenten características diferentes en cuanto a los tipos de riesgo. Idea: certificas el molde una vez, no unidad por unidad.</a:t>
+              <a:t>N1: ¿Qué es el examen de tipo?</a:t>
+            </a:r>
+          </a:p>
+          <a:p>
+            <a:r>
+              <a:t>N2: Piensa en el examen de tipo como certificar un molde. El fabricante pone a disposición uno o varios aparatos representativos de la producción, que se llaman el tipo. El organismo de control examina la documentación de diseño, comprueba que ese tipo se ha fabricado de acuerdo con ella, y realiza o hace realizar las pruebas necesarias para ver si cumple las normas o procedimientos aplicables. Si cumple todo, le expide al solicitante un certificado de examen de tipo. Un matiz: el tipo puede incluir varias variantes de producto, siempre que no presenten diferencias en cuanto a los tipos de riesgo. Es decir, se certifica el modelo una vez, no cada unidad.</a:t>
             </a:r>
           </a:p>
         </p:txBody>
@@ -1114,12 +1124,12 @@
           <a:lstStyle/>
           <a:p>
             <a:r>
-              <a:t>N1: ¿Y si el fabricante cambia algo del modelo ya aprobado?</a:t>
-            </a:r>
-          </a:p>
-          <a:p>
-            <a:r>
-              <a:t>N2: Debe informar al organismo que emitió el certificado de todas las modificaciones que puedan incidir en el cumplimiento de los requisitos. Si esas modificaciones afectan a los requisitos de seguridad o a las condiciones prescritas de uso, necesitan una aprobación adicional, que se realiza como complemento al certificado de examen de tipo. Por eso no vale apañar un aparato con piezas distintas a las certificadas: el certificado viejo ya no lo cubre.</a:t>
+              <a:t>N1: ¿Y si el fabricante cambia algo del modelo después?</a:t>
+            </a:r>
+          </a:p>
+          <a:p>
+            <a:r>
+              <a:t>N2: Buena pregunta, porque aquí está lo que más cae. El solicitante debe informar al organismo que emitió el certificado de todas las modificaciones introducidas en el tipo aprobado que puedan afectar al cumplimiento de los requisitos. Y si esas modificaciones afectan a los requisitos de seguridad o a las condiciones de utilización, no basta con avisar: necesitan una aprobación adicional del mismo organismo, que se añade como complemento al certificado de examen de tipo. La idea, para que se te quede: certificas el molde una vez, y avisas cada vez que retocas el molde. Por eso no vale apañar un aparato con piezas distintas a las certificadas.</a:t>
             </a:r>
           </a:p>
         </p:txBody>
@@ -1189,12 +1199,12 @@
           <a:lstStyle/>
           <a:p>
             <a:r>
-              <a:t>N1: ¿Basta con certificar el molde?</a:t>
-            </a:r>
-          </a:p>
-          <a:p>
-            <a:r>
-              <a:t>N2: No. El examen de tipo demuestra que el modelo es bueno; la verificación de la producción demuestra que cada unidad que sale de fábrica es igual que ese modelo. Se hace a través de un organismo de control, antes de comercializar, y el fabricante elige entre dos caminos: el examen de producto o el aseguramiento de la calidad. Certificar el molde no sirve de nada si luego la cadena produce copias defectuosas.</a:t>
+              <a:t>N1: Si el examen de tipo ya certifica el modelo, ¿para qué un segundo paso?</a:t>
+            </a:r>
+          </a:p>
+          <a:p>
+            <a:r>
+              <a:t>N2: Porque certificar el molde no sirve de nada si luego la cadena produce copias defectuosas. El examen de tipo demuestra que el modelo es bueno; la verificación de conformidad de la producción demuestra que cada unidad que sale de fábrica es igual que ese modelo. Por eso van de la mano. El fabricante adopta las medidas para que la fabricación, incluidas la inspección y las pruebas finales, garantice la homogeneidad de la producción y la conformidad con el tipo. Y esta verificación se hace a través de un organismo de control, antes de comercializar, por uno de dos procedimientos que elige el fabricante: el examen de producto o el aseguramiento de la calidad. Los vemos ahora.</a:t>
             </a:r>
           </a:p>
         </p:txBody>
@@ -1264,12 +1274,12 @@
           <a:lstStyle/>
           <a:p>
             <a:r>
-              <a:t>N1: ¿En qué consiste la inspección sorpresa?</a:t>
-            </a:r>
-          </a:p>
-          <a:p>
-            <a:r>
-              <a:t>N2: El organismo de control aparece sin avisar, a intervalos máximos de un año, coge un número adecuado de aparatos de la producción y sobre al menos uno realiza las pruebas necesarias. Cuando uno o más aparatos son rechazados, adopta las medidas apropiadas para evitar su comercialización. Retén el dato: intervalos máximos de un año y sin aviso previo. Este camino vigila los productos, unidad a unidad.</a:t>
+              <a:t>N1: ¿En qué consiste el examen de producto?</a:t>
+            </a:r>
+          </a:p>
+          <a:p>
+            <a:r>
+              <a:t>N2: Este camino se basa en pillar por sorpresa. El organismo de control aparece sin avisar, a intervalos máximos de un año, coge aparatos de la producción in situ, examina un número adecuado y, sobre al menos uno de los seleccionados, hace las pruebas necesarias. Él decide en cada caso si las pruebas se hacen total o parcialmente. ¿Y si alguno no pasa? Cuando uno o más aparatos son rechazados, el organismo adopta las medidas para evitar su comercialización, es decir, bloquea su venta. Retén los dos datos de examen: sin aviso previo, y a intervalos máximos de un año. Aquí se vigila el producto, unidad a unidad.</a:t>
             </a:r>
           </a:p>
         </p:txBody>
@@ -1339,12 +1349,12 @@
           <a:lstStyle/>
           <a:p>
             <a:r>
-              <a:t>N1: ¿Y el otro camino de la producción?</a:t>
-            </a:r>
-          </a:p>
-          <a:p>
-            <a:r>
-              <a:t>N2: En vez de vigilar los productos, se confía en que la fábrica tiene un sistema de calidad conforme a la ISO nueve mil uno, evaluado y certificado por un organismo acreditado. El fabricante envía cada año la documentación que acredita que mantiene el sistema, y el organismo, siempre y especialmente en caso de duda, puede pedir una muestra de la producción para verificarla. Aquí se vigila el proceso, no unidad a unidad. Asocia: camino dos dos igual a ISO nueve mil uno con seguimiento anual.</a:t>
+              <a:t>N1: ¿Y el otro camino, el de la calidad?</a:t>
+            </a:r>
+          </a:p>
+          <a:p>
+            <a:r>
+              <a:t>N2: Aquí se confía en el proceso, no en pillar productos sueltos. El fabricante garantiza la conformidad mediante un sistema de calidad de la producción o del producto conforme a la norma ISO nueve mil uno, que es la norma internacional de gestión de la calidad; significa que hay procedimientos escritos, controles y auditorías. Ese sistema lo evalúa y certifica un organismo de control acreditado. Luego hay un seguimiento: el fabricante envía anualmente la documentación que acredita que mantiene el sistema aprobado, y el organismo, siempre y especialmente en caso de duda, puede pedir una muestra de la producción para verificarla. Compara los dos caminos: en el dos punto uno vigilan los productos con inspecciones sorpresa; en el dos punto dos, vigilan el proceso con un sistema de calidad y seguimiento anual.</a:t>
             </a:r>
           </a:p>
         </p:txBody>
@@ -1414,12 +1424,12 @@
           <a:lstStyle/>
           <a:p>
             <a:r>
-              <a:t>N1: ¿Y si solo se fabrica un aparato, a medida?</a:t>
-            </a:r>
-          </a:p>
-          <a:p>
-            <a:r>
-              <a:t>N2: Es el camino alternativo, la letra c del apartado tres de la ITC. En vez de certificar un modelo de serie, el organismo comprueba y certifica un aparato en concreto y de forma independiente. La solicitud incluye el destino del aparato, dónde va a ir, y las pruebas pueden llevarse a cabo incluso tras la instalación. Es lógico: si solo hay un ejemplar, se examina ese, allí donde va a trabajar. Aquí tú, el instalador, puedes ser justo el punto donde el aparato queda montado antes de que el organismo lo ensaye.</a:t>
+              <a:t>N1: ¿Y si solo se fabrica un aparato, no una serie?</a:t>
+            </a:r>
+          </a:p>
+          <a:p>
+            <a:r>
+              <a:t>N2: Para eso está el camino alternativo, la c del apartado tres de la ITC: la verificación por unidad. En vez de certificar un modelo de serie, el organismo comprueba y certifica un aparato concreto, de forma independiente. Es lo típico de un aparato fabricado a medida o de una sola unidad. Fíjate en dos detalles diferenciadores que le gustan al examen: la solicitud pide el destino del aparato, es decir, dónde va a ir; y las pruebas pueden hacerse incluso tras la instalación del aparato. Es lógico: si solo hay un ejemplar, se examina ese, allí donde va a trabajar. Y aquí tú, el instalador, puedes ser justo el punto donde el aparato queda montado antes de que el organismo lo ensaye.</a:t>
             </a:r>
           </a:p>
         </p:txBody>
@@ -4742,7 +4752,7 @@
                 </a:solidFill>
                 <a:latin typeface="Montserrat"/>
               </a:rPr>
-              <a:t>APARTADO 4.1</a:t>
+              <a:t>DOCUMENTACIÓN · 4.1</a:t>
             </a:r>
           </a:p>
         </p:txBody>
@@ -4776,7 +4786,7 @@
                 </a:solidFill>
                 <a:latin typeface="Montserrat"/>
               </a:rPr>
-              <a:t>Documentación del examen de tipo</a:t>
+              <a:t>Diseño para el examen de tipo</a:t>
             </a:r>
           </a:p>
         </p:txBody>
@@ -4849,7 +4859,7 @@
                 </a:solidFill>
                 <a:latin typeface="Montserrat"/>
               </a:rPr>
-              <a:t>Tipos de gases y presiones</a:t>
+              <a:t>Cámara, salida de humos, gases y presiones</a:t>
             </a:r>
           </a:p>
           <a:p>
@@ -4874,7 +4884,7 @@
                 </a:solidFill>
                 <a:latin typeface="Montserrat"/>
               </a:rPr>
-              <a:t>Esquema eléctrico interior</a:t>
+              <a:t>Quemadores, seguridad y regulación</a:t>
             </a:r>
           </a:p>
           <a:p>
@@ -4899,14 +4909,14 @@
                 </a:solidFill>
                 <a:latin typeface="Montserrat"/>
               </a:rPr>
-              <a:t>Piezas sustituibles</a:t>
-            </a:r>
-          </a:p>
-        </p:txBody>
-      </p:sp>
-      <p:sp>
-        <p:nvSpPr>
-          <p:cNvPr id="8" name="imgph" descr="IMGQ:technical blueprint appliance schematic"/>
+              <a:t>Esquema eléctrico y piezas sustituibles</a:t>
+            </a:r>
+          </a:p>
+        </p:txBody>
+      </p:sp>
+      <p:sp>
+        <p:nvSpPr>
+          <p:cNvPr id="8" name="imgph" descr="IMGQ:technical design blueprint folder"/>
           <p:cNvSpPr/>
           <p:nvPr/>
         </p:nvSpPr>
@@ -4992,7 +5002,7 @@
                 </a:solidFill>
                 <a:latin typeface="Montserrat"/>
               </a:rPr>
-              <a:t>technical blueprint appliance schematic</a:t>
+              <a:t>technical design blueprint folder</a:t>
             </a:r>
           </a:p>
         </p:txBody>
@@ -5157,7 +5167,7 @@
                 </a:solidFill>
                 <a:latin typeface="Montserrat"/>
               </a:rPr>
-              <a:t>APARTADO 4.2</a:t>
+              <a:t>DOCUMENTACIÓN · 4.2</a:t>
             </a:r>
           </a:p>
         </p:txBody>
@@ -5191,7 +5201,7 @@
                 </a:solidFill>
                 <a:latin typeface="Montserrat"/>
               </a:rPr>
-              <a:t>Documentación de la unidad</a:t>
+              <a:t>Diseño para la verificación por unidad</a:t>
             </a:r>
           </a:p>
         </p:txBody>
@@ -5239,7 +5249,7 @@
                 </a:solidFill>
                 <a:latin typeface="Montserrat"/>
               </a:rPr>
-              <a:t>Describe este aparato concreto</a:t>
+              <a:t>Describe este aparato en su sitio</a:t>
             </a:r>
           </a:p>
           <a:p>
@@ -5264,7 +5274,7 @@
                 </a:solidFill>
                 <a:latin typeface="Montserrat"/>
               </a:rPr>
-              <a:t>Nº de fabricación y domicilio</a:t>
+              <a:t>Nº de fabricación y domicilio de la instalación</a:t>
             </a:r>
           </a:p>
           <a:p>
@@ -5289,7 +5299,7 @@
                 </a:solidFill>
                 <a:latin typeface="Montserrat"/>
               </a:rPr>
-              <a:t>Plano de situación</a:t>
+              <a:t>Plano de situación y línea de gas instalada</a:t>
             </a:r>
           </a:p>
           <a:p>
@@ -5314,14 +5324,14 @@
                 </a:solidFill>
                 <a:latin typeface="Montserrat"/>
               </a:rPr>
-              <a:t>Gas y presión de reglaje</a:t>
-            </a:r>
-          </a:p>
-        </p:txBody>
-      </p:sp>
-      <p:sp>
-        <p:nvSpPr>
-          <p:cNvPr id="8" name="imgph" descr="IMGQ:installation site location plan"/>
+              <a:t>Gas y presión para el que se reguló</a:t>
+            </a:r>
+          </a:p>
+        </p:txBody>
+      </p:sp>
+      <p:sp>
+        <p:nvSpPr>
+          <p:cNvPr id="8" name="imgph" descr="IMGQ:installed gas line meter site"/>
           <p:cNvSpPr/>
           <p:nvPr/>
         </p:nvSpPr>
@@ -5407,7 +5417,7 @@
                 </a:solidFill>
                 <a:latin typeface="Montserrat"/>
               </a:rPr>
-              <a:t>installation site location plan</a:t>
+              <a:t>installed gas line meter site</a:t>
             </a:r>
           </a:p>
         </p:txBody>
@@ -5572,7 +5582,7 @@
                 </a:solidFill>
                 <a:latin typeface="Montserrat"/>
               </a:rPr>
-              <a:t>OJO CON LAS PALABRAS</a:t>
+              <a:t>CUIDADO CON LAS LETRAS</a:t>
             </a:r>
           </a:p>
         </p:txBody>
@@ -5606,7 +5616,7 @@
                 </a:solidFill>
                 <a:latin typeface="Montserrat"/>
               </a:rPr>
-              <a:t>Tres clasificaciones que no se mezclan</a:t>
+              <a:t>Categoría del aparato ≠ tipo ≠ carné</a:t>
             </a:r>
           </a:p>
         </p:txBody>
@@ -5654,7 +5664,7 @@
                 </a:solidFill>
                 <a:latin typeface="Montserrat"/>
               </a:rPr>
-              <a:t>Tipo A/B/C: por la combustión</a:t>
+              <a:t>Categoría del aparato: qué gases admite</a:t>
             </a:r>
           </a:p>
           <a:p>
@@ -5679,7 +5689,7 @@
                 </a:solidFill>
                 <a:latin typeface="Montserrat"/>
               </a:rPr>
-              <a:t>Categoría del aparato: qué gases admite</a:t>
+              <a:t>Según UNE-EN 437</a:t>
             </a:r>
           </a:p>
           <a:p>
@@ -5704,14 +5714,39 @@
                 </a:solidFill>
                 <a:latin typeface="Montserrat"/>
               </a:rPr>
-              <a:t>Categoría del instalador: el carné</a:t>
-            </a:r>
-          </a:p>
-        </p:txBody>
-      </p:sp>
-      <p:sp>
-        <p:nvSpPr>
-          <p:cNvPr id="8" name="imgph" descr="IMGQ:gas type category label appliance"/>
+              <a:t>Tipo A/B/C: cómo quema el aparato</a:t>
+            </a:r>
+          </a:p>
+          <a:p>
+            <a:pPr>
+              <a:spcAft>
+                <a:spcPts val="1000"/>
+              </a:spcAft>
+            </a:pPr>
+            <a:r>
+              <a:rPr sz="1600" b="1" i="0">
+                <a:solidFill>
+                  <a:srgbClr val="2E3A80"/>
+                </a:solidFill>
+                <a:latin typeface="Montserrat"/>
+              </a:rPr>
+              <a:t>•  </a:t>
+            </a:r>
+            <a:r>
+              <a:rPr sz="1600" b="0" i="0">
+                <a:solidFill>
+                  <a:srgbClr val="1B2330"/>
+                </a:solidFill>
+                <a:latin typeface="Montserrat"/>
+              </a:rPr>
+              <a:t>Categoría A/B/C: el carné del instalador</a:t>
+            </a:r>
+          </a:p>
+        </p:txBody>
+      </p:sp>
+      <p:sp>
+        <p:nvSpPr>
+          <p:cNvPr id="8" name="imgph" descr="IMGQ:gas appliance category label detail"/>
           <p:cNvSpPr/>
           <p:nvPr/>
         </p:nvSpPr>
@@ -5797,7 +5832,7 @@
                 </a:solidFill>
                 <a:latin typeface="Montserrat"/>
               </a:rPr>
-              <a:t>gas type category label appliance</a:t>
+              <a:t>gas appliance category label detail</a:t>
             </a:r>
           </a:p>
         </p:txBody>
@@ -5835,7 +5870,7 @@
             <a:avLst/>
           </a:prstGeom>
           <a:solidFill>
-            <a:srgbClr val="FFFFFF"/>
+            <a:srgbClr val="1E2761"/>
           </a:solidFill>
           <a:ln>
             <a:noFill/>
@@ -5872,8 +5907,8 @@
         </p:nvSpPr>
         <p:spPr>
           <a:xfrm>
-            <a:off x="10607040" y="320040"/>
-            <a:ext cx="1371600" cy="365760"/>
+            <a:off x="822960" y="640080"/>
+            <a:ext cx="10515600" cy="457200"/>
           </a:xfrm>
           <a:prstGeom prst="rect">
             <a:avLst/>
@@ -5886,15 +5921,14 @@
           </a:bodyPr>
           <a:lstStyle/>
           <a:p>
-            <a:pPr algn="r"/>
-            <a:r>
-              <a:rPr sz="1000" b="1" i="0">
-                <a:solidFill>
-                  <a:srgbClr val="64748B"/>
-                </a:solidFill>
-                <a:latin typeface="Montserrat"/>
-              </a:rPr>
-              <a:t>013 / 013</a:t>
+            <a:r>
+              <a:rPr sz="1400" b="1" i="0">
+                <a:solidFill>
+                  <a:srgbClr val="CADCFC"/>
+                </a:solidFill>
+                <a:latin typeface="Montserrat"/>
+              </a:rPr>
+              <a:t>LO QUE YA DOMINAS</a:t>
             </a:r>
           </a:p>
         </p:txBody>
@@ -5907,8 +5941,8 @@
         </p:nvSpPr>
         <p:spPr>
           <a:xfrm>
-            <a:off x="457200" y="6419088"/>
-            <a:ext cx="8229600" cy="365760"/>
+            <a:off x="822960" y="1143000"/>
+            <a:ext cx="10515600" cy="1097280"/>
           </a:xfrm>
           <a:prstGeom prst="rect">
             <a:avLst/>
@@ -5922,13 +5956,13 @@
           <a:lstStyle/>
           <a:p>
             <a:r>
-              <a:rPr sz="900" b="0" i="0">
-                <a:solidFill>
-                  <a:srgbClr val="64748B"/>
-                </a:solidFill>
-                <a:latin typeface="Montserrat"/>
-              </a:rPr>
-              <a:t>Curso Gas B · Tema 05 · Aparatos de gas</a:t>
+              <a:rPr sz="3400" b="1" i="0">
+                <a:solidFill>
+                  <a:srgbClr val="FFFFFF"/>
+                </a:solidFill>
+                <a:latin typeface="Montserrat"/>
+              </a:rPr>
+              <a:t>Ya entiendes por qué te puedes fiar de un aparato</a:t>
             </a:r>
           </a:p>
         </p:txBody>
@@ -5941,8 +5975,8 @@
         </p:nvSpPr>
         <p:spPr>
           <a:xfrm>
-            <a:off x="822960" y="640080"/>
-            <a:ext cx="10058400" cy="914400"/>
+            <a:off x="822960" y="2514600"/>
+            <a:ext cx="10515600" cy="2834640"/>
           </a:xfrm>
           <a:prstGeom prst="rect">
             <a:avLst/>
@@ -5955,28 +5989,161 @@
           </a:bodyPr>
           <a:lstStyle/>
           <a:p>
-            <a:r>
-              <a:rPr sz="3000" b="1" i="0">
-                <a:solidFill>
-                  <a:srgbClr val="1E2761"/>
-                </a:solidFill>
-                <a:latin typeface="Montserrat"/>
-              </a:rPr>
-              <a:t>Qué me llevo</a:t>
-            </a:r>
-          </a:p>
-        </p:txBody>
-      </p:sp>
-      <p:sp>
-        <p:nvSpPr>
-          <p:cNvPr id="6" name="TextBox 5"/>
+            <a:pPr>
+              <a:spcAft>
+                <a:spcPts val="1200"/>
+              </a:spcAft>
+            </a:pPr>
+            <a:r>
+              <a:rPr sz="2000" b="1" i="0">
+                <a:solidFill>
+                  <a:srgbClr val="CADCFC"/>
+                </a:solidFill>
+                <a:latin typeface="Montserrat"/>
+              </a:rPr>
+              <a:t>✓  </a:t>
+            </a:r>
+            <a:r>
+              <a:rPr sz="1900" b="0" i="0">
+                <a:solidFill>
+                  <a:srgbClr val="FFFFFF"/>
+                </a:solidFill>
+                <a:latin typeface="Montserrat"/>
+              </a:rPr>
+              <a:t>El organismo certifica; el fabricante solo solicita</a:t>
+            </a:r>
+          </a:p>
+          <a:p>
+            <a:pPr>
+              <a:spcAft>
+                <a:spcPts val="1200"/>
+              </a:spcAft>
+            </a:pPr>
+            <a:r>
+              <a:rPr sz="2000" b="1" i="0">
+                <a:solidFill>
+                  <a:srgbClr val="CADCFC"/>
+                </a:solidFill>
+                <a:latin typeface="Montserrat"/>
+              </a:rPr>
+              <a:t>✓  </a:t>
+            </a:r>
+            <a:r>
+              <a:rPr sz="1900" b="0" i="0">
+                <a:solidFill>
+                  <a:srgbClr val="FFFFFF"/>
+                </a:solidFill>
+                <a:latin typeface="Montserrat"/>
+              </a:rPr>
+              <a:t>Examen de tipo = el molde; cambios = aprobación adicional</a:t>
+            </a:r>
+          </a:p>
+          <a:p>
+            <a:pPr>
+              <a:spcAft>
+                <a:spcPts val="1200"/>
+              </a:spcAft>
+            </a:pPr>
+            <a:r>
+              <a:rPr sz="2000" b="1" i="0">
+                <a:solidFill>
+                  <a:srgbClr val="CADCFC"/>
+                </a:solidFill>
+                <a:latin typeface="Montserrat"/>
+              </a:rPr>
+              <a:t>✓  </a:t>
+            </a:r>
+            <a:r>
+              <a:rPr sz="1900" b="0" i="0">
+                <a:solidFill>
+                  <a:srgbClr val="FFFFFF"/>
+                </a:solidFill>
+                <a:latin typeface="Montserrat"/>
+              </a:rPr>
+              <a:t>Producción: inspección sorpresa (1 año) o ISO 9001</a:t>
+            </a:r>
+          </a:p>
+          <a:p>
+            <a:pPr>
+              <a:spcAft>
+                <a:spcPts val="1200"/>
+              </a:spcAft>
+            </a:pPr>
+            <a:r>
+              <a:rPr sz="2000" b="1" i="0">
+                <a:solidFill>
+                  <a:srgbClr val="CADCFC"/>
+                </a:solidFill>
+                <a:latin typeface="Montserrat"/>
+              </a:rPr>
+              <a:t>✓  </a:t>
+            </a:r>
+            <a:r>
+              <a:rPr sz="1900" b="0" i="0">
+                <a:solidFill>
+                  <a:srgbClr val="FFFFFF"/>
+                </a:solidFill>
+                <a:latin typeface="Montserrat"/>
+              </a:rPr>
+              <a:t>Unidad = la pieza única, con su destino</a:t>
+            </a:r>
+          </a:p>
+        </p:txBody>
+      </p:sp>
+      <p:sp>
+        <p:nvSpPr>
+          <p:cNvPr id="6" name="Rounded Rectangle 5"/>
+          <p:cNvSpPr/>
+          <p:nvPr/>
+        </p:nvSpPr>
+        <p:spPr>
+          <a:xfrm>
+            <a:off x="822960" y="5532120"/>
+            <a:ext cx="10515600" cy="777240"/>
+          </a:xfrm>
+          <a:prstGeom prst="roundRect">
+            <a:avLst/>
+          </a:prstGeom>
+          <a:solidFill>
+            <a:srgbClr val="2E3A80"/>
+          </a:solidFill>
+          <a:ln>
+            <a:noFill/>
+          </a:ln>
+          <a:effectLst/>
+        </p:spPr>
+        <p:style>
+          <a:lnRef idx="1">
+            <a:schemeClr val="accent1"/>
+          </a:lnRef>
+          <a:fillRef idx="3">
+            <a:schemeClr val="accent1"/>
+          </a:fillRef>
+          <a:effectRef idx="2">
+            <a:schemeClr val="accent1"/>
+          </a:effectRef>
+          <a:fontRef idx="minor">
+            <a:schemeClr val="lt1"/>
+          </a:fontRef>
+        </p:style>
+        <p:txBody>
+          <a:bodyPr rtlCol="0" anchor="ctr"/>
+          <a:lstStyle/>
+          <a:p>
+            <a:pPr algn="ctr"/>
+          </a:p>
+        </p:txBody>
+      </p:sp>
+      <p:sp>
+        <p:nvSpPr>
+          <p:cNvPr id="7" name="TextBox 6"/>
           <p:cNvSpPr txBox="1"/>
           <p:nvPr/>
         </p:nvSpPr>
         <p:spPr>
           <a:xfrm>
-            <a:off x="822960" y="2011680"/>
-            <a:ext cx="10058400" cy="3657600"/>
+            <a:off x="1051560" y="5605272"/>
+            <a:ext cx="10058400" cy="640080"/>
           </a:xfrm>
           <a:prstGeom prst="rect">
             <a:avLst/>
@@ -5989,78 +6156,14 @@
           </a:bodyPr>
           <a:lstStyle/>
           <a:p>
-            <a:pPr>
-              <a:spcAft>
-                <a:spcPts val="1400"/>
-              </a:spcAft>
-            </a:pPr>
-            <a:r>
-              <a:rPr sz="2000" b="1" i="0">
-                <a:solidFill>
-                  <a:srgbClr val="2E3A80"/>
-                </a:solidFill>
-                <a:latin typeface="Montserrat"/>
-              </a:rPr>
-              <a:t>✓  </a:t>
-            </a:r>
-            <a:r>
-              <a:rPr sz="2000" b="0" i="0">
-                <a:solidFill>
-                  <a:srgbClr val="1B2330"/>
-                </a:solidFill>
-                <a:latin typeface="Montserrat"/>
-              </a:rPr>
-              <a:t>Organismo certifica; fabricante aporta</a:t>
-            </a:r>
-          </a:p>
-          <a:p>
-            <a:pPr>
-              <a:spcAft>
-                <a:spcPts val="1400"/>
-              </a:spcAft>
-            </a:pPr>
-            <a:r>
-              <a:rPr sz="2000" b="1" i="0">
-                <a:solidFill>
-                  <a:srgbClr val="2E3A80"/>
-                </a:solidFill>
-                <a:latin typeface="Montserrat"/>
-              </a:rPr>
-              <a:t>✓  </a:t>
-            </a:r>
-            <a:r>
-              <a:rPr sz="2000" b="0" i="0">
-                <a:solidFill>
-                  <a:srgbClr val="1B2330"/>
-                </a:solidFill>
-                <a:latin typeface="Montserrat"/>
-              </a:rPr>
-              <a:t>Tipo + producción, o bien unidad</a:t>
-            </a:r>
-          </a:p>
-          <a:p>
-            <a:pPr>
-              <a:spcAft>
-                <a:spcPts val="1400"/>
-              </a:spcAft>
-            </a:pPr>
-            <a:r>
-              <a:rPr sz="2000" b="1" i="0">
-                <a:solidFill>
-                  <a:srgbClr val="2E3A80"/>
-                </a:solidFill>
-                <a:latin typeface="Montserrat"/>
-              </a:rPr>
-              <a:t>✓  </a:t>
-            </a:r>
-            <a:r>
-              <a:rPr sz="2000" b="0" i="0">
-                <a:solidFill>
-                  <a:srgbClr val="1B2330"/>
-                </a:solidFill>
-                <a:latin typeface="Montserrat"/>
-              </a:rPr>
-              <a:t>Tipo ≠ categoría de aparato ≠ carné</a:t>
+            <a:r>
+              <a:rPr sz="1500" b="1" i="1">
+                <a:solidFill>
+                  <a:srgbClr val="CADCFC"/>
+                </a:solidFill>
+                <a:latin typeface="Montserrat"/>
+              </a:rPr>
+              <a:t>Ya sabes qué respalda la placa de un aparato. Solo nos queda leer esa placa y sus pruebas de seguridad.</a:t>
             </a:r>
           </a:p>
         </p:txBody>
@@ -6457,7 +6560,7 @@
                 </a:solidFill>
                 <a:latin typeface="Montserrat"/>
               </a:rPr>
-              <a:t>año, intervalo máximo sin aviso</a:t>
+              <a:t>año: intervalo máximo de control</a:t>
             </a:r>
           </a:p>
         </p:txBody>
@@ -6738,7 +6841,7 @@
                 </a:solidFill>
                 <a:latin typeface="Montserrat"/>
               </a:rPr>
-              <a:t>ANEXO 1 · REPARTO DE PAPELES</a:t>
+              <a:t>EL REPARTO DE PAPELES</a:t>
             </a:r>
           </a:p>
         </p:txBody>
@@ -6772,7 +6875,7 @@
                 </a:solidFill>
                 <a:latin typeface="Montserrat"/>
               </a:rPr>
-              <a:t>Fabricante y organismo de control</a:t>
+              <a:t>Quién certifica y quién solicita</a:t>
             </a:r>
           </a:p>
         </p:txBody>
@@ -6820,7 +6923,7 @@
                 </a:solidFill>
                 <a:latin typeface="Montserrat"/>
               </a:rPr>
-              <a:t>Fabricante: solicita y aporta el aparato</a:t>
+              <a:t>Organismo de control: examina, prueba y certifica</a:t>
             </a:r>
           </a:p>
           <a:p>
@@ -6845,7 +6948,7 @@
                 </a:solidFill>
                 <a:latin typeface="Montserrat"/>
               </a:rPr>
-              <a:t>Organismo: examina, prueba y certifica</a:t>
+              <a:t>Fabricante: solicita y aporta el aparato</a:t>
             </a:r>
           </a:p>
           <a:p>
@@ -6873,11 +6976,36 @@
               <a:t>Nunca se certifica a sí mismo</a:t>
             </a:r>
           </a:p>
-        </p:txBody>
-      </p:sp>
-      <p:sp>
-        <p:nvSpPr>
-          <p:cNvPr id="8" name="imgph" descr="IMGQ:laboratory testing equipment inspection"/>
+          <a:p>
+            <a:pPr>
+              <a:spcAft>
+                <a:spcPts val="1000"/>
+              </a:spcAft>
+            </a:pPr>
+            <a:r>
+              <a:rPr sz="1600" b="1" i="0">
+                <a:solidFill>
+                  <a:srgbClr val="2E3A80"/>
+                </a:solidFill>
+                <a:latin typeface="Montserrat"/>
+              </a:rPr>
+              <a:t>•  </a:t>
+            </a:r>
+            <a:r>
+              <a:rPr sz="1600" b="0" i="0">
+                <a:solidFill>
+                  <a:srgbClr val="1B2330"/>
+                </a:solidFill>
+                <a:latin typeface="Montserrat"/>
+              </a:rPr>
+              <a:t>Tercero independiente detrás de la placa</a:t>
+            </a:r>
+          </a:p>
+        </p:txBody>
+      </p:sp>
+      <p:sp>
+        <p:nvSpPr>
+          <p:cNvPr id="8" name="imgph" descr="IMGQ:laboratory technician testing appliance"/>
           <p:cNvSpPr/>
           <p:nvPr/>
         </p:nvSpPr>
@@ -6963,7 +7091,7 @@
                 </a:solidFill>
                 <a:latin typeface="Montserrat"/>
               </a:rPr>
-              <a:t>laboratory testing equipment inspection</a:t>
+              <a:t>laboratory technician testing appliance</a:t>
             </a:r>
           </a:p>
         </p:txBody>
@@ -7128,7 +7256,7 @@
                 </a:solidFill>
                 <a:latin typeface="Montserrat"/>
               </a:rPr>
-              <a:t>APARTADO 1 · EXAMEN DE TIPO</a:t>
+              <a:t>PROCEDIMIENTO 1 · EXAMEN DE TIPO</a:t>
             </a:r>
           </a:p>
         </p:txBody>
@@ -7210,7 +7338,7 @@
                 </a:solidFill>
                 <a:latin typeface="Montserrat"/>
               </a:rPr>
-              <a:t>Certifica un aparato representativo (tipo)</a:t>
+              <a:t>Se certifica un aparato representativo (el tipo)</a:t>
             </a:r>
           </a:p>
           <a:p>
@@ -7235,7 +7363,7 @@
                 </a:solidFill>
                 <a:latin typeface="Montserrat"/>
               </a:rPr>
-              <a:t>Vale para toda la serie</a:t>
+              <a:t>El organismo examina, prueba y expide certificado</a:t>
             </a:r>
           </a:p>
           <a:p>
@@ -7260,14 +7388,14 @@
                 </a:solidFill>
                 <a:latin typeface="Montserrat"/>
               </a:rPr>
-              <a:t>Puede incluir variantes sin más riesgo</a:t>
-            </a:r>
-          </a:p>
-        </p:txBody>
-      </p:sp>
-      <p:sp>
-        <p:nvSpPr>
-          <p:cNvPr id="8" name="imgph" descr="IMGQ:prototype appliance factory bench"/>
+              <a:t>El tipo puede incluir variantes sin más riesgo</a:t>
+            </a:r>
+          </a:p>
+        </p:txBody>
+      </p:sp>
+      <p:sp>
+        <p:nvSpPr>
+          <p:cNvPr id="8" name="imgph" descr="IMGQ:gas boiler prototype factory bench"/>
           <p:cNvSpPr/>
           <p:nvPr/>
         </p:nvSpPr>
@@ -7353,7 +7481,7 @@
                 </a:solidFill>
                 <a:latin typeface="Montserrat"/>
               </a:rPr>
-              <a:t>prototype appliance factory bench</a:t>
+              <a:t>gas boiler prototype factory bench</a:t>
             </a:r>
           </a:p>
         </p:txBody>
@@ -7518,7 +7646,7 @@
                 </a:solidFill>
                 <a:latin typeface="Montserrat"/>
               </a:rPr>
-              <a:t>APARTADO 1 · MODIFICACIONES</a:t>
+              <a:t>EXAMEN DE TIPO · CAMBIOS</a:t>
             </a:r>
           </a:p>
         </p:txBody>
@@ -7552,7 +7680,7 @@
                 </a:solidFill>
                 <a:latin typeface="Montserrat"/>
               </a:rPr>
-              <a:t>Si cambias el molde, avisa</a:t>
+              <a:t>Si tocas el molde, avisas</a:t>
             </a:r>
           </a:p>
         </p:txBody>
@@ -7600,7 +7728,7 @@
                 </a:solidFill>
                 <a:latin typeface="Montserrat"/>
               </a:rPr>
-              <a:t>Informar de toda modificación del tipo</a:t>
+              <a:t>El fabricante informa de toda modificación</a:t>
             </a:r>
           </a:p>
           <a:p>
@@ -7650,7 +7778,7 @@
                 </a:solidFill>
                 <a:latin typeface="Montserrat"/>
               </a:rPr>
-              <a:t>Se añade como complemento al certificado</a:t>
+              <a:t>Va como complemento al certificado</a:t>
             </a:r>
           </a:p>
         </p:txBody>
@@ -7908,7 +8036,7 @@
                 </a:solidFill>
                 <a:latin typeface="Montserrat"/>
               </a:rPr>
-              <a:t>APARTADO 2 · PRODUCCIÓN</a:t>
+              <a:t>PROCEDIMIENTO 2 · PRODUCCIÓN</a:t>
             </a:r>
           </a:p>
         </p:txBody>
@@ -7990,7 +8118,7 @@
                 </a:solidFill>
                 <a:latin typeface="Montserrat"/>
               </a:rPr>
-              <a:t>Antes de comercializar</a:t>
+              <a:t>Garantiza homogeneidad de la serie</a:t>
             </a:r>
           </a:p>
           <a:p>
@@ -8015,7 +8143,7 @@
                 </a:solidFill>
                 <a:latin typeface="Montserrat"/>
               </a:rPr>
-              <a:t>A elección del fabricante</a:t>
+              <a:t>Conformidad con el tipo certificado</a:t>
             </a:r>
           </a:p>
           <a:p>
@@ -8040,14 +8168,39 @@
                 </a:solidFill>
                 <a:latin typeface="Montserrat"/>
               </a:rPr>
-              <a:t>Dos caminos: 2.1 o 2.2</a:t>
-            </a:r>
-          </a:p>
-        </p:txBody>
-      </p:sp>
-      <p:sp>
-        <p:nvSpPr>
-          <p:cNvPr id="8" name="imgph" descr="IMGQ:boiler assembly production line"/>
+              <a:t>A elección del fabricante: 2.1 o 2.2</a:t>
+            </a:r>
+          </a:p>
+          <a:p>
+            <a:pPr>
+              <a:spcAft>
+                <a:spcPts val="1000"/>
+              </a:spcAft>
+            </a:pPr>
+            <a:r>
+              <a:rPr sz="1600" b="1" i="0">
+                <a:solidFill>
+                  <a:srgbClr val="2E3A80"/>
+                </a:solidFill>
+                <a:latin typeface="Montserrat"/>
+              </a:rPr>
+              <a:t>•  </a:t>
+            </a:r>
+            <a:r>
+              <a:rPr sz="1600" b="0" i="0">
+                <a:solidFill>
+                  <a:srgbClr val="1B2330"/>
+                </a:solidFill>
+                <a:latin typeface="Montserrat"/>
+              </a:rPr>
+              <a:t>Antes de comercializar</a:t>
+            </a:r>
+          </a:p>
+        </p:txBody>
+      </p:sp>
+      <p:sp>
+        <p:nvSpPr>
+          <p:cNvPr id="8" name="imgph" descr="IMGQ:boiler production assembly line"/>
           <p:cNvSpPr/>
           <p:nvPr/>
         </p:nvSpPr>
@@ -8133,7 +8286,7 @@
                 </a:solidFill>
                 <a:latin typeface="Montserrat"/>
               </a:rPr>
-              <a:t>boiler assembly production line</a:t>
+              <a:t>boiler production assembly line</a:t>
             </a:r>
           </a:p>
         </p:txBody>
@@ -8298,7 +8451,7 @@
                 </a:solidFill>
                 <a:latin typeface="Montserrat"/>
               </a:rPr>
-              <a:t>APARTADO 2.1</a:t>
+              <a:t>CAMINO 2.1 · EXAMEN DE PRODUCTO</a:t>
             </a:r>
           </a:p>
         </p:txBody>
@@ -8332,7 +8485,7 @@
                 </a:solidFill>
                 <a:latin typeface="Montserrat"/>
               </a:rPr>
-              <a:t>Examen de producto</a:t>
+              <a:t>La inspección sorpresa</a:t>
             </a:r>
           </a:p>
         </p:txBody>
@@ -8380,7 +8533,7 @@
                 </a:solidFill>
                 <a:latin typeface="Montserrat"/>
               </a:rPr>
-              <a:t>Controles in situ, sin aviso previo</a:t>
+              <a:t>Controles in situ y sin aviso previo</a:t>
             </a:r>
           </a:p>
           <a:p>
@@ -8405,7 +8558,7 @@
                 </a:solidFill>
                 <a:latin typeface="Montserrat"/>
               </a:rPr>
-              <a:t>Intervalos máximos de 1 año</a:t>
+              <a:t>Intervalos máximos de un año</a:t>
             </a:r>
           </a:p>
           <a:p>
@@ -8430,14 +8583,39 @@
                 </a:solidFill>
                 <a:latin typeface="Montserrat"/>
               </a:rPr>
-              <a:t>Aparato rechazado → se bloquea su venta</a:t>
-            </a:r>
-          </a:p>
-        </p:txBody>
-      </p:sp>
-      <p:sp>
-        <p:nvSpPr>
-          <p:cNvPr id="8" name="imgph" descr="IMGQ:inspector clipboard factory floor"/>
+              <a:t>Se prueba al menos un aparato</a:t>
+            </a:r>
+          </a:p>
+          <a:p>
+            <a:pPr>
+              <a:spcAft>
+                <a:spcPts val="1000"/>
+              </a:spcAft>
+            </a:pPr>
+            <a:r>
+              <a:rPr sz="1600" b="1" i="0">
+                <a:solidFill>
+                  <a:srgbClr val="2E3A80"/>
+                </a:solidFill>
+                <a:latin typeface="Montserrat"/>
+              </a:rPr>
+              <a:t>•  </a:t>
+            </a:r>
+            <a:r>
+              <a:rPr sz="1600" b="0" i="0">
+                <a:solidFill>
+                  <a:srgbClr val="1B2330"/>
+                </a:solidFill>
+                <a:latin typeface="Montserrat"/>
+              </a:rPr>
+              <a:t>Si uno se rechaza: se bloquea la venta</a:t>
+            </a:r>
+          </a:p>
+        </p:txBody>
+      </p:sp>
+      <p:sp>
+        <p:nvSpPr>
+          <p:cNvPr id="8" name="imgph" descr="IMGQ:quality inspector factory clipboard"/>
           <p:cNvSpPr/>
           <p:nvPr/>
         </p:nvSpPr>
@@ -8523,7 +8701,7 @@
                 </a:solidFill>
                 <a:latin typeface="Montserrat"/>
               </a:rPr>
-              <a:t>inspector clipboard factory floor</a:t>
+              <a:t>quality inspector factory clipboard</a:t>
             </a:r>
           </a:p>
         </p:txBody>
@@ -8688,7 +8866,7 @@
                 </a:solidFill>
                 <a:latin typeface="Montserrat"/>
               </a:rPr>
-              <a:t>APARTADO 2.2</a:t>
+              <a:t>CAMINO 2.2 · CALIDAD</a:t>
             </a:r>
           </a:p>
         </p:txBody>
@@ -8795,7 +8973,7 @@
                 </a:solidFill>
                 <a:latin typeface="Montserrat"/>
               </a:rPr>
-              <a:t>Evaluado por organismo acreditado</a:t>
+              <a:t>Evaluado y certificado por organismo</a:t>
             </a:r>
           </a:p>
           <a:p>
@@ -8820,7 +8998,7 @@
                 </a:solidFill>
                 <a:latin typeface="Montserrat"/>
               </a:rPr>
-              <a:t>Seguimiento anual</a:t>
+              <a:t>Seguimiento anual del mantenimiento</a:t>
             </a:r>
           </a:p>
           <a:p>
@@ -8845,14 +9023,14 @@
                 </a:solidFill>
                 <a:latin typeface="Montserrat"/>
               </a:rPr>
-              <a:t>En caso de duda, pide muestra</a:t>
-            </a:r>
-          </a:p>
-        </p:txBody>
-      </p:sp>
-      <p:sp>
-        <p:nvSpPr>
-          <p:cNvPr id="8" name="imgph" descr="IMGQ:quality management certificate document"/>
+              <a:t>Puede pedir una muestra si hay dudas</a:t>
+            </a:r>
+          </a:p>
+        </p:txBody>
+      </p:sp>
+      <p:sp>
+        <p:nvSpPr>
+          <p:cNvPr id="8" name="imgph" descr="IMGQ:quality management office documents"/>
           <p:cNvSpPr/>
           <p:nvPr/>
         </p:nvSpPr>
@@ -8938,7 +9116,7 @@
                 </a:solidFill>
                 <a:latin typeface="Montserrat"/>
               </a:rPr>
-              <a:t>quality management certificate document</a:t>
+              <a:t>quality management office documents</a:t>
             </a:r>
           </a:p>
         </p:txBody>
@@ -9103,7 +9281,7 @@
                 </a:solidFill>
                 <a:latin typeface="Montserrat"/>
               </a:rPr>
-              <a:t>APARTADO 3 · VERIFICACIÓN POR UNIDAD</a:t>
+              <a:t>PROCEDIMIENTO 3 · UNIDAD</a:t>
             </a:r>
           </a:p>
         </p:txBody>
@@ -9210,7 +9388,7 @@
                 </a:solidFill>
                 <a:latin typeface="Montserrat"/>
               </a:rPr>
-              <a:t>La solicitud pide el destino del aparato</a:t>
+              <a:t>Típico de fabricación a medida</a:t>
             </a:r>
           </a:p>
           <a:p>
@@ -9235,7 +9413,32 @@
                 </a:solidFill>
                 <a:latin typeface="Montserrat"/>
               </a:rPr>
-              <a:t>Pruebas incluso tras la instalación</a:t>
+              <a:t>La solicitud pide el destino del aparato</a:t>
+            </a:r>
+          </a:p>
+          <a:p>
+            <a:pPr>
+              <a:spcAft>
+                <a:spcPts val="1000"/>
+              </a:spcAft>
+            </a:pPr>
+            <a:r>
+              <a:rPr sz="1600" b="1" i="0">
+                <a:solidFill>
+                  <a:srgbClr val="2E3A80"/>
+                </a:solidFill>
+                <a:latin typeface="Montserrat"/>
+              </a:rPr>
+              <a:t>•  </a:t>
+            </a:r>
+            <a:r>
+              <a:rPr sz="1600" b="0" i="0">
+                <a:solidFill>
+                  <a:srgbClr val="1B2330"/>
+                </a:solidFill>
+                <a:latin typeface="Montserrat"/>
+              </a:rPr>
+              <a:t>Las pruebas, incluso tras instalarlo</a:t>
             </a:r>
           </a:p>
         </p:txBody>

--- a/Curso Gas B/05 - ITC-ICG 08 - Aparatos de gas/05 - ITC-ICG 08 - Aparatos de gas - Vídeo 3.pptx
+++ b/Curso Gas B/05 - ITC-ICG 08 - Aparatos de gas/05 - ITC-ICG 08 - Aparatos de gas - Vídeo 3.pptx
@@ -18,6 +18,7 @@
     <p:sldId id="266" r:id="rId18"/>
     <p:sldId id="267" r:id="rId19"/>
     <p:sldId id="268" r:id="rId20"/>
+    <p:sldId id="269" r:id="rId21"/>
   </p:sldIdLst>
   <p:sldSz cx="12191695" cy="6858000" type="screen4x3"/>
   <p:notesSz cx="6858000" cy="9144000"/>
@@ -589,12 +590,12 @@
           <a:lstStyle/>
           <a:p>
             <a:r>
-              <a:t>N1: ¿Qué papeles hay que presentar para certificar?</a:t>
-            </a:r>
-          </a:p>
-          <a:p>
-            <a:r>
-              <a:t>N2: Se llama documentación de diseño, y la del examen de tipo describe el modelo en general. Incluye marca, modelo, fabricante e importador; una descripción general del aparato con su cámara de combustión, la salida de humos, la categoría del aparato y los tipos de gases y presiones; los quemadores, inyectores y consumos; los elementos de seguridad y de regulación con sus valores de tarado y rangos; los datos para la instalación; los materiales; las piezas susceptibles de ser sustituidas; los esquemas de regulación y de seguridad, y el esquema de la instalación eléctrica interior. Más los planos acotados y a escala, la lista de normas aplicadas, la placa de características y los manuales. Es la carpeta completa del modelo.</a:t>
+              <a:t>N1: ¿Y si solo se fabrica un aparato, no una serie?</a:t>
+            </a:r>
+          </a:p>
+          <a:p>
+            <a:r>
+              <a:t>N2: Para eso está el camino alternativo, la c del apartado tres de la ITC: la verificación por unidad. En vez de certificar un modelo de serie, el organismo comprueba y certifica un aparato concreto, de forma independiente. Es lo típico de un aparato fabricado a medida o de una sola unidad. Fíjate en dos detalles diferenciadores que le gustan al examen: la solicitud pide el destino del aparato, es decir, dónde va a ir; y las pruebas pueden hacerse incluso tras la instalación del aparato. Es lógico: si solo hay un ejemplar, se examina ese, allí donde va a trabajar. Y aquí tú, el instalador, puedes ser justo el punto donde el aparato queda montado antes de que el organismo lo ensaye.</a:t>
             </a:r>
           </a:p>
         </p:txBody>
@@ -664,12 +665,12 @@
           <a:lstStyle/>
           <a:p>
             <a:r>
-              <a:t>N1: Las dos listas se parecen mucho. ¿Cuál es la diferencia?</a:t>
-            </a:r>
-          </a:p>
-          <a:p>
-            <a:r>
-              <a:t>N2: Ahí está el truco de examen. La documentación del examen de tipo, la cuatro punto uno, describe un modelo de serie en general. La de la verificación por unidad, la cuatro punto dos, describe un aparato concreto y añade datos de esa unidad y de su emplazamiento: el número de fabricación, el domicilio de la instalación, el plano de situación, el esquema de la línea de gas instalada, y el gas y la presión para el que ha sido regulado ese aparato. La cuatro punto uno, en cambio, habla de tipos de gases y presiones en general, y suma el esquema eléctrico interior y las piezas sustituibles. Regla para recordar: tipo, el modelo en general; unidad, este aparato en su sitio.</a:t>
+              <a:t>N1: ¿Qué papeles hay que presentar para certificar?</a:t>
+            </a:r>
+          </a:p>
+          <a:p>
+            <a:r>
+              <a:t>N2: Se llama documentación de diseño, y la del examen de tipo describe el modelo en general. Incluye marca, modelo, fabricante e importador; una descripción general del aparato con su cámara de combustión, la salida de humos, la categoría del aparato y los tipos de gases y presiones; los quemadores, inyectores y consumos; los elementos de seguridad y de regulación con sus valores de tarado y rangos; los datos para la instalación; los materiales; las piezas susceptibles de ser sustituidas; los esquemas de regulación y de seguridad, y el esquema de la instalación eléctrica interior. Más los planos acotados y a escala, la lista de normas aplicadas, la placa de características y los manuales. Es la carpeta completa del modelo.</a:t>
             </a:r>
           </a:p>
         </p:txBody>
@@ -739,12 +740,12 @@
           <a:lstStyle/>
           <a:p>
             <a:r>
-              <a:t>N1: En estas listas aparece categoría del aparato. ¿Es lo mismo que el tipo o el carné?</a:t>
-            </a:r>
-          </a:p>
-          <a:p>
-            <a:r>
-              <a:t>N2: No, y esta es una confusión que hay que cortar de raíz porque conviven tres clasificaciones distintas. Una, la categoría del aparato: se refiere a la categoría de gases que admite el aparato, es decir, qué gases y presiones acepta, según la norma UNE-EN cuatrocientos treinta y siete. Dos, el tipo A, B o C: cómo quema y evacúa el aparato, su circuito de combustión, que vimos en el vídeo dos. Y tres, la categoría A, B o C del instalador: el nivel del carné. Son tres cosas que no tienen nada que ver. Y en obra importa: elegir mal la categoría de gases para el suministro de esa vivienda es montar un aparato que no quemará bien ese gas.</a:t>
+              <a:t>N1: Las dos listas se parecen mucho. ¿Cuál es la diferencia?</a:t>
+            </a:r>
+          </a:p>
+          <a:p>
+            <a:r>
+              <a:t>N2: Ahí está el truco de examen. La documentación del examen de tipo, la cuatro punto uno, describe un modelo de serie en general. La de la verificación por unidad, la cuatro punto dos, describe un aparato concreto y añade datos de esa unidad y de su emplazamiento: el número de fabricación, el domicilio de la instalación, el plano de situación, el esquema de la línea de gas instalada, y el gas y la presión para el que ha sido regulado ese aparato. La cuatro punto uno, en cambio, habla de tipos de gases y presiones en general, y suma el esquema eléctrico interior y las piezas sustituibles. Regla para recordar: tipo, el modelo en general; unidad, este aparato en su sitio.</a:t>
             </a:r>
           </a:p>
         </p:txBody>
@@ -814,6 +815,81 @@
           <a:lstStyle/>
           <a:p>
             <a:r>
+              <a:t>N1: En estas listas aparece categoría del aparato. ¿Es lo mismo que el tipo o el carné?</a:t>
+            </a:r>
+          </a:p>
+          <a:p>
+            <a:r>
+              <a:t>N2: No, y esta es una confusión que hay que cortar de raíz porque conviven tres clasificaciones distintas. Una, la categoría del aparato: se refiere a la categoría de gases que admite el aparato, es decir, qué gases y presiones acepta, según la norma UNE-EN cuatrocientos treinta y siete. Dos, el tipo A, B o C: cómo quema y evacúa el aparato, su circuito de combustión, que vimos en el vídeo dos. Y tres, la categoría A, B o C del instalador: el nivel del carné. Son tres cosas que no tienen nada que ver. Y en obra importa: elegir mal la categoría de gases para el suministro de esa vivienda es montar un aparato que no quemará bien ese gas.</a:t>
+            </a:r>
+          </a:p>
+        </p:txBody>
+      </p:sp>
+      <p:sp>
+        <p:nvSpPr>
+          <p:cNvPr id="4" name="Slide Number Placeholder 3"/>
+          <p:cNvSpPr>
+            <a:spLocks noGrp="1"/>
+          </p:cNvSpPr>
+          <p:nvPr>
+            <p:ph type="sldNum" idx="5" sz="quarter"/>
+          </p:nvPr>
+        </p:nvSpPr>
+        <p:spPr/>
+      </p:sp>
+    </p:spTree>
+  </p:cSld>
+  <p:clrMapOvr>
+    <a:masterClrMapping/>
+  </p:clrMapOvr>
+</p:notes>
+</file>
+
+<file path=ppt/notesSlides/notesSlide14.xml><?xml version="1.0" encoding="utf-8"?>
+<p:notes xmlns:a="http://schemas.openxmlformats.org/drawingml/2006/main" xmlns:p="http://schemas.openxmlformats.org/presentationml/2006/main" xmlns:r="http://schemas.openxmlformats.org/officeDocument/2006/relationships">
+  <p:cSld>
+    <p:spTree>
+      <p:nvGrpSpPr>
+        <p:cNvPr id="1" name=""/>
+        <p:cNvGrpSpPr/>
+        <p:nvPr/>
+      </p:nvGrpSpPr>
+      <p:grpSpPr>
+        <a:xfrm>
+          <a:off x="0" y="0"/>
+          <a:ext cx="0" cy="0"/>
+          <a:chOff x="0" y="0"/>
+          <a:chExt cx="0" cy="0"/>
+        </a:xfrm>
+      </p:grpSpPr>
+      <p:sp>
+        <p:nvSpPr>
+          <p:cNvPr id="2" name="Slide Image Placeholder 1"/>
+          <p:cNvSpPr>
+            <a:spLocks noGrp="1"/>
+          </p:cNvSpPr>
+          <p:nvPr>
+            <p:ph type="sldImg" idx="2"/>
+          </p:nvPr>
+        </p:nvSpPr>
+        <p:spPr/>
+      </p:sp>
+      <p:sp>
+        <p:nvSpPr>
+          <p:cNvPr id="3" name="Notes Placeholder 2"/>
+          <p:cNvSpPr>
+            <a:spLocks noGrp="1"/>
+          </p:cNvSpPr>
+          <p:nvPr>
+            <p:ph type="body" idx="3" sz="quarter"/>
+          </p:nvPr>
+        </p:nvSpPr>
+        <p:spPr/>
+        <p:txBody>
+          <a:bodyPr/>
+          <a:lstStyle/>
+          <a:p>
+            <a:r>
               <a:t>N1: Es un vídeo técnico. ¿Cómo me quedo con lo importante?</a:t>
             </a:r>
           </a:p>
@@ -972,16 +1048,7 @@
         <p:txBody>
           <a:bodyPr/>
           <a:lstStyle/>
-          <a:p>
-            <a:r>
-              <a:t>N1: Antes de entrar en los procedimientos, ¿quién hace cada cosa?</a:t>
-            </a:r>
-          </a:p>
-          <a:p>
-            <a:r>
-              <a:t>N2: Esto es la clave que ordena todo el anexo, así que fíjalo primero. Hay dos actores. El organismo de control es un tercero independiente que examina la documentación, hace las pruebas y expide el certificado. El fabricante, o su representante legal, solo presenta la solicitud y pone el aparato a disposición. Es decir, el fabricante nunca se certifica a sí mismo: siempre hay alguien de fuera que da fe. ¿Por qué importa esto en obra? Porque cuando montas un aparato certificado, ese respaldo de un tercero independiente es lo que hay detrás de su placa y de su certificado. Sin él, ni deberías instalarlo ni podrías responder ante un siniestro.</a:t>
-            </a:r>
-          </a:p>
+          <a:p/>
         </p:txBody>
       </p:sp>
       <p:sp>
@@ -1049,12 +1116,12 @@
           <a:lstStyle/>
           <a:p>
             <a:r>
-              <a:t>N1: ¿Qué es el examen de tipo?</a:t>
-            </a:r>
-          </a:p>
-          <a:p>
-            <a:r>
-              <a:t>N2: Piensa en el examen de tipo como certificar un molde. El fabricante pone a disposición uno o varios aparatos representativos de la producción, que se llaman el tipo. El organismo de control examina la documentación de diseño, comprueba que ese tipo se ha fabricado de acuerdo con ella, y realiza o hace realizar las pruebas necesarias para ver si cumple las normas o procedimientos aplicables. Si cumple todo, le expide al solicitante un certificado de examen de tipo. Un matiz: el tipo puede incluir varias variantes de producto, siempre que no presenten diferencias en cuanto a los tipos de riesgo. Es decir, se certifica el modelo una vez, no cada unidad.</a:t>
+              <a:t>N1: Antes de entrar en los procedimientos, ¿quién hace cada cosa?</a:t>
+            </a:r>
+          </a:p>
+          <a:p>
+            <a:r>
+              <a:t>N2: Esto es la clave que ordena todo el anexo, así que fíjalo primero. Hay dos actores. El organismo de control es un tercero independiente que examina la documentación, hace las pruebas y expide el certificado. El fabricante, o su representante legal, solo presenta la solicitud y pone el aparato a disposición. Es decir, el fabricante nunca se certifica a sí mismo: siempre hay alguien de fuera que da fe. ¿Por qué importa esto en obra? Porque cuando montas un aparato certificado, ese respaldo de un tercero independiente es lo que hay detrás de su placa y de su certificado. Sin él, ni deberías instalarlo ni podrías responder ante un siniestro.</a:t>
             </a:r>
           </a:p>
         </p:txBody>
@@ -1124,12 +1191,12 @@
           <a:lstStyle/>
           <a:p>
             <a:r>
-              <a:t>N1: ¿Y si el fabricante cambia algo del modelo después?</a:t>
-            </a:r>
-          </a:p>
-          <a:p>
-            <a:r>
-              <a:t>N2: Buena pregunta, porque aquí está lo que más cae. El solicitante debe informar al organismo que emitió el certificado de todas las modificaciones introducidas en el tipo aprobado que puedan afectar al cumplimiento de los requisitos. Y si esas modificaciones afectan a los requisitos de seguridad o a las condiciones de utilización, no basta con avisar: necesitan una aprobación adicional del mismo organismo, que se añade como complemento al certificado de examen de tipo. La idea, para que se te quede: certificas el molde una vez, y avisas cada vez que retocas el molde. Por eso no vale apañar un aparato con piezas distintas a las certificadas.</a:t>
+              <a:t>N1: ¿Qué es el examen de tipo?</a:t>
+            </a:r>
+          </a:p>
+          <a:p>
+            <a:r>
+              <a:t>N2: Piensa en el examen de tipo como certificar un molde. El fabricante pone a disposición uno o varios aparatos representativos de la producción, que se llaman el tipo. El organismo de control examina la documentación de diseño, comprueba que ese tipo se ha fabricado de acuerdo con ella, y realiza o hace realizar las pruebas necesarias para ver si cumple las normas o procedimientos aplicables. Si cumple todo, le expide al solicitante un certificado de examen de tipo. Un matiz: el tipo puede incluir varias variantes de producto, siempre que no presenten diferencias en cuanto a los tipos de riesgo. Es decir, se certifica el modelo una vez, no cada unidad.</a:t>
             </a:r>
           </a:p>
         </p:txBody>
@@ -1199,12 +1266,12 @@
           <a:lstStyle/>
           <a:p>
             <a:r>
-              <a:t>N1: Si el examen de tipo ya certifica el modelo, ¿para qué un segundo paso?</a:t>
-            </a:r>
-          </a:p>
-          <a:p>
-            <a:r>
-              <a:t>N2: Porque certificar el molde no sirve de nada si luego la cadena produce copias defectuosas. El examen de tipo demuestra que el modelo es bueno; la verificación de conformidad de la producción demuestra que cada unidad que sale de fábrica es igual que ese modelo. Por eso van de la mano. El fabricante adopta las medidas para que la fabricación, incluidas la inspección y las pruebas finales, garantice la homogeneidad de la producción y la conformidad con el tipo. Y esta verificación se hace a través de un organismo de control, antes de comercializar, por uno de dos procedimientos que elige el fabricante: el examen de producto o el aseguramiento de la calidad. Los vemos ahora.</a:t>
+              <a:t>N1: ¿Y si el fabricante cambia algo del modelo después?</a:t>
+            </a:r>
+          </a:p>
+          <a:p>
+            <a:r>
+              <a:t>N2: Buena pregunta, porque aquí está lo que más cae. El solicitante debe informar al organismo que emitió el certificado de todas las modificaciones introducidas en el tipo aprobado que puedan afectar al cumplimiento de los requisitos. Y si esas modificaciones afectan a los requisitos de seguridad o a las condiciones de utilización, no basta con avisar: necesitan una aprobación adicional del mismo organismo, que se añade como complemento al certificado de examen de tipo. La idea, para que se te quede: certificas el molde una vez, y avisas cada vez que retocas el molde. Por eso no vale apañar un aparato con piezas distintas a las certificadas.</a:t>
             </a:r>
           </a:p>
         </p:txBody>
@@ -1274,12 +1341,12 @@
           <a:lstStyle/>
           <a:p>
             <a:r>
-              <a:t>N1: ¿En qué consiste el examen de producto?</a:t>
-            </a:r>
-          </a:p>
-          <a:p>
-            <a:r>
-              <a:t>N2: Este camino se basa en pillar por sorpresa. El organismo de control aparece sin avisar, a intervalos máximos de un año, coge aparatos de la producción in situ, examina un número adecuado y, sobre al menos uno de los seleccionados, hace las pruebas necesarias. Él decide en cada caso si las pruebas se hacen total o parcialmente. ¿Y si alguno no pasa? Cuando uno o más aparatos son rechazados, el organismo adopta las medidas para evitar su comercialización, es decir, bloquea su venta. Retén los dos datos de examen: sin aviso previo, y a intervalos máximos de un año. Aquí se vigila el producto, unidad a unidad.</a:t>
+              <a:t>N1: Si el examen de tipo ya certifica el modelo, ¿para qué un segundo paso?</a:t>
+            </a:r>
+          </a:p>
+          <a:p>
+            <a:r>
+              <a:t>N2: Porque certificar el molde no sirve de nada si luego la cadena produce copias defectuosas. El examen de tipo demuestra que el modelo es bueno; la verificación de conformidad de la producción demuestra que cada unidad que sale de fábrica es igual que ese modelo. Por eso van de la mano. El fabricante adopta las medidas para que la fabricación, incluidas la inspección y las pruebas finales, garantice la homogeneidad de la producción y la conformidad con el tipo. Y esta verificación se hace a través de un organismo de control, antes de comercializar, por uno de dos procedimientos que elige el fabricante: el examen de producto o el aseguramiento de la calidad. Los vemos ahora.</a:t>
             </a:r>
           </a:p>
         </p:txBody>
@@ -1349,12 +1416,12 @@
           <a:lstStyle/>
           <a:p>
             <a:r>
-              <a:t>N1: ¿Y el otro camino, el de la calidad?</a:t>
-            </a:r>
-          </a:p>
-          <a:p>
-            <a:r>
-              <a:t>N2: Aquí se confía en el proceso, no en pillar productos sueltos. El fabricante garantiza la conformidad mediante un sistema de calidad de la producción o del producto conforme a la norma ISO nueve mil uno, que es la norma internacional de gestión de la calidad; significa que hay procedimientos escritos, controles y auditorías. Ese sistema lo evalúa y certifica un organismo de control acreditado. Luego hay un seguimiento: el fabricante envía anualmente la documentación que acredita que mantiene el sistema aprobado, y el organismo, siempre y especialmente en caso de duda, puede pedir una muestra de la producción para verificarla. Compara los dos caminos: en el dos punto uno vigilan los productos con inspecciones sorpresa; en el dos punto dos, vigilan el proceso con un sistema de calidad y seguimiento anual.</a:t>
+              <a:t>N1: ¿En qué consiste el examen de producto?</a:t>
+            </a:r>
+          </a:p>
+          <a:p>
+            <a:r>
+              <a:t>N2: Este camino se basa en pillar por sorpresa. El organismo de control aparece sin avisar, a intervalos máximos de un año, coge aparatos de la producción in situ, examina un número adecuado y, sobre al menos uno de los seleccionados, hace las pruebas necesarias. Él decide en cada caso si las pruebas se hacen total o parcialmente. ¿Y si alguno no pasa? Cuando uno o más aparatos son rechazados, el organismo adopta las medidas para evitar su comercialización, es decir, bloquea su venta. Retén los dos datos de examen: sin aviso previo, y a intervalos máximos de un año. Aquí se vigila el producto, unidad a unidad.</a:t>
             </a:r>
           </a:p>
         </p:txBody>
@@ -1424,12 +1491,12 @@
           <a:lstStyle/>
           <a:p>
             <a:r>
-              <a:t>N1: ¿Y si solo se fabrica un aparato, no una serie?</a:t>
-            </a:r>
-          </a:p>
-          <a:p>
-            <a:r>
-              <a:t>N2: Para eso está el camino alternativo, la c del apartado tres de la ITC: la verificación por unidad. En vez de certificar un modelo de serie, el organismo comprueba y certifica un aparato concreto, de forma independiente. Es lo típico de un aparato fabricado a medida o de una sola unidad. Fíjate en dos detalles diferenciadores que le gustan al examen: la solicitud pide el destino del aparato, es decir, dónde va a ir; y las pruebas pueden hacerse incluso tras la instalación del aparato. Es lógico: si solo hay un ejemplar, se examina ese, allí donde va a trabajar. Y aquí tú, el instalador, puedes ser justo el punto donde el aparato queda montado antes de que el organismo lo ensaye.</a:t>
+              <a:t>N1: ¿Y el otro camino, el de la calidad?</a:t>
+            </a:r>
+          </a:p>
+          <a:p>
+            <a:r>
+              <a:t>N2: Aquí se confía en el proceso, no en pillar productos sueltos. El fabricante garantiza la conformidad mediante un sistema de calidad de la producción o del producto conforme a la norma ISO nueve mil uno, que es la norma internacional de gestión de la calidad; significa que hay procedimientos escritos, controles y auditorías. Ese sistema lo evalúa y certifica un organismo de control acreditado. Luego hay un seguimiento: el fabricante envía anualmente la documentación que acredita que mantiene el sistema aprobado, y el organismo, siempre y especialmente en caso de duda, puede pedir una muestra de la producción para verificarla. Compara los dos caminos: en el dos punto uno vigilan los productos con inspecciones sorpresa; en el dos punto dos, vigilan el proceso con un sistema de calidad y seguimiento anual.</a:t>
             </a:r>
           </a:p>
         </p:txBody>
@@ -4504,7 +4571,7 @@
             <a:r>
               <a:rPr sz="1400" b="1" i="0">
                 <a:solidFill>
-                  <a:srgbClr val="CADCFC"/>
+                  <a:srgbClr val="F4A24C"/>
                 </a:solidFill>
                 <a:latin typeface="Montserrat"/>
               </a:rPr>
@@ -4515,13 +4582,57 @@
       </p:sp>
       <p:sp>
         <p:nvSpPr>
-          <p:cNvPr id="4" name="TextBox 3"/>
+          <p:cNvPr id="4" name="Rounded Rectangle 3"/>
+          <p:cNvSpPr/>
+          <p:nvPr/>
+        </p:nvSpPr>
+        <p:spPr>
+          <a:xfrm>
+            <a:off x="868680" y="2057400"/>
+            <a:ext cx="1463040" cy="82296"/>
+          </a:xfrm>
+          <a:prstGeom prst="roundRect">
+            <a:avLst/>
+          </a:prstGeom>
+          <a:solidFill>
+            <a:srgbClr val="E8801A"/>
+          </a:solidFill>
+          <a:ln>
+            <a:noFill/>
+          </a:ln>
+          <a:effectLst/>
+        </p:spPr>
+        <p:style>
+          <a:lnRef idx="1">
+            <a:schemeClr val="accent1"/>
+          </a:lnRef>
+          <a:fillRef idx="3">
+            <a:schemeClr val="accent1"/>
+          </a:fillRef>
+          <a:effectRef idx="2">
+            <a:schemeClr val="accent1"/>
+          </a:effectRef>
+          <a:fontRef idx="minor">
+            <a:schemeClr val="lt1"/>
+          </a:fontRef>
+        </p:style>
+        <p:txBody>
+          <a:bodyPr rtlCol="0" anchor="ctr"/>
+          <a:lstStyle/>
+          <a:p>
+            <a:pPr algn="ctr"/>
+          </a:p>
+        </p:txBody>
+      </p:sp>
+      <p:sp>
+        <p:nvSpPr>
+          <p:cNvPr id="5" name="TextBox 4"/>
           <p:cNvSpPr txBox="1"/>
           <p:nvPr/>
         </p:nvSpPr>
         <p:spPr>
           <a:xfrm>
-            <a:off x="822960" y="2194560"/>
+            <a:off x="822960" y="2286000"/>
             <a:ext cx="10515600" cy="2011680"/>
           </a:xfrm>
           <a:prstGeom prst="rect">
@@ -4560,7 +4671,7 @@
       </p:sp>
       <p:sp>
         <p:nvSpPr>
-          <p:cNvPr id="5" name="TextBox 4"/>
+          <p:cNvPr id="6" name="TextBox 5"/>
           <p:cNvSpPr txBox="1"/>
           <p:nvPr/>
         </p:nvSpPr>
@@ -4684,7 +4795,7 @@
                 </a:solidFill>
                 <a:latin typeface="Montserrat"/>
               </a:rPr>
-              <a:t>010 / 013</a:t>
+              <a:t>010 / 014</a:t>
             </a:r>
           </a:p>
         </p:txBody>
@@ -4732,7 +4843,7 @@
         <p:spPr>
           <a:xfrm>
             <a:off x="822960" y="457200"/>
-            <a:ext cx="8229600" cy="365760"/>
+            <a:ext cx="10058400" cy="365760"/>
           </a:xfrm>
           <a:prstGeom prst="rect">
             <a:avLst/>
@@ -4746,13 +4857,13 @@
           <a:lstStyle/>
           <a:p>
             <a:r>
-              <a:rPr sz="1200" b="1" i="0">
-                <a:solidFill>
-                  <a:srgbClr val="64748B"/>
-                </a:solidFill>
-                <a:latin typeface="Montserrat"/>
-              </a:rPr>
-              <a:t>DOCUMENTACIÓN · 4.1</a:t>
+              <a:rPr sz="1300" b="1" i="0">
+                <a:solidFill>
+                  <a:srgbClr val="E8801A"/>
+                </a:solidFill>
+                <a:latin typeface="Montserrat"/>
+              </a:rPr>
+              <a:t>PROCEDIMIENTO 3 · UNIDAD</a:t>
             </a:r>
           </a:p>
         </p:txBody>
@@ -4780,26 +4891,70 @@
           <a:lstStyle/>
           <a:p>
             <a:r>
-              <a:rPr sz="2700" b="1" i="0">
+              <a:rPr sz="2800" b="1" i="0">
                 <a:solidFill>
                   <a:srgbClr val="1E2761"/>
                 </a:solidFill>
                 <a:latin typeface="Montserrat"/>
               </a:rPr>
-              <a:t>Diseño para el examen de tipo</a:t>
-            </a:r>
-          </a:p>
-        </p:txBody>
-      </p:sp>
-      <p:sp>
-        <p:nvSpPr>
-          <p:cNvPr id="7" name="TextBox 6"/>
+              <a:t>La vía de la pieza única</a:t>
+            </a:r>
+          </a:p>
+        </p:txBody>
+      </p:sp>
+      <p:sp>
+        <p:nvSpPr>
+          <p:cNvPr id="7" name="Rounded Rectangle 6"/>
+          <p:cNvSpPr/>
+          <p:nvPr/>
+        </p:nvSpPr>
+        <p:spPr>
+          <a:xfrm>
+            <a:off x="868680" y="1627632"/>
+            <a:ext cx="2011680" cy="73152"/>
+          </a:xfrm>
+          <a:prstGeom prst="roundRect">
+            <a:avLst/>
+          </a:prstGeom>
+          <a:solidFill>
+            <a:srgbClr val="E8801A"/>
+          </a:solidFill>
+          <a:ln>
+            <a:noFill/>
+          </a:ln>
+          <a:effectLst/>
+        </p:spPr>
+        <p:style>
+          <a:lnRef idx="1">
+            <a:schemeClr val="accent1"/>
+          </a:lnRef>
+          <a:fillRef idx="3">
+            <a:schemeClr val="accent1"/>
+          </a:fillRef>
+          <a:effectRef idx="2">
+            <a:schemeClr val="accent1"/>
+          </a:effectRef>
+          <a:fontRef idx="minor">
+            <a:schemeClr val="lt1"/>
+          </a:fontRef>
+        </p:style>
+        <p:txBody>
+          <a:bodyPr rtlCol="0" anchor="ctr"/>
+          <a:lstStyle/>
+          <a:p>
+            <a:pPr algn="ctr"/>
+          </a:p>
+        </p:txBody>
+      </p:sp>
+      <p:sp>
+        <p:nvSpPr>
+          <p:cNvPr id="8" name="TextBox 7"/>
           <p:cNvSpPr txBox="1"/>
           <p:nvPr/>
         </p:nvSpPr>
         <p:spPr>
           <a:xfrm>
-            <a:off x="822960" y="1920240"/>
+            <a:off x="822960" y="1965960"/>
             <a:ext cx="4983480" cy="4206240"/>
           </a:xfrm>
           <a:prstGeom prst="rect">
@@ -4815,17 +4970,17 @@
           <a:p>
             <a:pPr>
               <a:spcAft>
-                <a:spcPts val="1000"/>
+                <a:spcPts val="1100"/>
               </a:spcAft>
             </a:pPr>
             <a:r>
               <a:rPr sz="1600" b="1" i="0">
                 <a:solidFill>
-                  <a:srgbClr val="2E3A80"/>
-                </a:solidFill>
-                <a:latin typeface="Montserrat"/>
-              </a:rPr>
-              <a:t>•  </a:t>
+                  <a:srgbClr val="E8801A"/>
+                </a:solidFill>
+                <a:latin typeface="Montserrat"/>
+              </a:rPr>
+              <a:t>▸  </a:t>
             </a:r>
             <a:r>
               <a:rPr sz="1600" b="0" i="0">
@@ -4834,23 +4989,23 @@
                 </a:solidFill>
                 <a:latin typeface="Montserrat"/>
               </a:rPr>
-              <a:t>Describe el modelo en general</a:t>
+              <a:t>Certifica un aparato concreto</a:t>
             </a:r>
           </a:p>
           <a:p>
             <a:pPr>
               <a:spcAft>
-                <a:spcPts val="1000"/>
+                <a:spcPts val="1100"/>
               </a:spcAft>
             </a:pPr>
             <a:r>
               <a:rPr sz="1600" b="1" i="0">
                 <a:solidFill>
-                  <a:srgbClr val="2E3A80"/>
-                </a:solidFill>
-                <a:latin typeface="Montserrat"/>
-              </a:rPr>
-              <a:t>•  </a:t>
+                  <a:srgbClr val="E8801A"/>
+                </a:solidFill>
+                <a:latin typeface="Montserrat"/>
+              </a:rPr>
+              <a:t>▸  </a:t>
             </a:r>
             <a:r>
               <a:rPr sz="1600" b="0" i="0">
@@ -4859,23 +5014,23 @@
                 </a:solidFill>
                 <a:latin typeface="Montserrat"/>
               </a:rPr>
-              <a:t>Cámara, salida de humos, gases y presiones</a:t>
+              <a:t>Típico de fabricación a medida</a:t>
             </a:r>
           </a:p>
           <a:p>
             <a:pPr>
               <a:spcAft>
-                <a:spcPts val="1000"/>
+                <a:spcPts val="1100"/>
               </a:spcAft>
             </a:pPr>
             <a:r>
               <a:rPr sz="1600" b="1" i="0">
                 <a:solidFill>
-                  <a:srgbClr val="2E3A80"/>
-                </a:solidFill>
-                <a:latin typeface="Montserrat"/>
-              </a:rPr>
-              <a:t>•  </a:t>
+                  <a:srgbClr val="E8801A"/>
+                </a:solidFill>
+                <a:latin typeface="Montserrat"/>
+              </a:rPr>
+              <a:t>▸  </a:t>
             </a:r>
             <a:r>
               <a:rPr sz="1600" b="0" i="0">
@@ -4884,23 +5039,23 @@
                 </a:solidFill>
                 <a:latin typeface="Montserrat"/>
               </a:rPr>
-              <a:t>Quemadores, seguridad y regulación</a:t>
+              <a:t>La solicitud pide el destino del aparato</a:t>
             </a:r>
           </a:p>
           <a:p>
             <a:pPr>
               <a:spcAft>
-                <a:spcPts val="1000"/>
+                <a:spcPts val="1100"/>
               </a:spcAft>
             </a:pPr>
             <a:r>
               <a:rPr sz="1600" b="1" i="0">
                 <a:solidFill>
-                  <a:srgbClr val="2E3A80"/>
-                </a:solidFill>
-                <a:latin typeface="Montserrat"/>
-              </a:rPr>
-              <a:t>•  </a:t>
+                  <a:srgbClr val="E8801A"/>
+                </a:solidFill>
+                <a:latin typeface="Montserrat"/>
+              </a:rPr>
+              <a:t>▸  </a:t>
             </a:r>
             <a:r>
               <a:rPr sz="1600" b="0" i="0">
@@ -4909,14 +5064,14 @@
                 </a:solidFill>
                 <a:latin typeface="Montserrat"/>
               </a:rPr>
-              <a:t>Esquema eléctrico y piezas sustituibles</a:t>
-            </a:r>
-          </a:p>
-        </p:txBody>
-      </p:sp>
-      <p:sp>
-        <p:nvSpPr>
-          <p:cNvPr id="8" name="imgph" descr="IMGQ:technical design blueprint folder"/>
+              <a:t>Las pruebas, incluso tras instalarlo</a:t>
+            </a:r>
+          </a:p>
+        </p:txBody>
+      </p:sp>
+      <p:sp>
+        <p:nvSpPr>
+          <p:cNvPr id="9" name="imgph" descr="IMGQ:custom industrial gas burner unit"/>
           <p:cNvSpPr/>
           <p:nvPr/>
         </p:nvSpPr>
@@ -4962,7 +5117,7 @@
       </p:sp>
       <p:sp>
         <p:nvSpPr>
-          <p:cNvPr id="9" name="TextBox 8"/>
+          <p:cNvPr id="10" name="TextBox 9"/>
           <p:cNvSpPr txBox="1"/>
           <p:nvPr/>
         </p:nvSpPr>
@@ -5002,7 +5157,7 @@
                 </a:solidFill>
                 <a:latin typeface="Montserrat"/>
               </a:rPr>
-              <a:t>technical design blueprint folder</a:t>
+              <a:t>custom industrial gas burner unit</a:t>
             </a:r>
           </a:p>
         </p:txBody>
@@ -5099,7 +5254,7 @@
                 </a:solidFill>
                 <a:latin typeface="Montserrat"/>
               </a:rPr>
-              <a:t>011 / 013</a:t>
+              <a:t>011 / 014</a:t>
             </a:r>
           </a:p>
         </p:txBody>
@@ -5147,7 +5302,7 @@
         <p:spPr>
           <a:xfrm>
             <a:off x="822960" y="457200"/>
-            <a:ext cx="8229600" cy="365760"/>
+            <a:ext cx="10058400" cy="365760"/>
           </a:xfrm>
           <a:prstGeom prst="rect">
             <a:avLst/>
@@ -5161,13 +5316,13 @@
           <a:lstStyle/>
           <a:p>
             <a:r>
-              <a:rPr sz="1200" b="1" i="0">
-                <a:solidFill>
-                  <a:srgbClr val="64748B"/>
-                </a:solidFill>
-                <a:latin typeface="Montserrat"/>
-              </a:rPr>
-              <a:t>DOCUMENTACIÓN · 4.2</a:t>
+              <a:rPr sz="1300" b="1" i="0">
+                <a:solidFill>
+                  <a:srgbClr val="E8801A"/>
+                </a:solidFill>
+                <a:latin typeface="Montserrat"/>
+              </a:rPr>
+              <a:t>DOCUMENTACIÓN · 4.1</a:t>
             </a:r>
           </a:p>
         </p:txBody>
@@ -5195,26 +5350,70 @@
           <a:lstStyle/>
           <a:p>
             <a:r>
-              <a:rPr sz="2700" b="1" i="0">
+              <a:rPr sz="2800" b="1" i="0">
                 <a:solidFill>
                   <a:srgbClr val="1E2761"/>
                 </a:solidFill>
                 <a:latin typeface="Montserrat"/>
               </a:rPr>
-              <a:t>Diseño para la verificación por unidad</a:t>
-            </a:r>
-          </a:p>
-        </p:txBody>
-      </p:sp>
-      <p:sp>
-        <p:nvSpPr>
-          <p:cNvPr id="7" name="TextBox 6"/>
+              <a:t>Diseño para el examen de tipo</a:t>
+            </a:r>
+          </a:p>
+        </p:txBody>
+      </p:sp>
+      <p:sp>
+        <p:nvSpPr>
+          <p:cNvPr id="7" name="Rounded Rectangle 6"/>
+          <p:cNvSpPr/>
+          <p:nvPr/>
+        </p:nvSpPr>
+        <p:spPr>
+          <a:xfrm>
+            <a:off x="868680" y="1627632"/>
+            <a:ext cx="2011680" cy="73152"/>
+          </a:xfrm>
+          <a:prstGeom prst="roundRect">
+            <a:avLst/>
+          </a:prstGeom>
+          <a:solidFill>
+            <a:srgbClr val="E8801A"/>
+          </a:solidFill>
+          <a:ln>
+            <a:noFill/>
+          </a:ln>
+          <a:effectLst/>
+        </p:spPr>
+        <p:style>
+          <a:lnRef idx="1">
+            <a:schemeClr val="accent1"/>
+          </a:lnRef>
+          <a:fillRef idx="3">
+            <a:schemeClr val="accent1"/>
+          </a:fillRef>
+          <a:effectRef idx="2">
+            <a:schemeClr val="accent1"/>
+          </a:effectRef>
+          <a:fontRef idx="minor">
+            <a:schemeClr val="lt1"/>
+          </a:fontRef>
+        </p:style>
+        <p:txBody>
+          <a:bodyPr rtlCol="0" anchor="ctr"/>
+          <a:lstStyle/>
+          <a:p>
+            <a:pPr algn="ctr"/>
+          </a:p>
+        </p:txBody>
+      </p:sp>
+      <p:sp>
+        <p:nvSpPr>
+          <p:cNvPr id="8" name="TextBox 7"/>
           <p:cNvSpPr txBox="1"/>
           <p:nvPr/>
         </p:nvSpPr>
         <p:spPr>
           <a:xfrm>
-            <a:off x="822960" y="1920240"/>
+            <a:off x="822960" y="1965960"/>
             <a:ext cx="4983480" cy="4206240"/>
           </a:xfrm>
           <a:prstGeom prst="rect">
@@ -5230,17 +5429,17 @@
           <a:p>
             <a:pPr>
               <a:spcAft>
-                <a:spcPts val="1000"/>
+                <a:spcPts val="1100"/>
               </a:spcAft>
             </a:pPr>
             <a:r>
               <a:rPr sz="1600" b="1" i="0">
                 <a:solidFill>
-                  <a:srgbClr val="2E3A80"/>
-                </a:solidFill>
-                <a:latin typeface="Montserrat"/>
-              </a:rPr>
-              <a:t>•  </a:t>
+                  <a:srgbClr val="E8801A"/>
+                </a:solidFill>
+                <a:latin typeface="Montserrat"/>
+              </a:rPr>
+              <a:t>▸  </a:t>
             </a:r>
             <a:r>
               <a:rPr sz="1600" b="0" i="0">
@@ -5249,23 +5448,23 @@
                 </a:solidFill>
                 <a:latin typeface="Montserrat"/>
               </a:rPr>
-              <a:t>Describe este aparato en su sitio</a:t>
+              <a:t>Describe el modelo en general</a:t>
             </a:r>
           </a:p>
           <a:p>
             <a:pPr>
               <a:spcAft>
-                <a:spcPts val="1000"/>
+                <a:spcPts val="1100"/>
               </a:spcAft>
             </a:pPr>
             <a:r>
               <a:rPr sz="1600" b="1" i="0">
                 <a:solidFill>
-                  <a:srgbClr val="2E3A80"/>
-                </a:solidFill>
-                <a:latin typeface="Montserrat"/>
-              </a:rPr>
-              <a:t>•  </a:t>
+                  <a:srgbClr val="E8801A"/>
+                </a:solidFill>
+                <a:latin typeface="Montserrat"/>
+              </a:rPr>
+              <a:t>▸  </a:t>
             </a:r>
             <a:r>
               <a:rPr sz="1600" b="0" i="0">
@@ -5274,23 +5473,23 @@
                 </a:solidFill>
                 <a:latin typeface="Montserrat"/>
               </a:rPr>
-              <a:t>Nº de fabricación y domicilio de la instalación</a:t>
+              <a:t>Cámara, salida de humos, gases y presiones</a:t>
             </a:r>
           </a:p>
           <a:p>
             <a:pPr>
               <a:spcAft>
-                <a:spcPts val="1000"/>
+                <a:spcPts val="1100"/>
               </a:spcAft>
             </a:pPr>
             <a:r>
               <a:rPr sz="1600" b="1" i="0">
                 <a:solidFill>
-                  <a:srgbClr val="2E3A80"/>
-                </a:solidFill>
-                <a:latin typeface="Montserrat"/>
-              </a:rPr>
-              <a:t>•  </a:t>
+                  <a:srgbClr val="E8801A"/>
+                </a:solidFill>
+                <a:latin typeface="Montserrat"/>
+              </a:rPr>
+              <a:t>▸  </a:t>
             </a:r>
             <a:r>
               <a:rPr sz="1600" b="0" i="0">
@@ -5299,23 +5498,23 @@
                 </a:solidFill>
                 <a:latin typeface="Montserrat"/>
               </a:rPr>
-              <a:t>Plano de situación y línea de gas instalada</a:t>
+              <a:t>Quemadores, seguridad y regulación</a:t>
             </a:r>
           </a:p>
           <a:p>
             <a:pPr>
               <a:spcAft>
-                <a:spcPts val="1000"/>
+                <a:spcPts val="1100"/>
               </a:spcAft>
             </a:pPr>
             <a:r>
               <a:rPr sz="1600" b="1" i="0">
                 <a:solidFill>
-                  <a:srgbClr val="2E3A80"/>
-                </a:solidFill>
-                <a:latin typeface="Montserrat"/>
-              </a:rPr>
-              <a:t>•  </a:t>
+                  <a:srgbClr val="E8801A"/>
+                </a:solidFill>
+                <a:latin typeface="Montserrat"/>
+              </a:rPr>
+              <a:t>▸  </a:t>
             </a:r>
             <a:r>
               <a:rPr sz="1600" b="0" i="0">
@@ -5324,14 +5523,14 @@
                 </a:solidFill>
                 <a:latin typeface="Montserrat"/>
               </a:rPr>
-              <a:t>Gas y presión para el que se reguló</a:t>
-            </a:r>
-          </a:p>
-        </p:txBody>
-      </p:sp>
-      <p:sp>
-        <p:nvSpPr>
-          <p:cNvPr id="8" name="imgph" descr="IMGQ:installed gas line meter site"/>
+              <a:t>Esquema eléctrico y piezas sustituibles</a:t>
+            </a:r>
+          </a:p>
+        </p:txBody>
+      </p:sp>
+      <p:sp>
+        <p:nvSpPr>
+          <p:cNvPr id="9" name="imgph" descr="IMGQ:technical design blueprint folder"/>
           <p:cNvSpPr/>
           <p:nvPr/>
         </p:nvSpPr>
@@ -5377,7 +5576,7 @@
       </p:sp>
       <p:sp>
         <p:nvSpPr>
-          <p:cNvPr id="9" name="TextBox 8"/>
+          <p:cNvPr id="10" name="TextBox 9"/>
           <p:cNvSpPr txBox="1"/>
           <p:nvPr/>
         </p:nvSpPr>
@@ -5417,7 +5616,7 @@
                 </a:solidFill>
                 <a:latin typeface="Montserrat"/>
               </a:rPr>
-              <a:t>installed gas line meter site</a:t>
+              <a:t>technical design blueprint folder</a:t>
             </a:r>
           </a:p>
         </p:txBody>
@@ -5514,7 +5713,7 @@
                 </a:solidFill>
                 <a:latin typeface="Montserrat"/>
               </a:rPr>
-              <a:t>012 / 013</a:t>
+              <a:t>012 / 014</a:t>
             </a:r>
           </a:p>
         </p:txBody>
@@ -5562,7 +5761,7 @@
         <p:spPr>
           <a:xfrm>
             <a:off x="822960" y="457200"/>
-            <a:ext cx="8229600" cy="365760"/>
+            <a:ext cx="10058400" cy="365760"/>
           </a:xfrm>
           <a:prstGeom prst="rect">
             <a:avLst/>
@@ -5576,13 +5775,13 @@
           <a:lstStyle/>
           <a:p>
             <a:r>
-              <a:rPr sz="1200" b="1" i="0">
-                <a:solidFill>
-                  <a:srgbClr val="64748B"/>
-                </a:solidFill>
-                <a:latin typeface="Montserrat"/>
-              </a:rPr>
-              <a:t>CUIDADO CON LAS LETRAS</a:t>
+              <a:rPr sz="1300" b="1" i="0">
+                <a:solidFill>
+                  <a:srgbClr val="E8801A"/>
+                </a:solidFill>
+                <a:latin typeface="Montserrat"/>
+              </a:rPr>
+              <a:t>DOCUMENTACIÓN · 4.2</a:t>
             </a:r>
           </a:p>
         </p:txBody>
@@ -5610,26 +5809,70 @@
           <a:lstStyle/>
           <a:p>
             <a:r>
-              <a:rPr sz="2700" b="1" i="0">
+              <a:rPr sz="2800" b="1" i="0">
                 <a:solidFill>
                   <a:srgbClr val="1E2761"/>
                 </a:solidFill>
                 <a:latin typeface="Montserrat"/>
               </a:rPr>
-              <a:t>Categoría del aparato ≠ tipo ≠ carné</a:t>
-            </a:r>
-          </a:p>
-        </p:txBody>
-      </p:sp>
-      <p:sp>
-        <p:nvSpPr>
-          <p:cNvPr id="7" name="TextBox 6"/>
+              <a:t>Diseño para la verificación por unidad</a:t>
+            </a:r>
+          </a:p>
+        </p:txBody>
+      </p:sp>
+      <p:sp>
+        <p:nvSpPr>
+          <p:cNvPr id="7" name="Rounded Rectangle 6"/>
+          <p:cNvSpPr/>
+          <p:nvPr/>
+        </p:nvSpPr>
+        <p:spPr>
+          <a:xfrm>
+            <a:off x="868680" y="1627632"/>
+            <a:ext cx="2011680" cy="73152"/>
+          </a:xfrm>
+          <a:prstGeom prst="roundRect">
+            <a:avLst/>
+          </a:prstGeom>
+          <a:solidFill>
+            <a:srgbClr val="E8801A"/>
+          </a:solidFill>
+          <a:ln>
+            <a:noFill/>
+          </a:ln>
+          <a:effectLst/>
+        </p:spPr>
+        <p:style>
+          <a:lnRef idx="1">
+            <a:schemeClr val="accent1"/>
+          </a:lnRef>
+          <a:fillRef idx="3">
+            <a:schemeClr val="accent1"/>
+          </a:fillRef>
+          <a:effectRef idx="2">
+            <a:schemeClr val="accent1"/>
+          </a:effectRef>
+          <a:fontRef idx="minor">
+            <a:schemeClr val="lt1"/>
+          </a:fontRef>
+        </p:style>
+        <p:txBody>
+          <a:bodyPr rtlCol="0" anchor="ctr"/>
+          <a:lstStyle/>
+          <a:p>
+            <a:pPr algn="ctr"/>
+          </a:p>
+        </p:txBody>
+      </p:sp>
+      <p:sp>
+        <p:nvSpPr>
+          <p:cNvPr id="8" name="TextBox 7"/>
           <p:cNvSpPr txBox="1"/>
           <p:nvPr/>
         </p:nvSpPr>
         <p:spPr>
           <a:xfrm>
-            <a:off x="822960" y="1920240"/>
+            <a:off x="822960" y="1965960"/>
             <a:ext cx="4983480" cy="4206240"/>
           </a:xfrm>
           <a:prstGeom prst="rect">
@@ -5645,17 +5888,17 @@
           <a:p>
             <a:pPr>
               <a:spcAft>
-                <a:spcPts val="1000"/>
+                <a:spcPts val="1100"/>
               </a:spcAft>
             </a:pPr>
             <a:r>
               <a:rPr sz="1600" b="1" i="0">
                 <a:solidFill>
-                  <a:srgbClr val="2E3A80"/>
-                </a:solidFill>
-                <a:latin typeface="Montserrat"/>
-              </a:rPr>
-              <a:t>•  </a:t>
+                  <a:srgbClr val="E8801A"/>
+                </a:solidFill>
+                <a:latin typeface="Montserrat"/>
+              </a:rPr>
+              <a:t>▸  </a:t>
             </a:r>
             <a:r>
               <a:rPr sz="1600" b="0" i="0">
@@ -5664,23 +5907,23 @@
                 </a:solidFill>
                 <a:latin typeface="Montserrat"/>
               </a:rPr>
-              <a:t>Categoría del aparato: qué gases admite</a:t>
+              <a:t>Describe este aparato en su sitio</a:t>
             </a:r>
           </a:p>
           <a:p>
             <a:pPr>
               <a:spcAft>
-                <a:spcPts val="1000"/>
+                <a:spcPts val="1100"/>
               </a:spcAft>
             </a:pPr>
             <a:r>
               <a:rPr sz="1600" b="1" i="0">
                 <a:solidFill>
-                  <a:srgbClr val="2E3A80"/>
-                </a:solidFill>
-                <a:latin typeface="Montserrat"/>
-              </a:rPr>
-              <a:t>•  </a:t>
+                  <a:srgbClr val="E8801A"/>
+                </a:solidFill>
+                <a:latin typeface="Montserrat"/>
+              </a:rPr>
+              <a:t>▸  </a:t>
             </a:r>
             <a:r>
               <a:rPr sz="1600" b="0" i="0">
@@ -5689,23 +5932,23 @@
                 </a:solidFill>
                 <a:latin typeface="Montserrat"/>
               </a:rPr>
-              <a:t>Según UNE-EN 437</a:t>
+              <a:t>Nº de fabricación y domicilio de la instalación</a:t>
             </a:r>
           </a:p>
           <a:p>
             <a:pPr>
               <a:spcAft>
-                <a:spcPts val="1000"/>
+                <a:spcPts val="1100"/>
               </a:spcAft>
             </a:pPr>
             <a:r>
               <a:rPr sz="1600" b="1" i="0">
                 <a:solidFill>
-                  <a:srgbClr val="2E3A80"/>
-                </a:solidFill>
-                <a:latin typeface="Montserrat"/>
-              </a:rPr>
-              <a:t>•  </a:t>
+                  <a:srgbClr val="E8801A"/>
+                </a:solidFill>
+                <a:latin typeface="Montserrat"/>
+              </a:rPr>
+              <a:t>▸  </a:t>
             </a:r>
             <a:r>
               <a:rPr sz="1600" b="0" i="0">
@@ -5714,23 +5957,23 @@
                 </a:solidFill>
                 <a:latin typeface="Montserrat"/>
               </a:rPr>
-              <a:t>Tipo A/B/C: cómo quema el aparato</a:t>
+              <a:t>Plano de situación y línea de gas instalada</a:t>
             </a:r>
           </a:p>
           <a:p>
             <a:pPr>
               <a:spcAft>
-                <a:spcPts val="1000"/>
+                <a:spcPts val="1100"/>
               </a:spcAft>
             </a:pPr>
             <a:r>
               <a:rPr sz="1600" b="1" i="0">
                 <a:solidFill>
-                  <a:srgbClr val="2E3A80"/>
-                </a:solidFill>
-                <a:latin typeface="Montserrat"/>
-              </a:rPr>
-              <a:t>•  </a:t>
+                  <a:srgbClr val="E8801A"/>
+                </a:solidFill>
+                <a:latin typeface="Montserrat"/>
+              </a:rPr>
+              <a:t>▸  </a:t>
             </a:r>
             <a:r>
               <a:rPr sz="1600" b="0" i="0">
@@ -5739,14 +5982,14 @@
                 </a:solidFill>
                 <a:latin typeface="Montserrat"/>
               </a:rPr>
-              <a:t>Categoría A/B/C: el carné del instalador</a:t>
-            </a:r>
-          </a:p>
-        </p:txBody>
-      </p:sp>
-      <p:sp>
-        <p:nvSpPr>
-          <p:cNvPr id="8" name="imgph" descr="IMGQ:gas appliance category label detail"/>
+              <a:t>Gas y presión para el que se reguló</a:t>
+            </a:r>
+          </a:p>
+        </p:txBody>
+      </p:sp>
+      <p:sp>
+        <p:nvSpPr>
+          <p:cNvPr id="9" name="imgph" descr="IMGQ:installed gas line meter site"/>
           <p:cNvSpPr/>
           <p:nvPr/>
         </p:nvSpPr>
@@ -5792,7 +6035,7 @@
       </p:sp>
       <p:sp>
         <p:nvSpPr>
-          <p:cNvPr id="9" name="TextBox 8"/>
+          <p:cNvPr id="10" name="TextBox 9"/>
           <p:cNvSpPr txBox="1"/>
           <p:nvPr/>
         </p:nvSpPr>
@@ -5832,7 +6075,7 @@
                 </a:solidFill>
                 <a:latin typeface="Montserrat"/>
               </a:rPr>
-              <a:t>gas appliance category label detail</a:t>
+              <a:t>installed gas line meter site</a:t>
             </a:r>
           </a:p>
         </p:txBody>
@@ -5870,6 +6113,465 @@
             <a:avLst/>
           </a:prstGeom>
           <a:solidFill>
+            <a:srgbClr val="FFFFFF"/>
+          </a:solidFill>
+          <a:ln>
+            <a:noFill/>
+          </a:ln>
+          <a:effectLst/>
+        </p:spPr>
+        <p:style>
+          <a:lnRef idx="1">
+            <a:schemeClr val="accent1"/>
+          </a:lnRef>
+          <a:fillRef idx="3">
+            <a:schemeClr val="accent1"/>
+          </a:fillRef>
+          <a:effectRef idx="2">
+            <a:schemeClr val="accent1"/>
+          </a:effectRef>
+          <a:fontRef idx="minor">
+            <a:schemeClr val="lt1"/>
+          </a:fontRef>
+        </p:style>
+        <p:txBody>
+          <a:bodyPr rtlCol="0" anchor="ctr"/>
+          <a:lstStyle/>
+          <a:p>
+            <a:pPr algn="ctr"/>
+          </a:p>
+        </p:txBody>
+      </p:sp>
+      <p:sp>
+        <p:nvSpPr>
+          <p:cNvPr id="3" name="TextBox 2"/>
+          <p:cNvSpPr txBox="1"/>
+          <p:nvPr/>
+        </p:nvSpPr>
+        <p:spPr>
+          <a:xfrm>
+            <a:off x="10607040" y="320040"/>
+            <a:ext cx="1371600" cy="365760"/>
+          </a:xfrm>
+          <a:prstGeom prst="rect">
+            <a:avLst/>
+          </a:prstGeom>
+          <a:noFill/>
+        </p:spPr>
+        <p:txBody>
+          <a:bodyPr wrap="square">
+            <a:spAutoFit/>
+          </a:bodyPr>
+          <a:lstStyle/>
+          <a:p>
+            <a:pPr algn="r"/>
+            <a:r>
+              <a:rPr sz="1000" b="1" i="0">
+                <a:solidFill>
+                  <a:srgbClr val="64748B"/>
+                </a:solidFill>
+                <a:latin typeface="Montserrat"/>
+              </a:rPr>
+              <a:t>013 / 014</a:t>
+            </a:r>
+          </a:p>
+        </p:txBody>
+      </p:sp>
+      <p:sp>
+        <p:nvSpPr>
+          <p:cNvPr id="4" name="TextBox 3"/>
+          <p:cNvSpPr txBox="1"/>
+          <p:nvPr/>
+        </p:nvSpPr>
+        <p:spPr>
+          <a:xfrm>
+            <a:off x="457200" y="6419088"/>
+            <a:ext cx="8229600" cy="365760"/>
+          </a:xfrm>
+          <a:prstGeom prst="rect">
+            <a:avLst/>
+          </a:prstGeom>
+          <a:noFill/>
+        </p:spPr>
+        <p:txBody>
+          <a:bodyPr wrap="square">
+            <a:spAutoFit/>
+          </a:bodyPr>
+          <a:lstStyle/>
+          <a:p>
+            <a:r>
+              <a:rPr sz="900" b="0" i="0">
+                <a:solidFill>
+                  <a:srgbClr val="64748B"/>
+                </a:solidFill>
+                <a:latin typeface="Montserrat"/>
+              </a:rPr>
+              <a:t>Curso Gas B · Tema 05 · Aparatos de gas</a:t>
+            </a:r>
+          </a:p>
+        </p:txBody>
+      </p:sp>
+      <p:sp>
+        <p:nvSpPr>
+          <p:cNvPr id="5" name="TextBox 4"/>
+          <p:cNvSpPr txBox="1"/>
+          <p:nvPr/>
+        </p:nvSpPr>
+        <p:spPr>
+          <a:xfrm>
+            <a:off x="822960" y="457200"/>
+            <a:ext cx="10058400" cy="365760"/>
+          </a:xfrm>
+          <a:prstGeom prst="rect">
+            <a:avLst/>
+          </a:prstGeom>
+          <a:noFill/>
+        </p:spPr>
+        <p:txBody>
+          <a:bodyPr wrap="square">
+            <a:spAutoFit/>
+          </a:bodyPr>
+          <a:lstStyle/>
+          <a:p>
+            <a:r>
+              <a:rPr sz="1300" b="1" i="0">
+                <a:solidFill>
+                  <a:srgbClr val="E8801A"/>
+                </a:solidFill>
+                <a:latin typeface="Montserrat"/>
+              </a:rPr>
+              <a:t>CUIDADO CON LAS LETRAS</a:t>
+            </a:r>
+          </a:p>
+        </p:txBody>
+      </p:sp>
+      <p:sp>
+        <p:nvSpPr>
+          <p:cNvPr id="6" name="TextBox 5"/>
+          <p:cNvSpPr txBox="1"/>
+          <p:nvPr/>
+        </p:nvSpPr>
+        <p:spPr>
+          <a:xfrm>
+            <a:off x="822960" y="868680"/>
+            <a:ext cx="10515600" cy="914400"/>
+          </a:xfrm>
+          <a:prstGeom prst="rect">
+            <a:avLst/>
+          </a:prstGeom>
+          <a:noFill/>
+        </p:spPr>
+        <p:txBody>
+          <a:bodyPr wrap="square">
+            <a:spAutoFit/>
+          </a:bodyPr>
+          <a:lstStyle/>
+          <a:p>
+            <a:r>
+              <a:rPr sz="2800" b="1" i="0">
+                <a:solidFill>
+                  <a:srgbClr val="1E2761"/>
+                </a:solidFill>
+                <a:latin typeface="Montserrat"/>
+              </a:rPr>
+              <a:t>Categoría del aparato ≠ tipo ≠ carné</a:t>
+            </a:r>
+          </a:p>
+        </p:txBody>
+      </p:sp>
+      <p:sp>
+        <p:nvSpPr>
+          <p:cNvPr id="7" name="Rounded Rectangle 6"/>
+          <p:cNvSpPr/>
+          <p:nvPr/>
+        </p:nvSpPr>
+        <p:spPr>
+          <a:xfrm>
+            <a:off x="868680" y="1627632"/>
+            <a:ext cx="2011680" cy="73152"/>
+          </a:xfrm>
+          <a:prstGeom prst="roundRect">
+            <a:avLst/>
+          </a:prstGeom>
+          <a:solidFill>
+            <a:srgbClr val="E8801A"/>
+          </a:solidFill>
+          <a:ln>
+            <a:noFill/>
+          </a:ln>
+          <a:effectLst/>
+        </p:spPr>
+        <p:style>
+          <a:lnRef idx="1">
+            <a:schemeClr val="accent1"/>
+          </a:lnRef>
+          <a:fillRef idx="3">
+            <a:schemeClr val="accent1"/>
+          </a:fillRef>
+          <a:effectRef idx="2">
+            <a:schemeClr val="accent1"/>
+          </a:effectRef>
+          <a:fontRef idx="minor">
+            <a:schemeClr val="lt1"/>
+          </a:fontRef>
+        </p:style>
+        <p:txBody>
+          <a:bodyPr rtlCol="0" anchor="ctr"/>
+          <a:lstStyle/>
+          <a:p>
+            <a:pPr algn="ctr"/>
+          </a:p>
+        </p:txBody>
+      </p:sp>
+      <p:sp>
+        <p:nvSpPr>
+          <p:cNvPr id="8" name="TextBox 7"/>
+          <p:cNvSpPr txBox="1"/>
+          <p:nvPr/>
+        </p:nvSpPr>
+        <p:spPr>
+          <a:xfrm>
+            <a:off x="822960" y="1965960"/>
+            <a:ext cx="4983480" cy="4206240"/>
+          </a:xfrm>
+          <a:prstGeom prst="rect">
+            <a:avLst/>
+          </a:prstGeom>
+          <a:noFill/>
+        </p:spPr>
+        <p:txBody>
+          <a:bodyPr wrap="square">
+            <a:spAutoFit/>
+          </a:bodyPr>
+          <a:lstStyle/>
+          <a:p>
+            <a:pPr>
+              <a:spcAft>
+                <a:spcPts val="1100"/>
+              </a:spcAft>
+            </a:pPr>
+            <a:r>
+              <a:rPr sz="1600" b="1" i="0">
+                <a:solidFill>
+                  <a:srgbClr val="E8801A"/>
+                </a:solidFill>
+                <a:latin typeface="Montserrat"/>
+              </a:rPr>
+              <a:t>▸  </a:t>
+            </a:r>
+            <a:r>
+              <a:rPr sz="1600" b="0" i="0">
+                <a:solidFill>
+                  <a:srgbClr val="1B2330"/>
+                </a:solidFill>
+                <a:latin typeface="Montserrat"/>
+              </a:rPr>
+              <a:t>Categoría del aparato: qué gases admite</a:t>
+            </a:r>
+          </a:p>
+          <a:p>
+            <a:pPr>
+              <a:spcAft>
+                <a:spcPts val="1100"/>
+              </a:spcAft>
+            </a:pPr>
+            <a:r>
+              <a:rPr sz="1600" b="1" i="0">
+                <a:solidFill>
+                  <a:srgbClr val="E8801A"/>
+                </a:solidFill>
+                <a:latin typeface="Montserrat"/>
+              </a:rPr>
+              <a:t>▸  </a:t>
+            </a:r>
+            <a:r>
+              <a:rPr sz="1600" b="0" i="0">
+                <a:solidFill>
+                  <a:srgbClr val="1B2330"/>
+                </a:solidFill>
+                <a:latin typeface="Montserrat"/>
+              </a:rPr>
+              <a:t>Según UNE-EN 437</a:t>
+            </a:r>
+          </a:p>
+          <a:p>
+            <a:pPr>
+              <a:spcAft>
+                <a:spcPts val="1100"/>
+              </a:spcAft>
+            </a:pPr>
+            <a:r>
+              <a:rPr sz="1600" b="1" i="0">
+                <a:solidFill>
+                  <a:srgbClr val="E8801A"/>
+                </a:solidFill>
+                <a:latin typeface="Montserrat"/>
+              </a:rPr>
+              <a:t>▸  </a:t>
+            </a:r>
+            <a:r>
+              <a:rPr sz="1600" b="0" i="0">
+                <a:solidFill>
+                  <a:srgbClr val="1B2330"/>
+                </a:solidFill>
+                <a:latin typeface="Montserrat"/>
+              </a:rPr>
+              <a:t>Tipo A/B/C: cómo quema el aparato</a:t>
+            </a:r>
+          </a:p>
+          <a:p>
+            <a:pPr>
+              <a:spcAft>
+                <a:spcPts val="1100"/>
+              </a:spcAft>
+            </a:pPr>
+            <a:r>
+              <a:rPr sz="1600" b="1" i="0">
+                <a:solidFill>
+                  <a:srgbClr val="E8801A"/>
+                </a:solidFill>
+                <a:latin typeface="Montserrat"/>
+              </a:rPr>
+              <a:t>▸  </a:t>
+            </a:r>
+            <a:r>
+              <a:rPr sz="1600" b="0" i="0">
+                <a:solidFill>
+                  <a:srgbClr val="1B2330"/>
+                </a:solidFill>
+                <a:latin typeface="Montserrat"/>
+              </a:rPr>
+              <a:t>Categoría A/B/C: el carné del instalador</a:t>
+            </a:r>
+          </a:p>
+        </p:txBody>
+      </p:sp>
+      <p:sp>
+        <p:nvSpPr>
+          <p:cNvPr id="9" name="imgph" descr="IMGQ:gas appliance category label detail"/>
+          <p:cNvSpPr/>
+          <p:nvPr/>
+        </p:nvSpPr>
+        <p:spPr>
+          <a:xfrm>
+            <a:off x="5806440" y="1051560"/>
+            <a:ext cx="5298947" cy="4629150"/>
+          </a:xfrm>
+          <a:prstGeom prst="roundRect">
+            <a:avLst/>
+          </a:prstGeom>
+          <a:solidFill>
+            <a:srgbClr val="F3F6FB"/>
+          </a:solidFill>
+          <a:ln w="12700">
+            <a:solidFill>
+              <a:srgbClr val="C7D2E6"/>
+            </a:solidFill>
+          </a:ln>
+          <a:effectLst/>
+        </p:spPr>
+        <p:style>
+          <a:lnRef idx="1">
+            <a:schemeClr val="accent1"/>
+          </a:lnRef>
+          <a:fillRef idx="3">
+            <a:schemeClr val="accent1"/>
+          </a:fillRef>
+          <a:effectRef idx="2">
+            <a:schemeClr val="accent1"/>
+          </a:effectRef>
+          <a:fontRef idx="minor">
+            <a:schemeClr val="lt1"/>
+          </a:fontRef>
+        </p:style>
+        <p:txBody>
+          <a:bodyPr rtlCol="0" anchor="ctr"/>
+          <a:lstStyle/>
+          <a:p>
+            <a:pPr algn="ctr"/>
+          </a:p>
+        </p:txBody>
+      </p:sp>
+      <p:sp>
+        <p:nvSpPr>
+          <p:cNvPr id="10" name="TextBox 9"/>
+          <p:cNvSpPr txBox="1"/>
+          <p:nvPr/>
+        </p:nvSpPr>
+        <p:spPr>
+          <a:xfrm>
+            <a:off x="6080760" y="2726055"/>
+            <a:ext cx="4750307" cy="1280160"/>
+          </a:xfrm>
+          <a:prstGeom prst="rect">
+            <a:avLst/>
+          </a:prstGeom>
+          <a:noFill/>
+        </p:spPr>
+        <p:txBody>
+          <a:bodyPr wrap="square">
+            <a:spAutoFit/>
+          </a:bodyPr>
+          <a:lstStyle/>
+          <a:p>
+            <a:pPr algn="ctr"/>
+            <a:r>
+              <a:rPr sz="1400" b="1" i="0">
+                <a:solidFill>
+                  <a:srgbClr val="64748B"/>
+                </a:solidFill>
+                <a:latin typeface="Montserrat"/>
+              </a:rPr>
+              <a:t>IMAGEN REALISTA</a:t>
+            </a:r>
+          </a:p>
+          <a:p>
+            <a:pPr algn="ctr"/>
+            <a:r>
+              <a:rPr sz="1100" b="0" i="1">
+                <a:solidFill>
+                  <a:srgbClr val="64748B"/>
+                </a:solidFill>
+                <a:latin typeface="Montserrat"/>
+              </a:rPr>
+              <a:t>gas appliance category label detail</a:t>
+            </a:r>
+          </a:p>
+        </p:txBody>
+      </p:sp>
+    </p:spTree>
+  </p:cSld>
+  <p:clrMapOvr>
+    <a:masterClrMapping/>
+  </p:clrMapOvr>
+</p:sld>
+</file>
+
+<file path=ppt/slides/slide14.xml><?xml version="1.0" encoding="utf-8"?>
+<p:sld xmlns:a="http://schemas.openxmlformats.org/drawingml/2006/main" xmlns:p="http://schemas.openxmlformats.org/presentationml/2006/main" xmlns:r="http://schemas.openxmlformats.org/officeDocument/2006/relationships">
+  <p:cSld>
+    <p:spTree>
+      <p:nvGrpSpPr>
+        <p:cNvPr id="1" name=""/>
+        <p:cNvGrpSpPr/>
+        <p:nvPr/>
+      </p:nvGrpSpPr>
+      <p:grpSpPr/>
+      <p:sp>
+        <p:nvSpPr>
+          <p:cNvPr id="2" name="Rectangle 1"/>
+          <p:cNvSpPr/>
+          <p:nvPr/>
+        </p:nvSpPr>
+        <p:spPr>
+          <a:xfrm>
+            <a:off x="0" y="0"/>
+            <a:ext cx="12191695" cy="6858000"/>
+          </a:xfrm>
+          <a:prstGeom prst="rect">
+            <a:avLst/>
+          </a:prstGeom>
+          <a:solidFill>
             <a:srgbClr val="1E2761"/>
           </a:solidFill>
           <a:ln>
@@ -5924,7 +6626,7 @@
             <a:r>
               <a:rPr sz="1400" b="1" i="0">
                 <a:solidFill>
-                  <a:srgbClr val="CADCFC"/>
+                  <a:srgbClr val="F4A24C"/>
                 </a:solidFill>
                 <a:latin typeface="Montserrat"/>
               </a:rPr>
@@ -5935,13 +6637,57 @@
       </p:sp>
       <p:sp>
         <p:nvSpPr>
-          <p:cNvPr id="4" name="TextBox 3"/>
+          <p:cNvPr id="4" name="Rounded Rectangle 3"/>
+          <p:cNvSpPr/>
+          <p:nvPr/>
+        </p:nvSpPr>
+        <p:spPr>
+          <a:xfrm>
+            <a:off x="868680" y="1051560"/>
+            <a:ext cx="1463040" cy="82296"/>
+          </a:xfrm>
+          <a:prstGeom prst="roundRect">
+            <a:avLst/>
+          </a:prstGeom>
+          <a:solidFill>
+            <a:srgbClr val="E8801A"/>
+          </a:solidFill>
+          <a:ln>
+            <a:noFill/>
+          </a:ln>
+          <a:effectLst/>
+        </p:spPr>
+        <p:style>
+          <a:lnRef idx="1">
+            <a:schemeClr val="accent1"/>
+          </a:lnRef>
+          <a:fillRef idx="3">
+            <a:schemeClr val="accent1"/>
+          </a:fillRef>
+          <a:effectRef idx="2">
+            <a:schemeClr val="accent1"/>
+          </a:effectRef>
+          <a:fontRef idx="minor">
+            <a:schemeClr val="lt1"/>
+          </a:fontRef>
+        </p:style>
+        <p:txBody>
+          <a:bodyPr rtlCol="0" anchor="ctr"/>
+          <a:lstStyle/>
+          <a:p>
+            <a:pPr algn="ctr"/>
+          </a:p>
+        </p:txBody>
+      </p:sp>
+      <p:sp>
+        <p:nvSpPr>
+          <p:cNvPr id="5" name="TextBox 4"/>
           <p:cNvSpPr txBox="1"/>
           <p:nvPr/>
         </p:nvSpPr>
         <p:spPr>
           <a:xfrm>
-            <a:off x="822960" y="1143000"/>
+            <a:off x="822960" y="1234440"/>
             <a:ext cx="10515600" cy="1097280"/>
           </a:xfrm>
           <a:prstGeom prst="rect">
@@ -5969,14 +6715,14 @@
       </p:sp>
       <p:sp>
         <p:nvSpPr>
-          <p:cNvPr id="5" name="TextBox 4"/>
+          <p:cNvPr id="6" name="TextBox 5"/>
           <p:cNvSpPr txBox="1"/>
           <p:nvPr/>
         </p:nvSpPr>
         <p:spPr>
           <a:xfrm>
-            <a:off x="822960" y="2514600"/>
-            <a:ext cx="10515600" cy="2834640"/>
+            <a:off x="822960" y="2606040"/>
+            <a:ext cx="10515600" cy="2743200"/>
           </a:xfrm>
           <a:prstGeom prst="rect">
             <a:avLst/>
@@ -5997,7 +6743,7 @@
             <a:r>
               <a:rPr sz="2000" b="1" i="0">
                 <a:solidFill>
-                  <a:srgbClr val="CADCFC"/>
+                  <a:srgbClr val="F4A24C"/>
                 </a:solidFill>
                 <a:latin typeface="Montserrat"/>
               </a:rPr>
@@ -6022,7 +6768,7 @@
             <a:r>
               <a:rPr sz="2000" b="1" i="0">
                 <a:solidFill>
-                  <a:srgbClr val="CADCFC"/>
+                  <a:srgbClr val="F4A24C"/>
                 </a:solidFill>
                 <a:latin typeface="Montserrat"/>
               </a:rPr>
@@ -6047,7 +6793,7 @@
             <a:r>
               <a:rPr sz="2000" b="1" i="0">
                 <a:solidFill>
-                  <a:srgbClr val="CADCFC"/>
+                  <a:srgbClr val="F4A24C"/>
                 </a:solidFill>
                 <a:latin typeface="Montserrat"/>
               </a:rPr>
@@ -6072,7 +6818,7 @@
             <a:r>
               <a:rPr sz="2000" b="1" i="0">
                 <a:solidFill>
-                  <a:srgbClr val="CADCFC"/>
+                  <a:srgbClr val="F4A24C"/>
                 </a:solidFill>
                 <a:latin typeface="Montserrat"/>
               </a:rPr>
@@ -6092,20 +6838,20 @@
       </p:sp>
       <p:sp>
         <p:nvSpPr>
-          <p:cNvPr id="6" name="Rounded Rectangle 5"/>
+          <p:cNvPr id="7" name="Rounded Rectangle 6"/>
           <p:cNvSpPr/>
           <p:nvPr/>
         </p:nvSpPr>
         <p:spPr>
           <a:xfrm>
             <a:off x="822960" y="5532120"/>
-            <a:ext cx="10515600" cy="777240"/>
+            <a:ext cx="10515600" cy="822960"/>
           </a:xfrm>
           <a:prstGeom prst="roundRect">
             <a:avLst/>
           </a:prstGeom>
           <a:solidFill>
-            <a:srgbClr val="2E3A80"/>
+            <a:srgbClr val="E8801A"/>
           </a:solidFill>
           <a:ln>
             <a:noFill/>
@@ -6136,13 +6882,13 @@
       </p:sp>
       <p:sp>
         <p:nvSpPr>
-          <p:cNvPr id="7" name="TextBox 6"/>
+          <p:cNvPr id="8" name="TextBox 7"/>
           <p:cNvSpPr txBox="1"/>
           <p:nvPr/>
         </p:nvSpPr>
         <p:spPr>
           <a:xfrm>
-            <a:off x="1051560" y="5605272"/>
+            <a:off x="1051560" y="5623560"/>
             <a:ext cx="10058400" cy="640080"/>
           </a:xfrm>
           <a:prstGeom prst="rect">
@@ -6159,7 +6905,7 @@
             <a:r>
               <a:rPr sz="1500" b="1" i="1">
                 <a:solidFill>
-                  <a:srgbClr val="CADCFC"/>
+                  <a:srgbClr val="1E2761"/>
                 </a:solidFill>
                 <a:latin typeface="Montserrat"/>
               </a:rPr>
@@ -6260,7 +7006,7 @@
                 </a:solidFill>
                 <a:latin typeface="Montserrat"/>
               </a:rPr>
-              <a:t>002 / 013</a:t>
+              <a:t>002 / 014</a:t>
             </a:r>
           </a:p>
         </p:txBody>
@@ -6324,7 +7070,7 @@
             <a:r>
               <a:rPr sz="2700" b="1" i="0">
                 <a:solidFill>
-                  <a:srgbClr val="1E2761"/>
+                  <a:srgbClr val="E8801A"/>
                 </a:solidFill>
                 <a:latin typeface="Montserrat"/>
               </a:rPr>
@@ -6336,6 +7082,50 @@
       <p:sp>
         <p:nvSpPr>
           <p:cNvPr id="6" name="Rounded Rectangle 5"/>
+          <p:cNvSpPr/>
+          <p:nvPr/>
+        </p:nvSpPr>
+        <p:spPr>
+          <a:xfrm>
+            <a:off x="868680" y="1234440"/>
+            <a:ext cx="1463040" cy="73152"/>
+          </a:xfrm>
+          <a:prstGeom prst="roundRect">
+            <a:avLst/>
+          </a:prstGeom>
+          <a:solidFill>
+            <a:srgbClr val="1E2761"/>
+          </a:solidFill>
+          <a:ln>
+            <a:noFill/>
+          </a:ln>
+          <a:effectLst/>
+        </p:spPr>
+        <p:style>
+          <a:lnRef idx="1">
+            <a:schemeClr val="accent1"/>
+          </a:lnRef>
+          <a:fillRef idx="3">
+            <a:schemeClr val="accent1"/>
+          </a:fillRef>
+          <a:effectRef idx="2">
+            <a:schemeClr val="accent1"/>
+          </a:effectRef>
+          <a:fontRef idx="minor">
+            <a:schemeClr val="lt1"/>
+          </a:fontRef>
+        </p:style>
+        <p:txBody>
+          <a:bodyPr rtlCol="0" anchor="ctr"/>
+          <a:lstStyle/>
+          <a:p>
+            <a:pPr algn="ctr"/>
+          </a:p>
+        </p:txBody>
+      </p:sp>
+      <p:sp>
+        <p:nvSpPr>
+          <p:cNvPr id="7" name="Rounded Rectangle 6"/>
           <p:cNvSpPr/>
           <p:nvPr/>
         </p:nvSpPr>
@@ -6381,7 +7171,7 @@
       </p:sp>
       <p:sp>
         <p:nvSpPr>
-          <p:cNvPr id="7" name="TextBox 6"/>
+          <p:cNvPr id="8" name="TextBox 7"/>
           <p:cNvSpPr txBox="1"/>
           <p:nvPr/>
         </p:nvSpPr>
@@ -6416,7 +7206,7 @@
       </p:sp>
       <p:sp>
         <p:nvSpPr>
-          <p:cNvPr id="8" name="TextBox 7"/>
+          <p:cNvPr id="9" name="TextBox 8"/>
           <p:cNvSpPr txBox="1"/>
           <p:nvPr/>
         </p:nvSpPr>
@@ -6451,7 +7241,7 @@
       </p:sp>
       <p:sp>
         <p:nvSpPr>
-          <p:cNvPr id="9" name="Rounded Rectangle 8"/>
+          <p:cNvPr id="10" name="Rounded Rectangle 9"/>
           <p:cNvSpPr/>
           <p:nvPr/>
         </p:nvSpPr>
@@ -6497,7 +7287,7 @@
       </p:sp>
       <p:sp>
         <p:nvSpPr>
-          <p:cNvPr id="10" name="TextBox 9"/>
+          <p:cNvPr id="11" name="TextBox 10"/>
           <p:cNvSpPr txBox="1"/>
           <p:nvPr/>
         </p:nvSpPr>
@@ -6532,7 +7322,7 @@
       </p:sp>
       <p:sp>
         <p:nvSpPr>
-          <p:cNvPr id="11" name="TextBox 10"/>
+          <p:cNvPr id="12" name="TextBox 11"/>
           <p:cNvSpPr txBox="1"/>
           <p:nvPr/>
         </p:nvSpPr>
@@ -6567,7 +7357,7 @@
       </p:sp>
       <p:sp>
         <p:nvSpPr>
-          <p:cNvPr id="12" name="Rounded Rectangle 11"/>
+          <p:cNvPr id="13" name="Rounded Rectangle 12"/>
           <p:cNvSpPr/>
           <p:nvPr/>
         </p:nvSpPr>
@@ -6613,7 +7403,7 @@
       </p:sp>
       <p:sp>
         <p:nvSpPr>
-          <p:cNvPr id="13" name="TextBox 12"/>
+          <p:cNvPr id="14" name="TextBox 13"/>
           <p:cNvSpPr txBox="1"/>
           <p:nvPr/>
         </p:nvSpPr>
@@ -6648,7 +7438,7 @@
       </p:sp>
       <p:sp>
         <p:nvSpPr>
-          <p:cNvPr id="14" name="TextBox 13"/>
+          <p:cNvPr id="15" name="TextBox 14"/>
           <p:cNvSpPr txBox="1"/>
           <p:nvPr/>
         </p:nvSpPr>
@@ -6773,7 +7563,7 @@
                 </a:solidFill>
                 <a:latin typeface="Montserrat"/>
               </a:rPr>
-              <a:t>003 / 013</a:t>
+              <a:t>003 / 014</a:t>
             </a:r>
           </a:p>
         </p:txBody>
@@ -6820,7 +7610,7 @@
         </p:nvSpPr>
         <p:spPr>
           <a:xfrm>
-            <a:off x="822960" y="457200"/>
+            <a:off x="822960" y="502920"/>
             <a:ext cx="8229600" cy="365760"/>
           </a:xfrm>
           <a:prstGeom prst="rect">
@@ -6835,13 +7625,13 @@
           <a:lstStyle/>
           <a:p>
             <a:r>
-              <a:rPr sz="1200" b="1" i="0">
-                <a:solidFill>
-                  <a:srgbClr val="64748B"/>
-                </a:solidFill>
-                <a:latin typeface="Montserrat"/>
-              </a:rPr>
-              <a:t>EL REPARTO DE PAPELES</a:t>
+              <a:rPr sz="1300" b="1" i="0">
+                <a:solidFill>
+                  <a:srgbClr val="E8801A"/>
+                </a:solidFill>
+                <a:latin typeface="Montserrat"/>
+              </a:rPr>
+              <a:t>PARTES DE ESTE VÍDEO</a:t>
             </a:r>
           </a:p>
         </p:txBody>
@@ -6854,7 +7644,7 @@
         </p:nvSpPr>
         <p:spPr>
           <a:xfrm>
-            <a:off x="822960" y="868680"/>
+            <a:off x="822960" y="914400"/>
             <a:ext cx="10515600" cy="914400"/>
           </a:xfrm>
           <a:prstGeom prst="rect">
@@ -6875,155 +7665,30 @@
                 </a:solidFill>
                 <a:latin typeface="Montserrat"/>
               </a:rPr>
-              <a:t>Quién certifica y quién solicita</a:t>
-            </a:r>
-          </a:p>
-        </p:txBody>
-      </p:sp>
-      <p:sp>
-        <p:nvSpPr>
-          <p:cNvPr id="7" name="TextBox 6"/>
-          <p:cNvSpPr txBox="1"/>
-          <p:nvPr/>
-        </p:nvSpPr>
-        <p:spPr>
-          <a:xfrm>
-            <a:off x="822960" y="1920240"/>
-            <a:ext cx="4983480" cy="4206240"/>
-          </a:xfrm>
-          <a:prstGeom prst="rect">
-            <a:avLst/>
-          </a:prstGeom>
-          <a:noFill/>
-        </p:spPr>
-        <p:txBody>
-          <a:bodyPr wrap="square">
-            <a:spAutoFit/>
-          </a:bodyPr>
-          <a:lstStyle/>
-          <a:p>
-            <a:pPr>
-              <a:spcAft>
-                <a:spcPts val="1000"/>
-              </a:spcAft>
-            </a:pPr>
-            <a:r>
-              <a:rPr sz="1600" b="1" i="0">
-                <a:solidFill>
-                  <a:srgbClr val="2E3A80"/>
-                </a:solidFill>
-                <a:latin typeface="Montserrat"/>
-              </a:rPr>
-              <a:t>•  </a:t>
-            </a:r>
-            <a:r>
-              <a:rPr sz="1600" b="0" i="0">
-                <a:solidFill>
-                  <a:srgbClr val="1B2330"/>
-                </a:solidFill>
-                <a:latin typeface="Montserrat"/>
-              </a:rPr>
-              <a:t>Organismo de control: examina, prueba y certifica</a:t>
-            </a:r>
-          </a:p>
-          <a:p>
-            <a:pPr>
-              <a:spcAft>
-                <a:spcPts val="1000"/>
-              </a:spcAft>
-            </a:pPr>
-            <a:r>
-              <a:rPr sz="1600" b="1" i="0">
-                <a:solidFill>
-                  <a:srgbClr val="2E3A80"/>
-                </a:solidFill>
-                <a:latin typeface="Montserrat"/>
-              </a:rPr>
-              <a:t>•  </a:t>
-            </a:r>
-            <a:r>
-              <a:rPr sz="1600" b="0" i="0">
-                <a:solidFill>
-                  <a:srgbClr val="1B2330"/>
-                </a:solidFill>
-                <a:latin typeface="Montserrat"/>
-              </a:rPr>
-              <a:t>Fabricante: solicita y aporta el aparato</a:t>
-            </a:r>
-          </a:p>
-          <a:p>
-            <a:pPr>
-              <a:spcAft>
-                <a:spcPts val="1000"/>
-              </a:spcAft>
-            </a:pPr>
-            <a:r>
-              <a:rPr sz="1600" b="1" i="0">
-                <a:solidFill>
-                  <a:srgbClr val="2E3A80"/>
-                </a:solidFill>
-                <a:latin typeface="Montserrat"/>
-              </a:rPr>
-              <a:t>•  </a:t>
-            </a:r>
-            <a:r>
-              <a:rPr sz="1600" b="0" i="0">
-                <a:solidFill>
-                  <a:srgbClr val="1B2330"/>
-                </a:solidFill>
-                <a:latin typeface="Montserrat"/>
-              </a:rPr>
-              <a:t>Nunca se certifica a sí mismo</a:t>
-            </a:r>
-          </a:p>
-          <a:p>
-            <a:pPr>
-              <a:spcAft>
-                <a:spcPts val="1000"/>
-              </a:spcAft>
-            </a:pPr>
-            <a:r>
-              <a:rPr sz="1600" b="1" i="0">
-                <a:solidFill>
-                  <a:srgbClr val="2E3A80"/>
-                </a:solidFill>
-                <a:latin typeface="Montserrat"/>
-              </a:rPr>
-              <a:t>•  </a:t>
-            </a:r>
-            <a:r>
-              <a:rPr sz="1600" b="0" i="0">
-                <a:solidFill>
-                  <a:srgbClr val="1B2330"/>
-                </a:solidFill>
-                <a:latin typeface="Montserrat"/>
-              </a:rPr>
-              <a:t>Tercero independiente detrás de la placa</a:t>
-            </a:r>
-          </a:p>
-        </p:txBody>
-      </p:sp>
-      <p:sp>
-        <p:nvSpPr>
-          <p:cNvPr id="8" name="imgph" descr="IMGQ:laboratory technician testing appliance"/>
+              <a:t>En este vídeo</a:t>
+            </a:r>
+          </a:p>
+        </p:txBody>
+      </p:sp>
+      <p:sp>
+        <p:nvSpPr>
+          <p:cNvPr id="7" name="Rounded Rectangle 6"/>
           <p:cNvSpPr/>
           <p:nvPr/>
         </p:nvSpPr>
         <p:spPr>
           <a:xfrm>
-            <a:off x="5806440" y="1051560"/>
-            <a:ext cx="5298947" cy="4629150"/>
+            <a:off x="868680" y="1673352"/>
+            <a:ext cx="2011680" cy="73152"/>
           </a:xfrm>
           <a:prstGeom prst="roundRect">
             <a:avLst/>
           </a:prstGeom>
           <a:solidFill>
-            <a:srgbClr val="F3F6FB"/>
+            <a:srgbClr val="E8801A"/>
           </a:solidFill>
-          <a:ln w="12700">
-            <a:solidFill>
-              <a:srgbClr val="C7D2E6"/>
-            </a:solidFill>
+          <a:ln>
+            <a:noFill/>
           </a:ln>
           <a:effectLst/>
         </p:spPr>
@@ -7051,14 +7716,14 @@
       </p:sp>
       <p:sp>
         <p:nvSpPr>
-          <p:cNvPr id="9" name="TextBox 8"/>
+          <p:cNvPr id="8" name="TextBox 7"/>
           <p:cNvSpPr txBox="1"/>
           <p:nvPr/>
         </p:nvSpPr>
         <p:spPr>
           <a:xfrm>
-            <a:off x="6080760" y="2726055"/>
-            <a:ext cx="4750307" cy="1280160"/>
+            <a:off x="822960" y="2103120"/>
+            <a:ext cx="10515600" cy="4023360"/>
           </a:xfrm>
           <a:prstGeom prst="rect">
             <a:avLst/>
@@ -7071,27 +7736,228 @@
           </a:bodyPr>
           <a:lstStyle/>
           <a:p>
-            <a:pPr algn="ctr"/>
-            <a:r>
-              <a:rPr sz="1400" b="1" i="0">
-                <a:solidFill>
-                  <a:srgbClr val="64748B"/>
-                </a:solidFill>
-                <a:latin typeface="Montserrat"/>
-              </a:rPr>
-              <a:t>IMAGEN REALISTA</a:t>
-            </a:r>
-          </a:p>
-          <a:p>
-            <a:pPr algn="ctr"/>
-            <a:r>
-              <a:rPr sz="1100" b="0" i="1">
-                <a:solidFill>
-                  <a:srgbClr val="64748B"/>
-                </a:solidFill>
-                <a:latin typeface="Montserrat"/>
-              </a:rPr>
-              <a:t>laboratory technician testing appliance</a:t>
+            <a:pPr>
+              <a:spcAft>
+                <a:spcPts val="900"/>
+              </a:spcAft>
+            </a:pPr>
+            <a:r>
+              <a:rPr sz="1800" b="1" i="0">
+                <a:solidFill>
+                  <a:srgbClr val="E8801A"/>
+                </a:solidFill>
+                <a:latin typeface="Montserrat"/>
+              </a:rPr>
+              <a:t>01   </a:t>
+            </a:r>
+            <a:r>
+              <a:rPr sz="1700" b="0" i="0">
+                <a:solidFill>
+                  <a:srgbClr val="1B2330"/>
+                </a:solidFill>
+                <a:latin typeface="Montserrat"/>
+              </a:rPr>
+              <a:t>El reparto de papeles</a:t>
+            </a:r>
+          </a:p>
+          <a:p>
+            <a:pPr>
+              <a:spcAft>
+                <a:spcPts val="900"/>
+              </a:spcAft>
+            </a:pPr>
+            <a:r>
+              <a:rPr sz="1800" b="1" i="0">
+                <a:solidFill>
+                  <a:srgbClr val="E8801A"/>
+                </a:solidFill>
+                <a:latin typeface="Montserrat"/>
+              </a:rPr>
+              <a:t>02   </a:t>
+            </a:r>
+            <a:r>
+              <a:rPr sz="1700" b="0" i="0">
+                <a:solidFill>
+                  <a:srgbClr val="1B2330"/>
+                </a:solidFill>
+                <a:latin typeface="Montserrat"/>
+              </a:rPr>
+              <a:t>Procedimiento 1</a:t>
+            </a:r>
+          </a:p>
+          <a:p>
+            <a:pPr>
+              <a:spcAft>
+                <a:spcPts val="900"/>
+              </a:spcAft>
+            </a:pPr>
+            <a:r>
+              <a:rPr sz="1800" b="1" i="0">
+                <a:solidFill>
+                  <a:srgbClr val="E8801A"/>
+                </a:solidFill>
+                <a:latin typeface="Montserrat"/>
+              </a:rPr>
+              <a:t>03   </a:t>
+            </a:r>
+            <a:r>
+              <a:rPr sz="1700" b="0" i="0">
+                <a:solidFill>
+                  <a:srgbClr val="1B2330"/>
+                </a:solidFill>
+                <a:latin typeface="Montserrat"/>
+              </a:rPr>
+              <a:t>Examen de tipo</a:t>
+            </a:r>
+          </a:p>
+          <a:p>
+            <a:pPr>
+              <a:spcAft>
+                <a:spcPts val="900"/>
+              </a:spcAft>
+            </a:pPr>
+            <a:r>
+              <a:rPr sz="1800" b="1" i="0">
+                <a:solidFill>
+                  <a:srgbClr val="E8801A"/>
+                </a:solidFill>
+                <a:latin typeface="Montserrat"/>
+              </a:rPr>
+              <a:t>04   </a:t>
+            </a:r>
+            <a:r>
+              <a:rPr sz="1700" b="0" i="0">
+                <a:solidFill>
+                  <a:srgbClr val="1B2330"/>
+                </a:solidFill>
+                <a:latin typeface="Montserrat"/>
+              </a:rPr>
+              <a:t>Procedimiento 2</a:t>
+            </a:r>
+          </a:p>
+          <a:p>
+            <a:pPr>
+              <a:spcAft>
+                <a:spcPts val="900"/>
+              </a:spcAft>
+            </a:pPr>
+            <a:r>
+              <a:rPr sz="1800" b="1" i="0">
+                <a:solidFill>
+                  <a:srgbClr val="E8801A"/>
+                </a:solidFill>
+                <a:latin typeface="Montserrat"/>
+              </a:rPr>
+              <a:t>05   </a:t>
+            </a:r>
+            <a:r>
+              <a:rPr sz="1700" b="0" i="0">
+                <a:solidFill>
+                  <a:srgbClr val="1B2330"/>
+                </a:solidFill>
+                <a:latin typeface="Montserrat"/>
+              </a:rPr>
+              <a:t>Camino 2.1</a:t>
+            </a:r>
+          </a:p>
+          <a:p>
+            <a:pPr>
+              <a:spcAft>
+                <a:spcPts val="900"/>
+              </a:spcAft>
+            </a:pPr>
+            <a:r>
+              <a:rPr sz="1800" b="1" i="0">
+                <a:solidFill>
+                  <a:srgbClr val="E8801A"/>
+                </a:solidFill>
+                <a:latin typeface="Montserrat"/>
+              </a:rPr>
+              <a:t>06   </a:t>
+            </a:r>
+            <a:r>
+              <a:rPr sz="1700" b="0" i="0">
+                <a:solidFill>
+                  <a:srgbClr val="1B2330"/>
+                </a:solidFill>
+                <a:latin typeface="Montserrat"/>
+              </a:rPr>
+              <a:t>Camino 2.2</a:t>
+            </a:r>
+          </a:p>
+          <a:p>
+            <a:pPr>
+              <a:spcAft>
+                <a:spcPts val="900"/>
+              </a:spcAft>
+            </a:pPr>
+            <a:r>
+              <a:rPr sz="1800" b="1" i="0">
+                <a:solidFill>
+                  <a:srgbClr val="E8801A"/>
+                </a:solidFill>
+                <a:latin typeface="Montserrat"/>
+              </a:rPr>
+              <a:t>07   </a:t>
+            </a:r>
+            <a:r>
+              <a:rPr sz="1700" b="0" i="0">
+                <a:solidFill>
+                  <a:srgbClr val="1B2330"/>
+                </a:solidFill>
+                <a:latin typeface="Montserrat"/>
+              </a:rPr>
+              <a:t>Procedimiento 3</a:t>
+            </a:r>
+          </a:p>
+          <a:p>
+            <a:pPr>
+              <a:spcAft>
+                <a:spcPts val="900"/>
+              </a:spcAft>
+            </a:pPr>
+            <a:r>
+              <a:rPr sz="1800" b="1" i="0">
+                <a:solidFill>
+                  <a:srgbClr val="E8801A"/>
+                </a:solidFill>
+                <a:latin typeface="Montserrat"/>
+              </a:rPr>
+              <a:t>08   </a:t>
+            </a:r>
+            <a:r>
+              <a:rPr sz="1700" b="0" i="0">
+                <a:solidFill>
+                  <a:srgbClr val="1B2330"/>
+                </a:solidFill>
+                <a:latin typeface="Montserrat"/>
+              </a:rPr>
+              <a:t>Documentación</a:t>
+            </a:r>
+          </a:p>
+          <a:p>
+            <a:pPr>
+              <a:spcAft>
+                <a:spcPts val="900"/>
+              </a:spcAft>
+            </a:pPr>
+            <a:r>
+              <a:rPr sz="1800" b="1" i="0">
+                <a:solidFill>
+                  <a:srgbClr val="E8801A"/>
+                </a:solidFill>
+                <a:latin typeface="Montserrat"/>
+              </a:rPr>
+              <a:t>09   </a:t>
+            </a:r>
+            <a:r>
+              <a:rPr sz="1700" b="0" i="0">
+                <a:solidFill>
+                  <a:srgbClr val="1B2330"/>
+                </a:solidFill>
+                <a:latin typeface="Montserrat"/>
+              </a:rPr>
+              <a:t>Cuidado con las letras</a:t>
             </a:r>
           </a:p>
         </p:txBody>
@@ -7188,7 +8054,7 @@
                 </a:solidFill>
                 <a:latin typeface="Montserrat"/>
               </a:rPr>
-              <a:t>004 / 013</a:t>
+              <a:t>004 / 014</a:t>
             </a:r>
           </a:p>
         </p:txBody>
@@ -7236,7 +8102,7 @@
         <p:spPr>
           <a:xfrm>
             <a:off x="822960" y="457200"/>
-            <a:ext cx="8229600" cy="365760"/>
+            <a:ext cx="10058400" cy="365760"/>
           </a:xfrm>
           <a:prstGeom prst="rect">
             <a:avLst/>
@@ -7250,13 +8116,13 @@
           <a:lstStyle/>
           <a:p>
             <a:r>
-              <a:rPr sz="1200" b="1" i="0">
-                <a:solidFill>
-                  <a:srgbClr val="64748B"/>
-                </a:solidFill>
-                <a:latin typeface="Montserrat"/>
-              </a:rPr>
-              <a:t>PROCEDIMIENTO 1 · EXAMEN DE TIPO</a:t>
+              <a:rPr sz="1300" b="1" i="0">
+                <a:solidFill>
+                  <a:srgbClr val="E8801A"/>
+                </a:solidFill>
+                <a:latin typeface="Montserrat"/>
+              </a:rPr>
+              <a:t>EL REPARTO DE PAPELES</a:t>
             </a:r>
           </a:p>
         </p:txBody>
@@ -7284,26 +8150,70 @@
           <a:lstStyle/>
           <a:p>
             <a:r>
-              <a:rPr sz="2700" b="1" i="0">
+              <a:rPr sz="2800" b="1" i="0">
                 <a:solidFill>
                   <a:srgbClr val="1E2761"/>
                 </a:solidFill>
                 <a:latin typeface="Montserrat"/>
               </a:rPr>
-              <a:t>Certificar el molde</a:t>
-            </a:r>
-          </a:p>
-        </p:txBody>
-      </p:sp>
-      <p:sp>
-        <p:nvSpPr>
-          <p:cNvPr id="7" name="TextBox 6"/>
+              <a:t>Quién certifica y quién solicita</a:t>
+            </a:r>
+          </a:p>
+        </p:txBody>
+      </p:sp>
+      <p:sp>
+        <p:nvSpPr>
+          <p:cNvPr id="7" name="Rounded Rectangle 6"/>
+          <p:cNvSpPr/>
+          <p:nvPr/>
+        </p:nvSpPr>
+        <p:spPr>
+          <a:xfrm>
+            <a:off x="868680" y="1627632"/>
+            <a:ext cx="2011680" cy="73152"/>
+          </a:xfrm>
+          <a:prstGeom prst="roundRect">
+            <a:avLst/>
+          </a:prstGeom>
+          <a:solidFill>
+            <a:srgbClr val="E8801A"/>
+          </a:solidFill>
+          <a:ln>
+            <a:noFill/>
+          </a:ln>
+          <a:effectLst/>
+        </p:spPr>
+        <p:style>
+          <a:lnRef idx="1">
+            <a:schemeClr val="accent1"/>
+          </a:lnRef>
+          <a:fillRef idx="3">
+            <a:schemeClr val="accent1"/>
+          </a:fillRef>
+          <a:effectRef idx="2">
+            <a:schemeClr val="accent1"/>
+          </a:effectRef>
+          <a:fontRef idx="minor">
+            <a:schemeClr val="lt1"/>
+          </a:fontRef>
+        </p:style>
+        <p:txBody>
+          <a:bodyPr rtlCol="0" anchor="ctr"/>
+          <a:lstStyle/>
+          <a:p>
+            <a:pPr algn="ctr"/>
+          </a:p>
+        </p:txBody>
+      </p:sp>
+      <p:sp>
+        <p:nvSpPr>
+          <p:cNvPr id="8" name="TextBox 7"/>
           <p:cNvSpPr txBox="1"/>
           <p:nvPr/>
         </p:nvSpPr>
         <p:spPr>
           <a:xfrm>
-            <a:off x="822960" y="1920240"/>
+            <a:off x="822960" y="1965960"/>
             <a:ext cx="4983480" cy="4206240"/>
           </a:xfrm>
           <a:prstGeom prst="rect">
@@ -7319,17 +8229,17 @@
           <a:p>
             <a:pPr>
               <a:spcAft>
-                <a:spcPts val="1000"/>
+                <a:spcPts val="1100"/>
               </a:spcAft>
             </a:pPr>
             <a:r>
               <a:rPr sz="1600" b="1" i="0">
                 <a:solidFill>
-                  <a:srgbClr val="2E3A80"/>
-                </a:solidFill>
-                <a:latin typeface="Montserrat"/>
-              </a:rPr>
-              <a:t>•  </a:t>
+                  <a:srgbClr val="E8801A"/>
+                </a:solidFill>
+                <a:latin typeface="Montserrat"/>
+              </a:rPr>
+              <a:t>▸  </a:t>
             </a:r>
             <a:r>
               <a:rPr sz="1600" b="0" i="0">
@@ -7338,23 +8248,23 @@
                 </a:solidFill>
                 <a:latin typeface="Montserrat"/>
               </a:rPr>
-              <a:t>Se certifica un aparato representativo (el tipo)</a:t>
+              <a:t>Organismo de control: examina, prueba y certifica</a:t>
             </a:r>
           </a:p>
           <a:p>
             <a:pPr>
               <a:spcAft>
-                <a:spcPts val="1000"/>
+                <a:spcPts val="1100"/>
               </a:spcAft>
             </a:pPr>
             <a:r>
               <a:rPr sz="1600" b="1" i="0">
                 <a:solidFill>
-                  <a:srgbClr val="2E3A80"/>
-                </a:solidFill>
-                <a:latin typeface="Montserrat"/>
-              </a:rPr>
-              <a:t>•  </a:t>
+                  <a:srgbClr val="E8801A"/>
+                </a:solidFill>
+                <a:latin typeface="Montserrat"/>
+              </a:rPr>
+              <a:t>▸  </a:t>
             </a:r>
             <a:r>
               <a:rPr sz="1600" b="0" i="0">
@@ -7363,23 +8273,23 @@
                 </a:solidFill>
                 <a:latin typeface="Montserrat"/>
               </a:rPr>
-              <a:t>El organismo examina, prueba y expide certificado</a:t>
+              <a:t>Fabricante: solicita y aporta el aparato</a:t>
             </a:r>
           </a:p>
           <a:p>
             <a:pPr>
               <a:spcAft>
-                <a:spcPts val="1000"/>
+                <a:spcPts val="1100"/>
               </a:spcAft>
             </a:pPr>
             <a:r>
               <a:rPr sz="1600" b="1" i="0">
                 <a:solidFill>
-                  <a:srgbClr val="2E3A80"/>
-                </a:solidFill>
-                <a:latin typeface="Montserrat"/>
-              </a:rPr>
-              <a:t>•  </a:t>
+                  <a:srgbClr val="E8801A"/>
+                </a:solidFill>
+                <a:latin typeface="Montserrat"/>
+              </a:rPr>
+              <a:t>▸  </a:t>
             </a:r>
             <a:r>
               <a:rPr sz="1600" b="0" i="0">
@@ -7388,14 +8298,39 @@
                 </a:solidFill>
                 <a:latin typeface="Montserrat"/>
               </a:rPr>
-              <a:t>El tipo puede incluir variantes sin más riesgo</a:t>
-            </a:r>
-          </a:p>
-        </p:txBody>
-      </p:sp>
-      <p:sp>
-        <p:nvSpPr>
-          <p:cNvPr id="8" name="imgph" descr="IMGQ:gas boiler prototype factory bench"/>
+              <a:t>Nunca se certifica a sí mismo</a:t>
+            </a:r>
+          </a:p>
+          <a:p>
+            <a:pPr>
+              <a:spcAft>
+                <a:spcPts val="1100"/>
+              </a:spcAft>
+            </a:pPr>
+            <a:r>
+              <a:rPr sz="1600" b="1" i="0">
+                <a:solidFill>
+                  <a:srgbClr val="E8801A"/>
+                </a:solidFill>
+                <a:latin typeface="Montserrat"/>
+              </a:rPr>
+              <a:t>▸  </a:t>
+            </a:r>
+            <a:r>
+              <a:rPr sz="1600" b="0" i="0">
+                <a:solidFill>
+                  <a:srgbClr val="1B2330"/>
+                </a:solidFill>
+                <a:latin typeface="Montserrat"/>
+              </a:rPr>
+              <a:t>Tercero independiente detrás de la placa</a:t>
+            </a:r>
+          </a:p>
+        </p:txBody>
+      </p:sp>
+      <p:sp>
+        <p:nvSpPr>
+          <p:cNvPr id="9" name="imgph" descr="IMGQ:laboratory technician testing appliance"/>
           <p:cNvSpPr/>
           <p:nvPr/>
         </p:nvSpPr>
@@ -7441,7 +8376,7 @@
       </p:sp>
       <p:sp>
         <p:nvSpPr>
-          <p:cNvPr id="9" name="TextBox 8"/>
+          <p:cNvPr id="10" name="TextBox 9"/>
           <p:cNvSpPr txBox="1"/>
           <p:nvPr/>
         </p:nvSpPr>
@@ -7481,7 +8416,7 @@
                 </a:solidFill>
                 <a:latin typeface="Montserrat"/>
               </a:rPr>
-              <a:t>gas boiler prototype factory bench</a:t>
+              <a:t>laboratory technician testing appliance</a:t>
             </a:r>
           </a:p>
         </p:txBody>
@@ -7578,7 +8513,7 @@
                 </a:solidFill>
                 <a:latin typeface="Montserrat"/>
               </a:rPr>
-              <a:t>005 / 013</a:t>
+              <a:t>005 / 014</a:t>
             </a:r>
           </a:p>
         </p:txBody>
@@ -7626,7 +8561,7 @@
         <p:spPr>
           <a:xfrm>
             <a:off x="822960" y="457200"/>
-            <a:ext cx="8229600" cy="365760"/>
+            <a:ext cx="10058400" cy="365760"/>
           </a:xfrm>
           <a:prstGeom prst="rect">
             <a:avLst/>
@@ -7640,13 +8575,13 @@
           <a:lstStyle/>
           <a:p>
             <a:r>
-              <a:rPr sz="1200" b="1" i="0">
-                <a:solidFill>
-                  <a:srgbClr val="64748B"/>
-                </a:solidFill>
-                <a:latin typeface="Montserrat"/>
-              </a:rPr>
-              <a:t>EXAMEN DE TIPO · CAMBIOS</a:t>
+              <a:rPr sz="1300" b="1" i="0">
+                <a:solidFill>
+                  <a:srgbClr val="E8801A"/>
+                </a:solidFill>
+                <a:latin typeface="Montserrat"/>
+              </a:rPr>
+              <a:t>PROCEDIMIENTO 1 · EXAMEN DE TIPO</a:t>
             </a:r>
           </a:p>
         </p:txBody>
@@ -7674,26 +8609,70 @@
           <a:lstStyle/>
           <a:p>
             <a:r>
-              <a:rPr sz="2700" b="1" i="0">
+              <a:rPr sz="2800" b="1" i="0">
                 <a:solidFill>
                   <a:srgbClr val="1E2761"/>
                 </a:solidFill>
                 <a:latin typeface="Montserrat"/>
               </a:rPr>
-              <a:t>Si tocas el molde, avisas</a:t>
-            </a:r>
-          </a:p>
-        </p:txBody>
-      </p:sp>
-      <p:sp>
-        <p:nvSpPr>
-          <p:cNvPr id="7" name="TextBox 6"/>
+              <a:t>Certificar el molde</a:t>
+            </a:r>
+          </a:p>
+        </p:txBody>
+      </p:sp>
+      <p:sp>
+        <p:nvSpPr>
+          <p:cNvPr id="7" name="Rounded Rectangle 6"/>
+          <p:cNvSpPr/>
+          <p:nvPr/>
+        </p:nvSpPr>
+        <p:spPr>
+          <a:xfrm>
+            <a:off x="868680" y="1627632"/>
+            <a:ext cx="2011680" cy="73152"/>
+          </a:xfrm>
+          <a:prstGeom prst="roundRect">
+            <a:avLst/>
+          </a:prstGeom>
+          <a:solidFill>
+            <a:srgbClr val="E8801A"/>
+          </a:solidFill>
+          <a:ln>
+            <a:noFill/>
+          </a:ln>
+          <a:effectLst/>
+        </p:spPr>
+        <p:style>
+          <a:lnRef idx="1">
+            <a:schemeClr val="accent1"/>
+          </a:lnRef>
+          <a:fillRef idx="3">
+            <a:schemeClr val="accent1"/>
+          </a:fillRef>
+          <a:effectRef idx="2">
+            <a:schemeClr val="accent1"/>
+          </a:effectRef>
+          <a:fontRef idx="minor">
+            <a:schemeClr val="lt1"/>
+          </a:fontRef>
+        </p:style>
+        <p:txBody>
+          <a:bodyPr rtlCol="0" anchor="ctr"/>
+          <a:lstStyle/>
+          <a:p>
+            <a:pPr algn="ctr"/>
+          </a:p>
+        </p:txBody>
+      </p:sp>
+      <p:sp>
+        <p:nvSpPr>
+          <p:cNvPr id="8" name="TextBox 7"/>
           <p:cNvSpPr txBox="1"/>
           <p:nvPr/>
         </p:nvSpPr>
         <p:spPr>
           <a:xfrm>
-            <a:off x="822960" y="1920240"/>
+            <a:off x="822960" y="1965960"/>
             <a:ext cx="4983480" cy="4206240"/>
           </a:xfrm>
           <a:prstGeom prst="rect">
@@ -7709,17 +8688,17 @@
           <a:p>
             <a:pPr>
               <a:spcAft>
-                <a:spcPts val="1000"/>
+                <a:spcPts val="1100"/>
               </a:spcAft>
             </a:pPr>
             <a:r>
               <a:rPr sz="1600" b="1" i="0">
                 <a:solidFill>
-                  <a:srgbClr val="2E3A80"/>
-                </a:solidFill>
-                <a:latin typeface="Montserrat"/>
-              </a:rPr>
-              <a:t>•  </a:t>
+                  <a:srgbClr val="E8801A"/>
+                </a:solidFill>
+                <a:latin typeface="Montserrat"/>
+              </a:rPr>
+              <a:t>▸  </a:t>
             </a:r>
             <a:r>
               <a:rPr sz="1600" b="0" i="0">
@@ -7728,23 +8707,23 @@
                 </a:solidFill>
                 <a:latin typeface="Montserrat"/>
               </a:rPr>
-              <a:t>El fabricante informa de toda modificación</a:t>
+              <a:t>Se certifica un aparato representativo (el tipo)</a:t>
             </a:r>
           </a:p>
           <a:p>
             <a:pPr>
               <a:spcAft>
-                <a:spcPts val="1000"/>
+                <a:spcPts val="1100"/>
               </a:spcAft>
             </a:pPr>
             <a:r>
               <a:rPr sz="1600" b="1" i="0">
                 <a:solidFill>
-                  <a:srgbClr val="2E3A80"/>
-                </a:solidFill>
-                <a:latin typeface="Montserrat"/>
-              </a:rPr>
-              <a:t>•  </a:t>
+                  <a:srgbClr val="E8801A"/>
+                </a:solidFill>
+                <a:latin typeface="Montserrat"/>
+              </a:rPr>
+              <a:t>▸  </a:t>
             </a:r>
             <a:r>
               <a:rPr sz="1600" b="0" i="0">
@@ -7753,23 +8732,23 @@
                 </a:solidFill>
                 <a:latin typeface="Montserrat"/>
               </a:rPr>
-              <a:t>Si afecta a la seguridad: aprobación adicional</a:t>
+              <a:t>El organismo examina, prueba y expide certificado</a:t>
             </a:r>
           </a:p>
           <a:p>
             <a:pPr>
               <a:spcAft>
-                <a:spcPts val="1000"/>
+                <a:spcPts val="1100"/>
               </a:spcAft>
             </a:pPr>
             <a:r>
               <a:rPr sz="1600" b="1" i="0">
                 <a:solidFill>
-                  <a:srgbClr val="2E3A80"/>
-                </a:solidFill>
-                <a:latin typeface="Montserrat"/>
-              </a:rPr>
-              <a:t>•  </a:t>
+                  <a:srgbClr val="E8801A"/>
+                </a:solidFill>
+                <a:latin typeface="Montserrat"/>
+              </a:rPr>
+              <a:t>▸  </a:t>
             </a:r>
             <a:r>
               <a:rPr sz="1600" b="0" i="0">
@@ -7778,14 +8757,14 @@
                 </a:solidFill>
                 <a:latin typeface="Montserrat"/>
               </a:rPr>
-              <a:t>Va como complemento al certificado</a:t>
-            </a:r>
-          </a:p>
-        </p:txBody>
-      </p:sp>
-      <p:sp>
-        <p:nvSpPr>
-          <p:cNvPr id="8" name="imgph" descr="IMGQ:engineer reviewing technical drawings"/>
+              <a:t>El tipo puede incluir variantes sin más riesgo</a:t>
+            </a:r>
+          </a:p>
+        </p:txBody>
+      </p:sp>
+      <p:sp>
+        <p:nvSpPr>
+          <p:cNvPr id="9" name="imgph" descr="IMGQ:gas boiler prototype factory bench"/>
           <p:cNvSpPr/>
           <p:nvPr/>
         </p:nvSpPr>
@@ -7831,7 +8810,7 @@
       </p:sp>
       <p:sp>
         <p:nvSpPr>
-          <p:cNvPr id="9" name="TextBox 8"/>
+          <p:cNvPr id="10" name="TextBox 9"/>
           <p:cNvSpPr txBox="1"/>
           <p:nvPr/>
         </p:nvSpPr>
@@ -7871,7 +8850,7 @@
                 </a:solidFill>
                 <a:latin typeface="Montserrat"/>
               </a:rPr>
-              <a:t>engineer reviewing technical drawings</a:t>
+              <a:t>gas boiler prototype factory bench</a:t>
             </a:r>
           </a:p>
         </p:txBody>
@@ -7968,7 +8947,7 @@
                 </a:solidFill>
                 <a:latin typeface="Montserrat"/>
               </a:rPr>
-              <a:t>006 / 013</a:t>
+              <a:t>006 / 014</a:t>
             </a:r>
           </a:p>
         </p:txBody>
@@ -8016,7 +8995,7 @@
         <p:spPr>
           <a:xfrm>
             <a:off x="822960" y="457200"/>
-            <a:ext cx="8229600" cy="365760"/>
+            <a:ext cx="10058400" cy="365760"/>
           </a:xfrm>
           <a:prstGeom prst="rect">
             <a:avLst/>
@@ -8030,13 +9009,13 @@
           <a:lstStyle/>
           <a:p>
             <a:r>
-              <a:rPr sz="1200" b="1" i="0">
-                <a:solidFill>
-                  <a:srgbClr val="64748B"/>
-                </a:solidFill>
-                <a:latin typeface="Montserrat"/>
-              </a:rPr>
-              <a:t>PROCEDIMIENTO 2 · PRODUCCIÓN</a:t>
+              <a:rPr sz="1300" b="1" i="0">
+                <a:solidFill>
+                  <a:srgbClr val="E8801A"/>
+                </a:solidFill>
+                <a:latin typeface="Montserrat"/>
+              </a:rPr>
+              <a:t>EXAMEN DE TIPO · CAMBIOS</a:t>
             </a:r>
           </a:p>
         </p:txBody>
@@ -8064,26 +9043,70 @@
           <a:lstStyle/>
           <a:p>
             <a:r>
-              <a:rPr sz="2700" b="1" i="0">
+              <a:rPr sz="2800" b="1" i="0">
                 <a:solidFill>
                   <a:srgbClr val="1E2761"/>
                 </a:solidFill>
                 <a:latin typeface="Montserrat"/>
               </a:rPr>
-              <a:t>Que cada unidad salga igual</a:t>
-            </a:r>
-          </a:p>
-        </p:txBody>
-      </p:sp>
-      <p:sp>
-        <p:nvSpPr>
-          <p:cNvPr id="7" name="TextBox 6"/>
+              <a:t>Si tocas el molde, avisas</a:t>
+            </a:r>
+          </a:p>
+        </p:txBody>
+      </p:sp>
+      <p:sp>
+        <p:nvSpPr>
+          <p:cNvPr id="7" name="Rounded Rectangle 6"/>
+          <p:cNvSpPr/>
+          <p:nvPr/>
+        </p:nvSpPr>
+        <p:spPr>
+          <a:xfrm>
+            <a:off x="868680" y="1627632"/>
+            <a:ext cx="2011680" cy="73152"/>
+          </a:xfrm>
+          <a:prstGeom prst="roundRect">
+            <a:avLst/>
+          </a:prstGeom>
+          <a:solidFill>
+            <a:srgbClr val="E8801A"/>
+          </a:solidFill>
+          <a:ln>
+            <a:noFill/>
+          </a:ln>
+          <a:effectLst/>
+        </p:spPr>
+        <p:style>
+          <a:lnRef idx="1">
+            <a:schemeClr val="accent1"/>
+          </a:lnRef>
+          <a:fillRef idx="3">
+            <a:schemeClr val="accent1"/>
+          </a:fillRef>
+          <a:effectRef idx="2">
+            <a:schemeClr val="accent1"/>
+          </a:effectRef>
+          <a:fontRef idx="minor">
+            <a:schemeClr val="lt1"/>
+          </a:fontRef>
+        </p:style>
+        <p:txBody>
+          <a:bodyPr rtlCol="0" anchor="ctr"/>
+          <a:lstStyle/>
+          <a:p>
+            <a:pPr algn="ctr"/>
+          </a:p>
+        </p:txBody>
+      </p:sp>
+      <p:sp>
+        <p:nvSpPr>
+          <p:cNvPr id="8" name="TextBox 7"/>
           <p:cNvSpPr txBox="1"/>
           <p:nvPr/>
         </p:nvSpPr>
         <p:spPr>
           <a:xfrm>
-            <a:off x="822960" y="1920240"/>
+            <a:off x="822960" y="1965960"/>
             <a:ext cx="4983480" cy="4206240"/>
           </a:xfrm>
           <a:prstGeom prst="rect">
@@ -8099,17 +9122,17 @@
           <a:p>
             <a:pPr>
               <a:spcAft>
-                <a:spcPts val="1000"/>
+                <a:spcPts val="1100"/>
               </a:spcAft>
             </a:pPr>
             <a:r>
               <a:rPr sz="1600" b="1" i="0">
                 <a:solidFill>
-                  <a:srgbClr val="2E3A80"/>
-                </a:solidFill>
-                <a:latin typeface="Montserrat"/>
-              </a:rPr>
-              <a:t>•  </a:t>
+                  <a:srgbClr val="E8801A"/>
+                </a:solidFill>
+                <a:latin typeface="Montserrat"/>
+              </a:rPr>
+              <a:t>▸  </a:t>
             </a:r>
             <a:r>
               <a:rPr sz="1600" b="0" i="0">
@@ -8118,23 +9141,23 @@
                 </a:solidFill>
                 <a:latin typeface="Montserrat"/>
               </a:rPr>
-              <a:t>Garantiza homogeneidad de la serie</a:t>
+              <a:t>El fabricante informa de toda modificación</a:t>
             </a:r>
           </a:p>
           <a:p>
             <a:pPr>
               <a:spcAft>
-                <a:spcPts val="1000"/>
+                <a:spcPts val="1100"/>
               </a:spcAft>
             </a:pPr>
             <a:r>
               <a:rPr sz="1600" b="1" i="0">
                 <a:solidFill>
-                  <a:srgbClr val="2E3A80"/>
-                </a:solidFill>
-                <a:latin typeface="Montserrat"/>
-              </a:rPr>
-              <a:t>•  </a:t>
+                  <a:srgbClr val="E8801A"/>
+                </a:solidFill>
+                <a:latin typeface="Montserrat"/>
+              </a:rPr>
+              <a:t>▸  </a:t>
             </a:r>
             <a:r>
               <a:rPr sz="1600" b="0" i="0">
@@ -8143,23 +9166,23 @@
                 </a:solidFill>
                 <a:latin typeface="Montserrat"/>
               </a:rPr>
-              <a:t>Conformidad con el tipo certificado</a:t>
+              <a:t>Si afecta a la seguridad: aprobación adicional</a:t>
             </a:r>
           </a:p>
           <a:p>
             <a:pPr>
               <a:spcAft>
-                <a:spcPts val="1000"/>
+                <a:spcPts val="1100"/>
               </a:spcAft>
             </a:pPr>
             <a:r>
               <a:rPr sz="1600" b="1" i="0">
                 <a:solidFill>
-                  <a:srgbClr val="2E3A80"/>
-                </a:solidFill>
-                <a:latin typeface="Montserrat"/>
-              </a:rPr>
-              <a:t>•  </a:t>
+                  <a:srgbClr val="E8801A"/>
+                </a:solidFill>
+                <a:latin typeface="Montserrat"/>
+              </a:rPr>
+              <a:t>▸  </a:t>
             </a:r>
             <a:r>
               <a:rPr sz="1600" b="0" i="0">
@@ -8168,39 +9191,14 @@
                 </a:solidFill>
                 <a:latin typeface="Montserrat"/>
               </a:rPr>
-              <a:t>A elección del fabricante: 2.1 o 2.2</a:t>
-            </a:r>
-          </a:p>
-          <a:p>
-            <a:pPr>
-              <a:spcAft>
-                <a:spcPts val="1000"/>
-              </a:spcAft>
-            </a:pPr>
-            <a:r>
-              <a:rPr sz="1600" b="1" i="0">
-                <a:solidFill>
-                  <a:srgbClr val="2E3A80"/>
-                </a:solidFill>
-                <a:latin typeface="Montserrat"/>
-              </a:rPr>
-              <a:t>•  </a:t>
-            </a:r>
-            <a:r>
-              <a:rPr sz="1600" b="0" i="0">
-                <a:solidFill>
-                  <a:srgbClr val="1B2330"/>
-                </a:solidFill>
-                <a:latin typeface="Montserrat"/>
-              </a:rPr>
-              <a:t>Antes de comercializar</a:t>
-            </a:r>
-          </a:p>
-        </p:txBody>
-      </p:sp>
-      <p:sp>
-        <p:nvSpPr>
-          <p:cNvPr id="8" name="imgph" descr="IMGQ:boiler production assembly line"/>
+              <a:t>Va como complemento al certificado</a:t>
+            </a:r>
+          </a:p>
+        </p:txBody>
+      </p:sp>
+      <p:sp>
+        <p:nvSpPr>
+          <p:cNvPr id="9" name="imgph" descr="IMGQ:engineer reviewing technical drawings"/>
           <p:cNvSpPr/>
           <p:nvPr/>
         </p:nvSpPr>
@@ -8246,7 +9244,7 @@
       </p:sp>
       <p:sp>
         <p:nvSpPr>
-          <p:cNvPr id="9" name="TextBox 8"/>
+          <p:cNvPr id="10" name="TextBox 9"/>
           <p:cNvSpPr txBox="1"/>
           <p:nvPr/>
         </p:nvSpPr>
@@ -8286,7 +9284,7 @@
                 </a:solidFill>
                 <a:latin typeface="Montserrat"/>
               </a:rPr>
-              <a:t>boiler production assembly line</a:t>
+              <a:t>engineer reviewing technical drawings</a:t>
             </a:r>
           </a:p>
         </p:txBody>
@@ -8383,7 +9381,7 @@
                 </a:solidFill>
                 <a:latin typeface="Montserrat"/>
               </a:rPr>
-              <a:t>007 / 013</a:t>
+              <a:t>007 / 014</a:t>
             </a:r>
           </a:p>
         </p:txBody>
@@ -8431,7 +9429,7 @@
         <p:spPr>
           <a:xfrm>
             <a:off x="822960" y="457200"/>
-            <a:ext cx="8229600" cy="365760"/>
+            <a:ext cx="10058400" cy="365760"/>
           </a:xfrm>
           <a:prstGeom prst="rect">
             <a:avLst/>
@@ -8445,13 +9443,13 @@
           <a:lstStyle/>
           <a:p>
             <a:r>
-              <a:rPr sz="1200" b="1" i="0">
-                <a:solidFill>
-                  <a:srgbClr val="64748B"/>
-                </a:solidFill>
-                <a:latin typeface="Montserrat"/>
-              </a:rPr>
-              <a:t>CAMINO 2.1 · EXAMEN DE PRODUCTO</a:t>
+              <a:rPr sz="1300" b="1" i="0">
+                <a:solidFill>
+                  <a:srgbClr val="E8801A"/>
+                </a:solidFill>
+                <a:latin typeface="Montserrat"/>
+              </a:rPr>
+              <a:t>PROCEDIMIENTO 2 · PRODUCCIÓN</a:t>
             </a:r>
           </a:p>
         </p:txBody>
@@ -8479,26 +9477,70 @@
           <a:lstStyle/>
           <a:p>
             <a:r>
-              <a:rPr sz="2700" b="1" i="0">
+              <a:rPr sz="2800" b="1" i="0">
                 <a:solidFill>
                   <a:srgbClr val="1E2761"/>
                 </a:solidFill>
                 <a:latin typeface="Montserrat"/>
               </a:rPr>
-              <a:t>La inspección sorpresa</a:t>
-            </a:r>
-          </a:p>
-        </p:txBody>
-      </p:sp>
-      <p:sp>
-        <p:nvSpPr>
-          <p:cNvPr id="7" name="TextBox 6"/>
+              <a:t>Que cada unidad salga igual</a:t>
+            </a:r>
+          </a:p>
+        </p:txBody>
+      </p:sp>
+      <p:sp>
+        <p:nvSpPr>
+          <p:cNvPr id="7" name="Rounded Rectangle 6"/>
+          <p:cNvSpPr/>
+          <p:nvPr/>
+        </p:nvSpPr>
+        <p:spPr>
+          <a:xfrm>
+            <a:off x="868680" y="1627632"/>
+            <a:ext cx="2011680" cy="73152"/>
+          </a:xfrm>
+          <a:prstGeom prst="roundRect">
+            <a:avLst/>
+          </a:prstGeom>
+          <a:solidFill>
+            <a:srgbClr val="E8801A"/>
+          </a:solidFill>
+          <a:ln>
+            <a:noFill/>
+          </a:ln>
+          <a:effectLst/>
+        </p:spPr>
+        <p:style>
+          <a:lnRef idx="1">
+            <a:schemeClr val="accent1"/>
+          </a:lnRef>
+          <a:fillRef idx="3">
+            <a:schemeClr val="accent1"/>
+          </a:fillRef>
+          <a:effectRef idx="2">
+            <a:schemeClr val="accent1"/>
+          </a:effectRef>
+          <a:fontRef idx="minor">
+            <a:schemeClr val="lt1"/>
+          </a:fontRef>
+        </p:style>
+        <p:txBody>
+          <a:bodyPr rtlCol="0" anchor="ctr"/>
+          <a:lstStyle/>
+          <a:p>
+            <a:pPr algn="ctr"/>
+          </a:p>
+        </p:txBody>
+      </p:sp>
+      <p:sp>
+        <p:nvSpPr>
+          <p:cNvPr id="8" name="TextBox 7"/>
           <p:cNvSpPr txBox="1"/>
           <p:nvPr/>
         </p:nvSpPr>
         <p:spPr>
           <a:xfrm>
-            <a:off x="822960" y="1920240"/>
+            <a:off x="822960" y="1965960"/>
             <a:ext cx="4983480" cy="4206240"/>
           </a:xfrm>
           <a:prstGeom prst="rect">
@@ -8514,17 +9556,17 @@
           <a:p>
             <a:pPr>
               <a:spcAft>
-                <a:spcPts val="1000"/>
+                <a:spcPts val="1100"/>
               </a:spcAft>
             </a:pPr>
             <a:r>
               <a:rPr sz="1600" b="1" i="0">
                 <a:solidFill>
-                  <a:srgbClr val="2E3A80"/>
-                </a:solidFill>
-                <a:latin typeface="Montserrat"/>
-              </a:rPr>
-              <a:t>•  </a:t>
+                  <a:srgbClr val="E8801A"/>
+                </a:solidFill>
+                <a:latin typeface="Montserrat"/>
+              </a:rPr>
+              <a:t>▸  </a:t>
             </a:r>
             <a:r>
               <a:rPr sz="1600" b="0" i="0">
@@ -8533,23 +9575,23 @@
                 </a:solidFill>
                 <a:latin typeface="Montserrat"/>
               </a:rPr>
-              <a:t>Controles in situ y sin aviso previo</a:t>
+              <a:t>Garantiza homogeneidad de la serie</a:t>
             </a:r>
           </a:p>
           <a:p>
             <a:pPr>
               <a:spcAft>
-                <a:spcPts val="1000"/>
+                <a:spcPts val="1100"/>
               </a:spcAft>
             </a:pPr>
             <a:r>
               <a:rPr sz="1600" b="1" i="0">
                 <a:solidFill>
-                  <a:srgbClr val="2E3A80"/>
-                </a:solidFill>
-                <a:latin typeface="Montserrat"/>
-              </a:rPr>
-              <a:t>•  </a:t>
+                  <a:srgbClr val="E8801A"/>
+                </a:solidFill>
+                <a:latin typeface="Montserrat"/>
+              </a:rPr>
+              <a:t>▸  </a:t>
             </a:r>
             <a:r>
               <a:rPr sz="1600" b="0" i="0">
@@ -8558,23 +9600,23 @@
                 </a:solidFill>
                 <a:latin typeface="Montserrat"/>
               </a:rPr>
-              <a:t>Intervalos máximos de un año</a:t>
+              <a:t>Conformidad con el tipo certificado</a:t>
             </a:r>
           </a:p>
           <a:p>
             <a:pPr>
               <a:spcAft>
-                <a:spcPts val="1000"/>
+                <a:spcPts val="1100"/>
               </a:spcAft>
             </a:pPr>
             <a:r>
               <a:rPr sz="1600" b="1" i="0">
                 <a:solidFill>
-                  <a:srgbClr val="2E3A80"/>
-                </a:solidFill>
-                <a:latin typeface="Montserrat"/>
-              </a:rPr>
-              <a:t>•  </a:t>
+                  <a:srgbClr val="E8801A"/>
+                </a:solidFill>
+                <a:latin typeface="Montserrat"/>
+              </a:rPr>
+              <a:t>▸  </a:t>
             </a:r>
             <a:r>
               <a:rPr sz="1600" b="0" i="0">
@@ -8583,23 +9625,23 @@
                 </a:solidFill>
                 <a:latin typeface="Montserrat"/>
               </a:rPr>
-              <a:t>Se prueba al menos un aparato</a:t>
+              <a:t>A elección del fabricante: 2.1 o 2.2</a:t>
             </a:r>
           </a:p>
           <a:p>
             <a:pPr>
               <a:spcAft>
-                <a:spcPts val="1000"/>
+                <a:spcPts val="1100"/>
               </a:spcAft>
             </a:pPr>
             <a:r>
               <a:rPr sz="1600" b="1" i="0">
                 <a:solidFill>
-                  <a:srgbClr val="2E3A80"/>
-                </a:solidFill>
-                <a:latin typeface="Montserrat"/>
-              </a:rPr>
-              <a:t>•  </a:t>
+                  <a:srgbClr val="E8801A"/>
+                </a:solidFill>
+                <a:latin typeface="Montserrat"/>
+              </a:rPr>
+              <a:t>▸  </a:t>
             </a:r>
             <a:r>
               <a:rPr sz="1600" b="0" i="0">
@@ -8608,14 +9650,14 @@
                 </a:solidFill>
                 <a:latin typeface="Montserrat"/>
               </a:rPr>
-              <a:t>Si uno se rechaza: se bloquea la venta</a:t>
-            </a:r>
-          </a:p>
-        </p:txBody>
-      </p:sp>
-      <p:sp>
-        <p:nvSpPr>
-          <p:cNvPr id="8" name="imgph" descr="IMGQ:quality inspector factory clipboard"/>
+              <a:t>Antes de comercializar</a:t>
+            </a:r>
+          </a:p>
+        </p:txBody>
+      </p:sp>
+      <p:sp>
+        <p:nvSpPr>
+          <p:cNvPr id="9" name="imgph" descr="IMGQ:boiler production assembly line"/>
           <p:cNvSpPr/>
           <p:nvPr/>
         </p:nvSpPr>
@@ -8661,7 +9703,7 @@
       </p:sp>
       <p:sp>
         <p:nvSpPr>
-          <p:cNvPr id="9" name="TextBox 8"/>
+          <p:cNvPr id="10" name="TextBox 9"/>
           <p:cNvSpPr txBox="1"/>
           <p:nvPr/>
         </p:nvSpPr>
@@ -8701,7 +9743,7 @@
                 </a:solidFill>
                 <a:latin typeface="Montserrat"/>
               </a:rPr>
-              <a:t>quality inspector factory clipboard</a:t>
+              <a:t>boiler production assembly line</a:t>
             </a:r>
           </a:p>
         </p:txBody>
@@ -8798,7 +9840,7 @@
                 </a:solidFill>
                 <a:latin typeface="Montserrat"/>
               </a:rPr>
-              <a:t>008 / 013</a:t>
+              <a:t>008 / 014</a:t>
             </a:r>
           </a:p>
         </p:txBody>
@@ -8846,7 +9888,7 @@
         <p:spPr>
           <a:xfrm>
             <a:off x="822960" y="457200"/>
-            <a:ext cx="8229600" cy="365760"/>
+            <a:ext cx="10058400" cy="365760"/>
           </a:xfrm>
           <a:prstGeom prst="rect">
             <a:avLst/>
@@ -8860,13 +9902,13 @@
           <a:lstStyle/>
           <a:p>
             <a:r>
-              <a:rPr sz="1200" b="1" i="0">
-                <a:solidFill>
-                  <a:srgbClr val="64748B"/>
-                </a:solidFill>
-                <a:latin typeface="Montserrat"/>
-              </a:rPr>
-              <a:t>CAMINO 2.2 · CALIDAD</a:t>
+              <a:rPr sz="1300" b="1" i="0">
+                <a:solidFill>
+                  <a:srgbClr val="E8801A"/>
+                </a:solidFill>
+                <a:latin typeface="Montserrat"/>
+              </a:rPr>
+              <a:t>CAMINO 2.1 · EXAMEN DE PRODUCTO</a:t>
             </a:r>
           </a:p>
         </p:txBody>
@@ -8894,26 +9936,70 @@
           <a:lstStyle/>
           <a:p>
             <a:r>
-              <a:rPr sz="2700" b="1" i="0">
+              <a:rPr sz="2800" b="1" i="0">
                 <a:solidFill>
                   <a:srgbClr val="1E2761"/>
                 </a:solidFill>
                 <a:latin typeface="Montserrat"/>
               </a:rPr>
-              <a:t>Aseguramiento de la calidad</a:t>
-            </a:r>
-          </a:p>
-        </p:txBody>
-      </p:sp>
-      <p:sp>
-        <p:nvSpPr>
-          <p:cNvPr id="7" name="TextBox 6"/>
+              <a:t>La inspección sorpresa</a:t>
+            </a:r>
+          </a:p>
+        </p:txBody>
+      </p:sp>
+      <p:sp>
+        <p:nvSpPr>
+          <p:cNvPr id="7" name="Rounded Rectangle 6"/>
+          <p:cNvSpPr/>
+          <p:nvPr/>
+        </p:nvSpPr>
+        <p:spPr>
+          <a:xfrm>
+            <a:off x="868680" y="1627632"/>
+            <a:ext cx="2011680" cy="73152"/>
+          </a:xfrm>
+          <a:prstGeom prst="roundRect">
+            <a:avLst/>
+          </a:prstGeom>
+          <a:solidFill>
+            <a:srgbClr val="E8801A"/>
+          </a:solidFill>
+          <a:ln>
+            <a:noFill/>
+          </a:ln>
+          <a:effectLst/>
+        </p:spPr>
+        <p:style>
+          <a:lnRef idx="1">
+            <a:schemeClr val="accent1"/>
+          </a:lnRef>
+          <a:fillRef idx="3">
+            <a:schemeClr val="accent1"/>
+          </a:fillRef>
+          <a:effectRef idx="2">
+            <a:schemeClr val="accent1"/>
+          </a:effectRef>
+          <a:fontRef idx="minor">
+            <a:schemeClr val="lt1"/>
+          </a:fontRef>
+        </p:style>
+        <p:txBody>
+          <a:bodyPr rtlCol="0" anchor="ctr"/>
+          <a:lstStyle/>
+          <a:p>
+            <a:pPr algn="ctr"/>
+          </a:p>
+        </p:txBody>
+      </p:sp>
+      <p:sp>
+        <p:nvSpPr>
+          <p:cNvPr id="8" name="TextBox 7"/>
           <p:cNvSpPr txBox="1"/>
           <p:nvPr/>
         </p:nvSpPr>
         <p:spPr>
           <a:xfrm>
-            <a:off x="822960" y="1920240"/>
+            <a:off x="822960" y="1965960"/>
             <a:ext cx="4983480" cy="4206240"/>
           </a:xfrm>
           <a:prstGeom prst="rect">
@@ -8929,17 +10015,17 @@
           <a:p>
             <a:pPr>
               <a:spcAft>
-                <a:spcPts val="1000"/>
+                <a:spcPts val="1100"/>
               </a:spcAft>
             </a:pPr>
             <a:r>
               <a:rPr sz="1600" b="1" i="0">
                 <a:solidFill>
-                  <a:srgbClr val="2E3A80"/>
-                </a:solidFill>
-                <a:latin typeface="Montserrat"/>
-              </a:rPr>
-              <a:t>•  </a:t>
+                  <a:srgbClr val="E8801A"/>
+                </a:solidFill>
+                <a:latin typeface="Montserrat"/>
+              </a:rPr>
+              <a:t>▸  </a:t>
             </a:r>
             <a:r>
               <a:rPr sz="1600" b="0" i="0">
@@ -8948,23 +10034,23 @@
                 </a:solidFill>
                 <a:latin typeface="Montserrat"/>
               </a:rPr>
-              <a:t>Sistema de calidad ISO 9001</a:t>
+              <a:t>Controles in situ y sin aviso previo</a:t>
             </a:r>
           </a:p>
           <a:p>
             <a:pPr>
               <a:spcAft>
-                <a:spcPts val="1000"/>
+                <a:spcPts val="1100"/>
               </a:spcAft>
             </a:pPr>
             <a:r>
               <a:rPr sz="1600" b="1" i="0">
                 <a:solidFill>
-                  <a:srgbClr val="2E3A80"/>
-                </a:solidFill>
-                <a:latin typeface="Montserrat"/>
-              </a:rPr>
-              <a:t>•  </a:t>
+                  <a:srgbClr val="E8801A"/>
+                </a:solidFill>
+                <a:latin typeface="Montserrat"/>
+              </a:rPr>
+              <a:t>▸  </a:t>
             </a:r>
             <a:r>
               <a:rPr sz="1600" b="0" i="0">
@@ -8973,23 +10059,23 @@
                 </a:solidFill>
                 <a:latin typeface="Montserrat"/>
               </a:rPr>
-              <a:t>Evaluado y certificado por organismo</a:t>
+              <a:t>Intervalos máximos de un año</a:t>
             </a:r>
           </a:p>
           <a:p>
             <a:pPr>
               <a:spcAft>
-                <a:spcPts val="1000"/>
+                <a:spcPts val="1100"/>
               </a:spcAft>
             </a:pPr>
             <a:r>
               <a:rPr sz="1600" b="1" i="0">
                 <a:solidFill>
-                  <a:srgbClr val="2E3A80"/>
-                </a:solidFill>
-                <a:latin typeface="Montserrat"/>
-              </a:rPr>
-              <a:t>•  </a:t>
+                  <a:srgbClr val="E8801A"/>
+                </a:solidFill>
+                <a:latin typeface="Montserrat"/>
+              </a:rPr>
+              <a:t>▸  </a:t>
             </a:r>
             <a:r>
               <a:rPr sz="1600" b="0" i="0">
@@ -8998,23 +10084,23 @@
                 </a:solidFill>
                 <a:latin typeface="Montserrat"/>
               </a:rPr>
-              <a:t>Seguimiento anual del mantenimiento</a:t>
+              <a:t>Se prueba al menos un aparato</a:t>
             </a:r>
           </a:p>
           <a:p>
             <a:pPr>
               <a:spcAft>
-                <a:spcPts val="1000"/>
+                <a:spcPts val="1100"/>
               </a:spcAft>
             </a:pPr>
             <a:r>
               <a:rPr sz="1600" b="1" i="0">
                 <a:solidFill>
-                  <a:srgbClr val="2E3A80"/>
-                </a:solidFill>
-                <a:latin typeface="Montserrat"/>
-              </a:rPr>
-              <a:t>•  </a:t>
+                  <a:srgbClr val="E8801A"/>
+                </a:solidFill>
+                <a:latin typeface="Montserrat"/>
+              </a:rPr>
+              <a:t>▸  </a:t>
             </a:r>
             <a:r>
               <a:rPr sz="1600" b="0" i="0">
@@ -9023,14 +10109,14 @@
                 </a:solidFill>
                 <a:latin typeface="Montserrat"/>
               </a:rPr>
-              <a:t>Puede pedir una muestra si hay dudas</a:t>
-            </a:r>
-          </a:p>
-        </p:txBody>
-      </p:sp>
-      <p:sp>
-        <p:nvSpPr>
-          <p:cNvPr id="8" name="imgph" descr="IMGQ:quality management office documents"/>
+              <a:t>Si uno se rechaza: se bloquea la venta</a:t>
+            </a:r>
+          </a:p>
+        </p:txBody>
+      </p:sp>
+      <p:sp>
+        <p:nvSpPr>
+          <p:cNvPr id="9" name="imgph" descr="IMGQ:quality inspector factory clipboard"/>
           <p:cNvSpPr/>
           <p:nvPr/>
         </p:nvSpPr>
@@ -9076,7 +10162,7 @@
       </p:sp>
       <p:sp>
         <p:nvSpPr>
-          <p:cNvPr id="9" name="TextBox 8"/>
+          <p:cNvPr id="10" name="TextBox 9"/>
           <p:cNvSpPr txBox="1"/>
           <p:nvPr/>
         </p:nvSpPr>
@@ -9116,7 +10202,7 @@
                 </a:solidFill>
                 <a:latin typeface="Montserrat"/>
               </a:rPr>
-              <a:t>quality management office documents</a:t>
+              <a:t>quality inspector factory clipboard</a:t>
             </a:r>
           </a:p>
         </p:txBody>
@@ -9213,7 +10299,7 @@
                 </a:solidFill>
                 <a:latin typeface="Montserrat"/>
               </a:rPr>
-              <a:t>009 / 013</a:t>
+              <a:t>009 / 014</a:t>
             </a:r>
           </a:p>
         </p:txBody>
@@ -9261,7 +10347,7 @@
         <p:spPr>
           <a:xfrm>
             <a:off x="822960" y="457200"/>
-            <a:ext cx="8229600" cy="365760"/>
+            <a:ext cx="10058400" cy="365760"/>
           </a:xfrm>
           <a:prstGeom prst="rect">
             <a:avLst/>
@@ -9275,13 +10361,13 @@
           <a:lstStyle/>
           <a:p>
             <a:r>
-              <a:rPr sz="1200" b="1" i="0">
-                <a:solidFill>
-                  <a:srgbClr val="64748B"/>
-                </a:solidFill>
-                <a:latin typeface="Montserrat"/>
-              </a:rPr>
-              <a:t>PROCEDIMIENTO 3 · UNIDAD</a:t>
+              <a:rPr sz="1300" b="1" i="0">
+                <a:solidFill>
+                  <a:srgbClr val="E8801A"/>
+                </a:solidFill>
+                <a:latin typeface="Montserrat"/>
+              </a:rPr>
+              <a:t>CAMINO 2.2 · CALIDAD</a:t>
             </a:r>
           </a:p>
         </p:txBody>
@@ -9309,26 +10395,70 @@
           <a:lstStyle/>
           <a:p>
             <a:r>
-              <a:rPr sz="2700" b="1" i="0">
+              <a:rPr sz="2800" b="1" i="0">
                 <a:solidFill>
                   <a:srgbClr val="1E2761"/>
                 </a:solidFill>
                 <a:latin typeface="Montserrat"/>
               </a:rPr>
-              <a:t>La vía de la pieza única</a:t>
-            </a:r>
-          </a:p>
-        </p:txBody>
-      </p:sp>
-      <p:sp>
-        <p:nvSpPr>
-          <p:cNvPr id="7" name="TextBox 6"/>
+              <a:t>Aseguramiento de la calidad</a:t>
+            </a:r>
+          </a:p>
+        </p:txBody>
+      </p:sp>
+      <p:sp>
+        <p:nvSpPr>
+          <p:cNvPr id="7" name="Rounded Rectangle 6"/>
+          <p:cNvSpPr/>
+          <p:nvPr/>
+        </p:nvSpPr>
+        <p:spPr>
+          <a:xfrm>
+            <a:off x="868680" y="1627632"/>
+            <a:ext cx="2011680" cy="73152"/>
+          </a:xfrm>
+          <a:prstGeom prst="roundRect">
+            <a:avLst/>
+          </a:prstGeom>
+          <a:solidFill>
+            <a:srgbClr val="E8801A"/>
+          </a:solidFill>
+          <a:ln>
+            <a:noFill/>
+          </a:ln>
+          <a:effectLst/>
+        </p:spPr>
+        <p:style>
+          <a:lnRef idx="1">
+            <a:schemeClr val="accent1"/>
+          </a:lnRef>
+          <a:fillRef idx="3">
+            <a:schemeClr val="accent1"/>
+          </a:fillRef>
+          <a:effectRef idx="2">
+            <a:schemeClr val="accent1"/>
+          </a:effectRef>
+          <a:fontRef idx="minor">
+            <a:schemeClr val="lt1"/>
+          </a:fontRef>
+        </p:style>
+        <p:txBody>
+          <a:bodyPr rtlCol="0" anchor="ctr"/>
+          <a:lstStyle/>
+          <a:p>
+            <a:pPr algn="ctr"/>
+          </a:p>
+        </p:txBody>
+      </p:sp>
+      <p:sp>
+        <p:nvSpPr>
+          <p:cNvPr id="8" name="TextBox 7"/>
           <p:cNvSpPr txBox="1"/>
           <p:nvPr/>
         </p:nvSpPr>
         <p:spPr>
           <a:xfrm>
-            <a:off x="822960" y="1920240"/>
+            <a:off x="822960" y="1965960"/>
             <a:ext cx="4983480" cy="4206240"/>
           </a:xfrm>
           <a:prstGeom prst="rect">
@@ -9344,17 +10474,17 @@
           <a:p>
             <a:pPr>
               <a:spcAft>
-                <a:spcPts val="1000"/>
+                <a:spcPts val="1100"/>
               </a:spcAft>
             </a:pPr>
             <a:r>
               <a:rPr sz="1600" b="1" i="0">
                 <a:solidFill>
-                  <a:srgbClr val="2E3A80"/>
-                </a:solidFill>
-                <a:latin typeface="Montserrat"/>
-              </a:rPr>
-              <a:t>•  </a:t>
+                  <a:srgbClr val="E8801A"/>
+                </a:solidFill>
+                <a:latin typeface="Montserrat"/>
+              </a:rPr>
+              <a:t>▸  </a:t>
             </a:r>
             <a:r>
               <a:rPr sz="1600" b="0" i="0">
@@ -9363,23 +10493,23 @@
                 </a:solidFill>
                 <a:latin typeface="Montserrat"/>
               </a:rPr>
-              <a:t>Certifica un aparato concreto</a:t>
+              <a:t>Sistema de calidad ISO 9001</a:t>
             </a:r>
           </a:p>
           <a:p>
             <a:pPr>
               <a:spcAft>
-                <a:spcPts val="1000"/>
+                <a:spcPts val="1100"/>
               </a:spcAft>
             </a:pPr>
             <a:r>
               <a:rPr sz="1600" b="1" i="0">
                 <a:solidFill>
-                  <a:srgbClr val="2E3A80"/>
-                </a:solidFill>
-                <a:latin typeface="Montserrat"/>
-              </a:rPr>
-              <a:t>•  </a:t>
+                  <a:srgbClr val="E8801A"/>
+                </a:solidFill>
+                <a:latin typeface="Montserrat"/>
+              </a:rPr>
+              <a:t>▸  </a:t>
             </a:r>
             <a:r>
               <a:rPr sz="1600" b="0" i="0">
@@ -9388,23 +10518,23 @@
                 </a:solidFill>
                 <a:latin typeface="Montserrat"/>
               </a:rPr>
-              <a:t>Típico de fabricación a medida</a:t>
+              <a:t>Evaluado y certificado por organismo</a:t>
             </a:r>
           </a:p>
           <a:p>
             <a:pPr>
               <a:spcAft>
-                <a:spcPts val="1000"/>
+                <a:spcPts val="1100"/>
               </a:spcAft>
             </a:pPr>
             <a:r>
               <a:rPr sz="1600" b="1" i="0">
                 <a:solidFill>
-                  <a:srgbClr val="2E3A80"/>
-                </a:solidFill>
-                <a:latin typeface="Montserrat"/>
-              </a:rPr>
-              <a:t>•  </a:t>
+                  <a:srgbClr val="E8801A"/>
+                </a:solidFill>
+                <a:latin typeface="Montserrat"/>
+              </a:rPr>
+              <a:t>▸  </a:t>
             </a:r>
             <a:r>
               <a:rPr sz="1600" b="0" i="0">
@@ -9413,23 +10543,23 @@
                 </a:solidFill>
                 <a:latin typeface="Montserrat"/>
               </a:rPr>
-              <a:t>La solicitud pide el destino del aparato</a:t>
+              <a:t>Seguimiento anual del mantenimiento</a:t>
             </a:r>
           </a:p>
           <a:p>
             <a:pPr>
               <a:spcAft>
-                <a:spcPts val="1000"/>
+                <a:spcPts val="1100"/>
               </a:spcAft>
             </a:pPr>
             <a:r>
               <a:rPr sz="1600" b="1" i="0">
                 <a:solidFill>
-                  <a:srgbClr val="2E3A80"/>
-                </a:solidFill>
-                <a:latin typeface="Montserrat"/>
-              </a:rPr>
-              <a:t>•  </a:t>
+                  <a:srgbClr val="E8801A"/>
+                </a:solidFill>
+                <a:latin typeface="Montserrat"/>
+              </a:rPr>
+              <a:t>▸  </a:t>
             </a:r>
             <a:r>
               <a:rPr sz="1600" b="0" i="0">
@@ -9438,14 +10568,14 @@
                 </a:solidFill>
                 <a:latin typeface="Montserrat"/>
               </a:rPr>
-              <a:t>Las pruebas, incluso tras instalarlo</a:t>
-            </a:r>
-          </a:p>
-        </p:txBody>
-      </p:sp>
-      <p:sp>
-        <p:nvSpPr>
-          <p:cNvPr id="8" name="imgph" descr="IMGQ:custom industrial gas burner unit"/>
+              <a:t>Puede pedir una muestra si hay dudas</a:t>
+            </a:r>
+          </a:p>
+        </p:txBody>
+      </p:sp>
+      <p:sp>
+        <p:nvSpPr>
+          <p:cNvPr id="9" name="imgph" descr="IMGQ:quality management office documents"/>
           <p:cNvSpPr/>
           <p:nvPr/>
         </p:nvSpPr>
@@ -9491,7 +10621,7 @@
       </p:sp>
       <p:sp>
         <p:nvSpPr>
-          <p:cNvPr id="9" name="TextBox 8"/>
+          <p:cNvPr id="10" name="TextBox 9"/>
           <p:cNvSpPr txBox="1"/>
           <p:nvPr/>
         </p:nvSpPr>
@@ -9531,7 +10661,7 @@
                 </a:solidFill>
                 <a:latin typeface="Montserrat"/>
               </a:rPr>
-              <a:t>custom industrial gas burner unit</a:t>
+              <a:t>quality management office documents</a:t>
             </a:r>
           </a:p>
         </p:txBody>

--- a/Curso Gas B/05 - ITC-ICG 08 - Aparatos de gas/05 - ITC-ICG 08 - Aparatos de gas - Vídeo 3.pptx
+++ b/Curso Gas B/05 - ITC-ICG 08 - Aparatos de gas/05 - ITC-ICG 08 - Aparatos de gas - Vídeo 3.pptx
@@ -19,6 +19,10 @@
     <p:sldId id="267" r:id="rId19"/>
     <p:sldId id="268" r:id="rId20"/>
     <p:sldId id="269" r:id="rId21"/>
+    <p:sldId id="270" r:id="rId22"/>
+    <p:sldId id="271" r:id="rId23"/>
+    <p:sldId id="272" r:id="rId24"/>
+    <p:sldId id="273" r:id="rId25"/>
   </p:sldIdLst>
   <p:sldSz cx="12191695" cy="6858000" type="screen4x3"/>
   <p:notesSz cx="6858000" cy="9144000"/>
@@ -590,12 +594,12 @@
           <a:lstStyle/>
           <a:p>
             <a:r>
-              <a:t>N1: ¿Y si solo se fabrica un aparato, no una serie?</a:t>
-            </a:r>
-          </a:p>
-          <a:p>
-            <a:r>
-              <a:t>N2: Para eso está el camino alternativo, la c del apartado tres de la ITC: la verificación por unidad. En vez de certificar un modelo de serie, el organismo comprueba y certifica un aparato concreto, de forma independiente. Es lo típico de un aparato fabricado a medida o de una sola unidad. Fíjate en dos detalles diferenciadores que le gustan al examen: la solicitud pide el destino del aparato, es decir, dónde va a ir; y las pruebas pueden hacerse incluso tras la instalación del aparato. Es lógico: si solo hay un ejemplar, se examina ese, allí donde va a trabajar. Y aquí tú, el instalador, puedes ser justo el punto donde el aparato queda montado antes de que el organismo lo ensaye.</a:t>
+              <a:t>N1: ¿Por qué un año?</a:t>
+            </a:r>
+          </a:p>
+          <a:p>
+            <a:r>
+              <a:t>N2: Porque la norma fija controles in situ y sin aviso a intervalos máximos de un año; el organismo prueba al menos un aparato y, si lo rechaza, bloquea su comercialización. El truco: es intervalo máximo, es decir, como mucho un año, puede ser antes.</a:t>
             </a:r>
           </a:p>
         </p:txBody>
@@ -665,12 +669,12 @@
           <a:lstStyle/>
           <a:p>
             <a:r>
-              <a:t>N1: ¿Qué papeles hay que presentar para certificar?</a:t>
-            </a:r>
-          </a:p>
-          <a:p>
-            <a:r>
-              <a:t>N2: Se llama documentación de diseño, y la del examen de tipo describe el modelo en general. Incluye marca, modelo, fabricante e importador; una descripción general del aparato con su cámara de combustión, la salida de humos, la categoría del aparato y los tipos de gases y presiones; los quemadores, inyectores y consumos; los elementos de seguridad y de regulación con sus valores de tarado y rangos; los datos para la instalación; los materiales; las piezas susceptibles de ser sustituidas; los esquemas de regulación y de seguridad, y el esquema de la instalación eléctrica interior. Más los planos acotados y a escala, la lista de normas aplicadas, la placa de características y los manuales. Es la carpeta completa del modelo.</a:t>
+              <a:t>N1: ¿Y el otro camino, el de la calidad?</a:t>
+            </a:r>
+          </a:p>
+          <a:p>
+            <a:r>
+              <a:t>N2: Aquí se confía en el proceso, no en pillar productos sueltos. El fabricante garantiza la conformidad mediante un sistema de calidad de la producción o del producto conforme a la norma ISO nueve mil uno, que es la norma internacional de gestión de la calidad; significa que hay procedimientos escritos, controles y auditorías. Ese sistema lo evalúa y certifica un organismo de control acreditado. Luego hay un seguimiento: el fabricante envía anualmente la documentación que acredita que mantiene el sistema aprobado, y el organismo, siempre y especialmente en caso de duda, puede pedir una muestra de la producción para verificarla. Compara los dos caminos: en el dos punto uno vigilan los productos con inspecciones sorpresa; en el dos punto dos, vigilan el proceso con un sistema de calidad y seguimiento anual.</a:t>
             </a:r>
           </a:p>
         </p:txBody>
@@ -740,12 +744,12 @@
           <a:lstStyle/>
           <a:p>
             <a:r>
-              <a:t>N1: Las dos listas se parecen mucho. ¿Cuál es la diferencia?</a:t>
-            </a:r>
-          </a:p>
-          <a:p>
-            <a:r>
-              <a:t>N2: Ahí está el truco de examen. La documentación del examen de tipo, la cuatro punto uno, describe un modelo de serie en general. La de la verificación por unidad, la cuatro punto dos, describe un aparato concreto y añade datos de esa unidad y de su emplazamiento: el número de fabricación, el domicilio de la instalación, el plano de situación, el esquema de la línea de gas instalada, y el gas y la presión para el que ha sido regulado ese aparato. La cuatro punto uno, en cambio, habla de tipos de gases y presiones en general, y suma el esquema eléctrico interior y las piezas sustituibles. Regla para recordar: tipo, el modelo en general; unidad, este aparato en su sitio.</a:t>
+              <a:t>N1: ¿Y si solo se fabrica un aparato, no una serie?</a:t>
+            </a:r>
+          </a:p>
+          <a:p>
+            <a:r>
+              <a:t>N2: Para eso está el camino alternativo, la c del apartado tres de la ITC: la verificación por unidad. En vez de certificar un modelo de serie, el organismo comprueba y certifica un aparato concreto, de forma independiente. Es lo típico de un aparato fabricado a medida o de una sola unidad. Fíjate en dos detalles diferenciadores que le gustan al examen: la solicitud pide el destino del aparato, es decir, dónde va a ir; y las pruebas pueden hacerse incluso tras la instalación del aparato. Es lógico: si solo hay un ejemplar, se examina ese, allí donde va a trabajar. Y aquí tú, el instalador, puedes ser justo el punto donde el aparato queda montado antes de que el organismo lo ensaye.</a:t>
             </a:r>
           </a:p>
         </p:txBody>
@@ -815,12 +819,12 @@
           <a:lstStyle/>
           <a:p>
             <a:r>
-              <a:t>N1: En estas listas aparece categoría del aparato. ¿Es lo mismo que el tipo o el carné?</a:t>
-            </a:r>
-          </a:p>
-          <a:p>
-            <a:r>
-              <a:t>N2: No, y esta es una confusión que hay que cortar de raíz porque conviven tres clasificaciones distintas. Una, la categoría del aparato: se refiere a la categoría de gases que admite el aparato, es decir, qué gases y presiones acepta, según la norma UNE-EN cuatrocientos treinta y siete. Dos, el tipo A, B o C: cómo quema y evacúa el aparato, su circuito de combustión, que vimos en el vídeo dos. Y tres, la categoría A, B o C del instalador: el nivel del carné. Son tres cosas que no tienen nada que ver. Y en obra importa: elegir mal la categoría de gases para el suministro de esa vivienda es montar un aparato que no quemará bien ese gas.</a:t>
+              <a:t>N1: ¿Qué papeles hay que presentar para certificar?</a:t>
+            </a:r>
+          </a:p>
+          <a:p>
+            <a:r>
+              <a:t>N2: Se llama documentación de diseño, y la del examen de tipo describe el modelo en general. Incluye marca, modelo, fabricante e importador; una descripción general del aparato con su cámara de combustión, la salida de humos, la categoría del aparato y los tipos de gases y presiones; los quemadores, inyectores y consumos; los elementos de seguridad y de regulación con sus valores de tarado y rangos; los datos para la instalación; los materiales; las piezas susceptibles de ser sustituidas; los esquemas de regulación y de seguridad, y el esquema de la instalación eléctrica interior. Más los planos acotados y a escala, la lista de normas aplicadas, la placa de características y los manuales. Es la carpeta completa del modelo.</a:t>
             </a:r>
           </a:p>
         </p:txBody>
@@ -890,6 +894,306 @@
           <a:lstStyle/>
           <a:p>
             <a:r>
+              <a:t>N1: Las dos listas se parecen mucho. ¿Cuál es la diferencia?</a:t>
+            </a:r>
+          </a:p>
+          <a:p>
+            <a:r>
+              <a:t>N2: Ahí está el truco de examen. La documentación del examen de tipo, la cuatro punto uno, describe un modelo de serie en general. La de la verificación por unidad, la cuatro punto dos, describe un aparato concreto y añade datos de esa unidad y de su emplazamiento: el número de fabricación, el domicilio de la instalación, el plano de situación, el esquema de la línea de gas instalada, y el gas y la presión para el que ha sido regulado ese aparato. La cuatro punto uno, en cambio, habla de tipos de gases y presiones en general, y suma el esquema eléctrico interior y las piezas sustituibles. Regla para recordar: tipo, el modelo en general; unidad, este aparato en su sitio.</a:t>
+            </a:r>
+          </a:p>
+        </p:txBody>
+      </p:sp>
+      <p:sp>
+        <p:nvSpPr>
+          <p:cNvPr id="4" name="Slide Number Placeholder 3"/>
+          <p:cNvSpPr>
+            <a:spLocks noGrp="1"/>
+          </p:cNvSpPr>
+          <p:nvPr>
+            <p:ph type="sldNum" idx="5" sz="quarter"/>
+          </p:nvPr>
+        </p:nvSpPr>
+        <p:spPr/>
+      </p:sp>
+    </p:spTree>
+  </p:cSld>
+  <p:clrMapOvr>
+    <a:masterClrMapping/>
+  </p:clrMapOvr>
+</p:notes>
+</file>
+
+<file path=ppt/notesSlides/notesSlide15.xml><?xml version="1.0" encoding="utf-8"?>
+<p:notes xmlns:a="http://schemas.openxmlformats.org/drawingml/2006/main" xmlns:p="http://schemas.openxmlformats.org/presentationml/2006/main" xmlns:r="http://schemas.openxmlformats.org/officeDocument/2006/relationships">
+  <p:cSld>
+    <p:spTree>
+      <p:nvGrpSpPr>
+        <p:cNvPr id="1" name=""/>
+        <p:cNvGrpSpPr/>
+        <p:nvPr/>
+      </p:nvGrpSpPr>
+      <p:grpSpPr>
+        <a:xfrm>
+          <a:off x="0" y="0"/>
+          <a:ext cx="0" cy="0"/>
+          <a:chOff x="0" y="0"/>
+          <a:chExt cx="0" cy="0"/>
+        </a:xfrm>
+      </p:grpSpPr>
+      <p:sp>
+        <p:nvSpPr>
+          <p:cNvPr id="2" name="Slide Image Placeholder 1"/>
+          <p:cNvSpPr>
+            <a:spLocks noGrp="1"/>
+          </p:cNvSpPr>
+          <p:nvPr>
+            <p:ph type="sldImg" idx="2"/>
+          </p:nvPr>
+        </p:nvSpPr>
+        <p:spPr/>
+      </p:sp>
+      <p:sp>
+        <p:nvSpPr>
+          <p:cNvPr id="3" name="Notes Placeholder 2"/>
+          <p:cNvSpPr>
+            <a:spLocks noGrp="1"/>
+          </p:cNvSpPr>
+          <p:nvPr>
+            <p:ph type="body" idx="3" sz="quarter"/>
+          </p:nvPr>
+        </p:nvSpPr>
+        <p:spPr/>
+        <p:txBody>
+          <a:bodyPr/>
+          <a:lstStyle/>
+          <a:p>
+            <a:r>
+              <a:t>N1: En estas listas aparece categoría del aparato. ¿Es lo mismo que el tipo o el carné?</a:t>
+            </a:r>
+          </a:p>
+          <a:p>
+            <a:r>
+              <a:t>N2: No, y esta es una confusión que hay que cortar de raíz porque conviven tres clasificaciones distintas. Una, la categoría del aparato: se refiere a la categoría de gases que admite el aparato, es decir, qué gases y presiones acepta, según la norma UNE-EN cuatrocientos treinta y siete. Dos, el tipo A, B o C: cómo quema y evacúa el aparato, su circuito de combustión, que vimos en el vídeo dos. Y tres, la categoría A, B o C del instalador: el nivel del carné. Son tres cosas que no tienen nada que ver. Y en obra importa: elegir mal la categoría de gases para el suministro de esa vivienda es montar un aparato que no quemará bien ese gas.</a:t>
+            </a:r>
+          </a:p>
+        </p:txBody>
+      </p:sp>
+      <p:sp>
+        <p:nvSpPr>
+          <p:cNvPr id="4" name="Slide Number Placeholder 3"/>
+          <p:cNvSpPr>
+            <a:spLocks noGrp="1"/>
+          </p:cNvSpPr>
+          <p:nvPr>
+            <p:ph type="sldNum" idx="5" sz="quarter"/>
+          </p:nvPr>
+        </p:nvSpPr>
+        <p:spPr/>
+      </p:sp>
+    </p:spTree>
+  </p:cSld>
+  <p:clrMapOvr>
+    <a:masterClrMapping/>
+  </p:clrMapOvr>
+</p:notes>
+</file>
+
+<file path=ppt/notesSlides/notesSlide16.xml><?xml version="1.0" encoding="utf-8"?>
+<p:notes xmlns:a="http://schemas.openxmlformats.org/drawingml/2006/main" xmlns:p="http://schemas.openxmlformats.org/presentationml/2006/main" xmlns:r="http://schemas.openxmlformats.org/officeDocument/2006/relationships">
+  <p:cSld>
+    <p:spTree>
+      <p:nvGrpSpPr>
+        <p:cNvPr id="1" name=""/>
+        <p:cNvGrpSpPr/>
+        <p:nvPr/>
+      </p:nvGrpSpPr>
+      <p:grpSpPr>
+        <a:xfrm>
+          <a:off x="0" y="0"/>
+          <a:ext cx="0" cy="0"/>
+          <a:chOff x="0" y="0"/>
+          <a:chExt cx="0" cy="0"/>
+        </a:xfrm>
+      </p:grpSpPr>
+      <p:sp>
+        <p:nvSpPr>
+          <p:cNvPr id="2" name="Slide Image Placeholder 1"/>
+          <p:cNvSpPr>
+            <a:spLocks noGrp="1"/>
+          </p:cNvSpPr>
+          <p:nvPr>
+            <p:ph type="sldImg" idx="2"/>
+          </p:nvPr>
+        </p:nvSpPr>
+        <p:spPr/>
+      </p:sp>
+      <p:sp>
+        <p:nvSpPr>
+          <p:cNvPr id="3" name="Notes Placeholder 2"/>
+          <p:cNvSpPr>
+            <a:spLocks noGrp="1"/>
+          </p:cNvSpPr>
+          <p:nvPr>
+            <p:ph type="body" idx="3" sz="quarter"/>
+          </p:nvPr>
+        </p:nvSpPr>
+        <p:spPr/>
+        <p:txBody>
+          <a:bodyPr/>
+          <a:lstStyle/>
+          <a:p>
+            <a:r>
+              <a:t>N1: Cuidado, que aquí conviven tres clasificaciones que comparten palabras.</a:t>
+            </a:r>
+          </a:p>
+          <a:p>
+            <a:r>
+              <a:t>N2: Piensa en qué describe la categoría del aparato. No la confundas con cómo quema ni con el carné del instalador.</a:t>
+            </a:r>
+          </a:p>
+        </p:txBody>
+      </p:sp>
+      <p:sp>
+        <p:nvSpPr>
+          <p:cNvPr id="4" name="Slide Number Placeholder 3"/>
+          <p:cNvSpPr>
+            <a:spLocks noGrp="1"/>
+          </p:cNvSpPr>
+          <p:nvPr>
+            <p:ph type="sldNum" idx="5" sz="quarter"/>
+          </p:nvPr>
+        </p:nvSpPr>
+        <p:spPr/>
+      </p:sp>
+    </p:spTree>
+  </p:cSld>
+  <p:clrMapOvr>
+    <a:masterClrMapping/>
+  </p:clrMapOvr>
+</p:notes>
+</file>
+
+<file path=ppt/notesSlides/notesSlide17.xml><?xml version="1.0" encoding="utf-8"?>
+<p:notes xmlns:a="http://schemas.openxmlformats.org/drawingml/2006/main" xmlns:p="http://schemas.openxmlformats.org/presentationml/2006/main" xmlns:r="http://schemas.openxmlformats.org/officeDocument/2006/relationships">
+  <p:cSld>
+    <p:spTree>
+      <p:nvGrpSpPr>
+        <p:cNvPr id="1" name=""/>
+        <p:cNvGrpSpPr/>
+        <p:nvPr/>
+      </p:nvGrpSpPr>
+      <p:grpSpPr>
+        <a:xfrm>
+          <a:off x="0" y="0"/>
+          <a:ext cx="0" cy="0"/>
+          <a:chOff x="0" y="0"/>
+          <a:chExt cx="0" cy="0"/>
+        </a:xfrm>
+      </p:grpSpPr>
+      <p:sp>
+        <p:nvSpPr>
+          <p:cNvPr id="2" name="Slide Image Placeholder 1"/>
+          <p:cNvSpPr>
+            <a:spLocks noGrp="1"/>
+          </p:cNvSpPr>
+          <p:nvPr>
+            <p:ph type="sldImg" idx="2"/>
+          </p:nvPr>
+        </p:nvSpPr>
+        <p:spPr/>
+      </p:sp>
+      <p:sp>
+        <p:nvSpPr>
+          <p:cNvPr id="3" name="Notes Placeholder 2"/>
+          <p:cNvSpPr>
+            <a:spLocks noGrp="1"/>
+          </p:cNvSpPr>
+          <p:nvPr>
+            <p:ph type="body" idx="3" sz="quarter"/>
+          </p:nvPr>
+        </p:nvSpPr>
+        <p:spPr/>
+        <p:txBody>
+          <a:bodyPr/>
+          <a:lstStyle/>
+          <a:p>
+            <a:r>
+              <a:t>N1: ¿Por qué la be?</a:t>
+            </a:r>
+          </a:p>
+          <a:p>
+            <a:r>
+              <a:t>N2: Porque la categoría del aparato es la categoría de gases que admite: qué gases y presiones acepta. El tipo a, be o ce describe la combustión; y la categoría a, be o ce del carné es el nivel del instalador. Son tres cosas distintas: no las mezcles.</a:t>
+            </a:r>
+          </a:p>
+        </p:txBody>
+      </p:sp>
+      <p:sp>
+        <p:nvSpPr>
+          <p:cNvPr id="4" name="Slide Number Placeholder 3"/>
+          <p:cNvSpPr>
+            <a:spLocks noGrp="1"/>
+          </p:cNvSpPr>
+          <p:nvPr>
+            <p:ph type="sldNum" idx="5" sz="quarter"/>
+          </p:nvPr>
+        </p:nvSpPr>
+        <p:spPr/>
+      </p:sp>
+    </p:spTree>
+  </p:cSld>
+  <p:clrMapOvr>
+    <a:masterClrMapping/>
+  </p:clrMapOvr>
+</p:notes>
+</file>
+
+<file path=ppt/notesSlides/notesSlide18.xml><?xml version="1.0" encoding="utf-8"?>
+<p:notes xmlns:a="http://schemas.openxmlformats.org/drawingml/2006/main" xmlns:p="http://schemas.openxmlformats.org/presentationml/2006/main" xmlns:r="http://schemas.openxmlformats.org/officeDocument/2006/relationships">
+  <p:cSld>
+    <p:spTree>
+      <p:nvGrpSpPr>
+        <p:cNvPr id="1" name=""/>
+        <p:cNvGrpSpPr/>
+        <p:nvPr/>
+      </p:nvGrpSpPr>
+      <p:grpSpPr>
+        <a:xfrm>
+          <a:off x="0" y="0"/>
+          <a:ext cx="0" cy="0"/>
+          <a:chOff x="0" y="0"/>
+          <a:chExt cx="0" cy="0"/>
+        </a:xfrm>
+      </p:grpSpPr>
+      <p:sp>
+        <p:nvSpPr>
+          <p:cNvPr id="2" name="Slide Image Placeholder 1"/>
+          <p:cNvSpPr>
+            <a:spLocks noGrp="1"/>
+          </p:cNvSpPr>
+          <p:nvPr>
+            <p:ph type="sldImg" idx="2"/>
+          </p:nvPr>
+        </p:nvSpPr>
+        <p:spPr/>
+      </p:sp>
+      <p:sp>
+        <p:nvSpPr>
+          <p:cNvPr id="3" name="Notes Placeholder 2"/>
+          <p:cNvSpPr>
+            <a:spLocks noGrp="1"/>
+          </p:cNvSpPr>
+          <p:nvPr>
+            <p:ph type="body" idx="3" sz="quarter"/>
+          </p:nvPr>
+        </p:nvSpPr>
+        <p:spPr/>
+        <p:txBody>
+          <a:bodyPr/>
+          <a:lstStyle/>
+          <a:p>
+            <a:r>
               <a:t>N1: Es un vídeo técnico. ¿Cómo me quedo con lo importante?</a:t>
             </a:r>
           </a:p>
@@ -1491,12 +1795,12 @@
           <a:lstStyle/>
           <a:p>
             <a:r>
-              <a:t>N1: ¿Y el otro camino, el de la calidad?</a:t>
-            </a:r>
-          </a:p>
-          <a:p>
-            <a:r>
-              <a:t>N2: Aquí se confía en el proceso, no en pillar productos sueltos. El fabricante garantiza la conformidad mediante un sistema de calidad de la producción o del producto conforme a la norma ISO nueve mil uno, que es la norma internacional de gestión de la calidad; significa que hay procedimientos escritos, controles y auditorías. Ese sistema lo evalúa y certifica un organismo de control acreditado. Luego hay un seguimiento: el fabricante envía anualmente la documentación que acredita que mantiene el sistema aprobado, y el organismo, siempre y especialmente en caso de duda, puede pedir una muestra de la producción para verificarla. Compara los dos caminos: en el dos punto uno vigilan los productos con inspecciones sorpresa; en el dos punto dos, vigilan el proceso con un sistema de calidad y seguimiento anual.</a:t>
+              <a:t>N1: Un dato numérico del camino de la inspección sorpresa.</a:t>
+            </a:r>
+          </a:p>
+          <a:p>
+            <a:r>
+              <a:t>N2: Recuerda que el organismo aparece sin avisar. La clave es el intervalo máximo que puede pasar entre una visita y la siguiente.</a:t>
             </a:r>
           </a:p>
         </p:txBody>
@@ -4582,7 +4886,7 @@
       </p:sp>
       <p:sp>
         <p:nvSpPr>
-          <p:cNvPr id="4" name="Rounded Rectangle 3"/>
+          <p:cNvPr id="4" name="Rectangle 3"/>
           <p:cNvSpPr/>
           <p:nvPr/>
         </p:nvSpPr>
@@ -4591,7 +4895,7 @@
             <a:off x="868680" y="2057400"/>
             <a:ext cx="1463040" cy="82296"/>
           </a:xfrm>
-          <a:prstGeom prst="roundRect">
+          <a:prstGeom prst="rect">
             <a:avLst/>
           </a:prstGeom>
           <a:solidFill>
@@ -4708,6 +5012,18 @@
   <p:clrMapOvr>
     <a:masterClrMapping/>
   </p:clrMapOvr>
+  <mc:AlternateContent xmlns:mc="http://schemas.openxmlformats.org/markup-compatibility/2006">
+    <mc:Choice xmlns:p14="http://schemas.microsoft.com/office/powerpoint/2010/main" Requires="p14">
+      <p:transition spd="med" p14:dur="700">
+        <p14:cube dir="l"/>
+      </p:transition>
+    </mc:Choice>
+    <mc:Fallback>
+      <p:transition spd="med">
+        <p:push dir="l"/>
+      </p:transition>
+    </mc:Fallback>
+  </mc:AlternateContent>
 </p:sld>
 </file>
 
@@ -4795,7 +5111,7 @@
                 </a:solidFill>
                 <a:latin typeface="Montserrat"/>
               </a:rPr>
-              <a:t>010 / 014</a:t>
+              <a:t>010 / 018</a:t>
             </a:r>
           </a:p>
         </p:txBody>
@@ -4836,88 +5152,20 @@
       </p:sp>
       <p:sp>
         <p:nvSpPr>
-          <p:cNvPr id="5" name="TextBox 4"/>
-          <p:cNvSpPr txBox="1"/>
-          <p:nvPr/>
-        </p:nvSpPr>
-        <p:spPr>
-          <a:xfrm>
-            <a:off x="822960" y="457200"/>
-            <a:ext cx="10058400" cy="365760"/>
-          </a:xfrm>
-          <a:prstGeom prst="rect">
-            <a:avLst/>
-          </a:prstGeom>
-          <a:noFill/>
-        </p:spPr>
-        <p:txBody>
-          <a:bodyPr wrap="square">
-            <a:spAutoFit/>
-          </a:bodyPr>
-          <a:lstStyle/>
-          <a:p>
-            <a:r>
-              <a:rPr sz="1300" b="1" i="0">
-                <a:solidFill>
-                  <a:srgbClr val="E8801A"/>
-                </a:solidFill>
-                <a:latin typeface="Montserrat"/>
-              </a:rPr>
-              <a:t>PROCEDIMIENTO 3 · UNIDAD</a:t>
-            </a:r>
-          </a:p>
-        </p:txBody>
-      </p:sp>
-      <p:sp>
-        <p:nvSpPr>
-          <p:cNvPr id="6" name="TextBox 5"/>
-          <p:cNvSpPr txBox="1"/>
-          <p:nvPr/>
-        </p:nvSpPr>
-        <p:spPr>
-          <a:xfrm>
-            <a:off x="822960" y="868680"/>
-            <a:ext cx="10515600" cy="914400"/>
-          </a:xfrm>
-          <a:prstGeom prst="rect">
-            <a:avLst/>
-          </a:prstGeom>
-          <a:noFill/>
-        </p:spPr>
-        <p:txBody>
-          <a:bodyPr wrap="square">
-            <a:spAutoFit/>
-          </a:bodyPr>
-          <a:lstStyle/>
-          <a:p>
-            <a:r>
-              <a:rPr sz="2800" b="1" i="0">
-                <a:solidFill>
-                  <a:srgbClr val="1E2761"/>
-                </a:solidFill>
-                <a:latin typeface="Montserrat"/>
-              </a:rPr>
-              <a:t>La vía de la pieza única</a:t>
-            </a:r>
-          </a:p>
-        </p:txBody>
-      </p:sp>
-      <p:sp>
-        <p:nvSpPr>
-          <p:cNvPr id="7" name="Rounded Rectangle 6"/>
+          <p:cNvPr id="5" name="Rectangle 4"/>
           <p:cNvSpPr/>
           <p:nvPr/>
         </p:nvSpPr>
         <p:spPr>
           <a:xfrm>
-            <a:off x="868680" y="1627632"/>
-            <a:ext cx="2011680" cy="73152"/>
-          </a:xfrm>
-          <a:prstGeom prst="roundRect">
+            <a:off x="0" y="0"/>
+            <a:ext cx="12191695" cy="1143000"/>
+          </a:xfrm>
+          <a:prstGeom prst="rect">
             <a:avLst/>
           </a:prstGeom>
           <a:solidFill>
-            <a:srgbClr val="E8801A"/>
+            <a:srgbClr val="1E8E4B"/>
           </a:solidFill>
           <a:ln>
             <a:noFill/>
@@ -4948,14 +5196,14 @@
       </p:sp>
       <p:sp>
         <p:nvSpPr>
-          <p:cNvPr id="8" name="TextBox 7"/>
+          <p:cNvPr id="6" name="TextBox 5"/>
           <p:cNvSpPr txBox="1"/>
           <p:nvPr/>
         </p:nvSpPr>
         <p:spPr>
           <a:xfrm>
-            <a:off x="822960" y="1965960"/>
-            <a:ext cx="4983480" cy="4206240"/>
+            <a:off x="822960" y="274320"/>
+            <a:ext cx="10515600" cy="640080"/>
           </a:xfrm>
           <a:prstGeom prst="rect">
             <a:avLst/>
@@ -4968,127 +5216,72 @@
           </a:bodyPr>
           <a:lstStyle/>
           <a:p>
-            <a:pPr>
-              <a:spcAft>
-                <a:spcPts val="1100"/>
-              </a:spcAft>
-            </a:pPr>
-            <a:r>
-              <a:rPr sz="1600" b="1" i="0">
-                <a:solidFill>
-                  <a:srgbClr val="E8801A"/>
-                </a:solidFill>
-                <a:latin typeface="Montserrat"/>
-              </a:rPr>
-              <a:t>▸  </a:t>
-            </a:r>
-            <a:r>
-              <a:rPr sz="1600" b="0" i="0">
-                <a:solidFill>
-                  <a:srgbClr val="1B2330"/>
-                </a:solidFill>
-                <a:latin typeface="Montserrat"/>
-              </a:rPr>
-              <a:t>Certifica un aparato concreto</a:t>
-            </a:r>
-          </a:p>
-          <a:p>
-            <a:pPr>
-              <a:spcAft>
-                <a:spcPts val="1100"/>
-              </a:spcAft>
-            </a:pPr>
-            <a:r>
-              <a:rPr sz="1600" b="1" i="0">
-                <a:solidFill>
-                  <a:srgbClr val="E8801A"/>
-                </a:solidFill>
-                <a:latin typeface="Montserrat"/>
-              </a:rPr>
-              <a:t>▸  </a:t>
-            </a:r>
-            <a:r>
-              <a:rPr sz="1600" b="0" i="0">
-                <a:solidFill>
-                  <a:srgbClr val="1B2330"/>
-                </a:solidFill>
-                <a:latin typeface="Montserrat"/>
-              </a:rPr>
-              <a:t>Típico de fabricación a medida</a:t>
-            </a:r>
-          </a:p>
-          <a:p>
-            <a:pPr>
-              <a:spcAft>
-                <a:spcPts val="1100"/>
-              </a:spcAft>
-            </a:pPr>
-            <a:r>
-              <a:rPr sz="1600" b="1" i="0">
-                <a:solidFill>
-                  <a:srgbClr val="E8801A"/>
-                </a:solidFill>
-                <a:latin typeface="Montserrat"/>
-              </a:rPr>
-              <a:t>▸  </a:t>
-            </a:r>
-            <a:r>
-              <a:rPr sz="1600" b="0" i="0">
-                <a:solidFill>
-                  <a:srgbClr val="1B2330"/>
-                </a:solidFill>
-                <a:latin typeface="Montserrat"/>
-              </a:rPr>
-              <a:t>La solicitud pide el destino del aparato</a:t>
-            </a:r>
-          </a:p>
-          <a:p>
-            <a:pPr>
-              <a:spcAft>
-                <a:spcPts val="1100"/>
-              </a:spcAft>
-            </a:pPr>
-            <a:r>
-              <a:rPr sz="1600" b="1" i="0">
-                <a:solidFill>
-                  <a:srgbClr val="E8801A"/>
-                </a:solidFill>
-                <a:latin typeface="Montserrat"/>
-              </a:rPr>
-              <a:t>▸  </a:t>
-            </a:r>
-            <a:r>
-              <a:rPr sz="1600" b="0" i="0">
-                <a:solidFill>
-                  <a:srgbClr val="1B2330"/>
-                </a:solidFill>
-                <a:latin typeface="Montserrat"/>
-              </a:rPr>
-              <a:t>Las pruebas, incluso tras instalarlo</a:t>
-            </a:r>
-          </a:p>
-        </p:txBody>
-      </p:sp>
-      <p:sp>
-        <p:nvSpPr>
-          <p:cNvPr id="9" name="imgph" descr="IMGQ:custom industrial gas burner unit"/>
+            <a:r>
+              <a:rPr sz="2400" b="1" i="0">
+                <a:solidFill>
+                  <a:srgbClr val="FFFFFF"/>
+                </a:solidFill>
+                <a:latin typeface="Montserrat"/>
+              </a:rPr>
+              <a:t>✔  RESPUESTA:  A</a:t>
+            </a:r>
+          </a:p>
+        </p:txBody>
+      </p:sp>
+      <p:sp>
+        <p:nvSpPr>
+          <p:cNvPr id="7" name="TextBox 6"/>
+          <p:cNvSpPr txBox="1"/>
+          <p:nvPr/>
+        </p:nvSpPr>
+        <p:spPr>
+          <a:xfrm>
+            <a:off x="822960" y="1417320"/>
+            <a:ext cx="10515600" cy="914400"/>
+          </a:xfrm>
+          <a:prstGeom prst="rect">
+            <a:avLst/>
+          </a:prstGeom>
+          <a:noFill/>
+        </p:spPr>
+        <p:txBody>
+          <a:bodyPr wrap="square">
+            <a:spAutoFit/>
+          </a:bodyPr>
+          <a:lstStyle/>
+          <a:p>
+            <a:r>
+              <a:rPr sz="1800" b="1" i="0">
+                <a:solidFill>
+                  <a:srgbClr val="64748B"/>
+                </a:solidFill>
+                <a:latin typeface="Montserrat"/>
+              </a:rPr>
+              <a:t>En el examen de producto, ¿cada cuánto realiza el organismo los controles sin aviso previo?</a:t>
+            </a:r>
+          </a:p>
+        </p:txBody>
+      </p:sp>
+      <p:sp>
+        <p:nvSpPr>
+          <p:cNvPr id="8" name="Rounded Rectangle 7"/>
           <p:cNvSpPr/>
           <p:nvPr/>
         </p:nvSpPr>
         <p:spPr>
           <a:xfrm>
-            <a:off x="5806440" y="1051560"/>
-            <a:ext cx="5298947" cy="4629150"/>
+            <a:off x="822960" y="2514600"/>
+            <a:ext cx="10515600" cy="914400"/>
           </a:xfrm>
           <a:prstGeom prst="roundRect">
             <a:avLst/>
           </a:prstGeom>
           <a:solidFill>
-            <a:srgbClr val="F3F6FB"/>
+            <a:srgbClr val="E9F6EE"/>
           </a:solidFill>
           <a:ln w="12700">
             <a:solidFill>
-              <a:srgbClr val="C7D2E6"/>
+              <a:srgbClr val="1E8E4B"/>
             </a:solidFill>
           </a:ln>
           <a:effectLst/>
@@ -5117,14 +5310,14 @@
       </p:sp>
       <p:sp>
         <p:nvSpPr>
-          <p:cNvPr id="10" name="TextBox 9"/>
+          <p:cNvPr id="9" name="TextBox 8"/>
           <p:cNvSpPr txBox="1"/>
           <p:nvPr/>
         </p:nvSpPr>
         <p:spPr>
           <a:xfrm>
-            <a:off x="6080760" y="2726055"/>
-            <a:ext cx="4750307" cy="1280160"/>
+            <a:off x="1097280" y="2697480"/>
+            <a:ext cx="10058400" cy="640080"/>
           </a:xfrm>
           <a:prstGeom prst="rect">
             <a:avLst/>
@@ -5137,27 +5330,66 @@
           </a:bodyPr>
           <a:lstStyle/>
           <a:p>
-            <a:pPr algn="ctr"/>
-            <a:r>
-              <a:rPr sz="1400" b="1" i="0">
-                <a:solidFill>
-                  <a:srgbClr val="64748B"/>
-                </a:solidFill>
-                <a:latin typeface="Montserrat"/>
-              </a:rPr>
-              <a:t>IMAGEN REALISTA</a:t>
-            </a:r>
-          </a:p>
-          <a:p>
-            <a:pPr algn="ctr"/>
-            <a:r>
-              <a:rPr sz="1100" b="0" i="1">
-                <a:solidFill>
-                  <a:srgbClr val="64748B"/>
-                </a:solidFill>
-                <a:latin typeface="Montserrat"/>
-              </a:rPr>
-              <a:t>custom industrial gas burner unit</a:t>
+            <a:r>
+              <a:rPr sz="1800" b="1" i="0">
+                <a:solidFill>
+                  <a:srgbClr val="1E8E4B"/>
+                </a:solidFill>
+                <a:latin typeface="Montserrat"/>
+              </a:rPr>
+              <a:t>A.  </a:t>
+            </a:r>
+            <a:r>
+              <a:rPr sz="1800" b="1" i="0">
+                <a:solidFill>
+                  <a:srgbClr val="1E2761"/>
+                </a:solidFill>
+                <a:latin typeface="Montserrat"/>
+              </a:rPr>
+              <a:t>A intervalos máximos de un año</a:t>
+            </a:r>
+          </a:p>
+        </p:txBody>
+      </p:sp>
+      <p:sp>
+        <p:nvSpPr>
+          <p:cNvPr id="10" name="TextBox 9"/>
+          <p:cNvSpPr txBox="1"/>
+          <p:nvPr/>
+        </p:nvSpPr>
+        <p:spPr>
+          <a:xfrm>
+            <a:off x="822960" y="3749039"/>
+            <a:ext cx="10515600" cy="2194560"/>
+          </a:xfrm>
+          <a:prstGeom prst="rect">
+            <a:avLst/>
+          </a:prstGeom>
+          <a:noFill/>
+        </p:spPr>
+        <p:txBody>
+          <a:bodyPr wrap="square">
+            <a:spAutoFit/>
+          </a:bodyPr>
+          <a:lstStyle/>
+          <a:p>
+            <a:r>
+              <a:rPr sz="1500" b="1" i="0">
+                <a:solidFill>
+                  <a:srgbClr val="E8801A"/>
+                </a:solidFill>
+                <a:latin typeface="Montserrat"/>
+              </a:rPr>
+              <a:t>Por qué:  </a:t>
+            </a:r>
+            <a:r>
+              <a:rPr sz="1500" b="0" i="0">
+                <a:solidFill>
+                  <a:srgbClr val="1B2330"/>
+                </a:solidFill>
+                <a:latin typeface="Montserrat"/>
+              </a:rPr>
+              <a:t>El organismo controla los aparatos in situ y sin aviso previo, a intervalos máximos de un año; si rechaza alguno, evita su comercialización.</a:t>
             </a:r>
           </a:p>
         </p:txBody>
@@ -5167,6 +5399,18 @@
   <p:clrMapOvr>
     <a:masterClrMapping/>
   </p:clrMapOvr>
+  <mc:AlternateContent xmlns:mc="http://schemas.openxmlformats.org/markup-compatibility/2006">
+    <mc:Choice xmlns:p14="http://schemas.microsoft.com/office/powerpoint/2010/main" Requires="p14">
+      <p:transition spd="med" p14:dur="700">
+        <p14:cube dir="r"/>
+      </p:transition>
+    </mc:Choice>
+    <mc:Fallback>
+      <p:transition spd="med">
+        <p:push dir="r"/>
+      </p:transition>
+    </mc:Fallback>
+  </mc:AlternateContent>
 </p:sld>
 </file>
 
@@ -5254,7 +5498,7 @@
                 </a:solidFill>
                 <a:latin typeface="Montserrat"/>
               </a:rPr>
-              <a:t>011 / 014</a:t>
+              <a:t>011 / 018</a:t>
             </a:r>
           </a:p>
         </p:txBody>
@@ -5322,7 +5566,7 @@
                 </a:solidFill>
                 <a:latin typeface="Montserrat"/>
               </a:rPr>
-              <a:t>DOCUMENTACIÓN · 4.1</a:t>
+              <a:t>CAMINO 2.2 · CALIDAD</a:t>
             </a:r>
           </a:p>
         </p:txBody>
@@ -5356,14 +5600,14 @@
                 </a:solidFill>
                 <a:latin typeface="Montserrat"/>
               </a:rPr>
-              <a:t>Diseño para el examen de tipo</a:t>
-            </a:r>
-          </a:p>
-        </p:txBody>
-      </p:sp>
-      <p:sp>
-        <p:nvSpPr>
-          <p:cNvPr id="7" name="Rounded Rectangle 6"/>
+              <a:t>Aseguramiento de la calidad</a:t>
+            </a:r>
+          </a:p>
+        </p:txBody>
+      </p:sp>
+      <p:sp>
+        <p:nvSpPr>
+          <p:cNvPr id="7" name="Rectangle 6"/>
           <p:cNvSpPr/>
           <p:nvPr/>
         </p:nvSpPr>
@@ -5372,7 +5616,7 @@
             <a:off x="868680" y="1627632"/>
             <a:ext cx="2011680" cy="73152"/>
           </a:xfrm>
-          <a:prstGeom prst="roundRect">
+          <a:prstGeom prst="rect">
             <a:avLst/>
           </a:prstGeom>
           <a:solidFill>
@@ -5413,8 +5657,8 @@
         </p:nvSpPr>
         <p:spPr>
           <a:xfrm>
-            <a:off x="822960" y="1965960"/>
-            <a:ext cx="4983480" cy="4206240"/>
+            <a:off x="6355080" y="1965960"/>
+            <a:ext cx="5029200" cy="4206240"/>
           </a:xfrm>
           <a:prstGeom prst="rect">
             <a:avLst/>
@@ -5448,7 +5692,7 @@
                 </a:solidFill>
                 <a:latin typeface="Montserrat"/>
               </a:rPr>
-              <a:t>Describe el modelo en general</a:t>
+              <a:t>Sistema de calidad ISO 9001</a:t>
             </a:r>
           </a:p>
           <a:p>
@@ -5473,7 +5717,7 @@
                 </a:solidFill>
                 <a:latin typeface="Montserrat"/>
               </a:rPr>
-              <a:t>Cámara, salida de humos, gases y presiones</a:t>
+              <a:t>Evaluado y certificado por organismo</a:t>
             </a:r>
           </a:p>
           <a:p>
@@ -5498,7 +5742,7 @@
                 </a:solidFill>
                 <a:latin typeface="Montserrat"/>
               </a:rPr>
-              <a:t>Quemadores, seguridad y regulación</a:t>
+              <a:t>Seguimiento anual del mantenimiento</a:t>
             </a:r>
           </a:p>
           <a:p>
@@ -5523,21 +5767,21 @@
                 </a:solidFill>
                 <a:latin typeface="Montserrat"/>
               </a:rPr>
-              <a:t>Esquema eléctrico y piezas sustituibles</a:t>
-            </a:r>
-          </a:p>
-        </p:txBody>
-      </p:sp>
-      <p:sp>
-        <p:nvSpPr>
-          <p:cNvPr id="9" name="imgph" descr="IMGQ:technical design blueprint folder"/>
+              <a:t>Puede pedir una muestra si hay dudas</a:t>
+            </a:r>
+          </a:p>
+        </p:txBody>
+      </p:sp>
+      <p:sp>
+        <p:nvSpPr>
+          <p:cNvPr id="9" name="imgph" descr="IMGQ:quality management office documents"/>
           <p:cNvSpPr/>
           <p:nvPr/>
         </p:nvSpPr>
         <p:spPr>
           <a:xfrm>
-            <a:off x="5806440" y="1051560"/>
-            <a:ext cx="5298947" cy="4629150"/>
+            <a:off x="822960" y="1965960"/>
+            <a:ext cx="5303520" cy="4572000"/>
           </a:xfrm>
           <a:prstGeom prst="roundRect">
             <a:avLst/>
@@ -5582,8 +5826,8 @@
         </p:nvSpPr>
         <p:spPr>
           <a:xfrm>
-            <a:off x="6080760" y="2726055"/>
-            <a:ext cx="4750307" cy="1280160"/>
+            <a:off x="1097280" y="3611880"/>
+            <a:ext cx="4754880" cy="1280160"/>
           </a:xfrm>
           <a:prstGeom prst="rect">
             <a:avLst/>
@@ -5604,7 +5848,7 @@
                 </a:solidFill>
                 <a:latin typeface="Montserrat"/>
               </a:rPr>
-              <a:t>IMAGEN REALISTA</a:t>
+              <a:t>IMAGEN</a:t>
             </a:r>
           </a:p>
           <a:p>
@@ -5616,7 +5860,7 @@
                 </a:solidFill>
                 <a:latin typeface="Montserrat"/>
               </a:rPr>
-              <a:t>technical design blueprint folder</a:t>
+              <a:t>quality management office documents</a:t>
             </a:r>
           </a:p>
         </p:txBody>
@@ -5626,6 +5870,18 @@
   <p:clrMapOvr>
     <a:masterClrMapping/>
   </p:clrMapOvr>
+  <mc:AlternateContent xmlns:mc="http://schemas.openxmlformats.org/markup-compatibility/2006">
+    <mc:Choice xmlns:p14="http://schemas.microsoft.com/office/powerpoint/2010/main" Requires="p14">
+      <p:transition spd="med" p14:dur="700">
+        <p14:cube dir="l"/>
+      </p:transition>
+    </mc:Choice>
+    <mc:Fallback>
+      <p:transition spd="med">
+        <p:push dir="l"/>
+      </p:transition>
+    </mc:Fallback>
+  </mc:AlternateContent>
 </p:sld>
 </file>
 
@@ -5713,7 +5969,7 @@
                 </a:solidFill>
                 <a:latin typeface="Montserrat"/>
               </a:rPr>
-              <a:t>012 / 014</a:t>
+              <a:t>012 / 018</a:t>
             </a:r>
           </a:p>
         </p:txBody>
@@ -5781,7 +6037,7 @@
                 </a:solidFill>
                 <a:latin typeface="Montserrat"/>
               </a:rPr>
-              <a:t>DOCUMENTACIÓN · 4.2</a:t>
+              <a:t>PROCEDIMIENTO 3 · UNIDAD</a:t>
             </a:r>
           </a:p>
         </p:txBody>
@@ -5815,14 +6071,14 @@
                 </a:solidFill>
                 <a:latin typeface="Montserrat"/>
               </a:rPr>
-              <a:t>Diseño para la verificación por unidad</a:t>
-            </a:r>
-          </a:p>
-        </p:txBody>
-      </p:sp>
-      <p:sp>
-        <p:nvSpPr>
-          <p:cNvPr id="7" name="Rounded Rectangle 6"/>
+              <a:t>La vía de la pieza única</a:t>
+            </a:r>
+          </a:p>
+        </p:txBody>
+      </p:sp>
+      <p:sp>
+        <p:nvSpPr>
+          <p:cNvPr id="7" name="Rectangle 6"/>
           <p:cNvSpPr/>
           <p:nvPr/>
         </p:nvSpPr>
@@ -5831,7 +6087,7 @@
             <a:off x="868680" y="1627632"/>
             <a:ext cx="2011680" cy="73152"/>
           </a:xfrm>
-          <a:prstGeom prst="roundRect">
+          <a:prstGeom prst="rect">
             <a:avLst/>
           </a:prstGeom>
           <a:solidFill>
@@ -5873,7 +6129,7 @@
         <p:spPr>
           <a:xfrm>
             <a:off x="822960" y="1965960"/>
-            <a:ext cx="4983480" cy="4206240"/>
+            <a:ext cx="5029200" cy="4206240"/>
           </a:xfrm>
           <a:prstGeom prst="rect">
             <a:avLst/>
@@ -5907,7 +6163,7 @@
                 </a:solidFill>
                 <a:latin typeface="Montserrat"/>
               </a:rPr>
-              <a:t>Describe este aparato en su sitio</a:t>
+              <a:t>Certifica un aparato concreto</a:t>
             </a:r>
           </a:p>
           <a:p>
@@ -5932,7 +6188,7 @@
                 </a:solidFill>
                 <a:latin typeface="Montserrat"/>
               </a:rPr>
-              <a:t>Nº de fabricación y domicilio de la instalación</a:t>
+              <a:t>Típico de fabricación a medida</a:t>
             </a:r>
           </a:p>
           <a:p>
@@ -5957,7 +6213,7 @@
                 </a:solidFill>
                 <a:latin typeface="Montserrat"/>
               </a:rPr>
-              <a:t>Plano de situación y línea de gas instalada</a:t>
+              <a:t>La solicitud pide el destino del aparato</a:t>
             </a:r>
           </a:p>
           <a:p>
@@ -5982,21 +6238,21 @@
                 </a:solidFill>
                 <a:latin typeface="Montserrat"/>
               </a:rPr>
-              <a:t>Gas y presión para el que se reguló</a:t>
-            </a:r>
-          </a:p>
-        </p:txBody>
-      </p:sp>
-      <p:sp>
-        <p:nvSpPr>
-          <p:cNvPr id="9" name="imgph" descr="IMGQ:installed gas line meter site"/>
+              <a:t>Las pruebas, incluso tras instalarlo</a:t>
+            </a:r>
+          </a:p>
+        </p:txBody>
+      </p:sp>
+      <p:sp>
+        <p:nvSpPr>
+          <p:cNvPr id="9" name="imgph" descr="IMGQ:custom industrial gas burner unit"/>
           <p:cNvSpPr/>
           <p:nvPr/>
         </p:nvSpPr>
         <p:spPr>
           <a:xfrm>
-            <a:off x="5806440" y="1051560"/>
-            <a:ext cx="5298947" cy="4629150"/>
+            <a:off x="6080760" y="1965960"/>
+            <a:ext cx="5303520" cy="4572000"/>
           </a:xfrm>
           <a:prstGeom prst="roundRect">
             <a:avLst/>
@@ -6041,8 +6297,8 @@
         </p:nvSpPr>
         <p:spPr>
           <a:xfrm>
-            <a:off x="6080760" y="2726055"/>
-            <a:ext cx="4750307" cy="1280160"/>
+            <a:off x="6355080" y="3611880"/>
+            <a:ext cx="4754880" cy="1280160"/>
           </a:xfrm>
           <a:prstGeom prst="rect">
             <a:avLst/>
@@ -6063,7 +6319,7 @@
                 </a:solidFill>
                 <a:latin typeface="Montserrat"/>
               </a:rPr>
-              <a:t>IMAGEN REALISTA</a:t>
+              <a:t>IMAGEN</a:t>
             </a:r>
           </a:p>
           <a:p>
@@ -6075,7 +6331,7 @@
                 </a:solidFill>
                 <a:latin typeface="Montserrat"/>
               </a:rPr>
-              <a:t>installed gas line meter site</a:t>
+              <a:t>custom industrial gas burner unit</a:t>
             </a:r>
           </a:p>
         </p:txBody>
@@ -6085,6 +6341,18 @@
   <p:clrMapOvr>
     <a:masterClrMapping/>
   </p:clrMapOvr>
+  <mc:AlternateContent xmlns:mc="http://schemas.openxmlformats.org/markup-compatibility/2006">
+    <mc:Choice xmlns:p14="http://schemas.microsoft.com/office/powerpoint/2010/main" Requires="p14">
+      <p:transition spd="med" p14:dur="700">
+        <p14:cube dir="r"/>
+      </p:transition>
+    </mc:Choice>
+    <mc:Fallback>
+      <p:transition spd="med">
+        <p:push dir="r"/>
+      </p:transition>
+    </mc:Fallback>
+  </mc:AlternateContent>
 </p:sld>
 </file>
 
@@ -6172,7 +6440,7 @@
                 </a:solidFill>
                 <a:latin typeface="Montserrat"/>
               </a:rPr>
-              <a:t>013 / 014</a:t>
+              <a:t>013 / 018</a:t>
             </a:r>
           </a:p>
         </p:txBody>
@@ -6240,7 +6508,7 @@
                 </a:solidFill>
                 <a:latin typeface="Montserrat"/>
               </a:rPr>
-              <a:t>CUIDADO CON LAS LETRAS</a:t>
+              <a:t>DOCUMENTACIÓN · 4.1</a:t>
             </a:r>
           </a:p>
         </p:txBody>
@@ -6274,14 +6542,14 @@
                 </a:solidFill>
                 <a:latin typeface="Montserrat"/>
               </a:rPr>
-              <a:t>Categoría del aparato ≠ tipo ≠ carné</a:t>
-            </a:r>
-          </a:p>
-        </p:txBody>
-      </p:sp>
-      <p:sp>
-        <p:nvSpPr>
-          <p:cNvPr id="7" name="Rounded Rectangle 6"/>
+              <a:t>Diseño para el examen de tipo</a:t>
+            </a:r>
+          </a:p>
+        </p:txBody>
+      </p:sp>
+      <p:sp>
+        <p:nvSpPr>
+          <p:cNvPr id="7" name="Rectangle 6"/>
           <p:cNvSpPr/>
           <p:nvPr/>
         </p:nvSpPr>
@@ -6290,7 +6558,7 @@
             <a:off x="868680" y="1627632"/>
             <a:ext cx="2011680" cy="73152"/>
           </a:xfrm>
-          <a:prstGeom prst="roundRect">
+          <a:prstGeom prst="rect">
             <a:avLst/>
           </a:prstGeom>
           <a:solidFill>
@@ -6331,8 +6599,8 @@
         </p:nvSpPr>
         <p:spPr>
           <a:xfrm>
-            <a:off x="822960" y="1965960"/>
-            <a:ext cx="4983480" cy="4206240"/>
+            <a:off x="6355080" y="1965960"/>
+            <a:ext cx="5029200" cy="4206240"/>
           </a:xfrm>
           <a:prstGeom prst="rect">
             <a:avLst/>
@@ -6366,7 +6634,7 @@
                 </a:solidFill>
                 <a:latin typeface="Montserrat"/>
               </a:rPr>
-              <a:t>Categoría del aparato: qué gases admite</a:t>
+              <a:t>Describe el modelo en general</a:t>
             </a:r>
           </a:p>
           <a:p>
@@ -6391,7 +6659,7 @@
                 </a:solidFill>
                 <a:latin typeface="Montserrat"/>
               </a:rPr>
-              <a:t>Según UNE-EN 437</a:t>
+              <a:t>Cámara, salida de humos, gases y presiones</a:t>
             </a:r>
           </a:p>
           <a:p>
@@ -6416,7 +6684,7 @@
                 </a:solidFill>
                 <a:latin typeface="Montserrat"/>
               </a:rPr>
-              <a:t>Tipo A/B/C: cómo quema el aparato</a:t>
+              <a:t>Quemadores, seguridad y regulación</a:t>
             </a:r>
           </a:p>
           <a:p>
@@ -6441,21 +6709,21 @@
                 </a:solidFill>
                 <a:latin typeface="Montserrat"/>
               </a:rPr>
-              <a:t>Categoría A/B/C: el carné del instalador</a:t>
-            </a:r>
-          </a:p>
-        </p:txBody>
-      </p:sp>
-      <p:sp>
-        <p:nvSpPr>
-          <p:cNvPr id="9" name="imgph" descr="IMGQ:gas appliance category label detail"/>
+              <a:t>Esquema eléctrico y piezas sustituibles</a:t>
+            </a:r>
+          </a:p>
+        </p:txBody>
+      </p:sp>
+      <p:sp>
+        <p:nvSpPr>
+          <p:cNvPr id="9" name="imgph" descr="IMGQ:technical design blueprint folder"/>
           <p:cNvSpPr/>
           <p:nvPr/>
         </p:nvSpPr>
         <p:spPr>
           <a:xfrm>
-            <a:off x="5806440" y="1051560"/>
-            <a:ext cx="5298947" cy="4629150"/>
+            <a:off x="822960" y="1965960"/>
+            <a:ext cx="5303520" cy="4572000"/>
           </a:xfrm>
           <a:prstGeom prst="roundRect">
             <a:avLst/>
@@ -6500,8 +6768,8 @@
         </p:nvSpPr>
         <p:spPr>
           <a:xfrm>
-            <a:off x="6080760" y="2726055"/>
-            <a:ext cx="4750307" cy="1280160"/>
+            <a:off x="1097280" y="3611880"/>
+            <a:ext cx="4754880" cy="1280160"/>
           </a:xfrm>
           <a:prstGeom prst="rect">
             <a:avLst/>
@@ -6522,7 +6790,7 @@
                 </a:solidFill>
                 <a:latin typeface="Montserrat"/>
               </a:rPr>
-              <a:t>IMAGEN REALISTA</a:t>
+              <a:t>IMAGEN</a:t>
             </a:r>
           </a:p>
           <a:p>
@@ -6534,7 +6802,7 @@
                 </a:solidFill>
                 <a:latin typeface="Montserrat"/>
               </a:rPr>
-              <a:t>gas appliance category label detail</a:t>
+              <a:t>technical design blueprint folder</a:t>
             </a:r>
           </a:p>
         </p:txBody>
@@ -6544,6 +6812,18 @@
   <p:clrMapOvr>
     <a:masterClrMapping/>
   </p:clrMapOvr>
+  <mc:AlternateContent xmlns:mc="http://schemas.openxmlformats.org/markup-compatibility/2006">
+    <mc:Choice xmlns:p14="http://schemas.microsoft.com/office/powerpoint/2010/main" Requires="p14">
+      <p:transition spd="med" p14:dur="700">
+        <p14:cube dir="l"/>
+      </p:transition>
+    </mc:Choice>
+    <mc:Fallback>
+      <p:transition spd="med">
+        <p:push dir="l"/>
+      </p:transition>
+    </mc:Fallback>
+  </mc:AlternateContent>
 </p:sld>
 </file>
 
@@ -6572,7 +6852,7 @@
             <a:avLst/>
           </a:prstGeom>
           <a:solidFill>
-            <a:srgbClr val="1E2761"/>
+            <a:srgbClr val="FFFFFF"/>
           </a:solidFill>
           <a:ln>
             <a:noFill/>
@@ -6609,8 +6889,8 @@
         </p:nvSpPr>
         <p:spPr>
           <a:xfrm>
-            <a:off x="822960" y="640080"/>
-            <a:ext cx="10515600" cy="457200"/>
+            <a:off x="10607040" y="320040"/>
+            <a:ext cx="1371600" cy="365760"/>
           </a:xfrm>
           <a:prstGeom prst="rect">
             <a:avLst/>
@@ -6623,30 +6903,133 @@
           </a:bodyPr>
           <a:lstStyle/>
           <a:p>
-            <a:r>
-              <a:rPr sz="1400" b="1" i="0">
-                <a:solidFill>
-                  <a:srgbClr val="F4A24C"/>
-                </a:solidFill>
-                <a:latin typeface="Montserrat"/>
-              </a:rPr>
-              <a:t>LO QUE YA DOMINAS</a:t>
-            </a:r>
-          </a:p>
-        </p:txBody>
-      </p:sp>
-      <p:sp>
-        <p:nvSpPr>
-          <p:cNvPr id="4" name="Rounded Rectangle 3"/>
+            <a:pPr algn="r"/>
+            <a:r>
+              <a:rPr sz="1000" b="1" i="0">
+                <a:solidFill>
+                  <a:srgbClr val="64748B"/>
+                </a:solidFill>
+                <a:latin typeface="Montserrat"/>
+              </a:rPr>
+              <a:t>014 / 018</a:t>
+            </a:r>
+          </a:p>
+        </p:txBody>
+      </p:sp>
+      <p:sp>
+        <p:nvSpPr>
+          <p:cNvPr id="4" name="TextBox 3"/>
+          <p:cNvSpPr txBox="1"/>
+          <p:nvPr/>
+        </p:nvSpPr>
+        <p:spPr>
+          <a:xfrm>
+            <a:off x="457200" y="6419088"/>
+            <a:ext cx="8229600" cy="365760"/>
+          </a:xfrm>
+          <a:prstGeom prst="rect">
+            <a:avLst/>
+          </a:prstGeom>
+          <a:noFill/>
+        </p:spPr>
+        <p:txBody>
+          <a:bodyPr wrap="square">
+            <a:spAutoFit/>
+          </a:bodyPr>
+          <a:lstStyle/>
+          <a:p>
+            <a:r>
+              <a:rPr sz="900" b="0" i="0">
+                <a:solidFill>
+                  <a:srgbClr val="64748B"/>
+                </a:solidFill>
+                <a:latin typeface="Montserrat"/>
+              </a:rPr>
+              <a:t>Curso Gas B · Tema 05 · Aparatos de gas</a:t>
+            </a:r>
+          </a:p>
+        </p:txBody>
+      </p:sp>
+      <p:sp>
+        <p:nvSpPr>
+          <p:cNvPr id="5" name="TextBox 4"/>
+          <p:cNvSpPr txBox="1"/>
+          <p:nvPr/>
+        </p:nvSpPr>
+        <p:spPr>
+          <a:xfrm>
+            <a:off x="822960" y="457200"/>
+            <a:ext cx="10058400" cy="365760"/>
+          </a:xfrm>
+          <a:prstGeom prst="rect">
+            <a:avLst/>
+          </a:prstGeom>
+          <a:noFill/>
+        </p:spPr>
+        <p:txBody>
+          <a:bodyPr wrap="square">
+            <a:spAutoFit/>
+          </a:bodyPr>
+          <a:lstStyle/>
+          <a:p>
+            <a:r>
+              <a:rPr sz="1300" b="1" i="0">
+                <a:solidFill>
+                  <a:srgbClr val="E8801A"/>
+                </a:solidFill>
+                <a:latin typeface="Montserrat"/>
+              </a:rPr>
+              <a:t>DOCUMENTACIÓN · 4.2</a:t>
+            </a:r>
+          </a:p>
+        </p:txBody>
+      </p:sp>
+      <p:sp>
+        <p:nvSpPr>
+          <p:cNvPr id="6" name="TextBox 5"/>
+          <p:cNvSpPr txBox="1"/>
+          <p:nvPr/>
+        </p:nvSpPr>
+        <p:spPr>
+          <a:xfrm>
+            <a:off x="822960" y="868680"/>
+            <a:ext cx="10515600" cy="914400"/>
+          </a:xfrm>
+          <a:prstGeom prst="rect">
+            <a:avLst/>
+          </a:prstGeom>
+          <a:noFill/>
+        </p:spPr>
+        <p:txBody>
+          <a:bodyPr wrap="square">
+            <a:spAutoFit/>
+          </a:bodyPr>
+          <a:lstStyle/>
+          <a:p>
+            <a:r>
+              <a:rPr sz="2800" b="1" i="0">
+                <a:solidFill>
+                  <a:srgbClr val="1E2761"/>
+                </a:solidFill>
+                <a:latin typeface="Montserrat"/>
+              </a:rPr>
+              <a:t>Diseño para la verificación por unidad</a:t>
+            </a:r>
+          </a:p>
+        </p:txBody>
+      </p:sp>
+      <p:sp>
+        <p:nvSpPr>
+          <p:cNvPr id="7" name="Rectangle 6"/>
           <p:cNvSpPr/>
           <p:nvPr/>
         </p:nvSpPr>
         <p:spPr>
           <a:xfrm>
-            <a:off x="868680" y="1051560"/>
-            <a:ext cx="1463040" cy="82296"/>
-          </a:xfrm>
-          <a:prstGeom prst="roundRect">
+            <a:off x="868680" y="1627632"/>
+            <a:ext cx="2011680" cy="73152"/>
+          </a:xfrm>
+          <a:prstGeom prst="rect">
             <a:avLst/>
           </a:prstGeom>
           <a:solidFill>
@@ -6681,14 +7064,14 @@
       </p:sp>
       <p:sp>
         <p:nvSpPr>
-          <p:cNvPr id="5" name="TextBox 4"/>
+          <p:cNvPr id="8" name="TextBox 7"/>
           <p:cNvSpPr txBox="1"/>
           <p:nvPr/>
         </p:nvSpPr>
         <p:spPr>
           <a:xfrm>
-            <a:off x="822960" y="1234440"/>
-            <a:ext cx="10515600" cy="1097280"/>
+            <a:off x="822960" y="1965960"/>
+            <a:ext cx="5029200" cy="4206240"/>
           </a:xfrm>
           <a:prstGeom prst="rect">
             <a:avLst/>
@@ -6701,28 +7084,163 @@
           </a:bodyPr>
           <a:lstStyle/>
           <a:p>
-            <a:r>
-              <a:rPr sz="3400" b="1" i="0">
-                <a:solidFill>
-                  <a:srgbClr val="FFFFFF"/>
-                </a:solidFill>
-                <a:latin typeface="Montserrat"/>
-              </a:rPr>
-              <a:t>Ya entiendes por qué te puedes fiar de un aparato</a:t>
-            </a:r>
-          </a:p>
-        </p:txBody>
-      </p:sp>
-      <p:sp>
-        <p:nvSpPr>
-          <p:cNvPr id="6" name="TextBox 5"/>
+            <a:pPr>
+              <a:spcAft>
+                <a:spcPts val="1100"/>
+              </a:spcAft>
+            </a:pPr>
+            <a:r>
+              <a:rPr sz="1600" b="1" i="0">
+                <a:solidFill>
+                  <a:srgbClr val="E8801A"/>
+                </a:solidFill>
+                <a:latin typeface="Montserrat"/>
+              </a:rPr>
+              <a:t>▸  </a:t>
+            </a:r>
+            <a:r>
+              <a:rPr sz="1600" b="0" i="0">
+                <a:solidFill>
+                  <a:srgbClr val="1B2330"/>
+                </a:solidFill>
+                <a:latin typeface="Montserrat"/>
+              </a:rPr>
+              <a:t>Describe este aparato en su sitio</a:t>
+            </a:r>
+          </a:p>
+          <a:p>
+            <a:pPr>
+              <a:spcAft>
+                <a:spcPts val="1100"/>
+              </a:spcAft>
+            </a:pPr>
+            <a:r>
+              <a:rPr sz="1600" b="1" i="0">
+                <a:solidFill>
+                  <a:srgbClr val="E8801A"/>
+                </a:solidFill>
+                <a:latin typeface="Montserrat"/>
+              </a:rPr>
+              <a:t>▸  </a:t>
+            </a:r>
+            <a:r>
+              <a:rPr sz="1600" b="0" i="0">
+                <a:solidFill>
+                  <a:srgbClr val="1B2330"/>
+                </a:solidFill>
+                <a:latin typeface="Montserrat"/>
+              </a:rPr>
+              <a:t>Nº de fabricación y domicilio de la instalación</a:t>
+            </a:r>
+          </a:p>
+          <a:p>
+            <a:pPr>
+              <a:spcAft>
+                <a:spcPts val="1100"/>
+              </a:spcAft>
+            </a:pPr>
+            <a:r>
+              <a:rPr sz="1600" b="1" i="0">
+                <a:solidFill>
+                  <a:srgbClr val="E8801A"/>
+                </a:solidFill>
+                <a:latin typeface="Montserrat"/>
+              </a:rPr>
+              <a:t>▸  </a:t>
+            </a:r>
+            <a:r>
+              <a:rPr sz="1600" b="0" i="0">
+                <a:solidFill>
+                  <a:srgbClr val="1B2330"/>
+                </a:solidFill>
+                <a:latin typeface="Montserrat"/>
+              </a:rPr>
+              <a:t>Plano de situación y línea de gas instalada</a:t>
+            </a:r>
+          </a:p>
+          <a:p>
+            <a:pPr>
+              <a:spcAft>
+                <a:spcPts val="1100"/>
+              </a:spcAft>
+            </a:pPr>
+            <a:r>
+              <a:rPr sz="1600" b="1" i="0">
+                <a:solidFill>
+                  <a:srgbClr val="E8801A"/>
+                </a:solidFill>
+                <a:latin typeface="Montserrat"/>
+              </a:rPr>
+              <a:t>▸  </a:t>
+            </a:r>
+            <a:r>
+              <a:rPr sz="1600" b="0" i="0">
+                <a:solidFill>
+                  <a:srgbClr val="1B2330"/>
+                </a:solidFill>
+                <a:latin typeface="Montserrat"/>
+              </a:rPr>
+              <a:t>Gas y presión para el que se reguló</a:t>
+            </a:r>
+          </a:p>
+        </p:txBody>
+      </p:sp>
+      <p:sp>
+        <p:nvSpPr>
+          <p:cNvPr id="9" name="imgph" descr="IMGQ:installed gas line meter site"/>
+          <p:cNvSpPr/>
+          <p:nvPr/>
+        </p:nvSpPr>
+        <p:spPr>
+          <a:xfrm>
+            <a:off x="6080760" y="1965960"/>
+            <a:ext cx="5303520" cy="4572000"/>
+          </a:xfrm>
+          <a:prstGeom prst="roundRect">
+            <a:avLst/>
+          </a:prstGeom>
+          <a:solidFill>
+            <a:srgbClr val="F3F6FB"/>
+          </a:solidFill>
+          <a:ln w="12700">
+            <a:solidFill>
+              <a:srgbClr val="C7D2E6"/>
+            </a:solidFill>
+          </a:ln>
+          <a:effectLst/>
+        </p:spPr>
+        <p:style>
+          <a:lnRef idx="1">
+            <a:schemeClr val="accent1"/>
+          </a:lnRef>
+          <a:fillRef idx="3">
+            <a:schemeClr val="accent1"/>
+          </a:fillRef>
+          <a:effectRef idx="2">
+            <a:schemeClr val="accent1"/>
+          </a:effectRef>
+          <a:fontRef idx="minor">
+            <a:schemeClr val="lt1"/>
+          </a:fontRef>
+        </p:style>
+        <p:txBody>
+          <a:bodyPr rtlCol="0" anchor="ctr"/>
+          <a:lstStyle/>
+          <a:p>
+            <a:pPr algn="ctr"/>
+          </a:p>
+        </p:txBody>
+      </p:sp>
+      <p:sp>
+        <p:nvSpPr>
+          <p:cNvPr id="10" name="TextBox 9"/>
           <p:cNvSpPr txBox="1"/>
           <p:nvPr/>
         </p:nvSpPr>
         <p:spPr>
           <a:xfrm>
-            <a:off x="822960" y="2606040"/>
-            <a:ext cx="10515600" cy="2743200"/>
+            <a:off x="6355080" y="3611880"/>
+            <a:ext cx="4754880" cy="1280160"/>
           </a:xfrm>
           <a:prstGeom prst="rect">
             <a:avLst/>
@@ -6735,119 +7253,254 @@
           </a:bodyPr>
           <a:lstStyle/>
           <a:p>
-            <a:pPr>
-              <a:spcAft>
-                <a:spcPts val="1200"/>
-              </a:spcAft>
-            </a:pPr>
-            <a:r>
-              <a:rPr sz="2000" b="1" i="0">
-                <a:solidFill>
-                  <a:srgbClr val="F4A24C"/>
-                </a:solidFill>
-                <a:latin typeface="Montserrat"/>
-              </a:rPr>
-              <a:t>✓  </a:t>
-            </a:r>
-            <a:r>
-              <a:rPr sz="1900" b="0" i="0">
-                <a:solidFill>
-                  <a:srgbClr val="FFFFFF"/>
-                </a:solidFill>
-                <a:latin typeface="Montserrat"/>
-              </a:rPr>
-              <a:t>El organismo certifica; el fabricante solo solicita</a:t>
-            </a:r>
-          </a:p>
-          <a:p>
-            <a:pPr>
-              <a:spcAft>
-                <a:spcPts val="1200"/>
-              </a:spcAft>
-            </a:pPr>
-            <a:r>
-              <a:rPr sz="2000" b="1" i="0">
-                <a:solidFill>
-                  <a:srgbClr val="F4A24C"/>
-                </a:solidFill>
-                <a:latin typeface="Montserrat"/>
-              </a:rPr>
-              <a:t>✓  </a:t>
-            </a:r>
-            <a:r>
-              <a:rPr sz="1900" b="0" i="0">
-                <a:solidFill>
-                  <a:srgbClr val="FFFFFF"/>
-                </a:solidFill>
-                <a:latin typeface="Montserrat"/>
-              </a:rPr>
-              <a:t>Examen de tipo = el molde; cambios = aprobación adicional</a:t>
-            </a:r>
-          </a:p>
-          <a:p>
-            <a:pPr>
-              <a:spcAft>
-                <a:spcPts val="1200"/>
-              </a:spcAft>
-            </a:pPr>
-            <a:r>
-              <a:rPr sz="2000" b="1" i="0">
-                <a:solidFill>
-                  <a:srgbClr val="F4A24C"/>
-                </a:solidFill>
-                <a:latin typeface="Montserrat"/>
-              </a:rPr>
-              <a:t>✓  </a:t>
-            </a:r>
-            <a:r>
-              <a:rPr sz="1900" b="0" i="0">
-                <a:solidFill>
-                  <a:srgbClr val="FFFFFF"/>
-                </a:solidFill>
-                <a:latin typeface="Montserrat"/>
-              </a:rPr>
-              <a:t>Producción: inspección sorpresa (1 año) o ISO 9001</a:t>
-            </a:r>
-          </a:p>
-          <a:p>
-            <a:pPr>
-              <a:spcAft>
-                <a:spcPts val="1200"/>
-              </a:spcAft>
-            </a:pPr>
-            <a:r>
-              <a:rPr sz="2000" b="1" i="0">
-                <a:solidFill>
-                  <a:srgbClr val="F4A24C"/>
-                </a:solidFill>
-                <a:latin typeface="Montserrat"/>
-              </a:rPr>
-              <a:t>✓  </a:t>
-            </a:r>
-            <a:r>
-              <a:rPr sz="1900" b="0" i="0">
-                <a:solidFill>
-                  <a:srgbClr val="FFFFFF"/>
-                </a:solidFill>
-                <a:latin typeface="Montserrat"/>
-              </a:rPr>
-              <a:t>Unidad = la pieza única, con su destino</a:t>
-            </a:r>
-          </a:p>
-        </p:txBody>
-      </p:sp>
-      <p:sp>
-        <p:nvSpPr>
-          <p:cNvPr id="7" name="Rounded Rectangle 6"/>
+            <a:pPr algn="ctr"/>
+            <a:r>
+              <a:rPr sz="1400" b="1" i="0">
+                <a:solidFill>
+                  <a:srgbClr val="64748B"/>
+                </a:solidFill>
+                <a:latin typeface="Montserrat"/>
+              </a:rPr>
+              <a:t>IMAGEN</a:t>
+            </a:r>
+          </a:p>
+          <a:p>
+            <a:pPr algn="ctr"/>
+            <a:r>
+              <a:rPr sz="1100" b="0" i="1">
+                <a:solidFill>
+                  <a:srgbClr val="64748B"/>
+                </a:solidFill>
+                <a:latin typeface="Montserrat"/>
+              </a:rPr>
+              <a:t>installed gas line meter site</a:t>
+            </a:r>
+          </a:p>
+        </p:txBody>
+      </p:sp>
+    </p:spTree>
+  </p:cSld>
+  <p:clrMapOvr>
+    <a:masterClrMapping/>
+  </p:clrMapOvr>
+  <mc:AlternateContent xmlns:mc="http://schemas.openxmlformats.org/markup-compatibility/2006">
+    <mc:Choice xmlns:p14="http://schemas.microsoft.com/office/powerpoint/2010/main" Requires="p14">
+      <p:transition spd="med" p14:dur="700">
+        <p14:cube dir="r"/>
+      </p:transition>
+    </mc:Choice>
+    <mc:Fallback>
+      <p:transition spd="med">
+        <p:push dir="r"/>
+      </p:transition>
+    </mc:Fallback>
+  </mc:AlternateContent>
+</p:sld>
+</file>
+
+<file path=ppt/slides/slide15.xml><?xml version="1.0" encoding="utf-8"?>
+<p:sld xmlns:a="http://schemas.openxmlformats.org/drawingml/2006/main" xmlns:p="http://schemas.openxmlformats.org/presentationml/2006/main" xmlns:r="http://schemas.openxmlformats.org/officeDocument/2006/relationships">
+  <p:cSld>
+    <p:spTree>
+      <p:nvGrpSpPr>
+        <p:cNvPr id="1" name=""/>
+        <p:cNvGrpSpPr/>
+        <p:nvPr/>
+      </p:nvGrpSpPr>
+      <p:grpSpPr/>
+      <p:sp>
+        <p:nvSpPr>
+          <p:cNvPr id="2" name="Rectangle 1"/>
           <p:cNvSpPr/>
           <p:nvPr/>
         </p:nvSpPr>
         <p:spPr>
           <a:xfrm>
-            <a:off x="822960" y="5532120"/>
-            <a:ext cx="10515600" cy="822960"/>
-          </a:xfrm>
-          <a:prstGeom prst="roundRect">
+            <a:off x="0" y="0"/>
+            <a:ext cx="12191695" cy="6858000"/>
+          </a:xfrm>
+          <a:prstGeom prst="rect">
+            <a:avLst/>
+          </a:prstGeom>
+          <a:solidFill>
+            <a:srgbClr val="FFFFFF"/>
+          </a:solidFill>
+          <a:ln>
+            <a:noFill/>
+          </a:ln>
+          <a:effectLst/>
+        </p:spPr>
+        <p:style>
+          <a:lnRef idx="1">
+            <a:schemeClr val="accent1"/>
+          </a:lnRef>
+          <a:fillRef idx="3">
+            <a:schemeClr val="accent1"/>
+          </a:fillRef>
+          <a:effectRef idx="2">
+            <a:schemeClr val="accent1"/>
+          </a:effectRef>
+          <a:fontRef idx="minor">
+            <a:schemeClr val="lt1"/>
+          </a:fontRef>
+        </p:style>
+        <p:txBody>
+          <a:bodyPr rtlCol="0" anchor="ctr"/>
+          <a:lstStyle/>
+          <a:p>
+            <a:pPr algn="ctr"/>
+          </a:p>
+        </p:txBody>
+      </p:sp>
+      <p:sp>
+        <p:nvSpPr>
+          <p:cNvPr id="3" name="TextBox 2"/>
+          <p:cNvSpPr txBox="1"/>
+          <p:nvPr/>
+        </p:nvSpPr>
+        <p:spPr>
+          <a:xfrm>
+            <a:off x="10607040" y="320040"/>
+            <a:ext cx="1371600" cy="365760"/>
+          </a:xfrm>
+          <a:prstGeom prst="rect">
+            <a:avLst/>
+          </a:prstGeom>
+          <a:noFill/>
+        </p:spPr>
+        <p:txBody>
+          <a:bodyPr wrap="square">
+            <a:spAutoFit/>
+          </a:bodyPr>
+          <a:lstStyle/>
+          <a:p>
+            <a:pPr algn="r"/>
+            <a:r>
+              <a:rPr sz="1000" b="1" i="0">
+                <a:solidFill>
+                  <a:srgbClr val="64748B"/>
+                </a:solidFill>
+                <a:latin typeface="Montserrat"/>
+              </a:rPr>
+              <a:t>015 / 018</a:t>
+            </a:r>
+          </a:p>
+        </p:txBody>
+      </p:sp>
+      <p:sp>
+        <p:nvSpPr>
+          <p:cNvPr id="4" name="TextBox 3"/>
+          <p:cNvSpPr txBox="1"/>
+          <p:nvPr/>
+        </p:nvSpPr>
+        <p:spPr>
+          <a:xfrm>
+            <a:off x="457200" y="6419088"/>
+            <a:ext cx="8229600" cy="365760"/>
+          </a:xfrm>
+          <a:prstGeom prst="rect">
+            <a:avLst/>
+          </a:prstGeom>
+          <a:noFill/>
+        </p:spPr>
+        <p:txBody>
+          <a:bodyPr wrap="square">
+            <a:spAutoFit/>
+          </a:bodyPr>
+          <a:lstStyle/>
+          <a:p>
+            <a:r>
+              <a:rPr sz="900" b="0" i="0">
+                <a:solidFill>
+                  <a:srgbClr val="64748B"/>
+                </a:solidFill>
+                <a:latin typeface="Montserrat"/>
+              </a:rPr>
+              <a:t>Curso Gas B · Tema 05 · Aparatos de gas</a:t>
+            </a:r>
+          </a:p>
+        </p:txBody>
+      </p:sp>
+      <p:sp>
+        <p:nvSpPr>
+          <p:cNvPr id="5" name="TextBox 4"/>
+          <p:cNvSpPr txBox="1"/>
+          <p:nvPr/>
+        </p:nvSpPr>
+        <p:spPr>
+          <a:xfrm>
+            <a:off x="822960" y="457200"/>
+            <a:ext cx="10058400" cy="365760"/>
+          </a:xfrm>
+          <a:prstGeom prst="rect">
+            <a:avLst/>
+          </a:prstGeom>
+          <a:noFill/>
+        </p:spPr>
+        <p:txBody>
+          <a:bodyPr wrap="square">
+            <a:spAutoFit/>
+          </a:bodyPr>
+          <a:lstStyle/>
+          <a:p>
+            <a:r>
+              <a:rPr sz="1300" b="1" i="0">
+                <a:solidFill>
+                  <a:srgbClr val="E8801A"/>
+                </a:solidFill>
+                <a:latin typeface="Montserrat"/>
+              </a:rPr>
+              <a:t>CUIDADO CON LAS LETRAS</a:t>
+            </a:r>
+          </a:p>
+        </p:txBody>
+      </p:sp>
+      <p:sp>
+        <p:nvSpPr>
+          <p:cNvPr id="6" name="TextBox 5"/>
+          <p:cNvSpPr txBox="1"/>
+          <p:nvPr/>
+        </p:nvSpPr>
+        <p:spPr>
+          <a:xfrm>
+            <a:off x="822960" y="868680"/>
+            <a:ext cx="10515600" cy="914400"/>
+          </a:xfrm>
+          <a:prstGeom prst="rect">
+            <a:avLst/>
+          </a:prstGeom>
+          <a:noFill/>
+        </p:spPr>
+        <p:txBody>
+          <a:bodyPr wrap="square">
+            <a:spAutoFit/>
+          </a:bodyPr>
+          <a:lstStyle/>
+          <a:p>
+            <a:r>
+              <a:rPr sz="2800" b="1" i="0">
+                <a:solidFill>
+                  <a:srgbClr val="1E2761"/>
+                </a:solidFill>
+                <a:latin typeface="Montserrat"/>
+              </a:rPr>
+              <a:t>Categoría del aparato ≠ tipo ≠ carné</a:t>
+            </a:r>
+          </a:p>
+        </p:txBody>
+      </p:sp>
+      <p:sp>
+        <p:nvSpPr>
+          <p:cNvPr id="7" name="Rectangle 6"/>
+          <p:cNvSpPr/>
+          <p:nvPr/>
+        </p:nvSpPr>
+        <p:spPr>
+          <a:xfrm>
+            <a:off x="868680" y="1627632"/>
+            <a:ext cx="2011680" cy="73152"/>
+          </a:xfrm>
+          <a:prstGeom prst="rect">
             <a:avLst/>
           </a:prstGeom>
           <a:solidFill>
@@ -6888,8 +7541,8 @@
         </p:nvSpPr>
         <p:spPr>
           <a:xfrm>
-            <a:off x="1051560" y="5623560"/>
-            <a:ext cx="10058400" cy="640080"/>
+            <a:off x="6355080" y="1965960"/>
+            <a:ext cx="5029200" cy="4206240"/>
           </a:xfrm>
           <a:prstGeom prst="rect">
             <a:avLst/>
@@ -6902,14 +7555,196 @@
           </a:bodyPr>
           <a:lstStyle/>
           <a:p>
-            <a:r>
-              <a:rPr sz="1500" b="1" i="1">
-                <a:solidFill>
-                  <a:srgbClr val="1E2761"/>
-                </a:solidFill>
-                <a:latin typeface="Montserrat"/>
-              </a:rPr>
-              <a:t>Ya sabes qué respalda la placa de un aparato. Solo nos queda leer esa placa y sus pruebas de seguridad.</a:t>
+            <a:pPr>
+              <a:spcAft>
+                <a:spcPts val="1100"/>
+              </a:spcAft>
+            </a:pPr>
+            <a:r>
+              <a:rPr sz="1600" b="1" i="0">
+                <a:solidFill>
+                  <a:srgbClr val="E8801A"/>
+                </a:solidFill>
+                <a:latin typeface="Montserrat"/>
+              </a:rPr>
+              <a:t>▸  </a:t>
+            </a:r>
+            <a:r>
+              <a:rPr sz="1600" b="0" i="0">
+                <a:solidFill>
+                  <a:srgbClr val="1B2330"/>
+                </a:solidFill>
+                <a:latin typeface="Montserrat"/>
+              </a:rPr>
+              <a:t>Categoría del aparato: qué gases admite</a:t>
+            </a:r>
+          </a:p>
+          <a:p>
+            <a:pPr>
+              <a:spcAft>
+                <a:spcPts val="1100"/>
+              </a:spcAft>
+            </a:pPr>
+            <a:r>
+              <a:rPr sz="1600" b="1" i="0">
+                <a:solidFill>
+                  <a:srgbClr val="E8801A"/>
+                </a:solidFill>
+                <a:latin typeface="Montserrat"/>
+              </a:rPr>
+              <a:t>▸  </a:t>
+            </a:r>
+            <a:r>
+              <a:rPr sz="1600" b="0" i="0">
+                <a:solidFill>
+                  <a:srgbClr val="1B2330"/>
+                </a:solidFill>
+                <a:latin typeface="Montserrat"/>
+              </a:rPr>
+              <a:t>Según UNE-EN 437</a:t>
+            </a:r>
+          </a:p>
+          <a:p>
+            <a:pPr>
+              <a:spcAft>
+                <a:spcPts val="1100"/>
+              </a:spcAft>
+            </a:pPr>
+            <a:r>
+              <a:rPr sz="1600" b="1" i="0">
+                <a:solidFill>
+                  <a:srgbClr val="E8801A"/>
+                </a:solidFill>
+                <a:latin typeface="Montserrat"/>
+              </a:rPr>
+              <a:t>▸  </a:t>
+            </a:r>
+            <a:r>
+              <a:rPr sz="1600" b="0" i="0">
+                <a:solidFill>
+                  <a:srgbClr val="1B2330"/>
+                </a:solidFill>
+                <a:latin typeface="Montserrat"/>
+              </a:rPr>
+              <a:t>Tipo A/B/C: cómo quema el aparato</a:t>
+            </a:r>
+          </a:p>
+          <a:p>
+            <a:pPr>
+              <a:spcAft>
+                <a:spcPts val="1100"/>
+              </a:spcAft>
+            </a:pPr>
+            <a:r>
+              <a:rPr sz="1600" b="1" i="0">
+                <a:solidFill>
+                  <a:srgbClr val="E8801A"/>
+                </a:solidFill>
+                <a:latin typeface="Montserrat"/>
+              </a:rPr>
+              <a:t>▸  </a:t>
+            </a:r>
+            <a:r>
+              <a:rPr sz="1600" b="0" i="0">
+                <a:solidFill>
+                  <a:srgbClr val="1B2330"/>
+                </a:solidFill>
+                <a:latin typeface="Montserrat"/>
+              </a:rPr>
+              <a:t>Categoría A/B/C: el carné del instalador</a:t>
+            </a:r>
+          </a:p>
+        </p:txBody>
+      </p:sp>
+      <p:sp>
+        <p:nvSpPr>
+          <p:cNvPr id="9" name="imgph" descr="IMGQ:gas appliance category label detail"/>
+          <p:cNvSpPr/>
+          <p:nvPr/>
+        </p:nvSpPr>
+        <p:spPr>
+          <a:xfrm>
+            <a:off x="822960" y="1965960"/>
+            <a:ext cx="5303520" cy="4572000"/>
+          </a:xfrm>
+          <a:prstGeom prst="roundRect">
+            <a:avLst/>
+          </a:prstGeom>
+          <a:solidFill>
+            <a:srgbClr val="F3F6FB"/>
+          </a:solidFill>
+          <a:ln w="12700">
+            <a:solidFill>
+              <a:srgbClr val="C7D2E6"/>
+            </a:solidFill>
+          </a:ln>
+          <a:effectLst/>
+        </p:spPr>
+        <p:style>
+          <a:lnRef idx="1">
+            <a:schemeClr val="accent1"/>
+          </a:lnRef>
+          <a:fillRef idx="3">
+            <a:schemeClr val="accent1"/>
+          </a:fillRef>
+          <a:effectRef idx="2">
+            <a:schemeClr val="accent1"/>
+          </a:effectRef>
+          <a:fontRef idx="minor">
+            <a:schemeClr val="lt1"/>
+          </a:fontRef>
+        </p:style>
+        <p:txBody>
+          <a:bodyPr rtlCol="0" anchor="ctr"/>
+          <a:lstStyle/>
+          <a:p>
+            <a:pPr algn="ctr"/>
+          </a:p>
+        </p:txBody>
+      </p:sp>
+      <p:sp>
+        <p:nvSpPr>
+          <p:cNvPr id="10" name="TextBox 9"/>
+          <p:cNvSpPr txBox="1"/>
+          <p:nvPr/>
+        </p:nvSpPr>
+        <p:spPr>
+          <a:xfrm>
+            <a:off x="1097280" y="3611880"/>
+            <a:ext cx="4754880" cy="1280160"/>
+          </a:xfrm>
+          <a:prstGeom prst="rect">
+            <a:avLst/>
+          </a:prstGeom>
+          <a:noFill/>
+        </p:spPr>
+        <p:txBody>
+          <a:bodyPr wrap="square">
+            <a:spAutoFit/>
+          </a:bodyPr>
+          <a:lstStyle/>
+          <a:p>
+            <a:pPr algn="ctr"/>
+            <a:r>
+              <a:rPr sz="1400" b="1" i="0">
+                <a:solidFill>
+                  <a:srgbClr val="64748B"/>
+                </a:solidFill>
+                <a:latin typeface="Montserrat"/>
+              </a:rPr>
+              <a:t>IMAGEN</a:t>
+            </a:r>
+          </a:p>
+          <a:p>
+            <a:pPr algn="ctr"/>
+            <a:r>
+              <a:rPr sz="1100" b="0" i="1">
+                <a:solidFill>
+                  <a:srgbClr val="64748B"/>
+                </a:solidFill>
+                <a:latin typeface="Montserrat"/>
+              </a:rPr>
+              <a:t>gas appliance category label detail</a:t>
             </a:r>
           </a:p>
         </p:txBody>
@@ -6919,6 +7754,1683 @@
   <p:clrMapOvr>
     <a:masterClrMapping/>
   </p:clrMapOvr>
+  <mc:AlternateContent xmlns:mc="http://schemas.openxmlformats.org/markup-compatibility/2006">
+    <mc:Choice xmlns:p14="http://schemas.microsoft.com/office/powerpoint/2010/main" Requires="p14">
+      <p:transition spd="med" p14:dur="700">
+        <p14:cube dir="l"/>
+      </p:transition>
+    </mc:Choice>
+    <mc:Fallback>
+      <p:transition spd="med">
+        <p:push dir="l"/>
+      </p:transition>
+    </mc:Fallback>
+  </mc:AlternateContent>
+</p:sld>
+</file>
+
+<file path=ppt/slides/slide16.xml><?xml version="1.0" encoding="utf-8"?>
+<p:sld xmlns:a="http://schemas.openxmlformats.org/drawingml/2006/main" xmlns:p="http://schemas.openxmlformats.org/presentationml/2006/main" xmlns:r="http://schemas.openxmlformats.org/officeDocument/2006/relationships">
+  <p:cSld>
+    <p:spTree>
+      <p:nvGrpSpPr>
+        <p:cNvPr id="1" name=""/>
+        <p:cNvGrpSpPr/>
+        <p:nvPr/>
+      </p:nvGrpSpPr>
+      <p:grpSpPr/>
+      <p:sp>
+        <p:nvSpPr>
+          <p:cNvPr id="2" name="Rectangle 1"/>
+          <p:cNvSpPr/>
+          <p:nvPr/>
+        </p:nvSpPr>
+        <p:spPr>
+          <a:xfrm>
+            <a:off x="0" y="0"/>
+            <a:ext cx="12191695" cy="6858000"/>
+          </a:xfrm>
+          <a:prstGeom prst="rect">
+            <a:avLst/>
+          </a:prstGeom>
+          <a:solidFill>
+            <a:srgbClr val="FFFFFF"/>
+          </a:solidFill>
+          <a:ln>
+            <a:noFill/>
+          </a:ln>
+          <a:effectLst/>
+        </p:spPr>
+        <p:style>
+          <a:lnRef idx="1">
+            <a:schemeClr val="accent1"/>
+          </a:lnRef>
+          <a:fillRef idx="3">
+            <a:schemeClr val="accent1"/>
+          </a:fillRef>
+          <a:effectRef idx="2">
+            <a:schemeClr val="accent1"/>
+          </a:effectRef>
+          <a:fontRef idx="minor">
+            <a:schemeClr val="lt1"/>
+          </a:fontRef>
+        </p:style>
+        <p:txBody>
+          <a:bodyPr rtlCol="0" anchor="ctr"/>
+          <a:lstStyle/>
+          <a:p>
+            <a:pPr algn="ctr"/>
+          </a:p>
+        </p:txBody>
+      </p:sp>
+      <p:sp>
+        <p:nvSpPr>
+          <p:cNvPr id="3" name="TextBox 2"/>
+          <p:cNvSpPr txBox="1"/>
+          <p:nvPr/>
+        </p:nvSpPr>
+        <p:spPr>
+          <a:xfrm>
+            <a:off x="10607040" y="320040"/>
+            <a:ext cx="1371600" cy="365760"/>
+          </a:xfrm>
+          <a:prstGeom prst="rect">
+            <a:avLst/>
+          </a:prstGeom>
+          <a:noFill/>
+        </p:spPr>
+        <p:txBody>
+          <a:bodyPr wrap="square">
+            <a:spAutoFit/>
+          </a:bodyPr>
+          <a:lstStyle/>
+          <a:p>
+            <a:pPr algn="r"/>
+            <a:r>
+              <a:rPr sz="1000" b="1" i="0">
+                <a:solidFill>
+                  <a:srgbClr val="64748B"/>
+                </a:solidFill>
+                <a:latin typeface="Montserrat"/>
+              </a:rPr>
+              <a:t>016 / 018</a:t>
+            </a:r>
+          </a:p>
+        </p:txBody>
+      </p:sp>
+      <p:sp>
+        <p:nvSpPr>
+          <p:cNvPr id="4" name="TextBox 3"/>
+          <p:cNvSpPr txBox="1"/>
+          <p:nvPr/>
+        </p:nvSpPr>
+        <p:spPr>
+          <a:xfrm>
+            <a:off x="457200" y="6419088"/>
+            <a:ext cx="8229600" cy="365760"/>
+          </a:xfrm>
+          <a:prstGeom prst="rect">
+            <a:avLst/>
+          </a:prstGeom>
+          <a:noFill/>
+        </p:spPr>
+        <p:txBody>
+          <a:bodyPr wrap="square">
+            <a:spAutoFit/>
+          </a:bodyPr>
+          <a:lstStyle/>
+          <a:p>
+            <a:r>
+              <a:rPr sz="900" b="0" i="0">
+                <a:solidFill>
+                  <a:srgbClr val="64748B"/>
+                </a:solidFill>
+                <a:latin typeface="Montserrat"/>
+              </a:rPr>
+              <a:t>Curso Gas B · Tema 05 · Aparatos de gas</a:t>
+            </a:r>
+          </a:p>
+        </p:txBody>
+      </p:sp>
+      <p:sp>
+        <p:nvSpPr>
+          <p:cNvPr id="5" name="Rectangle 4"/>
+          <p:cNvSpPr/>
+          <p:nvPr/>
+        </p:nvSpPr>
+        <p:spPr>
+          <a:xfrm>
+            <a:off x="0" y="0"/>
+            <a:ext cx="12191695" cy="1143000"/>
+          </a:xfrm>
+          <a:prstGeom prst="rect">
+            <a:avLst/>
+          </a:prstGeom>
+          <a:solidFill>
+            <a:srgbClr val="E8801A"/>
+          </a:solidFill>
+          <a:ln>
+            <a:noFill/>
+          </a:ln>
+          <a:effectLst/>
+        </p:spPr>
+        <p:style>
+          <a:lnRef idx="1">
+            <a:schemeClr val="accent1"/>
+          </a:lnRef>
+          <a:fillRef idx="3">
+            <a:schemeClr val="accent1"/>
+          </a:fillRef>
+          <a:effectRef idx="2">
+            <a:schemeClr val="accent1"/>
+          </a:effectRef>
+          <a:fontRef idx="minor">
+            <a:schemeClr val="lt1"/>
+          </a:fontRef>
+        </p:style>
+        <p:txBody>
+          <a:bodyPr rtlCol="0" anchor="ctr"/>
+          <a:lstStyle/>
+          <a:p>
+            <a:pPr algn="ctr"/>
+          </a:p>
+        </p:txBody>
+      </p:sp>
+      <p:sp>
+        <p:nvSpPr>
+          <p:cNvPr id="6" name="TextBox 5"/>
+          <p:cNvSpPr txBox="1"/>
+          <p:nvPr/>
+        </p:nvSpPr>
+        <p:spPr>
+          <a:xfrm>
+            <a:off x="822960" y="274320"/>
+            <a:ext cx="10515600" cy="640080"/>
+          </a:xfrm>
+          <a:prstGeom prst="rect">
+            <a:avLst/>
+          </a:prstGeom>
+          <a:noFill/>
+        </p:spPr>
+        <p:txBody>
+          <a:bodyPr wrap="square">
+            <a:spAutoFit/>
+          </a:bodyPr>
+          <a:lstStyle/>
+          <a:p>
+            <a:r>
+              <a:rPr sz="2400" b="1" i="0">
+                <a:solidFill>
+                  <a:srgbClr val="FFFFFF"/>
+                </a:solidFill>
+                <a:latin typeface="Montserrat"/>
+              </a:rPr>
+              <a:t>⚡  PREGUNTA RÁPIDA</a:t>
+            </a:r>
+          </a:p>
+        </p:txBody>
+      </p:sp>
+      <p:sp>
+        <p:nvSpPr>
+          <p:cNvPr id="7" name="TextBox 6"/>
+          <p:cNvSpPr txBox="1"/>
+          <p:nvPr/>
+        </p:nvSpPr>
+        <p:spPr>
+          <a:xfrm>
+            <a:off x="822960" y="1508760"/>
+            <a:ext cx="10515600" cy="1371600"/>
+          </a:xfrm>
+          <a:prstGeom prst="rect">
+            <a:avLst/>
+          </a:prstGeom>
+          <a:noFill/>
+        </p:spPr>
+        <p:txBody>
+          <a:bodyPr wrap="square">
+            <a:spAutoFit/>
+          </a:bodyPr>
+          <a:lstStyle/>
+          <a:p>
+            <a:r>
+              <a:rPr sz="2400" b="1" i="0">
+                <a:solidFill>
+                  <a:srgbClr val="1E2761"/>
+                </a:solidFill>
+                <a:latin typeface="Montserrat"/>
+              </a:rPr>
+              <a:t>La categoría del aparato que aparece en la documentación de diseño, ¿a qué se refiere?</a:t>
+            </a:r>
+          </a:p>
+        </p:txBody>
+      </p:sp>
+      <p:sp>
+        <p:nvSpPr>
+          <p:cNvPr id="8" name="Rounded Rectangle 7"/>
+          <p:cNvSpPr/>
+          <p:nvPr/>
+        </p:nvSpPr>
+        <p:spPr>
+          <a:xfrm>
+            <a:off x="822960" y="3291840"/>
+            <a:ext cx="4983480" cy="1143000"/>
+          </a:xfrm>
+          <a:prstGeom prst="roundRect">
+            <a:avLst/>
+          </a:prstGeom>
+          <a:solidFill>
+            <a:srgbClr val="F3F6FB"/>
+          </a:solidFill>
+          <a:ln w="12700">
+            <a:solidFill>
+              <a:srgbClr val="C7D2E6"/>
+            </a:solidFill>
+          </a:ln>
+          <a:effectLst/>
+        </p:spPr>
+        <p:style>
+          <a:lnRef idx="1">
+            <a:schemeClr val="accent1"/>
+          </a:lnRef>
+          <a:fillRef idx="3">
+            <a:schemeClr val="accent1"/>
+          </a:fillRef>
+          <a:effectRef idx="2">
+            <a:schemeClr val="accent1"/>
+          </a:effectRef>
+          <a:fontRef idx="minor">
+            <a:schemeClr val="lt1"/>
+          </a:fontRef>
+        </p:style>
+        <p:txBody>
+          <a:bodyPr rtlCol="0" anchor="ctr"/>
+          <a:lstStyle/>
+          <a:p>
+            <a:pPr algn="ctr"/>
+          </a:p>
+        </p:txBody>
+      </p:sp>
+      <p:sp>
+        <p:nvSpPr>
+          <p:cNvPr id="9" name="Rectangle 8"/>
+          <p:cNvSpPr/>
+          <p:nvPr/>
+        </p:nvSpPr>
+        <p:spPr>
+          <a:xfrm>
+            <a:off x="822960" y="3291840"/>
+            <a:ext cx="640080" cy="1143000"/>
+          </a:xfrm>
+          <a:prstGeom prst="rect">
+            <a:avLst/>
+          </a:prstGeom>
+          <a:solidFill>
+            <a:srgbClr val="1E2761"/>
+          </a:solidFill>
+          <a:ln>
+            <a:noFill/>
+          </a:ln>
+          <a:effectLst/>
+        </p:spPr>
+        <p:style>
+          <a:lnRef idx="1">
+            <a:schemeClr val="accent1"/>
+          </a:lnRef>
+          <a:fillRef idx="3">
+            <a:schemeClr val="accent1"/>
+          </a:fillRef>
+          <a:effectRef idx="2">
+            <a:schemeClr val="accent1"/>
+          </a:effectRef>
+          <a:fontRef idx="minor">
+            <a:schemeClr val="lt1"/>
+          </a:fontRef>
+        </p:style>
+        <p:txBody>
+          <a:bodyPr rtlCol="0" anchor="ctr"/>
+          <a:lstStyle/>
+          <a:p>
+            <a:pPr algn="ctr"/>
+          </a:p>
+        </p:txBody>
+      </p:sp>
+      <p:sp>
+        <p:nvSpPr>
+          <p:cNvPr id="10" name="TextBox 9"/>
+          <p:cNvSpPr txBox="1"/>
+          <p:nvPr/>
+        </p:nvSpPr>
+        <p:spPr>
+          <a:xfrm>
+            <a:off x="822960" y="3611880"/>
+            <a:ext cx="640080" cy="548640"/>
+          </a:xfrm>
+          <a:prstGeom prst="rect">
+            <a:avLst/>
+          </a:prstGeom>
+          <a:noFill/>
+        </p:spPr>
+        <p:txBody>
+          <a:bodyPr wrap="square">
+            <a:spAutoFit/>
+          </a:bodyPr>
+          <a:lstStyle/>
+          <a:p>
+            <a:pPr algn="ctr"/>
+            <a:r>
+              <a:rPr sz="2200" b="1" i="0">
+                <a:solidFill>
+                  <a:srgbClr val="FFFFFF"/>
+                </a:solidFill>
+                <a:latin typeface="Montserrat"/>
+              </a:rPr>
+              <a:t>A</a:t>
+            </a:r>
+          </a:p>
+        </p:txBody>
+      </p:sp>
+      <p:sp>
+        <p:nvSpPr>
+          <p:cNvPr id="11" name="TextBox 10"/>
+          <p:cNvSpPr txBox="1"/>
+          <p:nvPr/>
+        </p:nvSpPr>
+        <p:spPr>
+          <a:xfrm>
+            <a:off x="1600200" y="3474720"/>
+            <a:ext cx="4114800" cy="868680"/>
+          </a:xfrm>
+          <a:prstGeom prst="rect">
+            <a:avLst/>
+          </a:prstGeom>
+          <a:noFill/>
+        </p:spPr>
+        <p:txBody>
+          <a:bodyPr wrap="square">
+            <a:spAutoFit/>
+          </a:bodyPr>
+          <a:lstStyle/>
+          <a:p>
+            <a:r>
+              <a:rPr sz="1400" b="0" i="0">
+                <a:solidFill>
+                  <a:srgbClr val="1B2330"/>
+                </a:solidFill>
+                <a:latin typeface="Montserrat"/>
+              </a:rPr>
+              <a:t>Al tipo de combustión A, B o C</a:t>
+            </a:r>
+          </a:p>
+        </p:txBody>
+      </p:sp>
+      <p:sp>
+        <p:nvSpPr>
+          <p:cNvPr id="12" name="Rounded Rectangle 11"/>
+          <p:cNvSpPr/>
+          <p:nvPr/>
+        </p:nvSpPr>
+        <p:spPr>
+          <a:xfrm>
+            <a:off x="6355080" y="3291840"/>
+            <a:ext cx="4983480" cy="1143000"/>
+          </a:xfrm>
+          <a:prstGeom prst="roundRect">
+            <a:avLst/>
+          </a:prstGeom>
+          <a:solidFill>
+            <a:srgbClr val="F3F6FB"/>
+          </a:solidFill>
+          <a:ln w="12700">
+            <a:solidFill>
+              <a:srgbClr val="C7D2E6"/>
+            </a:solidFill>
+          </a:ln>
+          <a:effectLst/>
+        </p:spPr>
+        <p:style>
+          <a:lnRef idx="1">
+            <a:schemeClr val="accent1"/>
+          </a:lnRef>
+          <a:fillRef idx="3">
+            <a:schemeClr val="accent1"/>
+          </a:fillRef>
+          <a:effectRef idx="2">
+            <a:schemeClr val="accent1"/>
+          </a:effectRef>
+          <a:fontRef idx="minor">
+            <a:schemeClr val="lt1"/>
+          </a:fontRef>
+        </p:style>
+        <p:txBody>
+          <a:bodyPr rtlCol="0" anchor="ctr"/>
+          <a:lstStyle/>
+          <a:p>
+            <a:pPr algn="ctr"/>
+          </a:p>
+        </p:txBody>
+      </p:sp>
+      <p:sp>
+        <p:nvSpPr>
+          <p:cNvPr id="13" name="Rectangle 12"/>
+          <p:cNvSpPr/>
+          <p:nvPr/>
+        </p:nvSpPr>
+        <p:spPr>
+          <a:xfrm>
+            <a:off x="6355080" y="3291840"/>
+            <a:ext cx="640080" cy="1143000"/>
+          </a:xfrm>
+          <a:prstGeom prst="rect">
+            <a:avLst/>
+          </a:prstGeom>
+          <a:solidFill>
+            <a:srgbClr val="1E2761"/>
+          </a:solidFill>
+          <a:ln>
+            <a:noFill/>
+          </a:ln>
+          <a:effectLst/>
+        </p:spPr>
+        <p:style>
+          <a:lnRef idx="1">
+            <a:schemeClr val="accent1"/>
+          </a:lnRef>
+          <a:fillRef idx="3">
+            <a:schemeClr val="accent1"/>
+          </a:fillRef>
+          <a:effectRef idx="2">
+            <a:schemeClr val="accent1"/>
+          </a:effectRef>
+          <a:fontRef idx="minor">
+            <a:schemeClr val="lt1"/>
+          </a:fontRef>
+        </p:style>
+        <p:txBody>
+          <a:bodyPr rtlCol="0" anchor="ctr"/>
+          <a:lstStyle/>
+          <a:p>
+            <a:pPr algn="ctr"/>
+          </a:p>
+        </p:txBody>
+      </p:sp>
+      <p:sp>
+        <p:nvSpPr>
+          <p:cNvPr id="14" name="TextBox 13"/>
+          <p:cNvSpPr txBox="1"/>
+          <p:nvPr/>
+        </p:nvSpPr>
+        <p:spPr>
+          <a:xfrm>
+            <a:off x="6355080" y="3611880"/>
+            <a:ext cx="640080" cy="548640"/>
+          </a:xfrm>
+          <a:prstGeom prst="rect">
+            <a:avLst/>
+          </a:prstGeom>
+          <a:noFill/>
+        </p:spPr>
+        <p:txBody>
+          <a:bodyPr wrap="square">
+            <a:spAutoFit/>
+          </a:bodyPr>
+          <a:lstStyle/>
+          <a:p>
+            <a:pPr algn="ctr"/>
+            <a:r>
+              <a:rPr sz="2200" b="1" i="0">
+                <a:solidFill>
+                  <a:srgbClr val="FFFFFF"/>
+                </a:solidFill>
+                <a:latin typeface="Montserrat"/>
+              </a:rPr>
+              <a:t>B</a:t>
+            </a:r>
+          </a:p>
+        </p:txBody>
+      </p:sp>
+      <p:sp>
+        <p:nvSpPr>
+          <p:cNvPr id="15" name="TextBox 14"/>
+          <p:cNvSpPr txBox="1"/>
+          <p:nvPr/>
+        </p:nvSpPr>
+        <p:spPr>
+          <a:xfrm>
+            <a:off x="7132320" y="3474720"/>
+            <a:ext cx="4114800" cy="868680"/>
+          </a:xfrm>
+          <a:prstGeom prst="rect">
+            <a:avLst/>
+          </a:prstGeom>
+          <a:noFill/>
+        </p:spPr>
+        <p:txBody>
+          <a:bodyPr wrap="square">
+            <a:spAutoFit/>
+          </a:bodyPr>
+          <a:lstStyle/>
+          <a:p>
+            <a:r>
+              <a:rPr sz="1400" b="0" i="0">
+                <a:solidFill>
+                  <a:srgbClr val="1B2330"/>
+                </a:solidFill>
+                <a:latin typeface="Montserrat"/>
+              </a:rPr>
+              <a:t>A los gases y presiones que admite el aparato</a:t>
+            </a:r>
+          </a:p>
+        </p:txBody>
+      </p:sp>
+      <p:sp>
+        <p:nvSpPr>
+          <p:cNvPr id="16" name="Rounded Rectangle 15"/>
+          <p:cNvSpPr/>
+          <p:nvPr/>
+        </p:nvSpPr>
+        <p:spPr>
+          <a:xfrm>
+            <a:off x="822960" y="4617720"/>
+            <a:ext cx="4983480" cy="1143000"/>
+          </a:xfrm>
+          <a:prstGeom prst="roundRect">
+            <a:avLst/>
+          </a:prstGeom>
+          <a:solidFill>
+            <a:srgbClr val="F3F6FB"/>
+          </a:solidFill>
+          <a:ln w="12700">
+            <a:solidFill>
+              <a:srgbClr val="C7D2E6"/>
+            </a:solidFill>
+          </a:ln>
+          <a:effectLst/>
+        </p:spPr>
+        <p:style>
+          <a:lnRef idx="1">
+            <a:schemeClr val="accent1"/>
+          </a:lnRef>
+          <a:fillRef idx="3">
+            <a:schemeClr val="accent1"/>
+          </a:fillRef>
+          <a:effectRef idx="2">
+            <a:schemeClr val="accent1"/>
+          </a:effectRef>
+          <a:fontRef idx="minor">
+            <a:schemeClr val="lt1"/>
+          </a:fontRef>
+        </p:style>
+        <p:txBody>
+          <a:bodyPr rtlCol="0" anchor="ctr"/>
+          <a:lstStyle/>
+          <a:p>
+            <a:pPr algn="ctr"/>
+          </a:p>
+        </p:txBody>
+      </p:sp>
+      <p:sp>
+        <p:nvSpPr>
+          <p:cNvPr id="17" name="Rectangle 16"/>
+          <p:cNvSpPr/>
+          <p:nvPr/>
+        </p:nvSpPr>
+        <p:spPr>
+          <a:xfrm>
+            <a:off x="822960" y="4617720"/>
+            <a:ext cx="640080" cy="1143000"/>
+          </a:xfrm>
+          <a:prstGeom prst="rect">
+            <a:avLst/>
+          </a:prstGeom>
+          <a:solidFill>
+            <a:srgbClr val="1E2761"/>
+          </a:solidFill>
+          <a:ln>
+            <a:noFill/>
+          </a:ln>
+          <a:effectLst/>
+        </p:spPr>
+        <p:style>
+          <a:lnRef idx="1">
+            <a:schemeClr val="accent1"/>
+          </a:lnRef>
+          <a:fillRef idx="3">
+            <a:schemeClr val="accent1"/>
+          </a:fillRef>
+          <a:effectRef idx="2">
+            <a:schemeClr val="accent1"/>
+          </a:effectRef>
+          <a:fontRef idx="minor">
+            <a:schemeClr val="lt1"/>
+          </a:fontRef>
+        </p:style>
+        <p:txBody>
+          <a:bodyPr rtlCol="0" anchor="ctr"/>
+          <a:lstStyle/>
+          <a:p>
+            <a:pPr algn="ctr"/>
+          </a:p>
+        </p:txBody>
+      </p:sp>
+      <p:sp>
+        <p:nvSpPr>
+          <p:cNvPr id="18" name="TextBox 17"/>
+          <p:cNvSpPr txBox="1"/>
+          <p:nvPr/>
+        </p:nvSpPr>
+        <p:spPr>
+          <a:xfrm>
+            <a:off x="822960" y="4937760"/>
+            <a:ext cx="640080" cy="548640"/>
+          </a:xfrm>
+          <a:prstGeom prst="rect">
+            <a:avLst/>
+          </a:prstGeom>
+          <a:noFill/>
+        </p:spPr>
+        <p:txBody>
+          <a:bodyPr wrap="square">
+            <a:spAutoFit/>
+          </a:bodyPr>
+          <a:lstStyle/>
+          <a:p>
+            <a:pPr algn="ctr"/>
+            <a:r>
+              <a:rPr sz="2200" b="1" i="0">
+                <a:solidFill>
+                  <a:srgbClr val="FFFFFF"/>
+                </a:solidFill>
+                <a:latin typeface="Montserrat"/>
+              </a:rPr>
+              <a:t>C</a:t>
+            </a:r>
+          </a:p>
+        </p:txBody>
+      </p:sp>
+      <p:sp>
+        <p:nvSpPr>
+          <p:cNvPr id="19" name="TextBox 18"/>
+          <p:cNvSpPr txBox="1"/>
+          <p:nvPr/>
+        </p:nvSpPr>
+        <p:spPr>
+          <a:xfrm>
+            <a:off x="1600200" y="4800600"/>
+            <a:ext cx="4114800" cy="868680"/>
+          </a:xfrm>
+          <a:prstGeom prst="rect">
+            <a:avLst/>
+          </a:prstGeom>
+          <a:noFill/>
+        </p:spPr>
+        <p:txBody>
+          <a:bodyPr wrap="square">
+            <a:spAutoFit/>
+          </a:bodyPr>
+          <a:lstStyle/>
+          <a:p>
+            <a:r>
+              <a:rPr sz="1400" b="0" i="0">
+                <a:solidFill>
+                  <a:srgbClr val="1B2330"/>
+                </a:solidFill>
+                <a:latin typeface="Montserrat"/>
+              </a:rPr>
+              <a:t>Al nivel del carné del instalador</a:t>
+            </a:r>
+          </a:p>
+        </p:txBody>
+      </p:sp>
+      <p:sp>
+        <p:nvSpPr>
+          <p:cNvPr id="20" name="Rounded Rectangle 19"/>
+          <p:cNvSpPr/>
+          <p:nvPr/>
+        </p:nvSpPr>
+        <p:spPr>
+          <a:xfrm>
+            <a:off x="6355080" y="4617720"/>
+            <a:ext cx="4983480" cy="1143000"/>
+          </a:xfrm>
+          <a:prstGeom prst="roundRect">
+            <a:avLst/>
+          </a:prstGeom>
+          <a:solidFill>
+            <a:srgbClr val="F3F6FB"/>
+          </a:solidFill>
+          <a:ln w="12700">
+            <a:solidFill>
+              <a:srgbClr val="C7D2E6"/>
+            </a:solidFill>
+          </a:ln>
+          <a:effectLst/>
+        </p:spPr>
+        <p:style>
+          <a:lnRef idx="1">
+            <a:schemeClr val="accent1"/>
+          </a:lnRef>
+          <a:fillRef idx="3">
+            <a:schemeClr val="accent1"/>
+          </a:fillRef>
+          <a:effectRef idx="2">
+            <a:schemeClr val="accent1"/>
+          </a:effectRef>
+          <a:fontRef idx="minor">
+            <a:schemeClr val="lt1"/>
+          </a:fontRef>
+        </p:style>
+        <p:txBody>
+          <a:bodyPr rtlCol="0" anchor="ctr"/>
+          <a:lstStyle/>
+          <a:p>
+            <a:pPr algn="ctr"/>
+          </a:p>
+        </p:txBody>
+      </p:sp>
+      <p:sp>
+        <p:nvSpPr>
+          <p:cNvPr id="21" name="Rectangle 20"/>
+          <p:cNvSpPr/>
+          <p:nvPr/>
+        </p:nvSpPr>
+        <p:spPr>
+          <a:xfrm>
+            <a:off x="6355080" y="4617720"/>
+            <a:ext cx="640080" cy="1143000"/>
+          </a:xfrm>
+          <a:prstGeom prst="rect">
+            <a:avLst/>
+          </a:prstGeom>
+          <a:solidFill>
+            <a:srgbClr val="1E2761"/>
+          </a:solidFill>
+          <a:ln>
+            <a:noFill/>
+          </a:ln>
+          <a:effectLst/>
+        </p:spPr>
+        <p:style>
+          <a:lnRef idx="1">
+            <a:schemeClr val="accent1"/>
+          </a:lnRef>
+          <a:fillRef idx="3">
+            <a:schemeClr val="accent1"/>
+          </a:fillRef>
+          <a:effectRef idx="2">
+            <a:schemeClr val="accent1"/>
+          </a:effectRef>
+          <a:fontRef idx="minor">
+            <a:schemeClr val="lt1"/>
+          </a:fontRef>
+        </p:style>
+        <p:txBody>
+          <a:bodyPr rtlCol="0" anchor="ctr"/>
+          <a:lstStyle/>
+          <a:p>
+            <a:pPr algn="ctr"/>
+          </a:p>
+        </p:txBody>
+      </p:sp>
+      <p:sp>
+        <p:nvSpPr>
+          <p:cNvPr id="22" name="TextBox 21"/>
+          <p:cNvSpPr txBox="1"/>
+          <p:nvPr/>
+        </p:nvSpPr>
+        <p:spPr>
+          <a:xfrm>
+            <a:off x="6355080" y="4937760"/>
+            <a:ext cx="640080" cy="548640"/>
+          </a:xfrm>
+          <a:prstGeom prst="rect">
+            <a:avLst/>
+          </a:prstGeom>
+          <a:noFill/>
+        </p:spPr>
+        <p:txBody>
+          <a:bodyPr wrap="square">
+            <a:spAutoFit/>
+          </a:bodyPr>
+          <a:lstStyle/>
+          <a:p>
+            <a:pPr algn="ctr"/>
+            <a:r>
+              <a:rPr sz="2200" b="1" i="0">
+                <a:solidFill>
+                  <a:srgbClr val="FFFFFF"/>
+                </a:solidFill>
+                <a:latin typeface="Montserrat"/>
+              </a:rPr>
+              <a:t>D</a:t>
+            </a:r>
+          </a:p>
+        </p:txBody>
+      </p:sp>
+      <p:sp>
+        <p:nvSpPr>
+          <p:cNvPr id="23" name="TextBox 22"/>
+          <p:cNvSpPr txBox="1"/>
+          <p:nvPr/>
+        </p:nvSpPr>
+        <p:spPr>
+          <a:xfrm>
+            <a:off x="7132320" y="4800600"/>
+            <a:ext cx="4114800" cy="868680"/>
+          </a:xfrm>
+          <a:prstGeom prst="rect">
+            <a:avLst/>
+          </a:prstGeom>
+          <a:noFill/>
+        </p:spPr>
+        <p:txBody>
+          <a:bodyPr wrap="square">
+            <a:spAutoFit/>
+          </a:bodyPr>
+          <a:lstStyle/>
+          <a:p>
+            <a:r>
+              <a:rPr sz="1400" b="0" i="0">
+                <a:solidFill>
+                  <a:srgbClr val="1B2330"/>
+                </a:solidFill>
+                <a:latin typeface="Montserrat"/>
+              </a:rPr>
+              <a:t>A la potencia útil en kilovatios</a:t>
+            </a:r>
+          </a:p>
+        </p:txBody>
+      </p:sp>
+    </p:spTree>
+  </p:cSld>
+  <p:clrMapOvr>
+    <a:masterClrMapping/>
+  </p:clrMapOvr>
+  <mc:AlternateContent xmlns:mc="http://schemas.openxmlformats.org/markup-compatibility/2006">
+    <mc:Choice xmlns:p14="http://schemas.microsoft.com/office/powerpoint/2010/main" Requires="p14">
+      <p:transition spd="med" p14:dur="700">
+        <p14:cube dir="r"/>
+      </p:transition>
+    </mc:Choice>
+    <mc:Fallback>
+      <p:transition spd="med">
+        <p:push dir="r"/>
+      </p:transition>
+    </mc:Fallback>
+  </mc:AlternateContent>
+</p:sld>
+</file>
+
+<file path=ppt/slides/slide17.xml><?xml version="1.0" encoding="utf-8"?>
+<p:sld xmlns:a="http://schemas.openxmlformats.org/drawingml/2006/main" xmlns:p="http://schemas.openxmlformats.org/presentationml/2006/main" xmlns:r="http://schemas.openxmlformats.org/officeDocument/2006/relationships">
+  <p:cSld>
+    <p:spTree>
+      <p:nvGrpSpPr>
+        <p:cNvPr id="1" name=""/>
+        <p:cNvGrpSpPr/>
+        <p:nvPr/>
+      </p:nvGrpSpPr>
+      <p:grpSpPr/>
+      <p:sp>
+        <p:nvSpPr>
+          <p:cNvPr id="2" name="Rectangle 1"/>
+          <p:cNvSpPr/>
+          <p:nvPr/>
+        </p:nvSpPr>
+        <p:spPr>
+          <a:xfrm>
+            <a:off x="0" y="0"/>
+            <a:ext cx="12191695" cy="6858000"/>
+          </a:xfrm>
+          <a:prstGeom prst="rect">
+            <a:avLst/>
+          </a:prstGeom>
+          <a:solidFill>
+            <a:srgbClr val="FFFFFF"/>
+          </a:solidFill>
+          <a:ln>
+            <a:noFill/>
+          </a:ln>
+          <a:effectLst/>
+        </p:spPr>
+        <p:style>
+          <a:lnRef idx="1">
+            <a:schemeClr val="accent1"/>
+          </a:lnRef>
+          <a:fillRef idx="3">
+            <a:schemeClr val="accent1"/>
+          </a:fillRef>
+          <a:effectRef idx="2">
+            <a:schemeClr val="accent1"/>
+          </a:effectRef>
+          <a:fontRef idx="minor">
+            <a:schemeClr val="lt1"/>
+          </a:fontRef>
+        </p:style>
+        <p:txBody>
+          <a:bodyPr rtlCol="0" anchor="ctr"/>
+          <a:lstStyle/>
+          <a:p>
+            <a:pPr algn="ctr"/>
+          </a:p>
+        </p:txBody>
+      </p:sp>
+      <p:sp>
+        <p:nvSpPr>
+          <p:cNvPr id="3" name="TextBox 2"/>
+          <p:cNvSpPr txBox="1"/>
+          <p:nvPr/>
+        </p:nvSpPr>
+        <p:spPr>
+          <a:xfrm>
+            <a:off x="10607040" y="320040"/>
+            <a:ext cx="1371600" cy="365760"/>
+          </a:xfrm>
+          <a:prstGeom prst="rect">
+            <a:avLst/>
+          </a:prstGeom>
+          <a:noFill/>
+        </p:spPr>
+        <p:txBody>
+          <a:bodyPr wrap="square">
+            <a:spAutoFit/>
+          </a:bodyPr>
+          <a:lstStyle/>
+          <a:p>
+            <a:pPr algn="r"/>
+            <a:r>
+              <a:rPr sz="1000" b="1" i="0">
+                <a:solidFill>
+                  <a:srgbClr val="64748B"/>
+                </a:solidFill>
+                <a:latin typeface="Montserrat"/>
+              </a:rPr>
+              <a:t>017 / 018</a:t>
+            </a:r>
+          </a:p>
+        </p:txBody>
+      </p:sp>
+      <p:sp>
+        <p:nvSpPr>
+          <p:cNvPr id="4" name="TextBox 3"/>
+          <p:cNvSpPr txBox="1"/>
+          <p:nvPr/>
+        </p:nvSpPr>
+        <p:spPr>
+          <a:xfrm>
+            <a:off x="457200" y="6419088"/>
+            <a:ext cx="8229600" cy="365760"/>
+          </a:xfrm>
+          <a:prstGeom prst="rect">
+            <a:avLst/>
+          </a:prstGeom>
+          <a:noFill/>
+        </p:spPr>
+        <p:txBody>
+          <a:bodyPr wrap="square">
+            <a:spAutoFit/>
+          </a:bodyPr>
+          <a:lstStyle/>
+          <a:p>
+            <a:r>
+              <a:rPr sz="900" b="0" i="0">
+                <a:solidFill>
+                  <a:srgbClr val="64748B"/>
+                </a:solidFill>
+                <a:latin typeface="Montserrat"/>
+              </a:rPr>
+              <a:t>Curso Gas B · Tema 05 · Aparatos de gas</a:t>
+            </a:r>
+          </a:p>
+        </p:txBody>
+      </p:sp>
+      <p:sp>
+        <p:nvSpPr>
+          <p:cNvPr id="5" name="Rectangle 4"/>
+          <p:cNvSpPr/>
+          <p:nvPr/>
+        </p:nvSpPr>
+        <p:spPr>
+          <a:xfrm>
+            <a:off x="0" y="0"/>
+            <a:ext cx="12191695" cy="1143000"/>
+          </a:xfrm>
+          <a:prstGeom prst="rect">
+            <a:avLst/>
+          </a:prstGeom>
+          <a:solidFill>
+            <a:srgbClr val="1E8E4B"/>
+          </a:solidFill>
+          <a:ln>
+            <a:noFill/>
+          </a:ln>
+          <a:effectLst/>
+        </p:spPr>
+        <p:style>
+          <a:lnRef idx="1">
+            <a:schemeClr val="accent1"/>
+          </a:lnRef>
+          <a:fillRef idx="3">
+            <a:schemeClr val="accent1"/>
+          </a:fillRef>
+          <a:effectRef idx="2">
+            <a:schemeClr val="accent1"/>
+          </a:effectRef>
+          <a:fontRef idx="minor">
+            <a:schemeClr val="lt1"/>
+          </a:fontRef>
+        </p:style>
+        <p:txBody>
+          <a:bodyPr rtlCol="0" anchor="ctr"/>
+          <a:lstStyle/>
+          <a:p>
+            <a:pPr algn="ctr"/>
+          </a:p>
+        </p:txBody>
+      </p:sp>
+      <p:sp>
+        <p:nvSpPr>
+          <p:cNvPr id="6" name="TextBox 5"/>
+          <p:cNvSpPr txBox="1"/>
+          <p:nvPr/>
+        </p:nvSpPr>
+        <p:spPr>
+          <a:xfrm>
+            <a:off x="822960" y="274320"/>
+            <a:ext cx="10515600" cy="640080"/>
+          </a:xfrm>
+          <a:prstGeom prst="rect">
+            <a:avLst/>
+          </a:prstGeom>
+          <a:noFill/>
+        </p:spPr>
+        <p:txBody>
+          <a:bodyPr wrap="square">
+            <a:spAutoFit/>
+          </a:bodyPr>
+          <a:lstStyle/>
+          <a:p>
+            <a:r>
+              <a:rPr sz="2400" b="1" i="0">
+                <a:solidFill>
+                  <a:srgbClr val="FFFFFF"/>
+                </a:solidFill>
+                <a:latin typeface="Montserrat"/>
+              </a:rPr>
+              <a:t>✔  RESPUESTA:  B</a:t>
+            </a:r>
+          </a:p>
+        </p:txBody>
+      </p:sp>
+      <p:sp>
+        <p:nvSpPr>
+          <p:cNvPr id="7" name="TextBox 6"/>
+          <p:cNvSpPr txBox="1"/>
+          <p:nvPr/>
+        </p:nvSpPr>
+        <p:spPr>
+          <a:xfrm>
+            <a:off x="822960" y="1417320"/>
+            <a:ext cx="10515600" cy="914400"/>
+          </a:xfrm>
+          <a:prstGeom prst="rect">
+            <a:avLst/>
+          </a:prstGeom>
+          <a:noFill/>
+        </p:spPr>
+        <p:txBody>
+          <a:bodyPr wrap="square">
+            <a:spAutoFit/>
+          </a:bodyPr>
+          <a:lstStyle/>
+          <a:p>
+            <a:r>
+              <a:rPr sz="1800" b="1" i="0">
+                <a:solidFill>
+                  <a:srgbClr val="64748B"/>
+                </a:solidFill>
+                <a:latin typeface="Montserrat"/>
+              </a:rPr>
+              <a:t>La categoría del aparato que aparece en la documentación de diseño, ¿a qué se refiere?</a:t>
+            </a:r>
+          </a:p>
+        </p:txBody>
+      </p:sp>
+      <p:sp>
+        <p:nvSpPr>
+          <p:cNvPr id="8" name="Rounded Rectangle 7"/>
+          <p:cNvSpPr/>
+          <p:nvPr/>
+        </p:nvSpPr>
+        <p:spPr>
+          <a:xfrm>
+            <a:off x="822960" y="2514600"/>
+            <a:ext cx="10515600" cy="914400"/>
+          </a:xfrm>
+          <a:prstGeom prst="roundRect">
+            <a:avLst/>
+          </a:prstGeom>
+          <a:solidFill>
+            <a:srgbClr val="E9F6EE"/>
+          </a:solidFill>
+          <a:ln w="12700">
+            <a:solidFill>
+              <a:srgbClr val="1E8E4B"/>
+            </a:solidFill>
+          </a:ln>
+          <a:effectLst/>
+        </p:spPr>
+        <p:style>
+          <a:lnRef idx="1">
+            <a:schemeClr val="accent1"/>
+          </a:lnRef>
+          <a:fillRef idx="3">
+            <a:schemeClr val="accent1"/>
+          </a:fillRef>
+          <a:effectRef idx="2">
+            <a:schemeClr val="accent1"/>
+          </a:effectRef>
+          <a:fontRef idx="minor">
+            <a:schemeClr val="lt1"/>
+          </a:fontRef>
+        </p:style>
+        <p:txBody>
+          <a:bodyPr rtlCol="0" anchor="ctr"/>
+          <a:lstStyle/>
+          <a:p>
+            <a:pPr algn="ctr"/>
+          </a:p>
+        </p:txBody>
+      </p:sp>
+      <p:sp>
+        <p:nvSpPr>
+          <p:cNvPr id="9" name="TextBox 8"/>
+          <p:cNvSpPr txBox="1"/>
+          <p:nvPr/>
+        </p:nvSpPr>
+        <p:spPr>
+          <a:xfrm>
+            <a:off x="1097280" y="2697480"/>
+            <a:ext cx="10058400" cy="640080"/>
+          </a:xfrm>
+          <a:prstGeom prst="rect">
+            <a:avLst/>
+          </a:prstGeom>
+          <a:noFill/>
+        </p:spPr>
+        <p:txBody>
+          <a:bodyPr wrap="square">
+            <a:spAutoFit/>
+          </a:bodyPr>
+          <a:lstStyle/>
+          <a:p>
+            <a:r>
+              <a:rPr sz="1800" b="1" i="0">
+                <a:solidFill>
+                  <a:srgbClr val="1E8E4B"/>
+                </a:solidFill>
+                <a:latin typeface="Montserrat"/>
+              </a:rPr>
+              <a:t>B.  </a:t>
+            </a:r>
+            <a:r>
+              <a:rPr sz="1800" b="1" i="0">
+                <a:solidFill>
+                  <a:srgbClr val="1E2761"/>
+                </a:solidFill>
+                <a:latin typeface="Montserrat"/>
+              </a:rPr>
+              <a:t>A los gases y presiones que admite el aparato</a:t>
+            </a:r>
+          </a:p>
+        </p:txBody>
+      </p:sp>
+      <p:sp>
+        <p:nvSpPr>
+          <p:cNvPr id="10" name="TextBox 9"/>
+          <p:cNvSpPr txBox="1"/>
+          <p:nvPr/>
+        </p:nvSpPr>
+        <p:spPr>
+          <a:xfrm>
+            <a:off x="822960" y="3749039"/>
+            <a:ext cx="10515600" cy="2194560"/>
+          </a:xfrm>
+          <a:prstGeom prst="rect">
+            <a:avLst/>
+          </a:prstGeom>
+          <a:noFill/>
+        </p:spPr>
+        <p:txBody>
+          <a:bodyPr wrap="square">
+            <a:spAutoFit/>
+          </a:bodyPr>
+          <a:lstStyle/>
+          <a:p>
+            <a:r>
+              <a:rPr sz="1500" b="1" i="0">
+                <a:solidFill>
+                  <a:srgbClr val="E8801A"/>
+                </a:solidFill>
+                <a:latin typeface="Montserrat"/>
+              </a:rPr>
+              <a:t>Por qué:  </a:t>
+            </a:r>
+            <a:r>
+              <a:rPr sz="1500" b="0" i="0">
+                <a:solidFill>
+                  <a:srgbClr val="1B2330"/>
+                </a:solidFill>
+                <a:latin typeface="Montserrat"/>
+              </a:rPr>
+              <a:t>La categoría del aparato indica qué gases y presiones acepta, según la UNE-EN 437; no es el tipo A/B/C de combustión ni la categoría del carné del instalador.</a:t>
+            </a:r>
+          </a:p>
+        </p:txBody>
+      </p:sp>
+    </p:spTree>
+  </p:cSld>
+  <p:clrMapOvr>
+    <a:masterClrMapping/>
+  </p:clrMapOvr>
+  <mc:AlternateContent xmlns:mc="http://schemas.openxmlformats.org/markup-compatibility/2006">
+    <mc:Choice xmlns:p14="http://schemas.microsoft.com/office/powerpoint/2010/main" Requires="p14">
+      <p:transition spd="med" p14:dur="700">
+        <p14:cube dir="l"/>
+      </p:transition>
+    </mc:Choice>
+    <mc:Fallback>
+      <p:transition spd="med">
+        <p:push dir="l"/>
+      </p:transition>
+    </mc:Fallback>
+  </mc:AlternateContent>
+</p:sld>
+</file>
+
+<file path=ppt/slides/slide18.xml><?xml version="1.0" encoding="utf-8"?>
+<p:sld xmlns:a="http://schemas.openxmlformats.org/drawingml/2006/main" xmlns:p="http://schemas.openxmlformats.org/presentationml/2006/main" xmlns:r="http://schemas.openxmlformats.org/officeDocument/2006/relationships">
+  <p:cSld>
+    <p:spTree>
+      <p:nvGrpSpPr>
+        <p:cNvPr id="1" name=""/>
+        <p:cNvGrpSpPr/>
+        <p:nvPr/>
+      </p:nvGrpSpPr>
+      <p:grpSpPr/>
+      <p:sp>
+        <p:nvSpPr>
+          <p:cNvPr id="2" name="Rectangle 1"/>
+          <p:cNvSpPr/>
+          <p:nvPr/>
+        </p:nvSpPr>
+        <p:spPr>
+          <a:xfrm>
+            <a:off x="0" y="0"/>
+            <a:ext cx="12191695" cy="6858000"/>
+          </a:xfrm>
+          <a:prstGeom prst="rect">
+            <a:avLst/>
+          </a:prstGeom>
+          <a:solidFill>
+            <a:srgbClr val="1E2761"/>
+          </a:solidFill>
+          <a:ln>
+            <a:noFill/>
+          </a:ln>
+          <a:effectLst/>
+        </p:spPr>
+        <p:style>
+          <a:lnRef idx="1">
+            <a:schemeClr val="accent1"/>
+          </a:lnRef>
+          <a:fillRef idx="3">
+            <a:schemeClr val="accent1"/>
+          </a:fillRef>
+          <a:effectRef idx="2">
+            <a:schemeClr val="accent1"/>
+          </a:effectRef>
+          <a:fontRef idx="minor">
+            <a:schemeClr val="lt1"/>
+          </a:fontRef>
+        </p:style>
+        <p:txBody>
+          <a:bodyPr rtlCol="0" anchor="ctr"/>
+          <a:lstStyle/>
+          <a:p>
+            <a:pPr algn="ctr"/>
+          </a:p>
+        </p:txBody>
+      </p:sp>
+      <p:sp>
+        <p:nvSpPr>
+          <p:cNvPr id="3" name="TextBox 2"/>
+          <p:cNvSpPr txBox="1"/>
+          <p:nvPr/>
+        </p:nvSpPr>
+        <p:spPr>
+          <a:xfrm>
+            <a:off x="822960" y="640080"/>
+            <a:ext cx="10515600" cy="457200"/>
+          </a:xfrm>
+          <a:prstGeom prst="rect">
+            <a:avLst/>
+          </a:prstGeom>
+          <a:noFill/>
+        </p:spPr>
+        <p:txBody>
+          <a:bodyPr wrap="square">
+            <a:spAutoFit/>
+          </a:bodyPr>
+          <a:lstStyle/>
+          <a:p>
+            <a:r>
+              <a:rPr sz="1400" b="1" i="0">
+                <a:solidFill>
+                  <a:srgbClr val="F4A24C"/>
+                </a:solidFill>
+                <a:latin typeface="Montserrat"/>
+              </a:rPr>
+              <a:t>LO QUE YA DOMINAS</a:t>
+            </a:r>
+          </a:p>
+        </p:txBody>
+      </p:sp>
+      <p:sp>
+        <p:nvSpPr>
+          <p:cNvPr id="4" name="Rectangle 3"/>
+          <p:cNvSpPr/>
+          <p:nvPr/>
+        </p:nvSpPr>
+        <p:spPr>
+          <a:xfrm>
+            <a:off x="868680" y="1051560"/>
+            <a:ext cx="1463040" cy="82296"/>
+          </a:xfrm>
+          <a:prstGeom prst="rect">
+            <a:avLst/>
+          </a:prstGeom>
+          <a:solidFill>
+            <a:srgbClr val="E8801A"/>
+          </a:solidFill>
+          <a:ln>
+            <a:noFill/>
+          </a:ln>
+          <a:effectLst/>
+        </p:spPr>
+        <p:style>
+          <a:lnRef idx="1">
+            <a:schemeClr val="accent1"/>
+          </a:lnRef>
+          <a:fillRef idx="3">
+            <a:schemeClr val="accent1"/>
+          </a:fillRef>
+          <a:effectRef idx="2">
+            <a:schemeClr val="accent1"/>
+          </a:effectRef>
+          <a:fontRef idx="minor">
+            <a:schemeClr val="lt1"/>
+          </a:fontRef>
+        </p:style>
+        <p:txBody>
+          <a:bodyPr rtlCol="0" anchor="ctr"/>
+          <a:lstStyle/>
+          <a:p>
+            <a:pPr algn="ctr"/>
+          </a:p>
+        </p:txBody>
+      </p:sp>
+      <p:sp>
+        <p:nvSpPr>
+          <p:cNvPr id="5" name="TextBox 4"/>
+          <p:cNvSpPr txBox="1"/>
+          <p:nvPr/>
+        </p:nvSpPr>
+        <p:spPr>
+          <a:xfrm>
+            <a:off x="822960" y="1234440"/>
+            <a:ext cx="10515600" cy="1097280"/>
+          </a:xfrm>
+          <a:prstGeom prst="rect">
+            <a:avLst/>
+          </a:prstGeom>
+          <a:noFill/>
+        </p:spPr>
+        <p:txBody>
+          <a:bodyPr wrap="square">
+            <a:spAutoFit/>
+          </a:bodyPr>
+          <a:lstStyle/>
+          <a:p>
+            <a:r>
+              <a:rPr sz="3400" b="1" i="0">
+                <a:solidFill>
+                  <a:srgbClr val="FFFFFF"/>
+                </a:solidFill>
+                <a:latin typeface="Montserrat"/>
+              </a:rPr>
+              <a:t>Ya entiendes por qué te puedes fiar de un aparato</a:t>
+            </a:r>
+          </a:p>
+        </p:txBody>
+      </p:sp>
+      <p:sp>
+        <p:nvSpPr>
+          <p:cNvPr id="6" name="TextBox 5"/>
+          <p:cNvSpPr txBox="1"/>
+          <p:nvPr/>
+        </p:nvSpPr>
+        <p:spPr>
+          <a:xfrm>
+            <a:off x="822960" y="2606040"/>
+            <a:ext cx="10515600" cy="2743200"/>
+          </a:xfrm>
+          <a:prstGeom prst="rect">
+            <a:avLst/>
+          </a:prstGeom>
+          <a:noFill/>
+        </p:spPr>
+        <p:txBody>
+          <a:bodyPr wrap="square">
+            <a:spAutoFit/>
+          </a:bodyPr>
+          <a:lstStyle/>
+          <a:p>
+            <a:pPr>
+              <a:spcAft>
+                <a:spcPts val="1200"/>
+              </a:spcAft>
+            </a:pPr>
+            <a:r>
+              <a:rPr sz="2000" b="1" i="0">
+                <a:solidFill>
+                  <a:srgbClr val="F4A24C"/>
+                </a:solidFill>
+                <a:latin typeface="Montserrat"/>
+              </a:rPr>
+              <a:t>✓  </a:t>
+            </a:r>
+            <a:r>
+              <a:rPr sz="1900" b="0" i="0">
+                <a:solidFill>
+                  <a:srgbClr val="FFFFFF"/>
+                </a:solidFill>
+                <a:latin typeface="Montserrat"/>
+              </a:rPr>
+              <a:t>El organismo certifica; el fabricante solo solicita</a:t>
+            </a:r>
+          </a:p>
+          <a:p>
+            <a:pPr>
+              <a:spcAft>
+                <a:spcPts val="1200"/>
+              </a:spcAft>
+            </a:pPr>
+            <a:r>
+              <a:rPr sz="2000" b="1" i="0">
+                <a:solidFill>
+                  <a:srgbClr val="F4A24C"/>
+                </a:solidFill>
+                <a:latin typeface="Montserrat"/>
+              </a:rPr>
+              <a:t>✓  </a:t>
+            </a:r>
+            <a:r>
+              <a:rPr sz="1900" b="0" i="0">
+                <a:solidFill>
+                  <a:srgbClr val="FFFFFF"/>
+                </a:solidFill>
+                <a:latin typeface="Montserrat"/>
+              </a:rPr>
+              <a:t>Examen de tipo = el molde; cambios = aprobación adicional</a:t>
+            </a:r>
+          </a:p>
+          <a:p>
+            <a:pPr>
+              <a:spcAft>
+                <a:spcPts val="1200"/>
+              </a:spcAft>
+            </a:pPr>
+            <a:r>
+              <a:rPr sz="2000" b="1" i="0">
+                <a:solidFill>
+                  <a:srgbClr val="F4A24C"/>
+                </a:solidFill>
+                <a:latin typeface="Montserrat"/>
+              </a:rPr>
+              <a:t>✓  </a:t>
+            </a:r>
+            <a:r>
+              <a:rPr sz="1900" b="0" i="0">
+                <a:solidFill>
+                  <a:srgbClr val="FFFFFF"/>
+                </a:solidFill>
+                <a:latin typeface="Montserrat"/>
+              </a:rPr>
+              <a:t>Producción: inspección sorpresa (1 año) o ISO 9001</a:t>
+            </a:r>
+          </a:p>
+          <a:p>
+            <a:pPr>
+              <a:spcAft>
+                <a:spcPts val="1200"/>
+              </a:spcAft>
+            </a:pPr>
+            <a:r>
+              <a:rPr sz="2000" b="1" i="0">
+                <a:solidFill>
+                  <a:srgbClr val="F4A24C"/>
+                </a:solidFill>
+                <a:latin typeface="Montserrat"/>
+              </a:rPr>
+              <a:t>✓  </a:t>
+            </a:r>
+            <a:r>
+              <a:rPr sz="1900" b="0" i="0">
+                <a:solidFill>
+                  <a:srgbClr val="FFFFFF"/>
+                </a:solidFill>
+                <a:latin typeface="Montserrat"/>
+              </a:rPr>
+              <a:t>Unidad = la pieza única, con su destino</a:t>
+            </a:r>
+          </a:p>
+        </p:txBody>
+      </p:sp>
+      <p:sp>
+        <p:nvSpPr>
+          <p:cNvPr id="7" name="Rounded Rectangle 6"/>
+          <p:cNvSpPr/>
+          <p:nvPr/>
+        </p:nvSpPr>
+        <p:spPr>
+          <a:xfrm>
+            <a:off x="822960" y="5532120"/>
+            <a:ext cx="10515600" cy="822960"/>
+          </a:xfrm>
+          <a:prstGeom prst="roundRect">
+            <a:avLst/>
+          </a:prstGeom>
+          <a:solidFill>
+            <a:srgbClr val="E8801A"/>
+          </a:solidFill>
+          <a:ln>
+            <a:noFill/>
+          </a:ln>
+          <a:effectLst/>
+        </p:spPr>
+        <p:style>
+          <a:lnRef idx="1">
+            <a:schemeClr val="accent1"/>
+          </a:lnRef>
+          <a:fillRef idx="3">
+            <a:schemeClr val="accent1"/>
+          </a:fillRef>
+          <a:effectRef idx="2">
+            <a:schemeClr val="accent1"/>
+          </a:effectRef>
+          <a:fontRef idx="minor">
+            <a:schemeClr val="lt1"/>
+          </a:fontRef>
+        </p:style>
+        <p:txBody>
+          <a:bodyPr rtlCol="0" anchor="ctr"/>
+          <a:lstStyle/>
+          <a:p>
+            <a:pPr algn="ctr"/>
+          </a:p>
+        </p:txBody>
+      </p:sp>
+      <p:sp>
+        <p:nvSpPr>
+          <p:cNvPr id="8" name="TextBox 7"/>
+          <p:cNvSpPr txBox="1"/>
+          <p:nvPr/>
+        </p:nvSpPr>
+        <p:spPr>
+          <a:xfrm>
+            <a:off x="1051560" y="5623560"/>
+            <a:ext cx="10058400" cy="640080"/>
+          </a:xfrm>
+          <a:prstGeom prst="rect">
+            <a:avLst/>
+          </a:prstGeom>
+          <a:noFill/>
+        </p:spPr>
+        <p:txBody>
+          <a:bodyPr wrap="square">
+            <a:spAutoFit/>
+          </a:bodyPr>
+          <a:lstStyle/>
+          <a:p>
+            <a:r>
+              <a:rPr sz="1500" b="1" i="1">
+                <a:solidFill>
+                  <a:srgbClr val="1E2761"/>
+                </a:solidFill>
+                <a:latin typeface="Montserrat"/>
+              </a:rPr>
+              <a:t>Ya sabes qué respalda la placa de un aparato. Solo nos queda leer esa placa y sus pruebas de seguridad.</a:t>
+            </a:r>
+          </a:p>
+        </p:txBody>
+      </p:sp>
+    </p:spTree>
+  </p:cSld>
+  <p:clrMapOvr>
+    <a:masterClrMapping/>
+  </p:clrMapOvr>
+  <mc:AlternateContent xmlns:mc="http://schemas.openxmlformats.org/markup-compatibility/2006">
+    <mc:Choice xmlns:p14="http://schemas.microsoft.com/office/powerpoint/2010/main" Requires="p14">
+      <p:transition spd="med" p14:dur="700">
+        <p14:cube dir="r"/>
+      </p:transition>
+    </mc:Choice>
+    <mc:Fallback>
+      <p:transition spd="med">
+        <p:push dir="r"/>
+      </p:transition>
+    </mc:Fallback>
+  </mc:AlternateContent>
 </p:sld>
 </file>
 
@@ -7006,7 +9518,7 @@
                 </a:solidFill>
                 <a:latin typeface="Montserrat"/>
               </a:rPr>
-              <a:t>002 / 014</a:t>
+              <a:t>002 / 018</a:t>
             </a:r>
           </a:p>
         </p:txBody>
@@ -7081,7 +9593,7 @@
       </p:sp>
       <p:sp>
         <p:nvSpPr>
-          <p:cNvPr id="6" name="Rounded Rectangle 5"/>
+          <p:cNvPr id="6" name="Rectangle 5"/>
           <p:cNvSpPr/>
           <p:nvPr/>
         </p:nvSpPr>
@@ -7090,7 +9602,7 @@
             <a:off x="868680" y="1234440"/>
             <a:ext cx="1463040" cy="73152"/>
           </a:xfrm>
-          <a:prstGeom prst="roundRect">
+          <a:prstGeom prst="rect">
             <a:avLst/>
           </a:prstGeom>
           <a:solidFill>
@@ -7171,14 +9683,58 @@
       </p:sp>
       <p:sp>
         <p:nvSpPr>
-          <p:cNvPr id="8" name="TextBox 7"/>
+          <p:cNvPr id="8" name="Rectangle 7"/>
+          <p:cNvSpPr/>
+          <p:nvPr/>
+        </p:nvSpPr>
+        <p:spPr>
+          <a:xfrm>
+            <a:off x="822960" y="2011680"/>
+            <a:ext cx="3017520" cy="128016"/>
+          </a:xfrm>
+          <a:prstGeom prst="rect">
+            <a:avLst/>
+          </a:prstGeom>
+          <a:solidFill>
+            <a:srgbClr val="E8801A"/>
+          </a:solidFill>
+          <a:ln>
+            <a:noFill/>
+          </a:ln>
+          <a:effectLst/>
+        </p:spPr>
+        <p:style>
+          <a:lnRef idx="1">
+            <a:schemeClr val="accent1"/>
+          </a:lnRef>
+          <a:fillRef idx="3">
+            <a:schemeClr val="accent1"/>
+          </a:fillRef>
+          <a:effectRef idx="2">
+            <a:schemeClr val="accent1"/>
+          </a:effectRef>
+          <a:fontRef idx="minor">
+            <a:schemeClr val="lt1"/>
+          </a:fontRef>
+        </p:style>
+        <p:txBody>
+          <a:bodyPr rtlCol="0" anchor="ctr"/>
+          <a:lstStyle/>
+          <a:p>
+            <a:pPr algn="ctr"/>
+          </a:p>
+        </p:txBody>
+      </p:sp>
+      <p:sp>
+        <p:nvSpPr>
+          <p:cNvPr id="9" name="TextBox 8"/>
           <p:cNvSpPr txBox="1"/>
           <p:nvPr/>
         </p:nvSpPr>
         <p:spPr>
           <a:xfrm>
-            <a:off x="822960" y="2331720"/>
-            <a:ext cx="3017520" cy="1463040"/>
+            <a:off x="822960" y="2377440"/>
+            <a:ext cx="3017520" cy="1371600"/>
           </a:xfrm>
           <a:prstGeom prst="rect">
             <a:avLst/>
@@ -7193,7 +9749,7 @@
           <a:p>
             <a:pPr algn="ctr"/>
             <a:r>
-              <a:rPr sz="6000" b="1" i="0">
+              <a:rPr sz="5800" b="1" i="0">
                 <a:solidFill>
                   <a:srgbClr val="1E2761"/>
                 </a:solidFill>
@@ -7206,13 +9762,13 @@
       </p:sp>
       <p:sp>
         <p:nvSpPr>
-          <p:cNvPr id="9" name="TextBox 8"/>
+          <p:cNvPr id="10" name="TextBox 9"/>
           <p:cNvSpPr txBox="1"/>
           <p:nvPr/>
         </p:nvSpPr>
         <p:spPr>
           <a:xfrm>
-            <a:off x="1051560" y="3611880"/>
+            <a:off x="1051560" y="3657600"/>
             <a:ext cx="2560320" cy="1005840"/>
           </a:xfrm>
           <a:prstGeom prst="rect">
@@ -7241,7 +9797,7 @@
       </p:sp>
       <p:sp>
         <p:nvSpPr>
-          <p:cNvPr id="10" name="Rounded Rectangle 9"/>
+          <p:cNvPr id="11" name="Rounded Rectangle 10"/>
           <p:cNvSpPr/>
           <p:nvPr/>
         </p:nvSpPr>
@@ -7287,14 +9843,58 @@
       </p:sp>
       <p:sp>
         <p:nvSpPr>
-          <p:cNvPr id="11" name="TextBox 10"/>
+          <p:cNvPr id="12" name="Rectangle 11"/>
+          <p:cNvSpPr/>
+          <p:nvPr/>
+        </p:nvSpPr>
+        <p:spPr>
+          <a:xfrm>
+            <a:off x="4617720" y="2011680"/>
+            <a:ext cx="3017520" cy="128016"/>
+          </a:xfrm>
+          <a:prstGeom prst="rect">
+            <a:avLst/>
+          </a:prstGeom>
+          <a:solidFill>
+            <a:srgbClr val="E8801A"/>
+          </a:solidFill>
+          <a:ln>
+            <a:noFill/>
+          </a:ln>
+          <a:effectLst/>
+        </p:spPr>
+        <p:style>
+          <a:lnRef idx="1">
+            <a:schemeClr val="accent1"/>
+          </a:lnRef>
+          <a:fillRef idx="3">
+            <a:schemeClr val="accent1"/>
+          </a:fillRef>
+          <a:effectRef idx="2">
+            <a:schemeClr val="accent1"/>
+          </a:effectRef>
+          <a:fontRef idx="minor">
+            <a:schemeClr val="lt1"/>
+          </a:fontRef>
+        </p:style>
+        <p:txBody>
+          <a:bodyPr rtlCol="0" anchor="ctr"/>
+          <a:lstStyle/>
+          <a:p>
+            <a:pPr algn="ctr"/>
+          </a:p>
+        </p:txBody>
+      </p:sp>
+      <p:sp>
+        <p:nvSpPr>
+          <p:cNvPr id="13" name="TextBox 12"/>
           <p:cNvSpPr txBox="1"/>
           <p:nvPr/>
         </p:nvSpPr>
         <p:spPr>
           <a:xfrm>
-            <a:off x="4617720" y="2331720"/>
-            <a:ext cx="3017520" cy="1463040"/>
+            <a:off x="4617720" y="2377440"/>
+            <a:ext cx="3017520" cy="1371600"/>
           </a:xfrm>
           <a:prstGeom prst="rect">
             <a:avLst/>
@@ -7309,7 +9909,7 @@
           <a:p>
             <a:pPr algn="ctr"/>
             <a:r>
-              <a:rPr sz="6000" b="1" i="0">
+              <a:rPr sz="5800" b="1" i="0">
                 <a:solidFill>
                   <a:srgbClr val="1E2761"/>
                 </a:solidFill>
@@ -7322,13 +9922,13 @@
       </p:sp>
       <p:sp>
         <p:nvSpPr>
-          <p:cNvPr id="12" name="TextBox 11"/>
+          <p:cNvPr id="14" name="TextBox 13"/>
           <p:cNvSpPr txBox="1"/>
           <p:nvPr/>
         </p:nvSpPr>
         <p:spPr>
           <a:xfrm>
-            <a:off x="4846320" y="3611880"/>
+            <a:off x="4846320" y="3657600"/>
             <a:ext cx="2560320" cy="1005840"/>
           </a:xfrm>
           <a:prstGeom prst="rect">
@@ -7357,7 +9957,7 @@
       </p:sp>
       <p:sp>
         <p:nvSpPr>
-          <p:cNvPr id="13" name="Rounded Rectangle 12"/>
+          <p:cNvPr id="15" name="Rounded Rectangle 14"/>
           <p:cNvSpPr/>
           <p:nvPr/>
         </p:nvSpPr>
@@ -7403,14 +10003,58 @@
       </p:sp>
       <p:sp>
         <p:nvSpPr>
-          <p:cNvPr id="14" name="TextBox 13"/>
+          <p:cNvPr id="16" name="Rectangle 15"/>
+          <p:cNvSpPr/>
+          <p:nvPr/>
+        </p:nvSpPr>
+        <p:spPr>
+          <a:xfrm>
+            <a:off x="8412480" y="2011680"/>
+            <a:ext cx="3017520" cy="128016"/>
+          </a:xfrm>
+          <a:prstGeom prst="rect">
+            <a:avLst/>
+          </a:prstGeom>
+          <a:solidFill>
+            <a:srgbClr val="E8801A"/>
+          </a:solidFill>
+          <a:ln>
+            <a:noFill/>
+          </a:ln>
+          <a:effectLst/>
+        </p:spPr>
+        <p:style>
+          <a:lnRef idx="1">
+            <a:schemeClr val="accent1"/>
+          </a:lnRef>
+          <a:fillRef idx="3">
+            <a:schemeClr val="accent1"/>
+          </a:fillRef>
+          <a:effectRef idx="2">
+            <a:schemeClr val="accent1"/>
+          </a:effectRef>
+          <a:fontRef idx="minor">
+            <a:schemeClr val="lt1"/>
+          </a:fontRef>
+        </p:style>
+        <p:txBody>
+          <a:bodyPr rtlCol="0" anchor="ctr"/>
+          <a:lstStyle/>
+          <a:p>
+            <a:pPr algn="ctr"/>
+          </a:p>
+        </p:txBody>
+      </p:sp>
+      <p:sp>
+        <p:nvSpPr>
+          <p:cNvPr id="17" name="TextBox 16"/>
           <p:cNvSpPr txBox="1"/>
           <p:nvPr/>
         </p:nvSpPr>
         <p:spPr>
           <a:xfrm>
-            <a:off x="8412480" y="2331720"/>
-            <a:ext cx="3017520" cy="1463040"/>
+            <a:off x="8412480" y="2377440"/>
+            <a:ext cx="3017520" cy="1371600"/>
           </a:xfrm>
           <a:prstGeom prst="rect">
             <a:avLst/>
@@ -7425,7 +10069,7 @@
           <a:p>
             <a:pPr algn="ctr"/>
             <a:r>
-              <a:rPr sz="6000" b="1" i="0">
+              <a:rPr sz="5800" b="1" i="0">
                 <a:solidFill>
                   <a:srgbClr val="1E2761"/>
                 </a:solidFill>
@@ -7438,13 +10082,13 @@
       </p:sp>
       <p:sp>
         <p:nvSpPr>
-          <p:cNvPr id="15" name="TextBox 14"/>
+          <p:cNvPr id="18" name="TextBox 17"/>
           <p:cNvSpPr txBox="1"/>
           <p:nvPr/>
         </p:nvSpPr>
         <p:spPr>
           <a:xfrm>
-            <a:off x="8641080" y="3611880"/>
+            <a:off x="8641080" y="3657600"/>
             <a:ext cx="2560320" cy="1005840"/>
           </a:xfrm>
           <a:prstGeom prst="rect">
@@ -7476,6 +10120,18 @@
   <p:clrMapOvr>
     <a:masterClrMapping/>
   </p:clrMapOvr>
+  <mc:AlternateContent xmlns:mc="http://schemas.openxmlformats.org/markup-compatibility/2006">
+    <mc:Choice xmlns:p14="http://schemas.microsoft.com/office/powerpoint/2010/main" Requires="p14">
+      <p:transition spd="med" p14:dur="700">
+        <p14:cube dir="r"/>
+      </p:transition>
+    </mc:Choice>
+    <mc:Fallback>
+      <p:transition spd="med">
+        <p:push dir="r"/>
+      </p:transition>
+    </mc:Fallback>
+  </mc:AlternateContent>
 </p:sld>
 </file>
 
@@ -7563,7 +10219,7 @@
                 </a:solidFill>
                 <a:latin typeface="Montserrat"/>
               </a:rPr>
-              <a:t>003 / 014</a:t>
+              <a:t>003 / 018</a:t>
             </a:r>
           </a:p>
         </p:txBody>
@@ -7672,7 +10328,7 @@
       </p:sp>
       <p:sp>
         <p:nvSpPr>
-          <p:cNvPr id="7" name="Rounded Rectangle 6"/>
+          <p:cNvPr id="7" name="Rectangle 6"/>
           <p:cNvSpPr/>
           <p:nvPr/>
         </p:nvSpPr>
@@ -7681,7 +10337,7 @@
             <a:off x="868680" y="1673352"/>
             <a:ext cx="2011680" cy="73152"/>
           </a:xfrm>
-          <a:prstGeom prst="roundRect">
+          <a:prstGeom prst="rect">
             <a:avLst/>
           </a:prstGeom>
           <a:solidFill>
@@ -7967,6 +10623,18 @@
   <p:clrMapOvr>
     <a:masterClrMapping/>
   </p:clrMapOvr>
+  <mc:AlternateContent xmlns:mc="http://schemas.openxmlformats.org/markup-compatibility/2006">
+    <mc:Choice xmlns:p14="http://schemas.microsoft.com/office/powerpoint/2010/main" Requires="p14">
+      <p:transition spd="med" p14:dur="700">
+        <p14:cube dir="l"/>
+      </p:transition>
+    </mc:Choice>
+    <mc:Fallback>
+      <p:transition spd="med">
+        <p:push dir="l"/>
+      </p:transition>
+    </mc:Fallback>
+  </mc:AlternateContent>
 </p:sld>
 </file>
 
@@ -8054,7 +10722,7 @@
                 </a:solidFill>
                 <a:latin typeface="Montserrat"/>
               </a:rPr>
-              <a:t>004 / 014</a:t>
+              <a:t>004 / 018</a:t>
             </a:r>
           </a:p>
         </p:txBody>
@@ -8163,7 +10831,7 @@
       </p:sp>
       <p:sp>
         <p:nvSpPr>
-          <p:cNvPr id="7" name="Rounded Rectangle 6"/>
+          <p:cNvPr id="7" name="Rectangle 6"/>
           <p:cNvSpPr/>
           <p:nvPr/>
         </p:nvSpPr>
@@ -8172,7 +10840,7 @@
             <a:off x="868680" y="1627632"/>
             <a:ext cx="2011680" cy="73152"/>
           </a:xfrm>
-          <a:prstGeom prst="roundRect">
+          <a:prstGeom prst="rect">
             <a:avLst/>
           </a:prstGeom>
           <a:solidFill>
@@ -8214,7 +10882,7 @@
         <p:spPr>
           <a:xfrm>
             <a:off x="822960" y="1965960"/>
-            <a:ext cx="4983480" cy="4206240"/>
+            <a:ext cx="5029200" cy="4206240"/>
           </a:xfrm>
           <a:prstGeom prst="rect">
             <a:avLst/>
@@ -8336,8 +11004,8 @@
         </p:nvSpPr>
         <p:spPr>
           <a:xfrm>
-            <a:off x="5806440" y="1051560"/>
-            <a:ext cx="5298947" cy="4629150"/>
+            <a:off x="6080760" y="1965960"/>
+            <a:ext cx="5303520" cy="4572000"/>
           </a:xfrm>
           <a:prstGeom prst="roundRect">
             <a:avLst/>
@@ -8382,8 +11050,8 @@
         </p:nvSpPr>
         <p:spPr>
           <a:xfrm>
-            <a:off x="6080760" y="2726055"/>
-            <a:ext cx="4750307" cy="1280160"/>
+            <a:off x="6355080" y="3611880"/>
+            <a:ext cx="4754880" cy="1280160"/>
           </a:xfrm>
           <a:prstGeom prst="rect">
             <a:avLst/>
@@ -8404,7 +11072,7 @@
                 </a:solidFill>
                 <a:latin typeface="Montserrat"/>
               </a:rPr>
-              <a:t>IMAGEN REALISTA</a:t>
+              <a:t>IMAGEN</a:t>
             </a:r>
           </a:p>
           <a:p>
@@ -8426,6 +11094,18 @@
   <p:clrMapOvr>
     <a:masterClrMapping/>
   </p:clrMapOvr>
+  <mc:AlternateContent xmlns:mc="http://schemas.openxmlformats.org/markup-compatibility/2006">
+    <mc:Choice xmlns:p14="http://schemas.microsoft.com/office/powerpoint/2010/main" Requires="p14">
+      <p:transition spd="med" p14:dur="700">
+        <p14:cube dir="r"/>
+      </p:transition>
+    </mc:Choice>
+    <mc:Fallback>
+      <p:transition spd="med">
+        <p:push dir="r"/>
+      </p:transition>
+    </mc:Fallback>
+  </mc:AlternateContent>
 </p:sld>
 </file>
 
@@ -8513,7 +11193,7 @@
                 </a:solidFill>
                 <a:latin typeface="Montserrat"/>
               </a:rPr>
-              <a:t>005 / 014</a:t>
+              <a:t>005 / 018</a:t>
             </a:r>
           </a:p>
         </p:txBody>
@@ -8622,7 +11302,7 @@
       </p:sp>
       <p:sp>
         <p:nvSpPr>
-          <p:cNvPr id="7" name="Rounded Rectangle 6"/>
+          <p:cNvPr id="7" name="Rectangle 6"/>
           <p:cNvSpPr/>
           <p:nvPr/>
         </p:nvSpPr>
@@ -8631,7 +11311,7 @@
             <a:off x="868680" y="1627632"/>
             <a:ext cx="2011680" cy="73152"/>
           </a:xfrm>
-          <a:prstGeom prst="roundRect">
+          <a:prstGeom prst="rect">
             <a:avLst/>
           </a:prstGeom>
           <a:solidFill>
@@ -8672,8 +11352,8 @@
         </p:nvSpPr>
         <p:spPr>
           <a:xfrm>
-            <a:off x="822960" y="1965960"/>
-            <a:ext cx="4983480" cy="4206240"/>
+            <a:off x="6355080" y="1965960"/>
+            <a:ext cx="5029200" cy="4206240"/>
           </a:xfrm>
           <a:prstGeom prst="rect">
             <a:avLst/>
@@ -8770,8 +11450,8 @@
         </p:nvSpPr>
         <p:spPr>
           <a:xfrm>
-            <a:off x="5806440" y="1051560"/>
-            <a:ext cx="5298947" cy="4629150"/>
+            <a:off x="822960" y="1965960"/>
+            <a:ext cx="5303520" cy="4572000"/>
           </a:xfrm>
           <a:prstGeom prst="roundRect">
             <a:avLst/>
@@ -8816,8 +11496,8 @@
         </p:nvSpPr>
         <p:spPr>
           <a:xfrm>
-            <a:off x="6080760" y="2726055"/>
-            <a:ext cx="4750307" cy="1280160"/>
+            <a:off x="1097280" y="3611880"/>
+            <a:ext cx="4754880" cy="1280160"/>
           </a:xfrm>
           <a:prstGeom prst="rect">
             <a:avLst/>
@@ -8838,7 +11518,7 @@
                 </a:solidFill>
                 <a:latin typeface="Montserrat"/>
               </a:rPr>
-              <a:t>IMAGEN REALISTA</a:t>
+              <a:t>IMAGEN</a:t>
             </a:r>
           </a:p>
           <a:p>
@@ -8860,6 +11540,18 @@
   <p:clrMapOvr>
     <a:masterClrMapping/>
   </p:clrMapOvr>
+  <mc:AlternateContent xmlns:mc="http://schemas.openxmlformats.org/markup-compatibility/2006">
+    <mc:Choice xmlns:p14="http://schemas.microsoft.com/office/powerpoint/2010/main" Requires="p14">
+      <p:transition spd="med" p14:dur="700">
+        <p14:cube dir="l"/>
+      </p:transition>
+    </mc:Choice>
+    <mc:Fallback>
+      <p:transition spd="med">
+        <p:push dir="l"/>
+      </p:transition>
+    </mc:Fallback>
+  </mc:AlternateContent>
 </p:sld>
 </file>
 
@@ -8947,7 +11639,7 @@
                 </a:solidFill>
                 <a:latin typeface="Montserrat"/>
               </a:rPr>
-              <a:t>006 / 014</a:t>
+              <a:t>006 / 018</a:t>
             </a:r>
           </a:p>
         </p:txBody>
@@ -9056,7 +11748,7 @@
       </p:sp>
       <p:sp>
         <p:nvSpPr>
-          <p:cNvPr id="7" name="Rounded Rectangle 6"/>
+          <p:cNvPr id="7" name="Rectangle 6"/>
           <p:cNvSpPr/>
           <p:nvPr/>
         </p:nvSpPr>
@@ -9065,7 +11757,7 @@
             <a:off x="868680" y="1627632"/>
             <a:ext cx="2011680" cy="73152"/>
           </a:xfrm>
-          <a:prstGeom prst="roundRect">
+          <a:prstGeom prst="rect">
             <a:avLst/>
           </a:prstGeom>
           <a:solidFill>
@@ -9107,7 +11799,7 @@
         <p:spPr>
           <a:xfrm>
             <a:off x="822960" y="1965960"/>
-            <a:ext cx="4983480" cy="4206240"/>
+            <a:ext cx="5029200" cy="4206240"/>
           </a:xfrm>
           <a:prstGeom prst="rect">
             <a:avLst/>
@@ -9204,8 +11896,8 @@
         </p:nvSpPr>
         <p:spPr>
           <a:xfrm>
-            <a:off x="5806440" y="1051560"/>
-            <a:ext cx="5298947" cy="4629150"/>
+            <a:off x="6080760" y="1965960"/>
+            <a:ext cx="5303520" cy="4572000"/>
           </a:xfrm>
           <a:prstGeom prst="roundRect">
             <a:avLst/>
@@ -9250,8 +11942,8 @@
         </p:nvSpPr>
         <p:spPr>
           <a:xfrm>
-            <a:off x="6080760" y="2726055"/>
-            <a:ext cx="4750307" cy="1280160"/>
+            <a:off x="6355080" y="3611880"/>
+            <a:ext cx="4754880" cy="1280160"/>
           </a:xfrm>
           <a:prstGeom prst="rect">
             <a:avLst/>
@@ -9272,7 +11964,7 @@
                 </a:solidFill>
                 <a:latin typeface="Montserrat"/>
               </a:rPr>
-              <a:t>IMAGEN REALISTA</a:t>
+              <a:t>IMAGEN</a:t>
             </a:r>
           </a:p>
           <a:p>
@@ -9294,6 +11986,18 @@
   <p:clrMapOvr>
     <a:masterClrMapping/>
   </p:clrMapOvr>
+  <mc:AlternateContent xmlns:mc="http://schemas.openxmlformats.org/markup-compatibility/2006">
+    <mc:Choice xmlns:p14="http://schemas.microsoft.com/office/powerpoint/2010/main" Requires="p14">
+      <p:transition spd="med" p14:dur="700">
+        <p14:cube dir="r"/>
+      </p:transition>
+    </mc:Choice>
+    <mc:Fallback>
+      <p:transition spd="med">
+        <p:push dir="r"/>
+      </p:transition>
+    </mc:Fallback>
+  </mc:AlternateContent>
 </p:sld>
 </file>
 
@@ -9381,7 +12085,7 @@
                 </a:solidFill>
                 <a:latin typeface="Montserrat"/>
               </a:rPr>
-              <a:t>007 / 014</a:t>
+              <a:t>007 / 018</a:t>
             </a:r>
           </a:p>
         </p:txBody>
@@ -9490,7 +12194,7 @@
       </p:sp>
       <p:sp>
         <p:nvSpPr>
-          <p:cNvPr id="7" name="Rounded Rectangle 6"/>
+          <p:cNvPr id="7" name="Rectangle 6"/>
           <p:cNvSpPr/>
           <p:nvPr/>
         </p:nvSpPr>
@@ -9499,7 +12203,7 @@
             <a:off x="868680" y="1627632"/>
             <a:ext cx="2011680" cy="73152"/>
           </a:xfrm>
-          <a:prstGeom prst="roundRect">
+          <a:prstGeom prst="rect">
             <a:avLst/>
           </a:prstGeom>
           <a:solidFill>
@@ -9540,8 +12244,8 @@
         </p:nvSpPr>
         <p:spPr>
           <a:xfrm>
-            <a:off x="822960" y="1965960"/>
-            <a:ext cx="4983480" cy="4206240"/>
+            <a:off x="6355080" y="1965960"/>
+            <a:ext cx="5029200" cy="4206240"/>
           </a:xfrm>
           <a:prstGeom prst="rect">
             <a:avLst/>
@@ -9663,8 +12367,8 @@
         </p:nvSpPr>
         <p:spPr>
           <a:xfrm>
-            <a:off x="5806440" y="1051560"/>
-            <a:ext cx="5298947" cy="4629150"/>
+            <a:off x="822960" y="1965960"/>
+            <a:ext cx="5303520" cy="4572000"/>
           </a:xfrm>
           <a:prstGeom prst="roundRect">
             <a:avLst/>
@@ -9709,8 +12413,8 @@
         </p:nvSpPr>
         <p:spPr>
           <a:xfrm>
-            <a:off x="6080760" y="2726055"/>
-            <a:ext cx="4750307" cy="1280160"/>
+            <a:off x="1097280" y="3611880"/>
+            <a:ext cx="4754880" cy="1280160"/>
           </a:xfrm>
           <a:prstGeom prst="rect">
             <a:avLst/>
@@ -9731,7 +12435,7 @@
                 </a:solidFill>
                 <a:latin typeface="Montserrat"/>
               </a:rPr>
-              <a:t>IMAGEN REALISTA</a:t>
+              <a:t>IMAGEN</a:t>
             </a:r>
           </a:p>
           <a:p>
@@ -9753,6 +12457,18 @@
   <p:clrMapOvr>
     <a:masterClrMapping/>
   </p:clrMapOvr>
+  <mc:AlternateContent xmlns:mc="http://schemas.openxmlformats.org/markup-compatibility/2006">
+    <mc:Choice xmlns:p14="http://schemas.microsoft.com/office/powerpoint/2010/main" Requires="p14">
+      <p:transition spd="med" p14:dur="700">
+        <p14:cube dir="l"/>
+      </p:transition>
+    </mc:Choice>
+    <mc:Fallback>
+      <p:transition spd="med">
+        <p:push dir="l"/>
+      </p:transition>
+    </mc:Fallback>
+  </mc:AlternateContent>
 </p:sld>
 </file>
 
@@ -9840,7 +12556,7 @@
                 </a:solidFill>
                 <a:latin typeface="Montserrat"/>
               </a:rPr>
-              <a:t>008 / 014</a:t>
+              <a:t>008 / 018</a:t>
             </a:r>
           </a:p>
         </p:txBody>
@@ -9949,7 +12665,7 @@
       </p:sp>
       <p:sp>
         <p:nvSpPr>
-          <p:cNvPr id="7" name="Rounded Rectangle 6"/>
+          <p:cNvPr id="7" name="Rectangle 6"/>
           <p:cNvSpPr/>
           <p:nvPr/>
         </p:nvSpPr>
@@ -9958,7 +12674,7 @@
             <a:off x="868680" y="1627632"/>
             <a:ext cx="2011680" cy="73152"/>
           </a:xfrm>
-          <a:prstGeom prst="roundRect">
+          <a:prstGeom prst="rect">
             <a:avLst/>
           </a:prstGeom>
           <a:solidFill>
@@ -10000,7 +12716,7 @@
         <p:spPr>
           <a:xfrm>
             <a:off x="822960" y="1965960"/>
-            <a:ext cx="4983480" cy="4206240"/>
+            <a:ext cx="5029200" cy="4206240"/>
           </a:xfrm>
           <a:prstGeom prst="rect">
             <a:avLst/>
@@ -10122,8 +12838,8 @@
         </p:nvSpPr>
         <p:spPr>
           <a:xfrm>
-            <a:off x="5806440" y="1051560"/>
-            <a:ext cx="5298947" cy="4629150"/>
+            <a:off x="6080760" y="1965960"/>
+            <a:ext cx="5303520" cy="4572000"/>
           </a:xfrm>
           <a:prstGeom prst="roundRect">
             <a:avLst/>
@@ -10168,8 +12884,8 @@
         </p:nvSpPr>
         <p:spPr>
           <a:xfrm>
-            <a:off x="6080760" y="2726055"/>
-            <a:ext cx="4750307" cy="1280160"/>
+            <a:off x="6355080" y="3611880"/>
+            <a:ext cx="4754880" cy="1280160"/>
           </a:xfrm>
           <a:prstGeom prst="rect">
             <a:avLst/>
@@ -10190,7 +12906,7 @@
                 </a:solidFill>
                 <a:latin typeface="Montserrat"/>
               </a:rPr>
-              <a:t>IMAGEN REALISTA</a:t>
+              <a:t>IMAGEN</a:t>
             </a:r>
           </a:p>
           <a:p>
@@ -10212,6 +12928,18 @@
   <p:clrMapOvr>
     <a:masterClrMapping/>
   </p:clrMapOvr>
+  <mc:AlternateContent xmlns:mc="http://schemas.openxmlformats.org/markup-compatibility/2006">
+    <mc:Choice xmlns:p14="http://schemas.microsoft.com/office/powerpoint/2010/main" Requires="p14">
+      <p:transition spd="med" p14:dur="700">
+        <p14:cube dir="r"/>
+      </p:transition>
+    </mc:Choice>
+    <mc:Fallback>
+      <p:transition spd="med">
+        <p:push dir="r"/>
+      </p:transition>
+    </mc:Fallback>
+  </mc:AlternateContent>
 </p:sld>
 </file>
 
@@ -10299,7 +13027,7 @@
                 </a:solidFill>
                 <a:latin typeface="Montserrat"/>
               </a:rPr>
-              <a:t>009 / 014</a:t>
+              <a:t>009 / 018</a:t>
             </a:r>
           </a:p>
         </p:txBody>
@@ -10340,84 +13068,16 @@
       </p:sp>
       <p:sp>
         <p:nvSpPr>
-          <p:cNvPr id="5" name="TextBox 4"/>
-          <p:cNvSpPr txBox="1"/>
-          <p:nvPr/>
-        </p:nvSpPr>
-        <p:spPr>
-          <a:xfrm>
-            <a:off x="822960" y="457200"/>
-            <a:ext cx="10058400" cy="365760"/>
-          </a:xfrm>
-          <a:prstGeom prst="rect">
-            <a:avLst/>
-          </a:prstGeom>
-          <a:noFill/>
-        </p:spPr>
-        <p:txBody>
-          <a:bodyPr wrap="square">
-            <a:spAutoFit/>
-          </a:bodyPr>
-          <a:lstStyle/>
-          <a:p>
-            <a:r>
-              <a:rPr sz="1300" b="1" i="0">
-                <a:solidFill>
-                  <a:srgbClr val="E8801A"/>
-                </a:solidFill>
-                <a:latin typeface="Montserrat"/>
-              </a:rPr>
-              <a:t>CAMINO 2.2 · CALIDAD</a:t>
-            </a:r>
-          </a:p>
-        </p:txBody>
-      </p:sp>
-      <p:sp>
-        <p:nvSpPr>
-          <p:cNvPr id="6" name="TextBox 5"/>
-          <p:cNvSpPr txBox="1"/>
-          <p:nvPr/>
-        </p:nvSpPr>
-        <p:spPr>
-          <a:xfrm>
-            <a:off x="822960" y="868680"/>
-            <a:ext cx="10515600" cy="914400"/>
-          </a:xfrm>
-          <a:prstGeom prst="rect">
-            <a:avLst/>
-          </a:prstGeom>
-          <a:noFill/>
-        </p:spPr>
-        <p:txBody>
-          <a:bodyPr wrap="square">
-            <a:spAutoFit/>
-          </a:bodyPr>
-          <a:lstStyle/>
-          <a:p>
-            <a:r>
-              <a:rPr sz="2800" b="1" i="0">
-                <a:solidFill>
-                  <a:srgbClr val="1E2761"/>
-                </a:solidFill>
-                <a:latin typeface="Montserrat"/>
-              </a:rPr>
-              <a:t>Aseguramiento de la calidad</a:t>
-            </a:r>
-          </a:p>
-        </p:txBody>
-      </p:sp>
-      <p:sp>
-        <p:nvSpPr>
-          <p:cNvPr id="7" name="Rounded Rectangle 6"/>
+          <p:cNvPr id="5" name="Rectangle 4"/>
           <p:cNvSpPr/>
           <p:nvPr/>
         </p:nvSpPr>
         <p:spPr>
           <a:xfrm>
-            <a:off x="868680" y="1627632"/>
-            <a:ext cx="2011680" cy="73152"/>
-          </a:xfrm>
-          <a:prstGeom prst="roundRect">
+            <a:off x="0" y="0"/>
+            <a:ext cx="12191695" cy="1143000"/>
+          </a:xfrm>
+          <a:prstGeom prst="rect">
             <a:avLst/>
           </a:prstGeom>
           <a:solidFill>
@@ -10452,14 +13112,14 @@
       </p:sp>
       <p:sp>
         <p:nvSpPr>
-          <p:cNvPr id="8" name="TextBox 7"/>
+          <p:cNvPr id="6" name="TextBox 5"/>
           <p:cNvSpPr txBox="1"/>
           <p:nvPr/>
         </p:nvSpPr>
         <p:spPr>
           <a:xfrm>
-            <a:off x="822960" y="1965960"/>
-            <a:ext cx="4983480" cy="4206240"/>
+            <a:off x="822960" y="274320"/>
+            <a:ext cx="10515600" cy="640080"/>
           </a:xfrm>
           <a:prstGeom prst="rect">
             <a:avLst/>
@@ -10472,117 +13132,62 @@
           </a:bodyPr>
           <a:lstStyle/>
           <a:p>
-            <a:pPr>
-              <a:spcAft>
-                <a:spcPts val="1100"/>
-              </a:spcAft>
-            </a:pPr>
-            <a:r>
-              <a:rPr sz="1600" b="1" i="0">
-                <a:solidFill>
-                  <a:srgbClr val="E8801A"/>
-                </a:solidFill>
-                <a:latin typeface="Montserrat"/>
-              </a:rPr>
-              <a:t>▸  </a:t>
-            </a:r>
-            <a:r>
-              <a:rPr sz="1600" b="0" i="0">
-                <a:solidFill>
-                  <a:srgbClr val="1B2330"/>
-                </a:solidFill>
-                <a:latin typeface="Montserrat"/>
-              </a:rPr>
-              <a:t>Sistema de calidad ISO 9001</a:t>
-            </a:r>
-          </a:p>
-          <a:p>
-            <a:pPr>
-              <a:spcAft>
-                <a:spcPts val="1100"/>
-              </a:spcAft>
-            </a:pPr>
-            <a:r>
-              <a:rPr sz="1600" b="1" i="0">
-                <a:solidFill>
-                  <a:srgbClr val="E8801A"/>
-                </a:solidFill>
-                <a:latin typeface="Montserrat"/>
-              </a:rPr>
-              <a:t>▸  </a:t>
-            </a:r>
-            <a:r>
-              <a:rPr sz="1600" b="0" i="0">
-                <a:solidFill>
-                  <a:srgbClr val="1B2330"/>
-                </a:solidFill>
-                <a:latin typeface="Montserrat"/>
-              </a:rPr>
-              <a:t>Evaluado y certificado por organismo</a:t>
-            </a:r>
-          </a:p>
-          <a:p>
-            <a:pPr>
-              <a:spcAft>
-                <a:spcPts val="1100"/>
-              </a:spcAft>
-            </a:pPr>
-            <a:r>
-              <a:rPr sz="1600" b="1" i="0">
-                <a:solidFill>
-                  <a:srgbClr val="E8801A"/>
-                </a:solidFill>
-                <a:latin typeface="Montserrat"/>
-              </a:rPr>
-              <a:t>▸  </a:t>
-            </a:r>
-            <a:r>
-              <a:rPr sz="1600" b="0" i="0">
-                <a:solidFill>
-                  <a:srgbClr val="1B2330"/>
-                </a:solidFill>
-                <a:latin typeface="Montserrat"/>
-              </a:rPr>
-              <a:t>Seguimiento anual del mantenimiento</a:t>
-            </a:r>
-          </a:p>
-          <a:p>
-            <a:pPr>
-              <a:spcAft>
-                <a:spcPts val="1100"/>
-              </a:spcAft>
-            </a:pPr>
-            <a:r>
-              <a:rPr sz="1600" b="1" i="0">
-                <a:solidFill>
-                  <a:srgbClr val="E8801A"/>
-                </a:solidFill>
-                <a:latin typeface="Montserrat"/>
-              </a:rPr>
-              <a:t>▸  </a:t>
-            </a:r>
-            <a:r>
-              <a:rPr sz="1600" b="0" i="0">
-                <a:solidFill>
-                  <a:srgbClr val="1B2330"/>
-                </a:solidFill>
-                <a:latin typeface="Montserrat"/>
-              </a:rPr>
-              <a:t>Puede pedir una muestra si hay dudas</a:t>
-            </a:r>
-          </a:p>
-        </p:txBody>
-      </p:sp>
-      <p:sp>
-        <p:nvSpPr>
-          <p:cNvPr id="9" name="imgph" descr="IMGQ:quality management office documents"/>
+            <a:r>
+              <a:rPr sz="2400" b="1" i="0">
+                <a:solidFill>
+                  <a:srgbClr val="FFFFFF"/>
+                </a:solidFill>
+                <a:latin typeface="Montserrat"/>
+              </a:rPr>
+              <a:t>⚡  PREGUNTA RÁPIDA</a:t>
+            </a:r>
+          </a:p>
+        </p:txBody>
+      </p:sp>
+      <p:sp>
+        <p:nvSpPr>
+          <p:cNvPr id="7" name="TextBox 6"/>
+          <p:cNvSpPr txBox="1"/>
+          <p:nvPr/>
+        </p:nvSpPr>
+        <p:spPr>
+          <a:xfrm>
+            <a:off x="822960" y="1508760"/>
+            <a:ext cx="10515600" cy="1371600"/>
+          </a:xfrm>
+          <a:prstGeom prst="rect">
+            <a:avLst/>
+          </a:prstGeom>
+          <a:noFill/>
+        </p:spPr>
+        <p:txBody>
+          <a:bodyPr wrap="square">
+            <a:spAutoFit/>
+          </a:bodyPr>
+          <a:lstStyle/>
+          <a:p>
+            <a:r>
+              <a:rPr sz="2400" b="1" i="0">
+                <a:solidFill>
+                  <a:srgbClr val="1E2761"/>
+                </a:solidFill>
+                <a:latin typeface="Montserrat"/>
+              </a:rPr>
+              <a:t>En el examen de producto, ¿cada cuánto realiza el organismo los controles sin aviso previo?</a:t>
+            </a:r>
+          </a:p>
+        </p:txBody>
+      </p:sp>
+      <p:sp>
+        <p:nvSpPr>
+          <p:cNvPr id="8" name="Rounded Rectangle 7"/>
           <p:cNvSpPr/>
           <p:nvPr/>
         </p:nvSpPr>
         <p:spPr>
           <a:xfrm>
-            <a:off x="5806440" y="1051560"/>
-            <a:ext cx="5298947" cy="4629150"/>
+            <a:off x="822960" y="3291840"/>
+            <a:ext cx="4983480" cy="1143000"/>
           </a:xfrm>
           <a:prstGeom prst="roundRect">
             <a:avLst/>
@@ -10621,14 +13226,58 @@
       </p:sp>
       <p:sp>
         <p:nvSpPr>
+          <p:cNvPr id="9" name="Rectangle 8"/>
+          <p:cNvSpPr/>
+          <p:nvPr/>
+        </p:nvSpPr>
+        <p:spPr>
+          <a:xfrm>
+            <a:off x="822960" y="3291840"/>
+            <a:ext cx="640080" cy="1143000"/>
+          </a:xfrm>
+          <a:prstGeom prst="rect">
+            <a:avLst/>
+          </a:prstGeom>
+          <a:solidFill>
+            <a:srgbClr val="1E2761"/>
+          </a:solidFill>
+          <a:ln>
+            <a:noFill/>
+          </a:ln>
+          <a:effectLst/>
+        </p:spPr>
+        <p:style>
+          <a:lnRef idx="1">
+            <a:schemeClr val="accent1"/>
+          </a:lnRef>
+          <a:fillRef idx="3">
+            <a:schemeClr val="accent1"/>
+          </a:fillRef>
+          <a:effectRef idx="2">
+            <a:schemeClr val="accent1"/>
+          </a:effectRef>
+          <a:fontRef idx="minor">
+            <a:schemeClr val="lt1"/>
+          </a:fontRef>
+        </p:style>
+        <p:txBody>
+          <a:bodyPr rtlCol="0" anchor="ctr"/>
+          <a:lstStyle/>
+          <a:p>
+            <a:pPr algn="ctr"/>
+          </a:p>
+        </p:txBody>
+      </p:sp>
+      <p:sp>
+        <p:nvSpPr>
           <p:cNvPr id="10" name="TextBox 9"/>
           <p:cNvSpPr txBox="1"/>
           <p:nvPr/>
         </p:nvSpPr>
         <p:spPr>
           <a:xfrm>
-            <a:off x="6080760" y="2726055"/>
-            <a:ext cx="4750307" cy="1280160"/>
+            <a:off x="822960" y="3611880"/>
+            <a:ext cx="640080" cy="548640"/>
           </a:xfrm>
           <a:prstGeom prst="rect">
             <a:avLst/>
@@ -10643,25 +13292,524 @@
           <a:p>
             <a:pPr algn="ctr"/>
             <a:r>
-              <a:rPr sz="1400" b="1" i="0">
-                <a:solidFill>
-                  <a:srgbClr val="64748B"/>
-                </a:solidFill>
-                <a:latin typeface="Montserrat"/>
-              </a:rPr>
-              <a:t>IMAGEN REALISTA</a:t>
-            </a:r>
-          </a:p>
+              <a:rPr sz="2200" b="1" i="0">
+                <a:solidFill>
+                  <a:srgbClr val="FFFFFF"/>
+                </a:solidFill>
+                <a:latin typeface="Montserrat"/>
+              </a:rPr>
+              <a:t>A</a:t>
+            </a:r>
+          </a:p>
+        </p:txBody>
+      </p:sp>
+      <p:sp>
+        <p:nvSpPr>
+          <p:cNvPr id="11" name="TextBox 10"/>
+          <p:cNvSpPr txBox="1"/>
+          <p:nvPr/>
+        </p:nvSpPr>
+        <p:spPr>
+          <a:xfrm>
+            <a:off x="1600200" y="3474720"/>
+            <a:ext cx="4114800" cy="868680"/>
+          </a:xfrm>
+          <a:prstGeom prst="rect">
+            <a:avLst/>
+          </a:prstGeom>
+          <a:noFill/>
+        </p:spPr>
+        <p:txBody>
+          <a:bodyPr wrap="square">
+            <a:spAutoFit/>
+          </a:bodyPr>
+          <a:lstStyle/>
+          <a:p>
+            <a:r>
+              <a:rPr sz="1400" b="0" i="0">
+                <a:solidFill>
+                  <a:srgbClr val="1B2330"/>
+                </a:solidFill>
+                <a:latin typeface="Montserrat"/>
+              </a:rPr>
+              <a:t>A intervalos máximos de un año</a:t>
+            </a:r>
+          </a:p>
+        </p:txBody>
+      </p:sp>
+      <p:sp>
+        <p:nvSpPr>
+          <p:cNvPr id="12" name="Rounded Rectangle 11"/>
+          <p:cNvSpPr/>
+          <p:nvPr/>
+        </p:nvSpPr>
+        <p:spPr>
+          <a:xfrm>
+            <a:off x="6355080" y="3291840"/>
+            <a:ext cx="4983480" cy="1143000"/>
+          </a:xfrm>
+          <a:prstGeom prst="roundRect">
+            <a:avLst/>
+          </a:prstGeom>
+          <a:solidFill>
+            <a:srgbClr val="F3F6FB"/>
+          </a:solidFill>
+          <a:ln w="12700">
+            <a:solidFill>
+              <a:srgbClr val="C7D2E6"/>
+            </a:solidFill>
+          </a:ln>
+          <a:effectLst/>
+        </p:spPr>
+        <p:style>
+          <a:lnRef idx="1">
+            <a:schemeClr val="accent1"/>
+          </a:lnRef>
+          <a:fillRef idx="3">
+            <a:schemeClr val="accent1"/>
+          </a:fillRef>
+          <a:effectRef idx="2">
+            <a:schemeClr val="accent1"/>
+          </a:effectRef>
+          <a:fontRef idx="minor">
+            <a:schemeClr val="lt1"/>
+          </a:fontRef>
+        </p:style>
+        <p:txBody>
+          <a:bodyPr rtlCol="0" anchor="ctr"/>
+          <a:lstStyle/>
           <a:p>
             <a:pPr algn="ctr"/>
-            <a:r>
-              <a:rPr sz="1100" b="0" i="1">
-                <a:solidFill>
-                  <a:srgbClr val="64748B"/>
-                </a:solidFill>
-                <a:latin typeface="Montserrat"/>
-              </a:rPr>
-              <a:t>quality management office documents</a:t>
+          </a:p>
+        </p:txBody>
+      </p:sp>
+      <p:sp>
+        <p:nvSpPr>
+          <p:cNvPr id="13" name="Rectangle 12"/>
+          <p:cNvSpPr/>
+          <p:nvPr/>
+        </p:nvSpPr>
+        <p:spPr>
+          <a:xfrm>
+            <a:off x="6355080" y="3291840"/>
+            <a:ext cx="640080" cy="1143000"/>
+          </a:xfrm>
+          <a:prstGeom prst="rect">
+            <a:avLst/>
+          </a:prstGeom>
+          <a:solidFill>
+            <a:srgbClr val="1E2761"/>
+          </a:solidFill>
+          <a:ln>
+            <a:noFill/>
+          </a:ln>
+          <a:effectLst/>
+        </p:spPr>
+        <p:style>
+          <a:lnRef idx="1">
+            <a:schemeClr val="accent1"/>
+          </a:lnRef>
+          <a:fillRef idx="3">
+            <a:schemeClr val="accent1"/>
+          </a:fillRef>
+          <a:effectRef idx="2">
+            <a:schemeClr val="accent1"/>
+          </a:effectRef>
+          <a:fontRef idx="minor">
+            <a:schemeClr val="lt1"/>
+          </a:fontRef>
+        </p:style>
+        <p:txBody>
+          <a:bodyPr rtlCol="0" anchor="ctr"/>
+          <a:lstStyle/>
+          <a:p>
+            <a:pPr algn="ctr"/>
+          </a:p>
+        </p:txBody>
+      </p:sp>
+      <p:sp>
+        <p:nvSpPr>
+          <p:cNvPr id="14" name="TextBox 13"/>
+          <p:cNvSpPr txBox="1"/>
+          <p:nvPr/>
+        </p:nvSpPr>
+        <p:spPr>
+          <a:xfrm>
+            <a:off x="6355080" y="3611880"/>
+            <a:ext cx="640080" cy="548640"/>
+          </a:xfrm>
+          <a:prstGeom prst="rect">
+            <a:avLst/>
+          </a:prstGeom>
+          <a:noFill/>
+        </p:spPr>
+        <p:txBody>
+          <a:bodyPr wrap="square">
+            <a:spAutoFit/>
+          </a:bodyPr>
+          <a:lstStyle/>
+          <a:p>
+            <a:pPr algn="ctr"/>
+            <a:r>
+              <a:rPr sz="2200" b="1" i="0">
+                <a:solidFill>
+                  <a:srgbClr val="FFFFFF"/>
+                </a:solidFill>
+                <a:latin typeface="Montserrat"/>
+              </a:rPr>
+              <a:t>B</a:t>
+            </a:r>
+          </a:p>
+        </p:txBody>
+      </p:sp>
+      <p:sp>
+        <p:nvSpPr>
+          <p:cNvPr id="15" name="TextBox 14"/>
+          <p:cNvSpPr txBox="1"/>
+          <p:nvPr/>
+        </p:nvSpPr>
+        <p:spPr>
+          <a:xfrm>
+            <a:off x="7132320" y="3474720"/>
+            <a:ext cx="4114800" cy="868680"/>
+          </a:xfrm>
+          <a:prstGeom prst="rect">
+            <a:avLst/>
+          </a:prstGeom>
+          <a:noFill/>
+        </p:spPr>
+        <p:txBody>
+          <a:bodyPr wrap="square">
+            <a:spAutoFit/>
+          </a:bodyPr>
+          <a:lstStyle/>
+          <a:p>
+            <a:r>
+              <a:rPr sz="1400" b="0" i="0">
+                <a:solidFill>
+                  <a:srgbClr val="1B2330"/>
+                </a:solidFill>
+                <a:latin typeface="Montserrat"/>
+              </a:rPr>
+              <a:t>A intervalos máximos de dos años</a:t>
+            </a:r>
+          </a:p>
+        </p:txBody>
+      </p:sp>
+      <p:sp>
+        <p:nvSpPr>
+          <p:cNvPr id="16" name="Rounded Rectangle 15"/>
+          <p:cNvSpPr/>
+          <p:nvPr/>
+        </p:nvSpPr>
+        <p:spPr>
+          <a:xfrm>
+            <a:off x="822960" y="4617720"/>
+            <a:ext cx="4983480" cy="1143000"/>
+          </a:xfrm>
+          <a:prstGeom prst="roundRect">
+            <a:avLst/>
+          </a:prstGeom>
+          <a:solidFill>
+            <a:srgbClr val="F3F6FB"/>
+          </a:solidFill>
+          <a:ln w="12700">
+            <a:solidFill>
+              <a:srgbClr val="C7D2E6"/>
+            </a:solidFill>
+          </a:ln>
+          <a:effectLst/>
+        </p:spPr>
+        <p:style>
+          <a:lnRef idx="1">
+            <a:schemeClr val="accent1"/>
+          </a:lnRef>
+          <a:fillRef idx="3">
+            <a:schemeClr val="accent1"/>
+          </a:fillRef>
+          <a:effectRef idx="2">
+            <a:schemeClr val="accent1"/>
+          </a:effectRef>
+          <a:fontRef idx="minor">
+            <a:schemeClr val="lt1"/>
+          </a:fontRef>
+        </p:style>
+        <p:txBody>
+          <a:bodyPr rtlCol="0" anchor="ctr"/>
+          <a:lstStyle/>
+          <a:p>
+            <a:pPr algn="ctr"/>
+          </a:p>
+        </p:txBody>
+      </p:sp>
+      <p:sp>
+        <p:nvSpPr>
+          <p:cNvPr id="17" name="Rectangle 16"/>
+          <p:cNvSpPr/>
+          <p:nvPr/>
+        </p:nvSpPr>
+        <p:spPr>
+          <a:xfrm>
+            <a:off x="822960" y="4617720"/>
+            <a:ext cx="640080" cy="1143000"/>
+          </a:xfrm>
+          <a:prstGeom prst="rect">
+            <a:avLst/>
+          </a:prstGeom>
+          <a:solidFill>
+            <a:srgbClr val="1E2761"/>
+          </a:solidFill>
+          <a:ln>
+            <a:noFill/>
+          </a:ln>
+          <a:effectLst/>
+        </p:spPr>
+        <p:style>
+          <a:lnRef idx="1">
+            <a:schemeClr val="accent1"/>
+          </a:lnRef>
+          <a:fillRef idx="3">
+            <a:schemeClr val="accent1"/>
+          </a:fillRef>
+          <a:effectRef idx="2">
+            <a:schemeClr val="accent1"/>
+          </a:effectRef>
+          <a:fontRef idx="minor">
+            <a:schemeClr val="lt1"/>
+          </a:fontRef>
+        </p:style>
+        <p:txBody>
+          <a:bodyPr rtlCol="0" anchor="ctr"/>
+          <a:lstStyle/>
+          <a:p>
+            <a:pPr algn="ctr"/>
+          </a:p>
+        </p:txBody>
+      </p:sp>
+      <p:sp>
+        <p:nvSpPr>
+          <p:cNvPr id="18" name="TextBox 17"/>
+          <p:cNvSpPr txBox="1"/>
+          <p:nvPr/>
+        </p:nvSpPr>
+        <p:spPr>
+          <a:xfrm>
+            <a:off x="822960" y="4937760"/>
+            <a:ext cx="640080" cy="548640"/>
+          </a:xfrm>
+          <a:prstGeom prst="rect">
+            <a:avLst/>
+          </a:prstGeom>
+          <a:noFill/>
+        </p:spPr>
+        <p:txBody>
+          <a:bodyPr wrap="square">
+            <a:spAutoFit/>
+          </a:bodyPr>
+          <a:lstStyle/>
+          <a:p>
+            <a:pPr algn="ctr"/>
+            <a:r>
+              <a:rPr sz="2200" b="1" i="0">
+                <a:solidFill>
+                  <a:srgbClr val="FFFFFF"/>
+                </a:solidFill>
+                <a:latin typeface="Montserrat"/>
+              </a:rPr>
+              <a:t>C</a:t>
+            </a:r>
+          </a:p>
+        </p:txBody>
+      </p:sp>
+      <p:sp>
+        <p:nvSpPr>
+          <p:cNvPr id="19" name="TextBox 18"/>
+          <p:cNvSpPr txBox="1"/>
+          <p:nvPr/>
+        </p:nvSpPr>
+        <p:spPr>
+          <a:xfrm>
+            <a:off x="1600200" y="4800600"/>
+            <a:ext cx="4114800" cy="868680"/>
+          </a:xfrm>
+          <a:prstGeom prst="rect">
+            <a:avLst/>
+          </a:prstGeom>
+          <a:noFill/>
+        </p:spPr>
+        <p:txBody>
+          <a:bodyPr wrap="square">
+            <a:spAutoFit/>
+          </a:bodyPr>
+          <a:lstStyle/>
+          <a:p>
+            <a:r>
+              <a:rPr sz="1400" b="0" i="0">
+                <a:solidFill>
+                  <a:srgbClr val="1B2330"/>
+                </a:solidFill>
+                <a:latin typeface="Montserrat"/>
+              </a:rPr>
+              <a:t>Cada seis meses, en fecha fija</a:t>
+            </a:r>
+          </a:p>
+        </p:txBody>
+      </p:sp>
+      <p:sp>
+        <p:nvSpPr>
+          <p:cNvPr id="20" name="Rounded Rectangle 19"/>
+          <p:cNvSpPr/>
+          <p:nvPr/>
+        </p:nvSpPr>
+        <p:spPr>
+          <a:xfrm>
+            <a:off x="6355080" y="4617720"/>
+            <a:ext cx="4983480" cy="1143000"/>
+          </a:xfrm>
+          <a:prstGeom prst="roundRect">
+            <a:avLst/>
+          </a:prstGeom>
+          <a:solidFill>
+            <a:srgbClr val="F3F6FB"/>
+          </a:solidFill>
+          <a:ln w="12700">
+            <a:solidFill>
+              <a:srgbClr val="C7D2E6"/>
+            </a:solidFill>
+          </a:ln>
+          <a:effectLst/>
+        </p:spPr>
+        <p:style>
+          <a:lnRef idx="1">
+            <a:schemeClr val="accent1"/>
+          </a:lnRef>
+          <a:fillRef idx="3">
+            <a:schemeClr val="accent1"/>
+          </a:fillRef>
+          <a:effectRef idx="2">
+            <a:schemeClr val="accent1"/>
+          </a:effectRef>
+          <a:fontRef idx="minor">
+            <a:schemeClr val="lt1"/>
+          </a:fontRef>
+        </p:style>
+        <p:txBody>
+          <a:bodyPr rtlCol="0" anchor="ctr"/>
+          <a:lstStyle/>
+          <a:p>
+            <a:pPr algn="ctr"/>
+          </a:p>
+        </p:txBody>
+      </p:sp>
+      <p:sp>
+        <p:nvSpPr>
+          <p:cNvPr id="21" name="Rectangle 20"/>
+          <p:cNvSpPr/>
+          <p:nvPr/>
+        </p:nvSpPr>
+        <p:spPr>
+          <a:xfrm>
+            <a:off x="6355080" y="4617720"/>
+            <a:ext cx="640080" cy="1143000"/>
+          </a:xfrm>
+          <a:prstGeom prst="rect">
+            <a:avLst/>
+          </a:prstGeom>
+          <a:solidFill>
+            <a:srgbClr val="1E2761"/>
+          </a:solidFill>
+          <a:ln>
+            <a:noFill/>
+          </a:ln>
+          <a:effectLst/>
+        </p:spPr>
+        <p:style>
+          <a:lnRef idx="1">
+            <a:schemeClr val="accent1"/>
+          </a:lnRef>
+          <a:fillRef idx="3">
+            <a:schemeClr val="accent1"/>
+          </a:fillRef>
+          <a:effectRef idx="2">
+            <a:schemeClr val="accent1"/>
+          </a:effectRef>
+          <a:fontRef idx="minor">
+            <a:schemeClr val="lt1"/>
+          </a:fontRef>
+        </p:style>
+        <p:txBody>
+          <a:bodyPr rtlCol="0" anchor="ctr"/>
+          <a:lstStyle/>
+          <a:p>
+            <a:pPr algn="ctr"/>
+          </a:p>
+        </p:txBody>
+      </p:sp>
+      <p:sp>
+        <p:nvSpPr>
+          <p:cNvPr id="22" name="TextBox 21"/>
+          <p:cNvSpPr txBox="1"/>
+          <p:nvPr/>
+        </p:nvSpPr>
+        <p:spPr>
+          <a:xfrm>
+            <a:off x="6355080" y="4937760"/>
+            <a:ext cx="640080" cy="548640"/>
+          </a:xfrm>
+          <a:prstGeom prst="rect">
+            <a:avLst/>
+          </a:prstGeom>
+          <a:noFill/>
+        </p:spPr>
+        <p:txBody>
+          <a:bodyPr wrap="square">
+            <a:spAutoFit/>
+          </a:bodyPr>
+          <a:lstStyle/>
+          <a:p>
+            <a:pPr algn="ctr"/>
+            <a:r>
+              <a:rPr sz="2200" b="1" i="0">
+                <a:solidFill>
+                  <a:srgbClr val="FFFFFF"/>
+                </a:solidFill>
+                <a:latin typeface="Montserrat"/>
+              </a:rPr>
+              <a:t>D</a:t>
+            </a:r>
+          </a:p>
+        </p:txBody>
+      </p:sp>
+      <p:sp>
+        <p:nvSpPr>
+          <p:cNvPr id="23" name="TextBox 22"/>
+          <p:cNvSpPr txBox="1"/>
+          <p:nvPr/>
+        </p:nvSpPr>
+        <p:spPr>
+          <a:xfrm>
+            <a:off x="7132320" y="4800600"/>
+            <a:ext cx="4114800" cy="868680"/>
+          </a:xfrm>
+          <a:prstGeom prst="rect">
+            <a:avLst/>
+          </a:prstGeom>
+          <a:noFill/>
+        </p:spPr>
+        <p:txBody>
+          <a:bodyPr wrap="square">
+            <a:spAutoFit/>
+          </a:bodyPr>
+          <a:lstStyle/>
+          <a:p>
+            <a:r>
+              <a:rPr sz="1400" b="0" i="0">
+                <a:solidFill>
+                  <a:srgbClr val="1B2330"/>
+                </a:solidFill>
+                <a:latin typeface="Montserrat"/>
+              </a:rPr>
+              <a:t>Solo cuando el fabricante lo solicita</a:t>
             </a:r>
           </a:p>
         </p:txBody>
@@ -10671,6 +13819,18 @@
   <p:clrMapOvr>
     <a:masterClrMapping/>
   </p:clrMapOvr>
+  <mc:AlternateContent xmlns:mc="http://schemas.openxmlformats.org/markup-compatibility/2006">
+    <mc:Choice xmlns:p14="http://schemas.microsoft.com/office/powerpoint/2010/main" Requires="p14">
+      <p:transition spd="med" p14:dur="700">
+        <p14:cube dir="l"/>
+      </p:transition>
+    </mc:Choice>
+    <mc:Fallback>
+      <p:transition spd="med">
+        <p:push dir="l"/>
+      </p:transition>
+    </mc:Fallback>
+  </mc:AlternateContent>
 </p:sld>
 </file>
 

--- a/Curso Gas B/05 - ITC-ICG 08 - Aparatos de gas/05 - ITC-ICG 08 - Aparatos de gas - Vídeo 3.pptx
+++ b/Curso Gas B/05 - ITC-ICG 08 - Aparatos de gas/05 - ITC-ICG 08 - Aparatos de gas - Vídeo 3.pptx
@@ -594,12 +594,12 @@
           <a:lstStyle/>
           <a:p>
             <a:r>
-              <a:t>N1: ¿Por qué un año?</a:t>
-            </a:r>
-          </a:p>
-          <a:p>
-            <a:r>
-              <a:t>N2: Porque la norma fija controles in situ y sin aviso a intervalos máximos de un año; el organismo prueba al menos un aparato y, si lo rechaza, bloquea su comercialización. El truco: es intervalo máximo, es decir, como mucho un año, puede ser antes.</a:t>
+              <a:t>N2: La respuesta correcta es la opción a: a intervalos máximos de un año. El porqué: la norma fija controles in situ y sin aviso previo a intervalos máximos de un año; el organismo prueba al menos un aparato y, si lo rechaza, bloquea su comercialización. El truco: fíjate en que es intervalo máximo, es decir, como mucho un año; puede ser antes, pero nunca más.</a:t>
+            </a:r>
+          </a:p>
+          <a:p>
+            <a:r>
+              <a:t>N1: Un año como máximo, y siempre por sorpresa.</a:t>
             </a:r>
           </a:p>
         </p:txBody>
@@ -1044,12 +1044,7 @@
           <a:lstStyle/>
           <a:p>
             <a:r>
-              <a:t>N1: Cuidado, que aquí conviven tres clasificaciones que comparten palabras.</a:t>
-            </a:r>
-          </a:p>
-          <a:p>
-            <a:r>
-              <a:t>N2: Piensa en qué describe la categoría del aparato. No la confundas con cómo quema ni con el carné del instalador.</a:t>
+              <a:t>N1: Cuidado, que aquí conviven tres clasificaciones que comparten palabras. La pregunta: la categoría del aparato que aparece en la documentación de diseño, ¿a qué se refiere? Opción a: al tipo de combustión a, be o ce. Opción be: a los gases y presiones que admite el aparato. Opción ce: al nivel del carné del instalador. Opción de: a la potencia útil en kilovatios. Tómate un momento y piensa qué describe exactamente la categoría del aparato...</a:t>
             </a:r>
           </a:p>
         </p:txBody>
@@ -1119,12 +1114,12 @@
           <a:lstStyle/>
           <a:p>
             <a:r>
-              <a:t>N1: ¿Por qué la be?</a:t>
-            </a:r>
-          </a:p>
-          <a:p>
-            <a:r>
-              <a:t>N2: Porque la categoría del aparato es la categoría de gases que admite: qué gases y presiones acepta. El tipo a, be o ce describe la combustión; y la categoría a, be o ce del carné es el nivel del instalador. Son tres cosas distintas: no las mezcles.</a:t>
+              <a:t>N2: La respuesta correcta es la opción be: a los gases y presiones que admite el aparato. El porqué: la categoría del aparato es la categoría de gases, qué gases y a qué presiones acepta, según la norma UNE-EN cuatrocientos treinta y siete. No la confundas: el tipo a, be o ce describe cómo quema, la combustión; y la categoría a, be o ce del carné es el nivel del instalador. Son tres cosas distintas. El truco: si la frase habla de gases, es la categoría del aparato.</a:t>
+            </a:r>
+          </a:p>
+          <a:p>
+            <a:r>
+              <a:t>N1: Categoría del aparato, igual a qué gases admite.</a:t>
             </a:r>
           </a:p>
         </p:txBody>
@@ -1795,12 +1790,7 @@
           <a:lstStyle/>
           <a:p>
             <a:r>
-              <a:t>N1: Un dato numérico del camino de la inspección sorpresa.</a:t>
-            </a:r>
-          </a:p>
-          <a:p>
-            <a:r>
-              <a:t>N2: Recuerda que el organismo aparece sin avisar. La clave es el intervalo máximo que puede pasar entre una visita y la siguiente.</a:t>
+              <a:t>N1: Un dato numérico del camino de la inspección sorpresa. La pregunta: en el examen de producto, ¿cada cuánto realiza el organismo los controles sin aviso previo? Opción a: a intervalos máximos de un año. Opción be: a intervalos máximos de dos años. Opción ce: cada seis meses, en fecha fija. Opción de: solo cuando el fabricante lo solicita. Piénsalo un momento... el organismo aparece sin avisar; la clave es el intervalo máximo entre una visita y la siguiente.</a:t>
             </a:r>
           </a:p>
         </p:txBody>
